--- a/a7/packages/A7 Unit 3 - Exponents and Scientific Notation/Lessons/3.05/A7 3.05 Applying Exponent Laws - Slides.pptx
+++ b/a7/packages/A7 Unit 3 - Exponents and Scientific Notation/Lessons/3.05/A7 3.05 Applying Exponent Laws - Slides.pptx
@@ -3129,7 +3129,7 @@
         </p:nvSpPr>
         <p:spPr>
           <a:xfrm>
-            <a:off x="777240" y="1691640"/>
+            <a:off x="777240" y="2148840"/>
             <a:ext cx="10607040" cy="347472"/>
           </a:xfrm>
           <a:prstGeom prst="rect">
@@ -3164,7 +3164,7 @@
         </p:nvSpPr>
         <p:spPr>
           <a:xfrm>
-            <a:off x="777240" y="2048256"/>
+            <a:off x="777240" y="2505456"/>
             <a:ext cx="10607040" cy="1005840"/>
           </a:xfrm>
           <a:prstGeom prst="rect">
@@ -3199,7 +3199,7 @@
         </p:nvCxnSpPr>
         <p:spPr>
           <a:xfrm>
-            <a:off x="3291840" y="3255264"/>
+            <a:off x="3291840" y="3712464"/>
             <a:ext cx="5577840" cy="0"/>
           </a:xfrm>
           <a:prstGeom prst="line">
@@ -3234,7 +3234,7 @@
         </p:nvCxnSpPr>
         <p:spPr>
           <a:xfrm>
-            <a:off x="3291840" y="3337560"/>
+            <a:off x="3291840" y="3794760"/>
             <a:ext cx="5577840" cy="0"/>
           </a:xfrm>
           <a:prstGeom prst="line">
@@ -3269,7 +3269,7 @@
         </p:nvSpPr>
         <p:spPr>
           <a:xfrm>
-            <a:off x="777240" y="3502152"/>
+            <a:off x="777240" y="3959352"/>
             <a:ext cx="10607040" cy="310896"/>
           </a:xfrm>
           <a:prstGeom prst="rect">
@@ -3304,7 +3304,7 @@
         </p:nvSpPr>
         <p:spPr>
           <a:xfrm>
-            <a:off x="777240" y="3840480"/>
+            <a:off x="777240" y="4297680"/>
             <a:ext cx="10607040" cy="731520"/>
           </a:xfrm>
           <a:prstGeom prst="rect">
@@ -3327,129 +3327,13 @@
                 <a:latin typeface="Century Schoolbook"/>
               </a:rPr>
               <a:t>I can rewrite a rational base with a negative exponent using a positive exponent, and apply several laws to generate an equivalent expression.</a:t>
-            </a:r>
-          </a:p>
-        </p:txBody>
-      </p:sp>
-      <p:sp>
-        <p:nvSpPr>
-          <p:cNvPr id="8" name="Rectangle 7"/>
-          <p:cNvSpPr/>
-          <p:nvPr/>
-        </p:nvSpPr>
-        <p:spPr>
-          <a:xfrm>
-            <a:off x="2377440" y="4736592"/>
-            <a:ext cx="7406640" cy="1051560"/>
-          </a:xfrm>
-          <a:prstGeom prst="rect">
-            <a:avLst/>
-          </a:prstGeom>
-          <a:solidFill>
-            <a:srgbClr val="F2F2F0"/>
-          </a:solidFill>
-          <a:ln w="9525">
-            <a:solidFill>
-              <a:srgbClr val="BFBFBF"/>
-            </a:solidFill>
-          </a:ln>
-          <a:effectLst/>
-        </p:spPr>
-        <p:style>
-          <a:lnRef idx="1">
-            <a:schemeClr val="accent1"/>
-          </a:lnRef>
-          <a:fillRef idx="3">
-            <a:schemeClr val="accent1"/>
-          </a:fillRef>
-          <a:effectRef idx="2">
-            <a:schemeClr val="accent1"/>
-          </a:effectRef>
-          <a:fontRef idx="minor">
-            <a:schemeClr val="lt1"/>
-          </a:fontRef>
-        </p:style>
-        <p:txBody>
-          <a:bodyPr rtlCol="0" anchor="ctr"/>
-          <a:lstStyle/>
-          <a:p>
-            <a:pPr algn="ctr"/>
-          </a:p>
-        </p:txBody>
-      </p:sp>
-      <p:sp>
-        <p:nvSpPr>
-          <p:cNvPr id="9" name="TextBox 8"/>
-          <p:cNvSpPr txBox="1"/>
-          <p:nvPr/>
-        </p:nvSpPr>
-        <p:spPr>
-          <a:xfrm>
-            <a:off x="2606040" y="4892040"/>
-            <a:ext cx="6949440" cy="365760"/>
-          </a:xfrm>
-          <a:prstGeom prst="rect">
-            <a:avLst/>
-          </a:prstGeom>
-          <a:noFill/>
-        </p:spPr>
-        <p:txBody>
-          <a:bodyPr wrap="square" lIns="45720" rIns="45720" tIns="18288" bIns="18288" anchor="t">
-            <a:spAutoFit/>
-          </a:bodyPr>
-          <a:lstStyle/>
-          <a:p>
-            <a:pPr algn="ctr"/>
-            <a:r>
-              <a:rPr sz="1700" b="0" i="1">
-                <a:solidFill>
-                  <a:srgbClr val="6B6B6B"/>
-                </a:solidFill>
-                <a:latin typeface="Century Schoolbook"/>
-              </a:rPr>
-              <a:t>Yesterday: a negative exponent means reciprocal.</a:t>
-            </a:r>
-          </a:p>
-        </p:txBody>
-      </p:sp>
-      <p:sp>
-        <p:nvSpPr>
-          <p:cNvPr id="10" name="TextBox 9"/>
-          <p:cNvSpPr txBox="1"/>
-          <p:nvPr/>
-        </p:nvSpPr>
-        <p:spPr>
-          <a:xfrm>
-            <a:off x="2606040" y="5276088"/>
-            <a:ext cx="6949440" cy="365760"/>
-          </a:xfrm>
-          <a:prstGeom prst="rect">
-            <a:avLst/>
-          </a:prstGeom>
-          <a:noFill/>
-        </p:spPr>
-        <p:txBody>
-          <a:bodyPr wrap="square" lIns="45720" rIns="45720" tIns="18288" bIns="18288" anchor="t">
-            <a:spAutoFit/>
-          </a:bodyPr>
-          <a:lstStyle/>
-          <a:p>
-            <a:pPr algn="ctr"/>
-            <a:r>
-              <a:rPr sz="1700" b="1" i="0">
-                <a:solidFill>
-                  <a:srgbClr val="1A1A1A"/>
-                </a:solidFill>
-                <a:latin typeface="Century Schoolbook"/>
-              </a:rPr>
-              <a:t>Today the base is a fraction — so the reciprocal flips it.</a:t>
             </a:r>
           </a:p>
         </p:txBody>
       </p:sp>
       <p:cxnSp>
         <p:nvCxnSpPr>
-          <p:cNvPr id="11" name="Connector 10"/>
+          <p:cNvPr id="8" name="Connector 7"/>
           <p:cNvCxnSpPr/>
           <p:nvPr/>
         </p:nvCxnSpPr>
@@ -3484,7 +3368,7 @@
       </p:cxnSp>
       <p:sp>
         <p:nvSpPr>
-          <p:cNvPr id="12" name="TextBox 11"/>
+          <p:cNvPr id="9" name="TextBox 8"/>
           <p:cNvSpPr txBox="1"/>
           <p:nvPr/>
         </p:nvSpPr>
@@ -3519,7 +3403,7 @@
       </p:sp>
       <p:sp>
         <p:nvSpPr>
-          <p:cNvPr id="13" name="TextBox 12"/>
+          <p:cNvPr id="10" name="TextBox 9"/>
           <p:cNvSpPr txBox="1"/>
           <p:nvPr/>
         </p:nvSpPr>
@@ -3675,44 +3559,9 @@
           </a:fontRef>
         </p:style>
       </p:cxnSp>
-      <p:sp>
-        <p:nvSpPr>
-          <p:cNvPr id="5" name="TextBox 4"/>
-          <p:cNvSpPr txBox="1"/>
-          <p:nvPr/>
-        </p:nvSpPr>
-        <p:spPr>
-          <a:xfrm>
-            <a:off x="777240" y="1261872"/>
-            <a:ext cx="10607040" cy="310896"/>
-          </a:xfrm>
-          <a:prstGeom prst="rect">
-            <a:avLst/>
-          </a:prstGeom>
-          <a:noFill/>
-        </p:spPr>
-        <p:txBody>
-          <a:bodyPr wrap="square" lIns="45720" rIns="45720" tIns="18288" bIns="18288" anchor="t">
-            <a:spAutoFit/>
-          </a:bodyPr>
-          <a:lstStyle/>
-          <a:p>
-            <a:pPr algn="l"/>
-            <a:r>
-              <a:rPr sz="1700" b="0" i="1">
-                <a:solidFill>
-                  <a:srgbClr val="6B6B6B"/>
-                </a:solidFill>
-                <a:latin typeface="Century Schoolbook"/>
-              </a:rPr>
-              <a:t>Answer.</a:t>
-            </a:r>
-          </a:p>
-        </p:txBody>
-      </p:sp>
       <p:cxnSp>
         <p:nvCxnSpPr>
-          <p:cNvPr id="6" name="Connector 5"/>
+          <p:cNvPr id="5" name="Connector 4"/>
           <p:cNvCxnSpPr/>
           <p:nvPr/>
         </p:nvCxnSpPr>
@@ -3747,7 +3596,7 @@
       </p:cxnSp>
       <p:sp>
         <p:nvSpPr>
-          <p:cNvPr id="7" name="TextBox 6"/>
+          <p:cNvPr id="6" name="TextBox 5"/>
           <p:cNvSpPr txBox="1"/>
           <p:nvPr/>
         </p:nvSpPr>
@@ -3782,7 +3631,7 @@
       </p:sp>
       <p:sp>
         <p:nvSpPr>
-          <p:cNvPr id="8" name="TextBox 7"/>
+          <p:cNvPr id="7" name="TextBox 6"/>
           <p:cNvSpPr txBox="1"/>
           <p:nvPr/>
         </p:nvSpPr>
@@ -3817,7 +3666,7 @@
       </p:sp>
       <p:pic>
         <p:nvPicPr>
-          <p:cNvPr id="9" name="Picture 8" descr="055ea4267017cf05.png"/>
+          <p:cNvPr id="8" name="Picture 7" descr="055ea4267017cf05.png"/>
           <p:cNvPicPr>
             <a:picLocks noChangeAspect="1"/>
           </p:cNvPicPr>
@@ -3841,60 +3690,42 @@
       </p:pic>
       <p:sp>
         <p:nvSpPr>
+          <p:cNvPr id="9" name="TextBox 8"/>
+          <p:cNvSpPr txBox="1"/>
+          <p:nvPr/>
+        </p:nvSpPr>
+        <p:spPr>
+          <a:xfrm>
+            <a:off x="777240" y="3560064"/>
+            <a:ext cx="10607040" cy="429370"/>
+          </a:xfrm>
+          <a:prstGeom prst="rect">
+            <a:avLst/>
+          </a:prstGeom>
+          <a:noFill/>
+        </p:spPr>
+        <p:txBody>
+          <a:bodyPr wrap="square" lIns="45720" rIns="45720" tIns="18288" bIns="18288" anchor="t">
+            <a:spAutoFit/>
+          </a:bodyPr>
+          <a:lstStyle/>
+          <a:p>
+            <a:pPr algn="ctr"/>
+            <a:r>
+              <a:rPr sz="2400" b="1" i="0">
+                <a:solidFill>
+                  <a:srgbClr val="1A1A1A"/>
+                </a:solidFill>
+                <a:latin typeface="Century Schoolbook"/>
+              </a:rPr>
+              <a:t>Rewrite with a positive exponent, then find the value.</a:t>
+            </a:r>
+          </a:p>
+        </p:txBody>
+      </p:sp>
+      <p:sp>
+        <p:nvSpPr>
           <p:cNvPr id="10" name="TextBox 9"/>
-          <p:cNvSpPr txBox="1"/>
-          <p:nvPr/>
-        </p:nvSpPr>
-        <p:spPr>
-          <a:xfrm>
-            <a:off x="777240" y="3377184"/>
-            <a:ext cx="10607040" cy="429370"/>
-          </a:xfrm>
-          <a:prstGeom prst="rect">
-            <a:avLst/>
-          </a:prstGeom>
-          <a:noFill/>
-        </p:spPr>
-        <p:txBody>
-          <a:bodyPr wrap="square" lIns="45720" rIns="45720" tIns="18288" bIns="18288" anchor="t">
-            <a:spAutoFit/>
-          </a:bodyPr>
-          <a:lstStyle/>
-          <a:p>
-            <a:pPr algn="ctr"/>
-            <a:r>
-              <a:rPr sz="2400" b="0" i="0">
-                <a:solidFill>
-                  <a:srgbClr val="6B6B6B"/>
-                </a:solidFill>
-                <a:latin typeface="Century Schoolbook"/>
-              </a:rPr>
-              <a:t>(−2/5)</a:t>
-            </a:r>
-            <a:r>
-              <a:rPr sz="2400" b="0" i="0" baseline="30000">
-                <a:solidFill>
-                  <a:srgbClr val="6B6B6B"/>
-                </a:solidFill>
-                <a:latin typeface="Century Schoolbook"/>
-              </a:rPr>
-              <a:t>3</a:t>
-            </a:r>
-            <a:r>
-              <a:rPr sz="2400" b="0" i="0">
-                <a:solidFill>
-                  <a:srgbClr val="6B6B6B"/>
-                </a:solidFill>
-                <a:latin typeface="Century Schoolbook"/>
-              </a:rPr>
-              <a:t> — odd power, negative</a:t>
-            </a:r>
-          </a:p>
-        </p:txBody>
-      </p:sp>
-      <p:sp>
-        <p:nvSpPr>
-          <p:cNvPr id="11" name="TextBox 10"/>
           <p:cNvSpPr txBox="1"/>
           <p:nvPr/>
         </p:nvSpPr>
@@ -3929,7 +3760,7 @@
       </p:sp>
       <p:pic>
         <p:nvPicPr>
-          <p:cNvPr id="12" name="Picture 11" descr="cacffea294d43135.png"/>
+          <p:cNvPr id="11" name="Picture 10" descr="cacffea294d43135.png"/>
           <p:cNvPicPr>
             <a:picLocks noChangeAspect="1"/>
           </p:cNvPicPr>
@@ -4074,44 +3905,9 @@
           </a:fontRef>
         </p:style>
       </p:cxnSp>
-      <p:sp>
-        <p:nvSpPr>
-          <p:cNvPr id="5" name="TextBox 4"/>
-          <p:cNvSpPr txBox="1"/>
-          <p:nvPr/>
-        </p:nvSpPr>
-        <p:spPr>
-          <a:xfrm>
-            <a:off x="777240" y="1261872"/>
-            <a:ext cx="10607040" cy="310896"/>
-          </a:xfrm>
-          <a:prstGeom prst="rect">
-            <a:avLst/>
-          </a:prstGeom>
-          <a:noFill/>
-        </p:spPr>
-        <p:txBody>
-          <a:bodyPr wrap="square" lIns="45720" rIns="45720" tIns="18288" bIns="18288" anchor="t">
-            <a:spAutoFit/>
-          </a:bodyPr>
-          <a:lstStyle/>
-          <a:p>
-            <a:pPr algn="l"/>
-            <a:r>
-              <a:rPr sz="1700" b="0" i="1">
-                <a:solidFill>
-                  <a:srgbClr val="6B6B6B"/>
-                </a:solidFill>
-                <a:latin typeface="Century Schoolbook"/>
-              </a:rPr>
-              <a:t>Two laws, then a flip.</a:t>
-            </a:r>
-          </a:p>
-        </p:txBody>
-      </p:sp>
       <p:cxnSp>
         <p:nvCxnSpPr>
-          <p:cNvPr id="6" name="Connector 5"/>
+          <p:cNvPr id="5" name="Connector 4"/>
           <p:cNvCxnSpPr/>
           <p:nvPr/>
         </p:nvCxnSpPr>
@@ -4146,7 +3942,7 @@
       </p:cxnSp>
       <p:sp>
         <p:nvSpPr>
-          <p:cNvPr id="7" name="TextBox 6"/>
+          <p:cNvPr id="6" name="TextBox 5"/>
           <p:cNvSpPr txBox="1"/>
           <p:nvPr/>
         </p:nvSpPr>
@@ -4181,7 +3977,7 @@
       </p:sp>
       <p:sp>
         <p:nvSpPr>
-          <p:cNvPr id="8" name="TextBox 7"/>
+          <p:cNvPr id="7" name="TextBox 6"/>
           <p:cNvSpPr txBox="1"/>
           <p:nvPr/>
         </p:nvSpPr>
@@ -4216,7 +4012,7 @@
       </p:sp>
       <p:pic>
         <p:nvPicPr>
-          <p:cNvPr id="9" name="Picture 8" descr="b8ecac4debf08671.png"/>
+          <p:cNvPr id="8" name="Picture 7" descr="b8ecac4debf08671.png"/>
           <p:cNvPicPr>
             <a:picLocks noChangeAspect="1"/>
           </p:cNvPicPr>
@@ -4240,7 +4036,7 @@
       </p:pic>
       <p:sp>
         <p:nvSpPr>
-          <p:cNvPr id="10" name="TextBox 9"/>
+          <p:cNvPr id="9" name="TextBox 8"/>
           <p:cNvSpPr txBox="1"/>
           <p:nvPr/>
         </p:nvSpPr>
@@ -4396,44 +4192,9 @@
           </a:fontRef>
         </p:style>
       </p:cxnSp>
-      <p:sp>
-        <p:nvSpPr>
-          <p:cNvPr id="5" name="TextBox 4"/>
-          <p:cNvSpPr txBox="1"/>
-          <p:nvPr/>
-        </p:nvSpPr>
-        <p:spPr>
-          <a:xfrm>
-            <a:off x="777240" y="1261872"/>
-            <a:ext cx="10607040" cy="310896"/>
-          </a:xfrm>
-          <a:prstGeom prst="rect">
-            <a:avLst/>
-          </a:prstGeom>
-          <a:noFill/>
-        </p:spPr>
-        <p:txBody>
-          <a:bodyPr wrap="square" lIns="45720" rIns="45720" tIns="18288" bIns="18288" anchor="t">
-            <a:spAutoFit/>
-          </a:bodyPr>
-          <a:lstStyle/>
-          <a:p>
-            <a:pPr algn="l"/>
-            <a:r>
-              <a:rPr sz="1700" b="0" i="1">
-                <a:solidFill>
-                  <a:srgbClr val="6B6B6B"/>
-                </a:solidFill>
-                <a:latin typeface="Century Schoolbook"/>
-              </a:rPr>
-              <a:t>Worked.</a:t>
-            </a:r>
-          </a:p>
-        </p:txBody>
-      </p:sp>
       <p:cxnSp>
         <p:nvCxnSpPr>
-          <p:cNvPr id="6" name="Connector 5"/>
+          <p:cNvPr id="5" name="Connector 4"/>
           <p:cNvCxnSpPr/>
           <p:nvPr/>
         </p:nvCxnSpPr>
@@ -4468,7 +4229,7 @@
       </p:cxnSp>
       <p:sp>
         <p:nvSpPr>
-          <p:cNvPr id="7" name="TextBox 6"/>
+          <p:cNvPr id="6" name="TextBox 5"/>
           <p:cNvSpPr txBox="1"/>
           <p:nvPr/>
         </p:nvSpPr>
@@ -4503,7 +4264,7 @@
       </p:sp>
       <p:sp>
         <p:nvSpPr>
-          <p:cNvPr id="8" name="TextBox 7"/>
+          <p:cNvPr id="7" name="TextBox 6"/>
           <p:cNvSpPr txBox="1"/>
           <p:nvPr/>
         </p:nvSpPr>
@@ -4538,7 +4299,7 @@
       </p:sp>
       <p:pic>
         <p:nvPicPr>
-          <p:cNvPr id="9" name="Picture 8" descr="10be869d41e0dd57.png"/>
+          <p:cNvPr id="8" name="Picture 7" descr="10be869d41e0dd57.png"/>
           <p:cNvPicPr>
             <a:picLocks noChangeAspect="1"/>
           </p:cNvPicPr>
@@ -4560,44 +4321,9 @@
           </a:prstGeom>
         </p:spPr>
       </p:pic>
-      <p:sp>
-        <p:nvSpPr>
-          <p:cNvPr id="10" name="TextBox 9"/>
-          <p:cNvSpPr txBox="1"/>
-          <p:nvPr/>
-        </p:nvSpPr>
-        <p:spPr>
-          <a:xfrm>
-            <a:off x="7525512" y="2039112"/>
-            <a:ext cx="3858767" cy="502920"/>
-          </a:xfrm>
-          <a:prstGeom prst="rect">
-            <a:avLst/>
-          </a:prstGeom>
-          <a:noFill/>
-        </p:spPr>
-        <p:txBody>
-          <a:bodyPr wrap="square" lIns="45720" rIns="45720" tIns="18288" bIns="18288" anchor="ctr">
-            <a:spAutoFit/>
-          </a:bodyPr>
-          <a:lstStyle/>
-          <a:p>
-            <a:pPr algn="l"/>
-            <a:r>
-              <a:rPr sz="2100" b="0" i="1">
-                <a:solidFill>
-                  <a:srgbClr val="6B6B6B"/>
-                </a:solidFill>
-                <a:latin typeface="Century Schoolbook"/>
-              </a:rPr>
-              <a:t>product of powers</a:t>
-            </a:r>
-          </a:p>
-        </p:txBody>
-      </p:sp>
       <p:pic>
         <p:nvPicPr>
-          <p:cNvPr id="11" name="Picture 10" descr="268771bcd93959c7.png"/>
+          <p:cNvPr id="9" name="Picture 8" descr="268771bcd93959c7.png"/>
           <p:cNvPicPr>
             <a:picLocks noChangeAspect="1"/>
           </p:cNvPicPr>
@@ -4621,42 +4347,7 @@
       </p:pic>
       <p:sp>
         <p:nvSpPr>
-          <p:cNvPr id="12" name="TextBox 11"/>
-          <p:cNvSpPr txBox="1"/>
-          <p:nvPr/>
-        </p:nvSpPr>
-        <p:spPr>
-          <a:xfrm>
-            <a:off x="3907536" y="3008376"/>
-            <a:ext cx="6400800" cy="502920"/>
-          </a:xfrm>
-          <a:prstGeom prst="rect">
-            <a:avLst/>
-          </a:prstGeom>
-          <a:noFill/>
-        </p:spPr>
-        <p:txBody>
-          <a:bodyPr wrap="square" lIns="45720" rIns="45720" tIns="18288" bIns="18288" anchor="ctr">
-            <a:spAutoFit/>
-          </a:bodyPr>
-          <a:lstStyle/>
-          <a:p>
-            <a:pPr algn="l"/>
-            <a:r>
-              <a:rPr sz="2100" b="0" i="1">
-                <a:solidFill>
-                  <a:srgbClr val="6B6B6B"/>
-                </a:solidFill>
-                <a:latin typeface="Century Schoolbook"/>
-              </a:rPr>
-              <a:t>already positive: no flip</a:t>
-            </a:r>
-          </a:p>
-        </p:txBody>
-      </p:sp>
-      <p:sp>
-        <p:nvSpPr>
-          <p:cNvPr id="13" name="TextBox 12"/>
+          <p:cNvPr id="10" name="TextBox 9"/>
           <p:cNvSpPr txBox="1"/>
           <p:nvPr/>
         </p:nvSpPr>
@@ -4830,44 +4521,9 @@
           </a:fontRef>
         </p:style>
       </p:cxnSp>
-      <p:sp>
-        <p:nvSpPr>
-          <p:cNvPr id="5" name="TextBox 4"/>
-          <p:cNvSpPr txBox="1"/>
-          <p:nvPr/>
-        </p:nvSpPr>
-        <p:spPr>
-          <a:xfrm>
-            <a:off x="777240" y="1261872"/>
-            <a:ext cx="10607040" cy="310896"/>
-          </a:xfrm>
-          <a:prstGeom prst="rect">
-            <a:avLst/>
-          </a:prstGeom>
-          <a:noFill/>
-        </p:spPr>
-        <p:txBody>
-          <a:bodyPr wrap="square" lIns="45720" rIns="45720" tIns="18288" bIns="18288" anchor="t">
-            <a:spAutoFit/>
-          </a:bodyPr>
-          <a:lstStyle/>
-          <a:p>
-            <a:pPr algn="l"/>
-            <a:r>
-              <a:rPr sz="1700" b="0" i="1">
-                <a:solidFill>
-                  <a:srgbClr val="6B6B6B"/>
-                </a:solidFill>
-                <a:latin typeface="Century Schoolbook"/>
-              </a:rPr>
-              <a:t>Same steps, your numbers. Boards up when done.</a:t>
-            </a:r>
-          </a:p>
-        </p:txBody>
-      </p:sp>
       <p:cxnSp>
         <p:nvCxnSpPr>
-          <p:cNvPr id="6" name="Connector 5"/>
+          <p:cNvPr id="5" name="Connector 4"/>
           <p:cNvCxnSpPr/>
           <p:nvPr/>
         </p:nvCxnSpPr>
@@ -4902,7 +4558,7 @@
       </p:cxnSp>
       <p:sp>
         <p:nvSpPr>
-          <p:cNvPr id="7" name="TextBox 6"/>
+          <p:cNvPr id="6" name="TextBox 5"/>
           <p:cNvSpPr txBox="1"/>
           <p:nvPr/>
         </p:nvSpPr>
@@ -4937,7 +4593,7 @@
       </p:sp>
       <p:sp>
         <p:nvSpPr>
-          <p:cNvPr id="8" name="TextBox 7"/>
+          <p:cNvPr id="7" name="TextBox 6"/>
           <p:cNvSpPr txBox="1"/>
           <p:nvPr/>
         </p:nvSpPr>
@@ -4972,7 +4628,7 @@
       </p:sp>
       <p:pic>
         <p:nvPicPr>
-          <p:cNvPr id="9" name="Picture 8" descr="a7f97d6945899edc.png"/>
+          <p:cNvPr id="8" name="Picture 7" descr="a7f97d6945899edc.png"/>
           <p:cNvPicPr>
             <a:picLocks noChangeAspect="1"/>
           </p:cNvPicPr>
@@ -4994,6 +4650,41 @@
           </a:prstGeom>
         </p:spPr>
       </p:pic>
+      <p:sp>
+        <p:nvSpPr>
+          <p:cNvPr id="9" name="TextBox 8"/>
+          <p:cNvSpPr txBox="1"/>
+          <p:nvPr/>
+        </p:nvSpPr>
+        <p:spPr>
+          <a:xfrm>
+            <a:off x="777240" y="3560064"/>
+            <a:ext cx="10607040" cy="858740"/>
+          </a:xfrm>
+          <a:prstGeom prst="rect">
+            <a:avLst/>
+          </a:prstGeom>
+          <a:noFill/>
+        </p:spPr>
+        <p:txBody>
+          <a:bodyPr wrap="square" lIns="45720" rIns="45720" tIns="18288" bIns="18288" anchor="t">
+            <a:spAutoFit/>
+          </a:bodyPr>
+          <a:lstStyle/>
+          <a:p>
+            <a:pPr algn="ctr"/>
+            <a:r>
+              <a:rPr sz="2400" b="1" i="0">
+                <a:solidFill>
+                  <a:srgbClr val="1A1A1A"/>
+                </a:solidFill>
+                <a:latin typeface="Century Schoolbook"/>
+              </a:rPr>
+              <a:t>Write an equivalent expression with one base and a positive exponent.</a:t>
+            </a:r>
+          </a:p>
+        </p:txBody>
+      </p:sp>
     </p:spTree>
   </p:cSld>
   <p:clrMapOvr>
@@ -5117,44 +4808,9 @@
           </a:fontRef>
         </p:style>
       </p:cxnSp>
-      <p:sp>
-        <p:nvSpPr>
-          <p:cNvPr id="5" name="TextBox 4"/>
-          <p:cNvSpPr txBox="1"/>
-          <p:nvPr/>
-        </p:nvSpPr>
-        <p:spPr>
-          <a:xfrm>
-            <a:off x="777240" y="1261872"/>
-            <a:ext cx="10607040" cy="310896"/>
-          </a:xfrm>
-          <a:prstGeom prst="rect">
-            <a:avLst/>
-          </a:prstGeom>
-          <a:noFill/>
-        </p:spPr>
-        <p:txBody>
-          <a:bodyPr wrap="square" lIns="45720" rIns="45720" tIns="18288" bIns="18288" anchor="t">
-            <a:spAutoFit/>
-          </a:bodyPr>
-          <a:lstStyle/>
-          <a:p>
-            <a:pPr algn="l"/>
-            <a:r>
-              <a:rPr sz="1700" b="0" i="1">
-                <a:solidFill>
-                  <a:srgbClr val="6B6B6B"/>
-                </a:solidFill>
-                <a:latin typeface="Century Schoolbook"/>
-              </a:rPr>
-              <a:t>Answer.</a:t>
-            </a:r>
-          </a:p>
-        </p:txBody>
-      </p:sp>
       <p:cxnSp>
         <p:nvCxnSpPr>
-          <p:cNvPr id="6" name="Connector 5"/>
+          <p:cNvPr id="5" name="Connector 4"/>
           <p:cNvCxnSpPr/>
           <p:nvPr/>
         </p:nvCxnSpPr>
@@ -5189,7 +4845,7 @@
       </p:cxnSp>
       <p:sp>
         <p:nvSpPr>
-          <p:cNvPr id="7" name="TextBox 6"/>
+          <p:cNvPr id="6" name="TextBox 5"/>
           <p:cNvSpPr txBox="1"/>
           <p:nvPr/>
         </p:nvSpPr>
@@ -5224,7 +4880,7 @@
       </p:sp>
       <p:sp>
         <p:nvSpPr>
-          <p:cNvPr id="8" name="TextBox 7"/>
+          <p:cNvPr id="7" name="TextBox 6"/>
           <p:cNvSpPr txBox="1"/>
           <p:nvPr/>
         </p:nvSpPr>
@@ -5259,7 +4915,7 @@
       </p:sp>
       <p:pic>
         <p:nvPicPr>
-          <p:cNvPr id="9" name="Picture 8" descr="40cdd198e5060778.png"/>
+          <p:cNvPr id="8" name="Picture 7" descr="40cdd198e5060778.png"/>
           <p:cNvPicPr>
             <a:picLocks noChangeAspect="1"/>
           </p:cNvPicPr>
@@ -5283,57 +4939,48 @@
       </p:pic>
       <p:sp>
         <p:nvSpPr>
+          <p:cNvPr id="9" name="TextBox 8"/>
+          <p:cNvSpPr txBox="1"/>
+          <p:nvPr/>
+        </p:nvSpPr>
+        <p:spPr>
+          <a:xfrm>
+            <a:off x="777240" y="3560064"/>
+            <a:ext cx="10607040" cy="858740"/>
+          </a:xfrm>
+          <a:prstGeom prst="rect">
+            <a:avLst/>
+          </a:prstGeom>
+          <a:noFill/>
+        </p:spPr>
+        <p:txBody>
+          <a:bodyPr wrap="square" lIns="45720" rIns="45720" tIns="18288" bIns="18288" anchor="t">
+            <a:spAutoFit/>
+          </a:bodyPr>
+          <a:lstStyle/>
+          <a:p>
+            <a:pPr algn="ctr"/>
+            <a:r>
+              <a:rPr sz="2400" b="1" i="0">
+                <a:solidFill>
+                  <a:srgbClr val="1A1A1A"/>
+                </a:solidFill>
+                <a:latin typeface="Century Schoolbook"/>
+              </a:rPr>
+              <a:t>Write an equivalent expression with one base and a positive exponent.</a:t>
+            </a:r>
+          </a:p>
+        </p:txBody>
+      </p:sp>
+      <p:sp>
+        <p:nvSpPr>
           <p:cNvPr id="10" name="TextBox 9"/>
           <p:cNvSpPr txBox="1"/>
           <p:nvPr/>
         </p:nvSpPr>
         <p:spPr>
           <a:xfrm>
-            <a:off x="777240" y="3377184"/>
-            <a:ext cx="10607040" cy="429370"/>
-          </a:xfrm>
-          <a:prstGeom prst="rect">
-            <a:avLst/>
-          </a:prstGeom>
-          <a:noFill/>
-        </p:spPr>
-        <p:txBody>
-          <a:bodyPr wrap="square" lIns="45720" rIns="45720" tIns="18288" bIns="18288" anchor="t">
-            <a:spAutoFit/>
-          </a:bodyPr>
-          <a:lstStyle/>
-          <a:p>
-            <a:pPr algn="ctr"/>
-            <a:r>
-              <a:rPr sz="2400" b="0" i="0">
-                <a:solidFill>
-                  <a:srgbClr val="6B6B6B"/>
-                </a:solidFill>
-                <a:latin typeface="Century Schoolbook"/>
-              </a:rPr>
-              <a:t>exponent −10, then flip: (−4/5)</a:t>
-            </a:r>
-            <a:r>
-              <a:rPr sz="2400" b="0" i="0" baseline="30000">
-                <a:solidFill>
-                  <a:srgbClr val="6B6B6B"/>
-                </a:solidFill>
-                <a:latin typeface="Century Schoolbook"/>
-              </a:rPr>
-              <a:t>10</a:t>
-            </a:r>
-          </a:p>
-        </p:txBody>
-      </p:sp>
-      <p:sp>
-        <p:nvSpPr>
-          <p:cNvPr id="11" name="TextBox 10"/>
-          <p:cNvSpPr txBox="1"/>
-          <p:nvPr/>
-        </p:nvSpPr>
-        <p:spPr>
-          <a:xfrm>
-            <a:off x="4364735" y="4637532"/>
+            <a:off x="4364735" y="4868384"/>
             <a:ext cx="1920240" cy="548640"/>
           </a:xfrm>
           <a:prstGeom prst="rect">
@@ -5362,7 +5009,7 @@
       </p:sp>
       <p:pic>
         <p:nvPicPr>
-          <p:cNvPr id="12" name="Picture 11" descr="3269d301dd5e8afa.png"/>
+          <p:cNvPr id="11" name="Picture 10" descr="3269d301dd5e8afa.png"/>
           <p:cNvPicPr>
             <a:picLocks noChangeAspect="1"/>
           </p:cNvPicPr>
@@ -5376,7 +5023,7 @@
         </p:blipFill>
         <p:spPr>
           <a:xfrm>
-            <a:off x="6284976" y="4480560"/>
+            <a:off x="6284976" y="4711412"/>
             <a:ext cx="1511808" cy="862584"/>
           </a:xfrm>
           <a:prstGeom prst="rect">
@@ -5507,44 +5154,9 @@
           </a:fontRef>
         </p:style>
       </p:cxnSp>
-      <p:sp>
-        <p:nvSpPr>
-          <p:cNvPr id="5" name="TextBox 4"/>
-          <p:cNvSpPr txBox="1"/>
-          <p:nvPr/>
-        </p:nvSpPr>
-        <p:spPr>
-          <a:xfrm>
-            <a:off x="777240" y="1261872"/>
-            <a:ext cx="10607040" cy="310896"/>
-          </a:xfrm>
-          <a:prstGeom prst="rect">
-            <a:avLst/>
-          </a:prstGeom>
-          <a:noFill/>
-        </p:spPr>
-        <p:txBody>
-          <a:bodyPr wrap="square" lIns="45720" rIns="45720" tIns="18288" bIns="18288" anchor="t">
-            <a:spAutoFit/>
-          </a:bodyPr>
-          <a:lstStyle/>
-          <a:p>
-            <a:pPr algn="l"/>
-            <a:r>
-              <a:rPr sz="1700" b="0" i="1">
-                <a:solidFill>
-                  <a:srgbClr val="6B6B6B"/>
-                </a:solidFill>
-                <a:latin typeface="Century Schoolbook"/>
-              </a:rPr>
-              <a:t>Boards up on three.</a:t>
-            </a:r>
-          </a:p>
-        </p:txBody>
-      </p:sp>
       <p:cxnSp>
         <p:nvCxnSpPr>
-          <p:cNvPr id="6" name="Connector 5"/>
+          <p:cNvPr id="5" name="Connector 4"/>
           <p:cNvCxnSpPr/>
           <p:nvPr/>
         </p:nvCxnSpPr>
@@ -5579,7 +5191,7 @@
       </p:cxnSp>
       <p:sp>
         <p:nvSpPr>
-          <p:cNvPr id="7" name="TextBox 6"/>
+          <p:cNvPr id="6" name="TextBox 5"/>
           <p:cNvSpPr txBox="1"/>
           <p:nvPr/>
         </p:nvSpPr>
@@ -5614,7 +5226,7 @@
       </p:sp>
       <p:sp>
         <p:nvSpPr>
-          <p:cNvPr id="8" name="TextBox 7"/>
+          <p:cNvPr id="7" name="TextBox 6"/>
           <p:cNvSpPr txBox="1"/>
           <p:nvPr/>
         </p:nvSpPr>
@@ -5649,7 +5261,7 @@
       </p:sp>
       <p:sp>
         <p:nvSpPr>
-          <p:cNvPr id="9" name="TextBox 8"/>
+          <p:cNvPr id="8" name="TextBox 7"/>
           <p:cNvSpPr txBox="1"/>
           <p:nvPr/>
         </p:nvSpPr>
@@ -5684,7 +5296,7 @@
       </p:sp>
       <p:pic>
         <p:nvPicPr>
-          <p:cNvPr id="10" name="Picture 9" descr="e8022fa09c25c018.png"/>
+          <p:cNvPr id="9" name="Picture 8" descr="e8022fa09c25c018.png"/>
           <p:cNvPicPr>
             <a:picLocks noChangeAspect="1"/>
           </p:cNvPicPr>
@@ -5708,7 +5320,7 @@
       </p:pic>
       <p:sp>
         <p:nvSpPr>
-          <p:cNvPr id="11" name="TextBox 10"/>
+          <p:cNvPr id="10" name="TextBox 9"/>
           <p:cNvSpPr txBox="1"/>
           <p:nvPr/>
         </p:nvSpPr>
@@ -5743,7 +5355,7 @@
       </p:sp>
       <p:sp>
         <p:nvSpPr>
-          <p:cNvPr id="12" name="TextBox 11"/>
+          <p:cNvPr id="11" name="TextBox 10"/>
           <p:cNvSpPr txBox="1"/>
           <p:nvPr/>
         </p:nvSpPr>
@@ -5778,7 +5390,7 @@
       </p:sp>
       <p:sp>
         <p:nvSpPr>
-          <p:cNvPr id="13" name="TextBox 12"/>
+          <p:cNvPr id="12" name="TextBox 11"/>
           <p:cNvSpPr txBox="1"/>
           <p:nvPr/>
         </p:nvSpPr>
@@ -5813,7 +5425,7 @@
       </p:sp>
       <p:sp>
         <p:nvSpPr>
-          <p:cNvPr id="14" name="TextBox 13"/>
+          <p:cNvPr id="13" name="TextBox 12"/>
           <p:cNvSpPr txBox="1"/>
           <p:nvPr/>
         </p:nvSpPr>
@@ -5969,44 +5581,9 @@
           </a:fontRef>
         </p:style>
       </p:cxnSp>
-      <p:sp>
-        <p:nvSpPr>
-          <p:cNvPr id="5" name="TextBox 4"/>
-          <p:cNvSpPr txBox="1"/>
-          <p:nvPr/>
-        </p:nvSpPr>
-        <p:spPr>
-          <a:xfrm>
-            <a:off x="777240" y="1261872"/>
-            <a:ext cx="10607040" cy="310896"/>
-          </a:xfrm>
-          <a:prstGeom prst="rect">
-            <a:avLst/>
-          </a:prstGeom>
-          <a:noFill/>
-        </p:spPr>
-        <p:txBody>
-          <a:bodyPr wrap="square" lIns="45720" rIns="45720" tIns="18288" bIns="18288" anchor="t">
-            <a:spAutoFit/>
-          </a:bodyPr>
-          <a:lstStyle/>
-          <a:p>
-            <a:pPr algn="l"/>
-            <a:r>
-              <a:rPr sz="1700" b="0" i="1">
-                <a:solidFill>
-                  <a:srgbClr val="6B6B6B"/>
-                </a:solidFill>
-                <a:latin typeface="Century Schoolbook"/>
-              </a:rPr>
-              <a:t>Answer.</a:t>
-            </a:r>
-          </a:p>
-        </p:txBody>
-      </p:sp>
       <p:cxnSp>
         <p:nvCxnSpPr>
-          <p:cNvPr id="6" name="Connector 5"/>
+          <p:cNvPr id="5" name="Connector 4"/>
           <p:cNvCxnSpPr/>
           <p:nvPr/>
         </p:nvCxnSpPr>
@@ -6041,7 +5618,7 @@
       </p:cxnSp>
       <p:sp>
         <p:nvSpPr>
-          <p:cNvPr id="7" name="TextBox 6"/>
+          <p:cNvPr id="6" name="TextBox 5"/>
           <p:cNvSpPr txBox="1"/>
           <p:nvPr/>
         </p:nvSpPr>
@@ -6076,7 +5653,7 @@
       </p:sp>
       <p:sp>
         <p:nvSpPr>
-          <p:cNvPr id="8" name="TextBox 7"/>
+          <p:cNvPr id="7" name="TextBox 6"/>
           <p:cNvSpPr txBox="1"/>
           <p:nvPr/>
         </p:nvSpPr>
@@ -6111,7 +5688,7 @@
       </p:sp>
       <p:sp>
         <p:nvSpPr>
-          <p:cNvPr id="9" name="TextBox 8"/>
+          <p:cNvPr id="8" name="TextBox 7"/>
           <p:cNvSpPr txBox="1"/>
           <p:nvPr/>
         </p:nvSpPr>
@@ -6146,7 +5723,7 @@
       </p:sp>
       <p:pic>
         <p:nvPicPr>
-          <p:cNvPr id="10" name="Picture 9" descr="024e90b41a6caf45.png"/>
+          <p:cNvPr id="9" name="Picture 8" descr="024e90b41a6caf45.png"/>
           <p:cNvPicPr>
             <a:picLocks noChangeAspect="1"/>
           </p:cNvPicPr>
@@ -6170,7 +5747,7 @@
       </p:pic>
       <p:sp>
         <p:nvSpPr>
-          <p:cNvPr id="11" name="TextBox 10"/>
+          <p:cNvPr id="10" name="TextBox 9"/>
           <p:cNvSpPr txBox="1"/>
           <p:nvPr/>
         </p:nvSpPr>
@@ -6205,7 +5782,7 @@
       </p:sp>
       <p:sp>
         <p:nvSpPr>
-          <p:cNvPr id="12" name="TextBox 11"/>
+          <p:cNvPr id="11" name="TextBox 10"/>
           <p:cNvSpPr txBox="1"/>
           <p:nvPr/>
         </p:nvSpPr>
@@ -6240,7 +5817,7 @@
       </p:sp>
       <p:sp>
         <p:nvSpPr>
-          <p:cNvPr id="13" name="TextBox 12"/>
+          <p:cNvPr id="12" name="TextBox 11"/>
           <p:cNvSpPr txBox="1"/>
           <p:nvPr/>
         </p:nvSpPr>
@@ -6275,93 +5852,13 @@
       </p:sp>
       <p:sp>
         <p:nvSpPr>
-          <p:cNvPr id="14" name="TextBox 13"/>
-          <p:cNvSpPr txBox="1"/>
-          <p:nvPr/>
-        </p:nvSpPr>
-        <p:spPr>
-          <a:xfrm>
-            <a:off x="1828800" y="4229431"/>
-            <a:ext cx="8503920" cy="548640"/>
-          </a:xfrm>
-          <a:prstGeom prst="rect">
-            <a:avLst/>
-          </a:prstGeom>
-          <a:noFill/>
-        </p:spPr>
-        <p:txBody>
-          <a:bodyPr wrap="square" lIns="45720" rIns="45720" tIns="18288" bIns="18288" anchor="t">
-            <a:spAutoFit/>
-          </a:bodyPr>
-          <a:lstStyle/>
-          <a:p>
-            <a:pPr algn="ctr"/>
-            <a:r>
-              <a:rPr sz="2400" b="0" i="0">
-                <a:solidFill>
-                  <a:srgbClr val="6B6B6B"/>
-                </a:solidFill>
-                <a:latin typeface="Century Schoolbook"/>
-              </a:rPr>
-              <a:t>(2/3)</a:t>
-            </a:r>
-            <a:r>
-              <a:rPr sz="2400" b="0" i="0" baseline="30000">
-                <a:solidFill>
-                  <a:srgbClr val="6B6B6B"/>
-                </a:solidFill>
-                <a:latin typeface="Century Schoolbook"/>
-              </a:rPr>
-              <a:t>4</a:t>
-            </a:r>
-            <a:r>
-              <a:rPr sz="2400" b="0" i="0">
-                <a:solidFill>
-                  <a:srgbClr val="6B6B6B"/>
-                </a:solidFill>
-                <a:latin typeface="Century Schoolbook"/>
-              </a:rPr>
-              <a:t> = 2</a:t>
-            </a:r>
-            <a:r>
-              <a:rPr sz="2400" b="0" i="0" baseline="30000">
-                <a:solidFill>
-                  <a:srgbClr val="6B6B6B"/>
-                </a:solidFill>
-                <a:latin typeface="Century Schoolbook"/>
-              </a:rPr>
-              <a:t>4</a:t>
-            </a:r>
-            <a:r>
-              <a:rPr sz="2400" b="0" i="0">
-                <a:solidFill>
-                  <a:srgbClr val="6B6B6B"/>
-                </a:solidFill>
-                <a:latin typeface="Century Schoolbook"/>
-              </a:rPr>
-              <a:t> over 3</a:t>
-            </a:r>
-            <a:r>
-              <a:rPr sz="2400" b="0" i="0" baseline="30000">
-                <a:solidFill>
-                  <a:srgbClr val="6B6B6B"/>
-                </a:solidFill>
-                <a:latin typeface="Century Schoolbook"/>
-              </a:rPr>
-              <a:t>4</a:t>
-            </a:r>
-          </a:p>
-        </p:txBody>
-      </p:sp>
-      <p:sp>
-        <p:nvSpPr>
-          <p:cNvPr id="15" name="TextBox 14"/>
-          <p:cNvSpPr txBox="1"/>
-          <p:nvPr/>
-        </p:nvSpPr>
-        <p:spPr>
-          <a:xfrm>
-            <a:off x="4864607" y="5120971"/>
+          <p:cNvPr id="13" name="TextBox 12"/>
+          <p:cNvSpPr txBox="1"/>
+          <p:nvPr/>
+        </p:nvSpPr>
+        <p:spPr>
+          <a:xfrm>
+            <a:off x="4864607" y="4823459"/>
             <a:ext cx="1920240" cy="548640"/>
           </a:xfrm>
           <a:prstGeom prst="rect">
@@ -6390,7 +5887,7 @@
       </p:sp>
       <p:pic>
         <p:nvPicPr>
-          <p:cNvPr id="16" name="Picture 15" descr="7dd35ac51a0ee44c.png"/>
+          <p:cNvPr id="14" name="Picture 13" descr="7dd35ac51a0ee44c.png"/>
           <p:cNvPicPr>
             <a:picLocks noChangeAspect="1"/>
           </p:cNvPicPr>
@@ -6404,7 +5901,7 @@
         </p:blipFill>
         <p:spPr>
           <a:xfrm>
-            <a:off x="6784848" y="4960951"/>
+            <a:off x="6784848" y="4663440"/>
             <a:ext cx="512064" cy="868680"/>
           </a:xfrm>
           <a:prstGeom prst="rect">
@@ -6535,44 +6032,9 @@
           </a:fontRef>
         </p:style>
       </p:cxnSp>
-      <p:sp>
-        <p:nvSpPr>
-          <p:cNvPr id="5" name="TextBox 4"/>
-          <p:cNvSpPr txBox="1"/>
-          <p:nvPr/>
-        </p:nvSpPr>
-        <p:spPr>
-          <a:xfrm>
-            <a:off x="777240" y="1261872"/>
-            <a:ext cx="10607040" cy="310896"/>
-          </a:xfrm>
-          <a:prstGeom prst="rect">
-            <a:avLst/>
-          </a:prstGeom>
-          <a:noFill/>
-        </p:spPr>
-        <p:txBody>
-          <a:bodyPr wrap="square" lIns="45720" rIns="45720" tIns="18288" bIns="18288" anchor="t">
-            <a:spAutoFit/>
-          </a:bodyPr>
-          <a:lstStyle/>
-          <a:p>
-            <a:pPr algn="l"/>
-            <a:r>
-              <a:rPr sz="1700" b="0" i="1">
-                <a:solidFill>
-                  <a:srgbClr val="6B6B6B"/>
-                </a:solidFill>
-                <a:latin typeface="Century Schoolbook"/>
-              </a:rPr>
-              <a:t>Boards up on three.</a:t>
-            </a:r>
-          </a:p>
-        </p:txBody>
-      </p:sp>
       <p:cxnSp>
         <p:nvCxnSpPr>
-          <p:cNvPr id="6" name="Connector 5"/>
+          <p:cNvPr id="5" name="Connector 4"/>
           <p:cNvCxnSpPr/>
           <p:nvPr/>
         </p:nvCxnSpPr>
@@ -6607,7 +6069,7 @@
       </p:cxnSp>
       <p:sp>
         <p:nvSpPr>
-          <p:cNvPr id="7" name="TextBox 6"/>
+          <p:cNvPr id="6" name="TextBox 5"/>
           <p:cNvSpPr txBox="1"/>
           <p:nvPr/>
         </p:nvSpPr>
@@ -6642,7 +6104,7 @@
       </p:sp>
       <p:sp>
         <p:nvSpPr>
-          <p:cNvPr id="8" name="TextBox 7"/>
+          <p:cNvPr id="7" name="TextBox 6"/>
           <p:cNvSpPr txBox="1"/>
           <p:nvPr/>
         </p:nvSpPr>
@@ -6677,7 +6139,7 @@
       </p:sp>
       <p:pic>
         <p:nvPicPr>
-          <p:cNvPr id="9" name="Picture 8" descr="23a87bc643d7e5a2.png"/>
+          <p:cNvPr id="8" name="Picture 7" descr="23a87bc643d7e5a2.png"/>
           <p:cNvPicPr>
             <a:picLocks noChangeAspect="1"/>
           </p:cNvPicPr>
@@ -6701,7 +6163,7 @@
       </p:pic>
       <p:sp>
         <p:nvSpPr>
-          <p:cNvPr id="10" name="TextBox 9"/>
+          <p:cNvPr id="9" name="TextBox 8"/>
           <p:cNvSpPr txBox="1"/>
           <p:nvPr/>
         </p:nvSpPr>
@@ -6730,41 +6192,6 @@
                 <a:latin typeface="Century Schoolbook"/>
               </a:rPr>
               <a:t>Answer it.</a:t>
-            </a:r>
-          </a:p>
-        </p:txBody>
-      </p:sp>
-      <p:sp>
-        <p:nvSpPr>
-          <p:cNvPr id="11" name="TextBox 10"/>
-          <p:cNvSpPr txBox="1"/>
-          <p:nvPr/>
-        </p:nvSpPr>
-        <p:spPr>
-          <a:xfrm>
-            <a:off x="777240" y="4828032"/>
-            <a:ext cx="10607040" cy="365760"/>
-          </a:xfrm>
-          <a:prstGeom prst="rect">
-            <a:avLst/>
-          </a:prstGeom>
-          <a:noFill/>
-        </p:spPr>
-        <p:txBody>
-          <a:bodyPr wrap="square" lIns="45720" rIns="45720" tIns="18288" bIns="18288" anchor="t">
-            <a:spAutoFit/>
-          </a:bodyPr>
-          <a:lstStyle/>
-          <a:p>
-            <a:pPr algn="ctr"/>
-            <a:r>
-              <a:rPr sz="1900" b="0" i="1">
-                <a:solidFill>
-                  <a:srgbClr val="6B6B6B"/>
-                </a:solidFill>
-                <a:latin typeface="Century Schoolbook"/>
-              </a:rPr>
-              <a:t>Rewrite with a positive exponent.</a:t>
             </a:r>
           </a:p>
         </p:txBody>
@@ -6892,44 +6319,9 @@
           </a:fontRef>
         </p:style>
       </p:cxnSp>
-      <p:sp>
-        <p:nvSpPr>
-          <p:cNvPr id="5" name="TextBox 4"/>
-          <p:cNvSpPr txBox="1"/>
-          <p:nvPr/>
-        </p:nvSpPr>
-        <p:spPr>
-          <a:xfrm>
-            <a:off x="777240" y="1261872"/>
-            <a:ext cx="10607040" cy="310896"/>
-          </a:xfrm>
-          <a:prstGeom prst="rect">
-            <a:avLst/>
-          </a:prstGeom>
-          <a:noFill/>
-        </p:spPr>
-        <p:txBody>
-          <a:bodyPr wrap="square" lIns="45720" rIns="45720" tIns="18288" bIns="18288" anchor="t">
-            <a:spAutoFit/>
-          </a:bodyPr>
-          <a:lstStyle/>
-          <a:p>
-            <a:pPr algn="l"/>
-            <a:r>
-              <a:rPr sz="1700" b="0" i="1">
-                <a:solidFill>
-                  <a:srgbClr val="6B6B6B"/>
-                </a:solidFill>
-                <a:latin typeface="Century Schoolbook"/>
-              </a:rPr>
-              <a:t>Answer.</a:t>
-            </a:r>
-          </a:p>
-        </p:txBody>
-      </p:sp>
       <p:cxnSp>
         <p:nvCxnSpPr>
-          <p:cNvPr id="6" name="Connector 5"/>
+          <p:cNvPr id="5" name="Connector 4"/>
           <p:cNvCxnSpPr/>
           <p:nvPr/>
         </p:nvCxnSpPr>
@@ -6964,7 +6356,7 @@
       </p:cxnSp>
       <p:sp>
         <p:nvSpPr>
-          <p:cNvPr id="7" name="TextBox 6"/>
+          <p:cNvPr id="6" name="TextBox 5"/>
           <p:cNvSpPr txBox="1"/>
           <p:nvPr/>
         </p:nvSpPr>
@@ -6999,7 +6391,7 @@
       </p:sp>
       <p:sp>
         <p:nvSpPr>
-          <p:cNvPr id="8" name="TextBox 7"/>
+          <p:cNvPr id="7" name="TextBox 6"/>
           <p:cNvSpPr txBox="1"/>
           <p:nvPr/>
         </p:nvSpPr>
@@ -7034,7 +6426,7 @@
       </p:sp>
       <p:pic>
         <p:nvPicPr>
-          <p:cNvPr id="9" name="Picture 8" descr="7b4aab4c0a6cc8a0.png"/>
+          <p:cNvPr id="8" name="Picture 7" descr="7b4aab4c0a6cc8a0.png"/>
           <p:cNvPicPr>
             <a:picLocks noChangeAspect="1"/>
           </p:cNvPicPr>
@@ -7058,42 +6450,7 @@
       </p:pic>
       <p:sp>
         <p:nvSpPr>
-          <p:cNvPr id="10" name="TextBox 9"/>
-          <p:cNvSpPr txBox="1"/>
-          <p:nvPr/>
-        </p:nvSpPr>
-        <p:spPr>
-          <a:xfrm>
-            <a:off x="1828800" y="3246120"/>
-            <a:ext cx="8503920" cy="548640"/>
-          </a:xfrm>
-          <a:prstGeom prst="rect">
-            <a:avLst/>
-          </a:prstGeom>
-          <a:noFill/>
-        </p:spPr>
-        <p:txBody>
-          <a:bodyPr wrap="square" lIns="45720" rIns="45720" tIns="18288" bIns="18288" anchor="t">
-            <a:spAutoFit/>
-          </a:bodyPr>
-          <a:lstStyle/>
-          <a:p>
-            <a:pPr algn="ctr"/>
-            <a:r>
-              <a:rPr sz="2400" b="0" i="0">
-                <a:solidFill>
-                  <a:srgbClr val="6B6B6B"/>
-                </a:solidFill>
-                <a:latin typeface="Century Schoolbook"/>
-              </a:rPr>
-              <a:t>flip the numbers; the sign stays in the fraction</a:t>
-            </a:r>
-          </a:p>
-        </p:txBody>
-      </p:sp>
-      <p:sp>
-        <p:nvSpPr>
-          <p:cNvPr id="11" name="TextBox 10"/>
+          <p:cNvPr id="9" name="TextBox 8"/>
           <p:cNvSpPr txBox="1"/>
           <p:nvPr/>
         </p:nvSpPr>
@@ -7128,7 +6485,7 @@
       </p:sp>
       <p:pic>
         <p:nvPicPr>
-          <p:cNvPr id="12" name="Picture 11" descr="837676bd53bd7ebc.png"/>
+          <p:cNvPr id="10" name="Picture 9" descr="837676bd53bd7ebc.png"/>
           <p:cNvPicPr>
             <a:picLocks noChangeAspect="1"/>
           </p:cNvPicPr>
@@ -7273,44 +6630,9 @@
           </a:fontRef>
         </p:style>
       </p:cxnSp>
-      <p:sp>
-        <p:nvSpPr>
-          <p:cNvPr id="5" name="TextBox 4"/>
-          <p:cNvSpPr txBox="1"/>
-          <p:nvPr/>
-        </p:nvSpPr>
-        <p:spPr>
-          <a:xfrm>
-            <a:off x="777240" y="1261872"/>
-            <a:ext cx="10607040" cy="310896"/>
-          </a:xfrm>
-          <a:prstGeom prst="rect">
-            <a:avLst/>
-          </a:prstGeom>
-          <a:noFill/>
-        </p:spPr>
-        <p:txBody>
-          <a:bodyPr wrap="square" lIns="45720" rIns="45720" tIns="18288" bIns="18288" anchor="t">
-            <a:spAutoFit/>
-          </a:bodyPr>
-          <a:lstStyle/>
-          <a:p>
-            <a:pPr algn="l"/>
-            <a:r>
-              <a:rPr sz="1700" b="0" i="1">
-                <a:solidFill>
-                  <a:srgbClr val="6B6B6B"/>
-                </a:solidFill>
-                <a:latin typeface="Century Schoolbook"/>
-              </a:rPr>
-              <a:t>Boards up on three.</a:t>
-            </a:r>
-          </a:p>
-        </p:txBody>
-      </p:sp>
       <p:cxnSp>
         <p:nvCxnSpPr>
-          <p:cNvPr id="6" name="Connector 5"/>
+          <p:cNvPr id="5" name="Connector 4"/>
           <p:cNvCxnSpPr/>
           <p:nvPr/>
         </p:nvCxnSpPr>
@@ -7345,7 +6667,7 @@
       </p:cxnSp>
       <p:sp>
         <p:nvSpPr>
-          <p:cNvPr id="7" name="TextBox 6"/>
+          <p:cNvPr id="6" name="TextBox 5"/>
           <p:cNvSpPr txBox="1"/>
           <p:nvPr/>
         </p:nvSpPr>
@@ -7380,7 +6702,7 @@
       </p:sp>
       <p:sp>
         <p:nvSpPr>
-          <p:cNvPr id="8" name="TextBox 7"/>
+          <p:cNvPr id="7" name="TextBox 6"/>
           <p:cNvSpPr txBox="1"/>
           <p:nvPr/>
         </p:nvSpPr>
@@ -7415,7 +6737,7 @@
       </p:sp>
       <p:pic>
         <p:nvPicPr>
-          <p:cNvPr id="9" name="Picture 8" descr="c08fd56f1b4e345e.png"/>
+          <p:cNvPr id="8" name="Picture 7" descr="c08fd56f1b4e345e.png"/>
           <p:cNvPicPr>
             <a:picLocks noChangeAspect="1"/>
           </p:cNvPicPr>
@@ -7439,7 +6761,7 @@
       </p:pic>
       <p:sp>
         <p:nvSpPr>
-          <p:cNvPr id="10" name="TextBox 9"/>
+          <p:cNvPr id="9" name="TextBox 8"/>
           <p:cNvSpPr txBox="1"/>
           <p:nvPr/>
         </p:nvSpPr>
@@ -7468,41 +6790,6 @@
                 <a:latin typeface="Century Schoolbook"/>
               </a:rPr>
               <a:t>Answer it.</a:t>
-            </a:r>
-          </a:p>
-        </p:txBody>
-      </p:sp>
-      <p:sp>
-        <p:nvSpPr>
-          <p:cNvPr id="11" name="TextBox 10"/>
-          <p:cNvSpPr txBox="1"/>
-          <p:nvPr/>
-        </p:nvSpPr>
-        <p:spPr>
-          <a:xfrm>
-            <a:off x="777240" y="4828032"/>
-            <a:ext cx="10607040" cy="365760"/>
-          </a:xfrm>
-          <a:prstGeom prst="rect">
-            <a:avLst/>
-          </a:prstGeom>
-          <a:noFill/>
-        </p:spPr>
-        <p:txBody>
-          <a:bodyPr wrap="square" lIns="45720" rIns="45720" tIns="18288" bIns="18288" anchor="t">
-            <a:spAutoFit/>
-          </a:bodyPr>
-          <a:lstStyle/>
-          <a:p>
-            <a:pPr algn="ctr"/>
-            <a:r>
-              <a:rPr sz="1900" b="0" i="1">
-                <a:solidFill>
-                  <a:srgbClr val="6B6B6B"/>
-                </a:solidFill>
-                <a:latin typeface="Century Schoolbook"/>
-              </a:rPr>
-              <a:t>Find the value.</a:t>
             </a:r>
           </a:p>
         </p:txBody>
@@ -7630,44 +6917,9 @@
           </a:fontRef>
         </p:style>
       </p:cxnSp>
-      <p:sp>
-        <p:nvSpPr>
-          <p:cNvPr id="5" name="TextBox 4"/>
-          <p:cNvSpPr txBox="1"/>
-          <p:nvPr/>
-        </p:nvSpPr>
-        <p:spPr>
-          <a:xfrm>
-            <a:off x="777240" y="1261872"/>
-            <a:ext cx="10607040" cy="310896"/>
-          </a:xfrm>
-          <a:prstGeom prst="rect">
-            <a:avLst/>
-          </a:prstGeom>
-          <a:noFill/>
-        </p:spPr>
-        <p:txBody>
-          <a:bodyPr wrap="square" lIns="45720" rIns="45720" tIns="18288" bIns="18288" anchor="t">
-            <a:spAutoFit/>
-          </a:bodyPr>
-          <a:lstStyle/>
-          <a:p>
-            <a:pPr algn="l"/>
-            <a:r>
-              <a:rPr sz="1700" b="0" i="1">
-                <a:solidFill>
-                  <a:srgbClr val="6B6B6B"/>
-                </a:solidFill>
-                <a:latin typeface="Century Schoolbook"/>
-              </a:rPr>
-              <a:t>On your own. Four minutes. No notes.</a:t>
-            </a:r>
-          </a:p>
-        </p:txBody>
-      </p:sp>
       <p:cxnSp>
         <p:nvCxnSpPr>
-          <p:cNvPr id="6" name="Connector 5"/>
+          <p:cNvPr id="5" name="Connector 4"/>
           <p:cNvCxnSpPr/>
           <p:nvPr/>
         </p:nvCxnSpPr>
@@ -7702,7 +6954,7 @@
       </p:cxnSp>
       <p:sp>
         <p:nvSpPr>
-          <p:cNvPr id="7" name="TextBox 6"/>
+          <p:cNvPr id="6" name="TextBox 5"/>
           <p:cNvSpPr txBox="1"/>
           <p:nvPr/>
         </p:nvSpPr>
@@ -7737,7 +6989,7 @@
       </p:sp>
       <p:sp>
         <p:nvSpPr>
-          <p:cNvPr id="8" name="TextBox 7"/>
+          <p:cNvPr id="7" name="TextBox 6"/>
           <p:cNvSpPr txBox="1"/>
           <p:nvPr/>
         </p:nvSpPr>
@@ -7772,13 +7024,13 @@
       </p:sp>
       <p:sp>
         <p:nvSpPr>
-          <p:cNvPr id="9" name="TextBox 8"/>
-          <p:cNvSpPr txBox="1"/>
-          <p:nvPr/>
-        </p:nvSpPr>
-        <p:spPr>
-          <a:xfrm>
-            <a:off x="1874519" y="1760220"/>
+          <p:cNvPr id="8" name="TextBox 7"/>
+          <p:cNvSpPr txBox="1"/>
+          <p:nvPr/>
+        </p:nvSpPr>
+        <p:spPr>
+          <a:xfrm>
+            <a:off x="1874519" y="1440180"/>
             <a:ext cx="3058734" cy="457200"/>
           </a:xfrm>
           <a:prstGeom prst="rect">
@@ -7807,7 +7059,7 @@
       </p:sp>
       <p:pic>
         <p:nvPicPr>
-          <p:cNvPr id="10" name="Picture 9" descr="1538ef9a323bca44.png"/>
+          <p:cNvPr id="9" name="Picture 8" descr="1538ef9a323bca44.png"/>
           <p:cNvPicPr>
             <a:picLocks noChangeAspect="1"/>
           </p:cNvPicPr>
@@ -7821,7 +7073,7 @@
         </p:blipFill>
         <p:spPr>
           <a:xfrm>
-            <a:off x="4796094" y="1851660"/>
+            <a:off x="4796094" y="1531620"/>
             <a:ext cx="417576" cy="274320"/>
           </a:xfrm>
           <a:prstGeom prst="rect">
@@ -7831,13 +7083,13 @@
       </p:pic>
       <p:sp>
         <p:nvSpPr>
-          <p:cNvPr id="11" name="TextBox 10"/>
-          <p:cNvSpPr txBox="1"/>
-          <p:nvPr/>
-        </p:nvSpPr>
-        <p:spPr>
-          <a:xfrm>
-            <a:off x="1874519" y="2468880"/>
+          <p:cNvPr id="10" name="TextBox 9"/>
+          <p:cNvSpPr txBox="1"/>
+          <p:nvPr/>
+        </p:nvSpPr>
+        <p:spPr>
+          <a:xfrm>
+            <a:off x="1874519" y="2148840"/>
             <a:ext cx="5677198" cy="457200"/>
           </a:xfrm>
           <a:prstGeom prst="rect">
@@ -7866,7 +7118,7 @@
       </p:sp>
       <p:pic>
         <p:nvPicPr>
-          <p:cNvPr id="12" name="Picture 11" descr="82be0161615a5d7f.png"/>
+          <p:cNvPr id="11" name="Picture 10" descr="82be0161615a5d7f.png"/>
           <p:cNvPicPr>
             <a:picLocks noChangeAspect="1"/>
           </p:cNvPicPr>
@@ -7880,7 +7132,7 @@
         </p:blipFill>
         <p:spPr>
           <a:xfrm>
-            <a:off x="7414558" y="2395728"/>
+            <a:off x="7414558" y="2075688"/>
             <a:ext cx="463296" cy="603504"/>
           </a:xfrm>
           <a:prstGeom prst="rect">
@@ -7890,13 +7142,13 @@
       </p:pic>
       <p:sp>
         <p:nvSpPr>
-          <p:cNvPr id="13" name="TextBox 12"/>
-          <p:cNvSpPr txBox="1"/>
-          <p:nvPr/>
-        </p:nvSpPr>
-        <p:spPr>
-          <a:xfrm>
-            <a:off x="1874519" y="3177540"/>
+          <p:cNvPr id="12" name="TextBox 11"/>
+          <p:cNvSpPr txBox="1"/>
+          <p:nvPr/>
+        </p:nvSpPr>
+        <p:spPr>
+          <a:xfrm>
+            <a:off x="1874519" y="2857500"/>
             <a:ext cx="3065570" cy="457200"/>
           </a:xfrm>
           <a:prstGeom prst="rect">
@@ -7925,7 +7177,7 @@
       </p:sp>
       <p:pic>
         <p:nvPicPr>
-          <p:cNvPr id="14" name="Picture 13" descr="5fa67493f2d0b1ad.png"/>
+          <p:cNvPr id="13" name="Picture 12" descr="5fa67493f2d0b1ad.png"/>
           <p:cNvPicPr>
             <a:picLocks noChangeAspect="1"/>
           </p:cNvPicPr>
@@ -7939,7 +7191,7 @@
         </p:blipFill>
         <p:spPr>
           <a:xfrm>
-            <a:off x="4802930" y="3268980"/>
+            <a:off x="4802930" y="2948940"/>
             <a:ext cx="265176" cy="274320"/>
           </a:xfrm>
           <a:prstGeom prst="rect">
@@ -7949,13 +7201,13 @@
       </p:pic>
       <p:sp>
         <p:nvSpPr>
-          <p:cNvPr id="15" name="TextBox 14"/>
-          <p:cNvSpPr txBox="1"/>
-          <p:nvPr/>
-        </p:nvSpPr>
-        <p:spPr>
-          <a:xfrm>
-            <a:off x="5068106" y="3177540"/>
+          <p:cNvPr id="14" name="TextBox 13"/>
+          <p:cNvSpPr txBox="1"/>
+          <p:nvPr/>
+        </p:nvSpPr>
+        <p:spPr>
+          <a:xfrm>
+            <a:off x="5068106" y="2857500"/>
             <a:ext cx="674751" cy="457200"/>
           </a:xfrm>
           <a:prstGeom prst="rect">
@@ -7984,7 +7236,7 @@
       </p:sp>
       <p:pic>
         <p:nvPicPr>
-          <p:cNvPr id="16" name="Picture 15" descr="cd79bb74d01bc946.png"/>
+          <p:cNvPr id="15" name="Picture 14" descr="cd79bb74d01bc946.png"/>
           <p:cNvPicPr>
             <a:picLocks noChangeAspect="1"/>
           </p:cNvPicPr>
@@ -7998,7 +7250,7 @@
         </p:blipFill>
         <p:spPr>
           <a:xfrm>
-            <a:off x="5605697" y="3264408"/>
+            <a:off x="5605697" y="2944368"/>
             <a:ext cx="265176" cy="283464"/>
           </a:xfrm>
           <a:prstGeom prst="rect">
@@ -8008,13 +7260,13 @@
       </p:pic>
       <p:sp>
         <p:nvSpPr>
-          <p:cNvPr id="17" name="TextBox 16"/>
-          <p:cNvSpPr txBox="1"/>
-          <p:nvPr/>
-        </p:nvSpPr>
-        <p:spPr>
-          <a:xfrm>
-            <a:off x="5870873" y="3177540"/>
+          <p:cNvPr id="16" name="TextBox 15"/>
+          <p:cNvSpPr txBox="1"/>
+          <p:nvPr/>
+        </p:nvSpPr>
+        <p:spPr>
+          <a:xfrm>
+            <a:off x="5870873" y="2857500"/>
             <a:ext cx="347771" cy="457200"/>
           </a:xfrm>
           <a:prstGeom prst="rect">
@@ -8043,13 +7295,13 @@
       </p:sp>
       <p:sp>
         <p:nvSpPr>
-          <p:cNvPr id="18" name="TextBox 17"/>
-          <p:cNvSpPr txBox="1"/>
-          <p:nvPr/>
-        </p:nvSpPr>
-        <p:spPr>
-          <a:xfrm>
-            <a:off x="1874519" y="3863340"/>
+          <p:cNvPr id="17" name="TextBox 16"/>
+          <p:cNvSpPr txBox="1"/>
+          <p:nvPr/>
+        </p:nvSpPr>
+        <p:spPr>
+          <a:xfrm>
+            <a:off x="1874519" y="3543300"/>
             <a:ext cx="4084107" cy="457200"/>
           </a:xfrm>
           <a:prstGeom prst="rect">
@@ -8078,7 +7330,7 @@
       </p:sp>
       <p:pic>
         <p:nvPicPr>
-          <p:cNvPr id="19" name="Picture 18" descr="e5446a4e89f9a3af.png"/>
+          <p:cNvPr id="18" name="Picture 17" descr="e5446a4e89f9a3af.png"/>
           <p:cNvPicPr>
             <a:picLocks noChangeAspect="1"/>
           </p:cNvPicPr>
@@ -8092,7 +7344,7 @@
         </p:blipFill>
         <p:spPr>
           <a:xfrm>
-            <a:off x="5821467" y="3813048"/>
+            <a:off x="5821467" y="3493008"/>
             <a:ext cx="377952" cy="557784"/>
           </a:xfrm>
           <a:prstGeom prst="rect">
@@ -8223,44 +7475,9 @@
           </a:fontRef>
         </p:style>
       </p:cxnSp>
-      <p:sp>
-        <p:nvSpPr>
-          <p:cNvPr id="5" name="TextBox 4"/>
-          <p:cNvSpPr txBox="1"/>
-          <p:nvPr/>
-        </p:nvSpPr>
-        <p:spPr>
-          <a:xfrm>
-            <a:off x="777240" y="1261872"/>
-            <a:ext cx="10607040" cy="310896"/>
-          </a:xfrm>
-          <a:prstGeom prst="rect">
-            <a:avLst/>
-          </a:prstGeom>
-          <a:noFill/>
-        </p:spPr>
-        <p:txBody>
-          <a:bodyPr wrap="square" lIns="45720" rIns="45720" tIns="18288" bIns="18288" anchor="t">
-            <a:spAutoFit/>
-          </a:bodyPr>
-          <a:lstStyle/>
-          <a:p>
-            <a:pPr algn="l"/>
-            <a:r>
-              <a:rPr sz="1700" b="0" i="1">
-                <a:solidFill>
-                  <a:srgbClr val="6B6B6B"/>
-                </a:solidFill>
-                <a:latin typeface="Century Schoolbook"/>
-              </a:rPr>
-              <a:t>Answer.</a:t>
-            </a:r>
-          </a:p>
-        </p:txBody>
-      </p:sp>
       <p:cxnSp>
         <p:nvCxnSpPr>
-          <p:cNvPr id="6" name="Connector 5"/>
+          <p:cNvPr id="5" name="Connector 4"/>
           <p:cNvCxnSpPr/>
           <p:nvPr/>
         </p:nvCxnSpPr>
@@ -8295,7 +7512,7 @@
       </p:cxnSp>
       <p:sp>
         <p:nvSpPr>
-          <p:cNvPr id="7" name="TextBox 6"/>
+          <p:cNvPr id="6" name="TextBox 5"/>
           <p:cNvSpPr txBox="1"/>
           <p:nvPr/>
         </p:nvSpPr>
@@ -8330,7 +7547,7 @@
       </p:sp>
       <p:sp>
         <p:nvSpPr>
-          <p:cNvPr id="8" name="TextBox 7"/>
+          <p:cNvPr id="7" name="TextBox 6"/>
           <p:cNvSpPr txBox="1"/>
           <p:nvPr/>
         </p:nvSpPr>
@@ -8365,7 +7582,7 @@
       </p:sp>
       <p:pic>
         <p:nvPicPr>
-          <p:cNvPr id="9" name="Picture 8" descr="bc194338a8886ecd.png"/>
+          <p:cNvPr id="8" name="Picture 7" descr="bc194338a8886ecd.png"/>
           <p:cNvPicPr>
             <a:picLocks noChangeAspect="1"/>
           </p:cNvPicPr>
@@ -8389,60 +7606,7 @@
       </p:pic>
       <p:sp>
         <p:nvSpPr>
-          <p:cNvPr id="10" name="TextBox 9"/>
-          <p:cNvSpPr txBox="1"/>
-          <p:nvPr/>
-        </p:nvSpPr>
-        <p:spPr>
-          <a:xfrm>
-            <a:off x="1828800" y="3246120"/>
-            <a:ext cx="8503920" cy="548640"/>
-          </a:xfrm>
-          <a:prstGeom prst="rect">
-            <a:avLst/>
-          </a:prstGeom>
-          <a:noFill/>
-        </p:spPr>
-        <p:txBody>
-          <a:bodyPr wrap="square" lIns="45720" rIns="45720" tIns="18288" bIns="18288" anchor="t">
-            <a:spAutoFit/>
-          </a:bodyPr>
-          <a:lstStyle/>
-          <a:p>
-            <a:pPr algn="ctr"/>
-            <a:r>
-              <a:rPr sz="2400" b="0" i="0">
-                <a:solidFill>
-                  <a:srgbClr val="6B6B6B"/>
-                </a:solidFill>
-                <a:latin typeface="Century Schoolbook"/>
-              </a:rPr>
-              <a:t>(−9/8)</a:t>
-            </a:r>
-            <a:r>
-              <a:rPr sz="2400" b="0" i="0" baseline="30000">
-                <a:solidFill>
-                  <a:srgbClr val="6B6B6B"/>
-                </a:solidFill>
-                <a:latin typeface="Century Schoolbook"/>
-              </a:rPr>
-              <a:t>2</a:t>
-            </a:r>
-            <a:r>
-              <a:rPr sz="2400" b="0" i="0">
-                <a:solidFill>
-                  <a:srgbClr val="6B6B6B"/>
-                </a:solidFill>
-                <a:latin typeface="Century Schoolbook"/>
-              </a:rPr>
-              <a:t> = 81/64</a:t>
-            </a:r>
-          </a:p>
-        </p:txBody>
-      </p:sp>
-      <p:sp>
-        <p:nvSpPr>
-          <p:cNvPr id="11" name="TextBox 10"/>
+          <p:cNvPr id="9" name="TextBox 8"/>
           <p:cNvSpPr txBox="1"/>
           <p:nvPr/>
         </p:nvSpPr>
@@ -8477,7 +7641,7 @@
       </p:sp>
       <p:pic>
         <p:nvPicPr>
-          <p:cNvPr id="12" name="Picture 11" descr="3148abf2051aaac1.png"/>
+          <p:cNvPr id="10" name="Picture 9" descr="3148abf2051aaac1.png"/>
           <p:cNvPicPr>
             <a:picLocks noChangeAspect="1"/>
           </p:cNvPicPr>
@@ -8622,44 +7786,9 @@
           </a:fontRef>
         </p:style>
       </p:cxnSp>
-      <p:sp>
-        <p:nvSpPr>
-          <p:cNvPr id="5" name="TextBox 4"/>
-          <p:cNvSpPr txBox="1"/>
-          <p:nvPr/>
-        </p:nvSpPr>
-        <p:spPr>
-          <a:xfrm>
-            <a:off x="777240" y="1261872"/>
-            <a:ext cx="10607040" cy="310896"/>
-          </a:xfrm>
-          <a:prstGeom prst="rect">
-            <a:avLst/>
-          </a:prstGeom>
-          <a:noFill/>
-        </p:spPr>
-        <p:txBody>
-          <a:bodyPr wrap="square" lIns="45720" rIns="45720" tIns="18288" bIns="18288" anchor="t">
-            <a:spAutoFit/>
-          </a:bodyPr>
-          <a:lstStyle/>
-          <a:p>
-            <a:pPr algn="l"/>
-            <a:r>
-              <a:rPr sz="1700" b="0" i="1">
-                <a:solidFill>
-                  <a:srgbClr val="6B6B6B"/>
-                </a:solidFill>
-                <a:latin typeface="Century Schoolbook"/>
-              </a:rPr>
-              <a:t>Boards up on three.</a:t>
-            </a:r>
-          </a:p>
-        </p:txBody>
-      </p:sp>
       <p:cxnSp>
         <p:nvCxnSpPr>
-          <p:cNvPr id="6" name="Connector 5"/>
+          <p:cNvPr id="5" name="Connector 4"/>
           <p:cNvCxnSpPr/>
           <p:nvPr/>
         </p:nvCxnSpPr>
@@ -8694,7 +7823,7 @@
       </p:cxnSp>
       <p:sp>
         <p:nvSpPr>
-          <p:cNvPr id="7" name="TextBox 6"/>
+          <p:cNvPr id="6" name="TextBox 5"/>
           <p:cNvSpPr txBox="1"/>
           <p:nvPr/>
         </p:nvSpPr>
@@ -8729,7 +7858,7 @@
       </p:sp>
       <p:sp>
         <p:nvSpPr>
-          <p:cNvPr id="8" name="TextBox 7"/>
+          <p:cNvPr id="7" name="TextBox 6"/>
           <p:cNvSpPr txBox="1"/>
           <p:nvPr/>
         </p:nvSpPr>
@@ -8764,7 +7893,7 @@
       </p:sp>
       <p:pic>
         <p:nvPicPr>
-          <p:cNvPr id="9" name="Picture 8" descr="c2285e954aff8d61.png"/>
+          <p:cNvPr id="8" name="Picture 7" descr="c2285e954aff8d61.png"/>
           <p:cNvPicPr>
             <a:picLocks noChangeAspect="1"/>
           </p:cNvPicPr>
@@ -8788,7 +7917,7 @@
       </p:pic>
       <p:sp>
         <p:nvSpPr>
-          <p:cNvPr id="10" name="TextBox 9"/>
+          <p:cNvPr id="9" name="TextBox 8"/>
           <p:cNvSpPr txBox="1"/>
           <p:nvPr/>
         </p:nvSpPr>
@@ -8817,41 +7946,6 @@
                 <a:latin typeface="Century Schoolbook"/>
               </a:rPr>
               <a:t>Answer it.</a:t>
-            </a:r>
-          </a:p>
-        </p:txBody>
-      </p:sp>
-      <p:sp>
-        <p:nvSpPr>
-          <p:cNvPr id="11" name="TextBox 10"/>
-          <p:cNvSpPr txBox="1"/>
-          <p:nvPr/>
-        </p:nvSpPr>
-        <p:spPr>
-          <a:xfrm>
-            <a:off x="777240" y="4828032"/>
-            <a:ext cx="10607040" cy="365760"/>
-          </a:xfrm>
-          <a:prstGeom prst="rect">
-            <a:avLst/>
-          </a:prstGeom>
-          <a:noFill/>
-        </p:spPr>
-        <p:txBody>
-          <a:bodyPr wrap="square" lIns="45720" rIns="45720" tIns="18288" bIns="18288" anchor="t">
-            <a:spAutoFit/>
-          </a:bodyPr>
-          <a:lstStyle/>
-          <a:p>
-            <a:pPr algn="ctr"/>
-            <a:r>
-              <a:rPr sz="1900" b="0" i="1">
-                <a:solidFill>
-                  <a:srgbClr val="6B6B6B"/>
-                </a:solidFill>
-                <a:latin typeface="Century Schoolbook"/>
-              </a:rPr>
-              <a:t>Rewrite with a positive exponent.</a:t>
             </a:r>
           </a:p>
         </p:txBody>
@@ -8979,44 +8073,9 @@
           </a:fontRef>
         </p:style>
       </p:cxnSp>
-      <p:sp>
-        <p:nvSpPr>
-          <p:cNvPr id="5" name="TextBox 4"/>
-          <p:cNvSpPr txBox="1"/>
-          <p:nvPr/>
-        </p:nvSpPr>
-        <p:spPr>
-          <a:xfrm>
-            <a:off x="777240" y="1261872"/>
-            <a:ext cx="10607040" cy="310896"/>
-          </a:xfrm>
-          <a:prstGeom prst="rect">
-            <a:avLst/>
-          </a:prstGeom>
-          <a:noFill/>
-        </p:spPr>
-        <p:txBody>
-          <a:bodyPr wrap="square" lIns="45720" rIns="45720" tIns="18288" bIns="18288" anchor="t">
-            <a:spAutoFit/>
-          </a:bodyPr>
-          <a:lstStyle/>
-          <a:p>
-            <a:pPr algn="l"/>
-            <a:r>
-              <a:rPr sz="1700" b="0" i="1">
-                <a:solidFill>
-                  <a:srgbClr val="6B6B6B"/>
-                </a:solidFill>
-                <a:latin typeface="Century Schoolbook"/>
-              </a:rPr>
-              <a:t>Answer.</a:t>
-            </a:r>
-          </a:p>
-        </p:txBody>
-      </p:sp>
       <p:cxnSp>
         <p:nvCxnSpPr>
-          <p:cNvPr id="6" name="Connector 5"/>
+          <p:cNvPr id="5" name="Connector 4"/>
           <p:cNvCxnSpPr/>
           <p:nvPr/>
         </p:nvCxnSpPr>
@@ -9051,7 +8110,7 @@
       </p:cxnSp>
       <p:sp>
         <p:nvSpPr>
-          <p:cNvPr id="7" name="TextBox 6"/>
+          <p:cNvPr id="6" name="TextBox 5"/>
           <p:cNvSpPr txBox="1"/>
           <p:nvPr/>
         </p:nvSpPr>
@@ -9086,7 +8145,7 @@
       </p:sp>
       <p:sp>
         <p:nvSpPr>
-          <p:cNvPr id="8" name="TextBox 7"/>
+          <p:cNvPr id="7" name="TextBox 6"/>
           <p:cNvSpPr txBox="1"/>
           <p:nvPr/>
         </p:nvSpPr>
@@ -9121,7 +8180,7 @@
       </p:sp>
       <p:pic>
         <p:nvPicPr>
-          <p:cNvPr id="9" name="Picture 8" descr="bf10b2e2dc356d3c.png"/>
+          <p:cNvPr id="8" name="Picture 7" descr="bf10b2e2dc356d3c.png"/>
           <p:cNvPicPr>
             <a:picLocks noChangeAspect="1"/>
           </p:cNvPicPr>
@@ -9145,42 +8204,7 @@
       </p:pic>
       <p:sp>
         <p:nvSpPr>
-          <p:cNvPr id="10" name="TextBox 9"/>
-          <p:cNvSpPr txBox="1"/>
-          <p:nvPr/>
-        </p:nvSpPr>
-        <p:spPr>
-          <a:xfrm>
-            <a:off x="1828800" y="3227832"/>
-            <a:ext cx="8503920" cy="548640"/>
-          </a:xfrm>
-          <a:prstGeom prst="rect">
-            <a:avLst/>
-          </a:prstGeom>
-          <a:noFill/>
-        </p:spPr>
-        <p:txBody>
-          <a:bodyPr wrap="square" lIns="45720" rIns="45720" tIns="18288" bIns="18288" anchor="t">
-            <a:spAutoFit/>
-          </a:bodyPr>
-          <a:lstStyle/>
-          <a:p>
-            <a:pPr algn="ctr"/>
-            <a:r>
-              <a:rPr sz="2400" b="0" i="0">
-                <a:solidFill>
-                  <a:srgbClr val="6B6B6B"/>
-                </a:solidFill>
-                <a:latin typeface="Century Schoolbook"/>
-              </a:rPr>
-              <a:t>flip</a:t>
-            </a:r>
-          </a:p>
-        </p:txBody>
-      </p:sp>
-      <p:sp>
-        <p:nvSpPr>
-          <p:cNvPr id="11" name="TextBox 10"/>
+          <p:cNvPr id="9" name="TextBox 8"/>
           <p:cNvSpPr txBox="1"/>
           <p:nvPr/>
         </p:nvSpPr>
@@ -9215,7 +8239,7 @@
       </p:sp>
       <p:pic>
         <p:nvPicPr>
-          <p:cNvPr id="12" name="Picture 11" descr="c2c7971114380740.png"/>
+          <p:cNvPr id="10" name="Picture 9" descr="c2c7971114380740.png"/>
           <p:cNvPicPr>
             <a:picLocks noChangeAspect="1"/>
           </p:cNvPicPr>
@@ -9360,44 +8384,9 @@
           </a:fontRef>
         </p:style>
       </p:cxnSp>
-      <p:sp>
-        <p:nvSpPr>
-          <p:cNvPr id="5" name="TextBox 4"/>
-          <p:cNvSpPr txBox="1"/>
-          <p:nvPr/>
-        </p:nvSpPr>
-        <p:spPr>
-          <a:xfrm>
-            <a:off x="777240" y="1261872"/>
-            <a:ext cx="10607040" cy="310896"/>
-          </a:xfrm>
-          <a:prstGeom prst="rect">
-            <a:avLst/>
-          </a:prstGeom>
-          <a:noFill/>
-        </p:spPr>
-        <p:txBody>
-          <a:bodyPr wrap="square" lIns="45720" rIns="45720" tIns="18288" bIns="18288" anchor="t">
-            <a:spAutoFit/>
-          </a:bodyPr>
-          <a:lstStyle/>
-          <a:p>
-            <a:pPr algn="l"/>
-            <a:r>
-              <a:rPr sz="1700" b="0" i="1">
-                <a:solidFill>
-                  <a:srgbClr val="6B6B6B"/>
-                </a:solidFill>
-                <a:latin typeface="Century Schoolbook"/>
-              </a:rPr>
-              <a:t>Boards up on three.</a:t>
-            </a:r>
-          </a:p>
-        </p:txBody>
-      </p:sp>
       <p:cxnSp>
         <p:nvCxnSpPr>
-          <p:cNvPr id="6" name="Connector 5"/>
+          <p:cNvPr id="5" name="Connector 4"/>
           <p:cNvCxnSpPr/>
           <p:nvPr/>
         </p:nvCxnSpPr>
@@ -9432,7 +8421,7 @@
       </p:cxnSp>
       <p:sp>
         <p:nvSpPr>
-          <p:cNvPr id="7" name="TextBox 6"/>
+          <p:cNvPr id="6" name="TextBox 5"/>
           <p:cNvSpPr txBox="1"/>
           <p:nvPr/>
         </p:nvSpPr>
@@ -9467,7 +8456,7 @@
       </p:sp>
       <p:sp>
         <p:nvSpPr>
-          <p:cNvPr id="8" name="TextBox 7"/>
+          <p:cNvPr id="7" name="TextBox 6"/>
           <p:cNvSpPr txBox="1"/>
           <p:nvPr/>
         </p:nvSpPr>
@@ -9502,7 +8491,7 @@
       </p:sp>
       <p:pic>
         <p:nvPicPr>
-          <p:cNvPr id="9" name="Picture 8" descr="fb95563de51335d3.png"/>
+          <p:cNvPr id="8" name="Picture 7" descr="fb95563de51335d3.png"/>
           <p:cNvPicPr>
             <a:picLocks noChangeAspect="1"/>
           </p:cNvPicPr>
@@ -9526,7 +8515,7 @@
       </p:pic>
       <p:sp>
         <p:nvSpPr>
-          <p:cNvPr id="10" name="TextBox 9"/>
+          <p:cNvPr id="9" name="TextBox 8"/>
           <p:cNvSpPr txBox="1"/>
           <p:nvPr/>
         </p:nvSpPr>
@@ -9561,7 +8550,7 @@
       </p:sp>
       <p:sp>
         <p:nvSpPr>
-          <p:cNvPr id="11" name="TextBox 10"/>
+          <p:cNvPr id="10" name="TextBox 9"/>
           <p:cNvSpPr txBox="1"/>
           <p:nvPr/>
         </p:nvSpPr>
@@ -9614,7 +8603,7 @@
       </p:sp>
       <p:sp>
         <p:nvSpPr>
-          <p:cNvPr id="12" name="TextBox 11"/>
+          <p:cNvPr id="11" name="TextBox 10"/>
           <p:cNvSpPr txBox="1"/>
           <p:nvPr/>
         </p:nvSpPr>
@@ -9667,7 +8656,7 @@
       </p:sp>
       <p:sp>
         <p:nvSpPr>
-          <p:cNvPr id="13" name="TextBox 12"/>
+          <p:cNvPr id="12" name="TextBox 11"/>
           <p:cNvSpPr txBox="1"/>
           <p:nvPr/>
         </p:nvSpPr>
@@ -9720,7 +8709,7 @@
       </p:sp>
       <p:sp>
         <p:nvSpPr>
-          <p:cNvPr id="14" name="TextBox 13"/>
+          <p:cNvPr id="13" name="TextBox 12"/>
           <p:cNvSpPr txBox="1"/>
           <p:nvPr/>
         </p:nvSpPr>
@@ -9773,7 +8762,7 @@
       </p:sp>
       <p:sp>
         <p:nvSpPr>
-          <p:cNvPr id="15" name="TextBox 14"/>
+          <p:cNvPr id="14" name="TextBox 13"/>
           <p:cNvSpPr txBox="1"/>
           <p:nvPr/>
         </p:nvSpPr>
@@ -9929,44 +8918,9 @@
           </a:fontRef>
         </p:style>
       </p:cxnSp>
-      <p:sp>
-        <p:nvSpPr>
-          <p:cNvPr id="5" name="TextBox 4"/>
-          <p:cNvSpPr txBox="1"/>
-          <p:nvPr/>
-        </p:nvSpPr>
-        <p:spPr>
-          <a:xfrm>
-            <a:off x="777240" y="1261872"/>
-            <a:ext cx="10607040" cy="310896"/>
-          </a:xfrm>
-          <a:prstGeom prst="rect">
-            <a:avLst/>
-          </a:prstGeom>
-          <a:noFill/>
-        </p:spPr>
-        <p:txBody>
-          <a:bodyPr wrap="square" lIns="45720" rIns="45720" tIns="18288" bIns="18288" anchor="t">
-            <a:spAutoFit/>
-          </a:bodyPr>
-          <a:lstStyle/>
-          <a:p>
-            <a:pPr algn="l"/>
-            <a:r>
-              <a:rPr sz="1700" b="0" i="1">
-                <a:solidFill>
-                  <a:srgbClr val="6B6B6B"/>
-                </a:solidFill>
-                <a:latin typeface="Century Schoolbook"/>
-              </a:rPr>
-              <a:t>Answer.</a:t>
-            </a:r>
-          </a:p>
-        </p:txBody>
-      </p:sp>
       <p:cxnSp>
         <p:nvCxnSpPr>
-          <p:cNvPr id="6" name="Connector 5"/>
+          <p:cNvPr id="5" name="Connector 4"/>
           <p:cNvCxnSpPr/>
           <p:nvPr/>
         </p:nvCxnSpPr>
@@ -10001,7 +8955,7 @@
       </p:cxnSp>
       <p:sp>
         <p:nvSpPr>
-          <p:cNvPr id="7" name="TextBox 6"/>
+          <p:cNvPr id="6" name="TextBox 5"/>
           <p:cNvSpPr txBox="1"/>
           <p:nvPr/>
         </p:nvSpPr>
@@ -10036,7 +8990,7 @@
       </p:sp>
       <p:sp>
         <p:nvSpPr>
-          <p:cNvPr id="8" name="TextBox 7"/>
+          <p:cNvPr id="7" name="TextBox 6"/>
           <p:cNvSpPr txBox="1"/>
           <p:nvPr/>
         </p:nvSpPr>
@@ -10071,7 +9025,7 @@
       </p:sp>
       <p:pic>
         <p:nvPicPr>
-          <p:cNvPr id="9" name="Picture 8" descr="de3072ed6d5fe593.png"/>
+          <p:cNvPr id="8" name="Picture 7" descr="de3072ed6d5fe593.png"/>
           <p:cNvPicPr>
             <a:picLocks noChangeAspect="1"/>
           </p:cNvPicPr>
@@ -10095,7 +9049,7 @@
       </p:pic>
       <p:sp>
         <p:nvSpPr>
-          <p:cNvPr id="10" name="TextBox 9"/>
+          <p:cNvPr id="9" name="TextBox 8"/>
           <p:cNvSpPr txBox="1"/>
           <p:nvPr/>
         </p:nvSpPr>
@@ -10130,7 +9084,7 @@
       </p:sp>
       <p:sp>
         <p:nvSpPr>
-          <p:cNvPr id="11" name="TextBox 10"/>
+          <p:cNvPr id="10" name="TextBox 9"/>
           <p:cNvSpPr txBox="1"/>
           <p:nvPr/>
         </p:nvSpPr>
@@ -10183,7 +9137,7 @@
       </p:sp>
       <p:sp>
         <p:nvSpPr>
-          <p:cNvPr id="12" name="TextBox 11"/>
+          <p:cNvPr id="11" name="TextBox 10"/>
           <p:cNvSpPr txBox="1"/>
           <p:nvPr/>
         </p:nvSpPr>
@@ -10236,7 +9190,7 @@
       </p:sp>
       <p:sp>
         <p:nvSpPr>
-          <p:cNvPr id="13" name="TextBox 12"/>
+          <p:cNvPr id="12" name="TextBox 11"/>
           <p:cNvSpPr txBox="1"/>
           <p:nvPr/>
         </p:nvSpPr>
@@ -10289,7 +9243,7 @@
       </p:sp>
       <p:sp>
         <p:nvSpPr>
-          <p:cNvPr id="14" name="TextBox 13"/>
+          <p:cNvPr id="13" name="TextBox 12"/>
           <p:cNvSpPr txBox="1"/>
           <p:nvPr/>
         </p:nvSpPr>
@@ -10342,7 +9296,7 @@
       </p:sp>
       <p:sp>
         <p:nvSpPr>
-          <p:cNvPr id="15" name="TextBox 14"/>
+          <p:cNvPr id="14" name="TextBox 13"/>
           <p:cNvSpPr txBox="1"/>
           <p:nvPr/>
         </p:nvSpPr>
@@ -10507,44 +9461,9 @@
           </a:fontRef>
         </p:style>
       </p:cxnSp>
-      <p:sp>
-        <p:nvSpPr>
-          <p:cNvPr id="5" name="TextBox 4"/>
-          <p:cNvSpPr txBox="1"/>
-          <p:nvPr/>
-        </p:nvSpPr>
-        <p:spPr>
-          <a:xfrm>
-            <a:off x="777240" y="1261872"/>
-            <a:ext cx="10607040" cy="310896"/>
-          </a:xfrm>
-          <a:prstGeom prst="rect">
-            <a:avLst/>
-          </a:prstGeom>
-          <a:noFill/>
-        </p:spPr>
-        <p:txBody>
-          <a:bodyPr wrap="square" lIns="45720" rIns="45720" tIns="18288" bIns="18288" anchor="t">
-            <a:spAutoFit/>
-          </a:bodyPr>
-          <a:lstStyle/>
-          <a:p>
-            <a:pPr algn="l"/>
-            <a:r>
-              <a:rPr sz="1700" b="0" i="1">
-                <a:solidFill>
-                  <a:srgbClr val="6B6B6B"/>
-                </a:solidFill>
-                <a:latin typeface="Century Schoolbook"/>
-              </a:rPr>
-              <a:t>Boards up on three.</a:t>
-            </a:r>
-          </a:p>
-        </p:txBody>
-      </p:sp>
       <p:cxnSp>
         <p:nvCxnSpPr>
-          <p:cNvPr id="6" name="Connector 5"/>
+          <p:cNvPr id="5" name="Connector 4"/>
           <p:cNvCxnSpPr/>
           <p:nvPr/>
         </p:nvCxnSpPr>
@@ -10579,7 +9498,7 @@
       </p:cxnSp>
       <p:sp>
         <p:nvSpPr>
-          <p:cNvPr id="7" name="TextBox 6"/>
+          <p:cNvPr id="6" name="TextBox 5"/>
           <p:cNvSpPr txBox="1"/>
           <p:nvPr/>
         </p:nvSpPr>
@@ -10614,7 +9533,7 @@
       </p:sp>
       <p:sp>
         <p:nvSpPr>
-          <p:cNvPr id="8" name="TextBox 7"/>
+          <p:cNvPr id="7" name="TextBox 6"/>
           <p:cNvSpPr txBox="1"/>
           <p:nvPr/>
         </p:nvSpPr>
@@ -10649,7 +9568,7 @@
       </p:sp>
       <p:pic>
         <p:nvPicPr>
-          <p:cNvPr id="9" name="Picture 8" descr="e9242358ed1b2b8f.png"/>
+          <p:cNvPr id="8" name="Picture 7" descr="e9242358ed1b2b8f.png"/>
           <p:cNvPicPr>
             <a:picLocks noChangeAspect="1"/>
           </p:cNvPicPr>
@@ -10673,7 +9592,7 @@
       </p:pic>
       <p:sp>
         <p:nvSpPr>
-          <p:cNvPr id="10" name="TextBox 9"/>
+          <p:cNvPr id="9" name="TextBox 8"/>
           <p:cNvSpPr txBox="1"/>
           <p:nvPr/>
         </p:nvSpPr>
@@ -10708,7 +9627,7 @@
       </p:sp>
       <p:sp>
         <p:nvSpPr>
-          <p:cNvPr id="11" name="TextBox 10"/>
+          <p:cNvPr id="10" name="TextBox 9"/>
           <p:cNvSpPr txBox="1"/>
           <p:nvPr/>
         </p:nvSpPr>
@@ -10761,7 +9680,7 @@
       </p:sp>
       <p:sp>
         <p:nvSpPr>
-          <p:cNvPr id="12" name="TextBox 11"/>
+          <p:cNvPr id="11" name="TextBox 10"/>
           <p:cNvSpPr txBox="1"/>
           <p:nvPr/>
         </p:nvSpPr>
@@ -10814,7 +9733,7 @@
       </p:sp>
       <p:sp>
         <p:nvSpPr>
-          <p:cNvPr id="13" name="TextBox 12"/>
+          <p:cNvPr id="12" name="TextBox 11"/>
           <p:cNvSpPr txBox="1"/>
           <p:nvPr/>
         </p:nvSpPr>
@@ -10867,7 +9786,7 @@
       </p:sp>
       <p:sp>
         <p:nvSpPr>
-          <p:cNvPr id="14" name="TextBox 13"/>
+          <p:cNvPr id="13" name="TextBox 12"/>
           <p:cNvSpPr txBox="1"/>
           <p:nvPr/>
         </p:nvSpPr>
@@ -10920,7 +9839,7 @@
       </p:sp>
       <p:sp>
         <p:nvSpPr>
-          <p:cNvPr id="15" name="TextBox 14"/>
+          <p:cNvPr id="14" name="TextBox 13"/>
           <p:cNvSpPr txBox="1"/>
           <p:nvPr/>
         </p:nvSpPr>
@@ -11076,44 +9995,9 @@
           </a:fontRef>
         </p:style>
       </p:cxnSp>
-      <p:sp>
-        <p:nvSpPr>
-          <p:cNvPr id="5" name="TextBox 4"/>
-          <p:cNvSpPr txBox="1"/>
-          <p:nvPr/>
-        </p:nvSpPr>
-        <p:spPr>
-          <a:xfrm>
-            <a:off x="777240" y="1261872"/>
-            <a:ext cx="10607040" cy="310896"/>
-          </a:xfrm>
-          <a:prstGeom prst="rect">
-            <a:avLst/>
-          </a:prstGeom>
-          <a:noFill/>
-        </p:spPr>
-        <p:txBody>
-          <a:bodyPr wrap="square" lIns="45720" rIns="45720" tIns="18288" bIns="18288" anchor="t">
-            <a:spAutoFit/>
-          </a:bodyPr>
-          <a:lstStyle/>
-          <a:p>
-            <a:pPr algn="l"/>
-            <a:r>
-              <a:rPr sz="1700" b="0" i="1">
-                <a:solidFill>
-                  <a:srgbClr val="6B6B6B"/>
-                </a:solidFill>
-                <a:latin typeface="Century Schoolbook"/>
-              </a:rPr>
-              <a:t>Answer.</a:t>
-            </a:r>
-          </a:p>
-        </p:txBody>
-      </p:sp>
       <p:cxnSp>
         <p:nvCxnSpPr>
-          <p:cNvPr id="6" name="Connector 5"/>
+          <p:cNvPr id="5" name="Connector 4"/>
           <p:cNvCxnSpPr/>
           <p:nvPr/>
         </p:nvCxnSpPr>
@@ -11148,7 +10032,7 @@
       </p:cxnSp>
       <p:sp>
         <p:nvSpPr>
-          <p:cNvPr id="7" name="TextBox 6"/>
+          <p:cNvPr id="6" name="TextBox 5"/>
           <p:cNvSpPr txBox="1"/>
           <p:nvPr/>
         </p:nvSpPr>
@@ -11183,7 +10067,7 @@
       </p:sp>
       <p:sp>
         <p:nvSpPr>
-          <p:cNvPr id="8" name="TextBox 7"/>
+          <p:cNvPr id="7" name="TextBox 6"/>
           <p:cNvSpPr txBox="1"/>
           <p:nvPr/>
         </p:nvSpPr>
@@ -11218,7 +10102,7 @@
       </p:sp>
       <p:pic>
         <p:nvPicPr>
-          <p:cNvPr id="9" name="Picture 8" descr="77243053f2f7c3fe.png"/>
+          <p:cNvPr id="8" name="Picture 7" descr="77243053f2f7c3fe.png"/>
           <p:cNvPicPr>
             <a:picLocks noChangeAspect="1"/>
           </p:cNvPicPr>
@@ -11242,7 +10126,7 @@
       </p:pic>
       <p:sp>
         <p:nvSpPr>
-          <p:cNvPr id="10" name="TextBox 9"/>
+          <p:cNvPr id="9" name="TextBox 8"/>
           <p:cNvSpPr txBox="1"/>
           <p:nvPr/>
         </p:nvSpPr>
@@ -11277,7 +10161,7 @@
       </p:sp>
       <p:sp>
         <p:nvSpPr>
-          <p:cNvPr id="11" name="TextBox 10"/>
+          <p:cNvPr id="10" name="TextBox 9"/>
           <p:cNvSpPr txBox="1"/>
           <p:nvPr/>
         </p:nvSpPr>
@@ -11330,7 +10214,7 @@
       </p:sp>
       <p:sp>
         <p:nvSpPr>
-          <p:cNvPr id="12" name="TextBox 11"/>
+          <p:cNvPr id="11" name="TextBox 10"/>
           <p:cNvSpPr txBox="1"/>
           <p:nvPr/>
         </p:nvSpPr>
@@ -11383,7 +10267,7 @@
       </p:sp>
       <p:sp>
         <p:nvSpPr>
-          <p:cNvPr id="13" name="TextBox 12"/>
+          <p:cNvPr id="12" name="TextBox 11"/>
           <p:cNvSpPr txBox="1"/>
           <p:nvPr/>
         </p:nvSpPr>
@@ -11436,7 +10320,7 @@
       </p:sp>
       <p:sp>
         <p:nvSpPr>
-          <p:cNvPr id="14" name="TextBox 13"/>
+          <p:cNvPr id="13" name="TextBox 12"/>
           <p:cNvSpPr txBox="1"/>
           <p:nvPr/>
         </p:nvSpPr>
@@ -11489,7 +10373,7 @@
       </p:sp>
       <p:sp>
         <p:nvSpPr>
-          <p:cNvPr id="15" name="TextBox 14"/>
+          <p:cNvPr id="14" name="TextBox 13"/>
           <p:cNvSpPr txBox="1"/>
           <p:nvPr/>
         </p:nvSpPr>
@@ -11654,44 +10538,9 @@
           </a:fontRef>
         </p:style>
       </p:cxnSp>
-      <p:sp>
-        <p:nvSpPr>
-          <p:cNvPr id="5" name="TextBox 4"/>
-          <p:cNvSpPr txBox="1"/>
-          <p:nvPr/>
-        </p:nvSpPr>
-        <p:spPr>
-          <a:xfrm>
-            <a:off x="777240" y="1261872"/>
-            <a:ext cx="10607040" cy="310896"/>
-          </a:xfrm>
-          <a:prstGeom prst="rect">
-            <a:avLst/>
-          </a:prstGeom>
-          <a:noFill/>
-        </p:spPr>
-        <p:txBody>
-          <a:bodyPr wrap="square" lIns="45720" rIns="45720" tIns="18288" bIns="18288" anchor="t">
-            <a:spAutoFit/>
-          </a:bodyPr>
-          <a:lstStyle/>
-          <a:p>
-            <a:pPr algn="l"/>
-            <a:r>
-              <a:rPr sz="1700" b="0" i="1">
-                <a:solidFill>
-                  <a:srgbClr val="6B6B6B"/>
-                </a:solidFill>
-                <a:latin typeface="Century Schoolbook"/>
-              </a:rPr>
-              <a:t>Boards up on three.</a:t>
-            </a:r>
-          </a:p>
-        </p:txBody>
-      </p:sp>
       <p:cxnSp>
         <p:nvCxnSpPr>
-          <p:cNvPr id="6" name="Connector 5"/>
+          <p:cNvPr id="5" name="Connector 4"/>
           <p:cNvCxnSpPr/>
           <p:nvPr/>
         </p:nvCxnSpPr>
@@ -11726,7 +10575,7 @@
       </p:cxnSp>
       <p:sp>
         <p:nvSpPr>
-          <p:cNvPr id="7" name="TextBox 6"/>
+          <p:cNvPr id="6" name="TextBox 5"/>
           <p:cNvSpPr txBox="1"/>
           <p:nvPr/>
         </p:nvSpPr>
@@ -11761,7 +10610,7 @@
       </p:sp>
       <p:sp>
         <p:nvSpPr>
-          <p:cNvPr id="8" name="TextBox 7"/>
+          <p:cNvPr id="7" name="TextBox 6"/>
           <p:cNvSpPr txBox="1"/>
           <p:nvPr/>
         </p:nvSpPr>
@@ -11796,7 +10645,7 @@
       </p:sp>
       <p:pic>
         <p:nvPicPr>
-          <p:cNvPr id="9" name="Picture 8" descr="983316d8a340e399.png"/>
+          <p:cNvPr id="8" name="Picture 7" descr="983316d8a340e399.png"/>
           <p:cNvPicPr>
             <a:picLocks noChangeAspect="1"/>
           </p:cNvPicPr>
@@ -11820,7 +10669,7 @@
       </p:pic>
       <p:sp>
         <p:nvSpPr>
-          <p:cNvPr id="10" name="TextBox 9"/>
+          <p:cNvPr id="9" name="TextBox 8"/>
           <p:cNvSpPr txBox="1"/>
           <p:nvPr/>
         </p:nvSpPr>
@@ -11849,41 +10698,6 @@
                 <a:latin typeface="Century Schoolbook"/>
               </a:rPr>
               <a:t>Answer it.</a:t>
-            </a:r>
-          </a:p>
-        </p:txBody>
-      </p:sp>
-      <p:sp>
-        <p:nvSpPr>
-          <p:cNvPr id="11" name="TextBox 10"/>
-          <p:cNvSpPr txBox="1"/>
-          <p:nvPr/>
-        </p:nvSpPr>
-        <p:spPr>
-          <a:xfrm>
-            <a:off x="777240" y="4828032"/>
-            <a:ext cx="10607040" cy="365760"/>
-          </a:xfrm>
-          <a:prstGeom prst="rect">
-            <a:avLst/>
-          </a:prstGeom>
-          <a:noFill/>
-        </p:spPr>
-        <p:txBody>
-          <a:bodyPr wrap="square" lIns="45720" rIns="45720" tIns="18288" bIns="18288" anchor="t">
-            <a:spAutoFit/>
-          </a:bodyPr>
-          <a:lstStyle/>
-          <a:p>
-            <a:pPr algn="ctr"/>
-            <a:r>
-              <a:rPr sz="1900" b="0" i="1">
-                <a:solidFill>
-                  <a:srgbClr val="6B6B6B"/>
-                </a:solidFill>
-                <a:latin typeface="Century Schoolbook"/>
-              </a:rPr>
-              <a:t>Find the value.</a:t>
             </a:r>
           </a:p>
         </p:txBody>
@@ -12011,44 +10825,9 @@
           </a:fontRef>
         </p:style>
       </p:cxnSp>
-      <p:sp>
-        <p:nvSpPr>
-          <p:cNvPr id="5" name="TextBox 4"/>
-          <p:cNvSpPr txBox="1"/>
-          <p:nvPr/>
-        </p:nvSpPr>
-        <p:spPr>
-          <a:xfrm>
-            <a:off x="777240" y="1261872"/>
-            <a:ext cx="10607040" cy="310896"/>
-          </a:xfrm>
-          <a:prstGeom prst="rect">
-            <a:avLst/>
-          </a:prstGeom>
-          <a:noFill/>
-        </p:spPr>
-        <p:txBody>
-          <a:bodyPr wrap="square" lIns="45720" rIns="45720" tIns="18288" bIns="18288" anchor="t">
-            <a:spAutoFit/>
-          </a:bodyPr>
-          <a:lstStyle/>
-          <a:p>
-            <a:pPr algn="l"/>
-            <a:r>
-              <a:rPr sz="1700" b="0" i="1">
-                <a:solidFill>
-                  <a:srgbClr val="6B6B6B"/>
-                </a:solidFill>
-                <a:latin typeface="Century Schoolbook"/>
-              </a:rPr>
-              <a:t>Answer.</a:t>
-            </a:r>
-          </a:p>
-        </p:txBody>
-      </p:sp>
       <p:cxnSp>
         <p:nvCxnSpPr>
-          <p:cNvPr id="6" name="Connector 5"/>
+          <p:cNvPr id="5" name="Connector 4"/>
           <p:cNvCxnSpPr/>
           <p:nvPr/>
         </p:nvCxnSpPr>
@@ -12083,7 +10862,7 @@
       </p:cxnSp>
       <p:sp>
         <p:nvSpPr>
-          <p:cNvPr id="7" name="TextBox 6"/>
+          <p:cNvPr id="6" name="TextBox 5"/>
           <p:cNvSpPr txBox="1"/>
           <p:nvPr/>
         </p:nvSpPr>
@@ -12118,7 +10897,7 @@
       </p:sp>
       <p:sp>
         <p:nvSpPr>
-          <p:cNvPr id="8" name="TextBox 7"/>
+          <p:cNvPr id="7" name="TextBox 6"/>
           <p:cNvSpPr txBox="1"/>
           <p:nvPr/>
         </p:nvSpPr>
@@ -12153,7 +10932,7 @@
       </p:sp>
       <p:pic>
         <p:nvPicPr>
-          <p:cNvPr id="9" name="Picture 8" descr="cccf2e6aacb49bf9.png"/>
+          <p:cNvPr id="8" name="Picture 7" descr="cccf2e6aacb49bf9.png"/>
           <p:cNvPicPr>
             <a:picLocks noChangeAspect="1"/>
           </p:cNvPicPr>
@@ -12177,87 +10956,7 @@
       </p:pic>
       <p:sp>
         <p:nvSpPr>
-          <p:cNvPr id="10" name="TextBox 9"/>
-          <p:cNvSpPr txBox="1"/>
-          <p:nvPr/>
-        </p:nvSpPr>
-        <p:spPr>
-          <a:xfrm>
-            <a:off x="1828800" y="3255263"/>
-            <a:ext cx="8503920" cy="548640"/>
-          </a:xfrm>
-          <a:prstGeom prst="rect">
-            <a:avLst/>
-          </a:prstGeom>
-          <a:noFill/>
-        </p:spPr>
-        <p:txBody>
-          <a:bodyPr wrap="square" lIns="45720" rIns="45720" tIns="18288" bIns="18288" anchor="t">
-            <a:spAutoFit/>
-          </a:bodyPr>
-          <a:lstStyle/>
-          <a:p>
-            <a:pPr algn="ctr"/>
-            <a:r>
-              <a:rPr sz="2400" b="0" i="0">
-                <a:solidFill>
-                  <a:srgbClr val="6B6B6B"/>
-                </a:solidFill>
-                <a:latin typeface="Century Schoolbook"/>
-              </a:rPr>
-              <a:t>(5/2)</a:t>
-            </a:r>
-            <a:r>
-              <a:rPr sz="2400" b="0" i="0" baseline="30000">
-                <a:solidFill>
-                  <a:srgbClr val="6B6B6B"/>
-                </a:solidFill>
-                <a:latin typeface="Century Schoolbook"/>
-              </a:rPr>
-              <a:t>1</a:t>
-            </a:r>
-            <a:r>
-              <a:rPr sz="2400" b="0" i="0">
-                <a:solidFill>
-                  <a:srgbClr val="6B6B6B"/>
-                </a:solidFill>
-                <a:latin typeface="Century Schoolbook"/>
-              </a:rPr>
-              <a:t> · (5/2)</a:t>
-            </a:r>
-            <a:r>
-              <a:rPr sz="2400" b="0" i="0" baseline="30000">
-                <a:solidFill>
-                  <a:srgbClr val="6B6B6B"/>
-                </a:solidFill>
-                <a:latin typeface="Century Schoolbook"/>
-              </a:rPr>
-              <a:t>1</a:t>
-            </a:r>
-            <a:r>
-              <a:rPr sz="2400" b="0" i="0">
-                <a:solidFill>
-                  <a:srgbClr val="6B6B6B"/>
-                </a:solidFill>
-                <a:latin typeface="Century Schoolbook"/>
-              </a:rPr>
-              <a:t> = (5/2)</a:t>
-            </a:r>
-            <a:r>
-              <a:rPr sz="2400" b="0" i="0" baseline="30000">
-                <a:solidFill>
-                  <a:srgbClr val="6B6B6B"/>
-                </a:solidFill>
-                <a:latin typeface="Century Schoolbook"/>
-              </a:rPr>
-              <a:t>2</a:t>
-            </a:r>
-          </a:p>
-        </p:txBody>
-      </p:sp>
-      <p:sp>
-        <p:nvSpPr>
-          <p:cNvPr id="11" name="TextBox 10"/>
+          <p:cNvPr id="9" name="TextBox 8"/>
           <p:cNvSpPr txBox="1"/>
           <p:nvPr/>
         </p:nvSpPr>
@@ -12292,7 +10991,7 @@
       </p:sp>
       <p:pic>
         <p:nvPicPr>
-          <p:cNvPr id="12" name="Picture 11" descr="c37c2f03a9ba8642.png"/>
+          <p:cNvPr id="10" name="Picture 9" descr="c37c2f03a9ba8642.png"/>
           <p:cNvPicPr>
             <a:picLocks noChangeAspect="1"/>
           </p:cNvPicPr>
@@ -12437,44 +11136,9 @@
           </a:fontRef>
         </p:style>
       </p:cxnSp>
-      <p:sp>
-        <p:nvSpPr>
-          <p:cNvPr id="5" name="TextBox 4"/>
-          <p:cNvSpPr txBox="1"/>
-          <p:nvPr/>
-        </p:nvSpPr>
-        <p:spPr>
-          <a:xfrm>
-            <a:off x="777240" y="1261872"/>
-            <a:ext cx="10607040" cy="310896"/>
-          </a:xfrm>
-          <a:prstGeom prst="rect">
-            <a:avLst/>
-          </a:prstGeom>
-          <a:noFill/>
-        </p:spPr>
-        <p:txBody>
-          <a:bodyPr wrap="square" lIns="45720" rIns="45720" tIns="18288" bIns="18288" anchor="t">
-            <a:spAutoFit/>
-          </a:bodyPr>
-          <a:lstStyle/>
-          <a:p>
-            <a:pPr algn="l"/>
-            <a:r>
-              <a:rPr sz="1700" b="0" i="1">
-                <a:solidFill>
-                  <a:srgbClr val="6B6B6B"/>
-                </a:solidFill>
-                <a:latin typeface="Century Schoolbook"/>
-              </a:rPr>
-              <a:t>Boards up on three.</a:t>
-            </a:r>
-          </a:p>
-        </p:txBody>
-      </p:sp>
       <p:cxnSp>
         <p:nvCxnSpPr>
-          <p:cNvPr id="6" name="Connector 5"/>
+          <p:cNvPr id="5" name="Connector 4"/>
           <p:cNvCxnSpPr/>
           <p:nvPr/>
         </p:nvCxnSpPr>
@@ -12509,7 +11173,7 @@
       </p:cxnSp>
       <p:sp>
         <p:nvSpPr>
-          <p:cNvPr id="7" name="TextBox 6"/>
+          <p:cNvPr id="6" name="TextBox 5"/>
           <p:cNvSpPr txBox="1"/>
           <p:nvPr/>
         </p:nvSpPr>
@@ -12544,7 +11208,7 @@
       </p:sp>
       <p:sp>
         <p:nvSpPr>
-          <p:cNvPr id="8" name="TextBox 7"/>
+          <p:cNvPr id="7" name="TextBox 6"/>
           <p:cNvSpPr txBox="1"/>
           <p:nvPr/>
         </p:nvSpPr>
@@ -12579,7 +11243,7 @@
       </p:sp>
       <p:pic>
         <p:nvPicPr>
-          <p:cNvPr id="9" name="Picture 8" descr="c18abdc6135bde12.png"/>
+          <p:cNvPr id="8" name="Picture 7" descr="c18abdc6135bde12.png"/>
           <p:cNvPicPr>
             <a:picLocks noChangeAspect="1"/>
           </p:cNvPicPr>
@@ -12603,7 +11267,7 @@
       </p:pic>
       <p:sp>
         <p:nvSpPr>
-          <p:cNvPr id="10" name="TextBox 9"/>
+          <p:cNvPr id="9" name="TextBox 8"/>
           <p:cNvSpPr txBox="1"/>
           <p:nvPr/>
         </p:nvSpPr>
@@ -12632,41 +11296,6 @@
                 <a:latin typeface="Century Schoolbook"/>
               </a:rPr>
               <a:t>Answer it.</a:t>
-            </a:r>
-          </a:p>
-        </p:txBody>
-      </p:sp>
-      <p:sp>
-        <p:nvSpPr>
-          <p:cNvPr id="11" name="TextBox 10"/>
-          <p:cNvSpPr txBox="1"/>
-          <p:nvPr/>
-        </p:nvSpPr>
-        <p:spPr>
-          <a:xfrm>
-            <a:off x="777240" y="4828032"/>
-            <a:ext cx="10607040" cy="365760"/>
-          </a:xfrm>
-          <a:prstGeom prst="rect">
-            <a:avLst/>
-          </a:prstGeom>
-          <a:noFill/>
-        </p:spPr>
-        <p:txBody>
-          <a:bodyPr wrap="square" lIns="45720" rIns="45720" tIns="18288" bIns="18288" anchor="t">
-            <a:spAutoFit/>
-          </a:bodyPr>
-          <a:lstStyle/>
-          <a:p>
-            <a:pPr algn="ctr"/>
-            <a:r>
-              <a:rPr sz="1900" b="0" i="1">
-                <a:solidFill>
-                  <a:srgbClr val="6B6B6B"/>
-                </a:solidFill>
-                <a:latin typeface="Century Schoolbook"/>
-              </a:rPr>
-              <a:t>Write it with one base and one positive exponent.</a:t>
             </a:r>
           </a:p>
         </p:txBody>
@@ -12794,44 +11423,9 @@
           </a:fontRef>
         </p:style>
       </p:cxnSp>
-      <p:sp>
-        <p:nvSpPr>
-          <p:cNvPr id="5" name="TextBox 4"/>
-          <p:cNvSpPr txBox="1"/>
-          <p:nvPr/>
-        </p:nvSpPr>
-        <p:spPr>
-          <a:xfrm>
-            <a:off x="777240" y="1261872"/>
-            <a:ext cx="10607040" cy="310896"/>
-          </a:xfrm>
-          <a:prstGeom prst="rect">
-            <a:avLst/>
-          </a:prstGeom>
-          <a:noFill/>
-        </p:spPr>
-        <p:txBody>
-          <a:bodyPr wrap="square" lIns="45720" rIns="45720" tIns="18288" bIns="18288" anchor="t">
-            <a:spAutoFit/>
-          </a:bodyPr>
-          <a:lstStyle/>
-          <a:p>
-            <a:pPr algn="l"/>
-            <a:r>
-              <a:rPr sz="1700" b="0" i="1">
-                <a:solidFill>
-                  <a:srgbClr val="6B6B6B"/>
-                </a:solidFill>
-                <a:latin typeface="Century Schoolbook"/>
-              </a:rPr>
-              <a:t>Answers.</a:t>
-            </a:r>
-          </a:p>
-        </p:txBody>
-      </p:sp>
       <p:cxnSp>
         <p:nvCxnSpPr>
-          <p:cNvPr id="6" name="Connector 5"/>
+          <p:cNvPr id="5" name="Connector 4"/>
           <p:cNvCxnSpPr/>
           <p:nvPr/>
         </p:nvCxnSpPr>
@@ -12866,7 +11460,7 @@
       </p:cxnSp>
       <p:sp>
         <p:nvSpPr>
-          <p:cNvPr id="7" name="TextBox 6"/>
+          <p:cNvPr id="6" name="TextBox 5"/>
           <p:cNvSpPr txBox="1"/>
           <p:nvPr/>
         </p:nvSpPr>
@@ -12901,7 +11495,7 @@
       </p:sp>
       <p:sp>
         <p:nvSpPr>
-          <p:cNvPr id="8" name="TextBox 7"/>
+          <p:cNvPr id="7" name="TextBox 6"/>
           <p:cNvSpPr txBox="1"/>
           <p:nvPr/>
         </p:nvSpPr>
@@ -12936,13 +11530,13 @@
       </p:sp>
       <p:sp>
         <p:nvSpPr>
-          <p:cNvPr id="9" name="TextBox 8"/>
-          <p:cNvSpPr txBox="1"/>
-          <p:nvPr/>
-        </p:nvSpPr>
-        <p:spPr>
-          <a:xfrm>
-            <a:off x="1874519" y="1760220"/>
+          <p:cNvPr id="8" name="TextBox 7"/>
+          <p:cNvSpPr txBox="1"/>
+          <p:nvPr/>
+        </p:nvSpPr>
+        <p:spPr>
+          <a:xfrm>
+            <a:off x="1874519" y="1440180"/>
             <a:ext cx="3058734" cy="457200"/>
           </a:xfrm>
           <a:prstGeom prst="rect">
@@ -12971,7 +11565,7 @@
       </p:sp>
       <p:pic>
         <p:nvPicPr>
-          <p:cNvPr id="10" name="Picture 9" descr="1538ef9a323bca44.png"/>
+          <p:cNvPr id="9" name="Picture 8" descr="1538ef9a323bca44.png"/>
           <p:cNvPicPr>
             <a:picLocks noChangeAspect="1"/>
           </p:cNvPicPr>
@@ -12985,7 +11579,7 @@
         </p:blipFill>
         <p:spPr>
           <a:xfrm>
-            <a:off x="4796094" y="1851660"/>
+            <a:off x="4796094" y="1531620"/>
             <a:ext cx="417576" cy="274320"/>
           </a:xfrm>
           <a:prstGeom prst="rect">
@@ -12995,7 +11589,7 @@
       </p:pic>
       <p:pic>
         <p:nvPicPr>
-          <p:cNvPr id="11" name="Picture 10" descr="0f45754c59884ba0.png"/>
+          <p:cNvPr id="10" name="Picture 9" descr="0f45754c59884ba0.png"/>
           <p:cNvPicPr>
             <a:picLocks noChangeAspect="1"/>
           </p:cNvPicPr>
@@ -13009,7 +11603,7 @@
         </p:blipFill>
         <p:spPr>
           <a:xfrm>
-            <a:off x="5762310" y="1783080"/>
+            <a:off x="5762310" y="1463040"/>
             <a:ext cx="170688" cy="554736"/>
           </a:xfrm>
           <a:prstGeom prst="rect">
@@ -13019,13 +11613,13 @@
       </p:pic>
       <p:sp>
         <p:nvSpPr>
-          <p:cNvPr id="12" name="TextBox 11"/>
-          <p:cNvSpPr txBox="1"/>
-          <p:nvPr/>
-        </p:nvSpPr>
-        <p:spPr>
-          <a:xfrm>
-            <a:off x="1874519" y="2468880"/>
+          <p:cNvPr id="11" name="TextBox 10"/>
+          <p:cNvSpPr txBox="1"/>
+          <p:nvPr/>
+        </p:nvSpPr>
+        <p:spPr>
+          <a:xfrm>
+            <a:off x="1874519" y="2148840"/>
             <a:ext cx="5677198" cy="457200"/>
           </a:xfrm>
           <a:prstGeom prst="rect">
@@ -13054,7 +11648,7 @@
       </p:sp>
       <p:pic>
         <p:nvPicPr>
-          <p:cNvPr id="13" name="Picture 12" descr="82be0161615a5d7f.png"/>
+          <p:cNvPr id="12" name="Picture 11" descr="82be0161615a5d7f.png"/>
           <p:cNvPicPr>
             <a:picLocks noChangeAspect="1"/>
           </p:cNvPicPr>
@@ -13068,7 +11662,7 @@
         </p:blipFill>
         <p:spPr>
           <a:xfrm>
-            <a:off x="7414558" y="2395728"/>
+            <a:off x="7414558" y="2075688"/>
             <a:ext cx="463296" cy="603504"/>
           </a:xfrm>
           <a:prstGeom prst="rect">
@@ -13078,7 +11672,7 @@
       </p:pic>
       <p:pic>
         <p:nvPicPr>
-          <p:cNvPr id="14" name="Picture 13" descr="b031d4b8beeb8414.png"/>
+          <p:cNvPr id="13" name="Picture 12" descr="b031d4b8beeb8414.png"/>
           <p:cNvPicPr>
             <a:picLocks noChangeAspect="1"/>
           </p:cNvPicPr>
@@ -13092,7 +11686,7 @@
         </p:blipFill>
         <p:spPr>
           <a:xfrm>
-            <a:off x="8426494" y="2462784"/>
+            <a:off x="8426494" y="2142744"/>
             <a:ext cx="271272" cy="277368"/>
           </a:xfrm>
           <a:prstGeom prst="rect">
@@ -13102,13 +11696,13 @@
       </p:pic>
       <p:sp>
         <p:nvSpPr>
-          <p:cNvPr id="15" name="TextBox 14"/>
-          <p:cNvSpPr txBox="1"/>
-          <p:nvPr/>
-        </p:nvSpPr>
-        <p:spPr>
-          <a:xfrm>
-            <a:off x="1874519" y="3177540"/>
+          <p:cNvPr id="14" name="TextBox 13"/>
+          <p:cNvSpPr txBox="1"/>
+          <p:nvPr/>
+        </p:nvSpPr>
+        <p:spPr>
+          <a:xfrm>
+            <a:off x="1874519" y="2857500"/>
             <a:ext cx="3065570" cy="457200"/>
           </a:xfrm>
           <a:prstGeom prst="rect">
@@ -13137,7 +11731,7 @@
       </p:sp>
       <p:pic>
         <p:nvPicPr>
-          <p:cNvPr id="16" name="Picture 15" descr="5fa67493f2d0b1ad.png"/>
+          <p:cNvPr id="15" name="Picture 14" descr="5fa67493f2d0b1ad.png"/>
           <p:cNvPicPr>
             <a:picLocks noChangeAspect="1"/>
           </p:cNvPicPr>
@@ -13151,7 +11745,7 @@
         </p:blipFill>
         <p:spPr>
           <a:xfrm>
-            <a:off x="4802930" y="3268980"/>
+            <a:off x="4802930" y="2948940"/>
             <a:ext cx="265176" cy="274320"/>
           </a:xfrm>
           <a:prstGeom prst="rect">
@@ -13161,13 +11755,13 @@
       </p:pic>
       <p:sp>
         <p:nvSpPr>
-          <p:cNvPr id="17" name="TextBox 16"/>
-          <p:cNvSpPr txBox="1"/>
-          <p:nvPr/>
-        </p:nvSpPr>
-        <p:spPr>
-          <a:xfrm>
-            <a:off x="5068106" y="3177540"/>
+          <p:cNvPr id="16" name="TextBox 15"/>
+          <p:cNvSpPr txBox="1"/>
+          <p:nvPr/>
+        </p:nvSpPr>
+        <p:spPr>
+          <a:xfrm>
+            <a:off x="5068106" y="2857500"/>
             <a:ext cx="674751" cy="457200"/>
           </a:xfrm>
           <a:prstGeom prst="rect">
@@ -13196,7 +11790,7 @@
       </p:sp>
       <p:pic>
         <p:nvPicPr>
-          <p:cNvPr id="18" name="Picture 17" descr="cd79bb74d01bc946.png"/>
+          <p:cNvPr id="17" name="Picture 16" descr="cd79bb74d01bc946.png"/>
           <p:cNvPicPr>
             <a:picLocks noChangeAspect="1"/>
           </p:cNvPicPr>
@@ -13210,7 +11804,7 @@
         </p:blipFill>
         <p:spPr>
           <a:xfrm>
-            <a:off x="5605697" y="3264408"/>
+            <a:off x="5605697" y="2944368"/>
             <a:ext cx="265176" cy="283464"/>
           </a:xfrm>
           <a:prstGeom prst="rect">
@@ -13220,13 +11814,13 @@
       </p:pic>
       <p:sp>
         <p:nvSpPr>
-          <p:cNvPr id="19" name="TextBox 18"/>
-          <p:cNvSpPr txBox="1"/>
-          <p:nvPr/>
-        </p:nvSpPr>
-        <p:spPr>
-          <a:xfrm>
-            <a:off x="5870873" y="3177540"/>
+          <p:cNvPr id="18" name="TextBox 17"/>
+          <p:cNvSpPr txBox="1"/>
+          <p:nvPr/>
+        </p:nvSpPr>
+        <p:spPr>
+          <a:xfrm>
+            <a:off x="5870873" y="2857500"/>
             <a:ext cx="347771" cy="457200"/>
           </a:xfrm>
           <a:prstGeom prst="rect">
@@ -13255,7 +11849,7 @@
       </p:sp>
       <p:pic>
         <p:nvPicPr>
-          <p:cNvPr id="20" name="Picture 19" descr="0663332b63521aed.png"/>
+          <p:cNvPr id="19" name="Picture 18" descr="0663332b63521aed.png"/>
           <p:cNvPicPr>
             <a:picLocks noChangeAspect="1"/>
           </p:cNvPicPr>
@@ -13269,7 +11863,7 @@
         </p:blipFill>
         <p:spPr>
           <a:xfrm>
-            <a:off x="6630125" y="3264408"/>
+            <a:off x="6630125" y="2944368"/>
             <a:ext cx="265176" cy="283464"/>
           </a:xfrm>
           <a:prstGeom prst="rect">
@@ -13279,13 +11873,13 @@
       </p:pic>
       <p:sp>
         <p:nvSpPr>
-          <p:cNvPr id="21" name="TextBox 20"/>
-          <p:cNvSpPr txBox="1"/>
-          <p:nvPr/>
-        </p:nvSpPr>
-        <p:spPr>
-          <a:xfrm>
-            <a:off x="6895301" y="3177540"/>
+          <p:cNvPr id="20" name="TextBox 19"/>
+          <p:cNvSpPr txBox="1"/>
+          <p:nvPr/>
+        </p:nvSpPr>
+        <p:spPr>
+          <a:xfrm>
+            <a:off x="6895301" y="2857500"/>
             <a:ext cx="1616354" cy="457200"/>
           </a:xfrm>
           <a:prstGeom prst="rect">
@@ -13314,13 +11908,13 @@
       </p:sp>
       <p:sp>
         <p:nvSpPr>
-          <p:cNvPr id="22" name="TextBox 21"/>
-          <p:cNvSpPr txBox="1"/>
-          <p:nvPr/>
-        </p:nvSpPr>
-        <p:spPr>
-          <a:xfrm>
-            <a:off x="1874519" y="3863340"/>
+          <p:cNvPr id="21" name="TextBox 20"/>
+          <p:cNvSpPr txBox="1"/>
+          <p:nvPr/>
+        </p:nvSpPr>
+        <p:spPr>
+          <a:xfrm>
+            <a:off x="1874519" y="3543300"/>
             <a:ext cx="4084107" cy="457200"/>
           </a:xfrm>
           <a:prstGeom prst="rect">
@@ -13349,7 +11943,7 @@
       </p:sp>
       <p:pic>
         <p:nvPicPr>
-          <p:cNvPr id="23" name="Picture 22" descr="e5446a4e89f9a3af.png"/>
+          <p:cNvPr id="22" name="Picture 21" descr="e5446a4e89f9a3af.png"/>
           <p:cNvPicPr>
             <a:picLocks noChangeAspect="1"/>
           </p:cNvPicPr>
@@ -13363,7 +11957,7 @@
         </p:blipFill>
         <p:spPr>
           <a:xfrm>
-            <a:off x="5821467" y="3813048"/>
+            <a:off x="5821467" y="3493008"/>
             <a:ext cx="377952" cy="557784"/>
           </a:xfrm>
           <a:prstGeom prst="rect">
@@ -13373,7 +11967,7 @@
       </p:pic>
       <p:pic>
         <p:nvPicPr>
-          <p:cNvPr id="24" name="Picture 23" descr="84c4e18228051985.png"/>
+          <p:cNvPr id="23" name="Picture 22" descr="84c4e18228051985.png"/>
           <p:cNvPicPr>
             <a:picLocks noChangeAspect="1"/>
           </p:cNvPicPr>
@@ -13387,7 +11981,7 @@
         </p:blipFill>
         <p:spPr>
           <a:xfrm>
-            <a:off x="6748059" y="3813048"/>
+            <a:off x="6748059" y="3493008"/>
             <a:ext cx="377952" cy="557784"/>
           </a:xfrm>
           <a:prstGeom prst="rect">
@@ -13518,44 +12112,9 @@
           </a:fontRef>
         </p:style>
       </p:cxnSp>
-      <p:sp>
-        <p:nvSpPr>
-          <p:cNvPr id="5" name="TextBox 4"/>
-          <p:cNvSpPr txBox="1"/>
-          <p:nvPr/>
-        </p:nvSpPr>
-        <p:spPr>
-          <a:xfrm>
-            <a:off x="777240" y="1261872"/>
-            <a:ext cx="10607040" cy="310896"/>
-          </a:xfrm>
-          <a:prstGeom prst="rect">
-            <a:avLst/>
-          </a:prstGeom>
-          <a:noFill/>
-        </p:spPr>
-        <p:txBody>
-          <a:bodyPr wrap="square" lIns="45720" rIns="45720" tIns="18288" bIns="18288" anchor="t">
-            <a:spAutoFit/>
-          </a:bodyPr>
-          <a:lstStyle/>
-          <a:p>
-            <a:pPr algn="l"/>
-            <a:r>
-              <a:rPr sz="1700" b="0" i="1">
-                <a:solidFill>
-                  <a:srgbClr val="6B6B6B"/>
-                </a:solidFill>
-                <a:latin typeface="Century Schoolbook"/>
-              </a:rPr>
-              <a:t>Answer.</a:t>
-            </a:r>
-          </a:p>
-        </p:txBody>
-      </p:sp>
       <p:cxnSp>
         <p:nvCxnSpPr>
-          <p:cNvPr id="6" name="Connector 5"/>
+          <p:cNvPr id="5" name="Connector 4"/>
           <p:cNvCxnSpPr/>
           <p:nvPr/>
         </p:nvCxnSpPr>
@@ -13590,7 +12149,7 @@
       </p:cxnSp>
       <p:sp>
         <p:nvSpPr>
-          <p:cNvPr id="7" name="TextBox 6"/>
+          <p:cNvPr id="6" name="TextBox 5"/>
           <p:cNvSpPr txBox="1"/>
           <p:nvPr/>
         </p:nvSpPr>
@@ -13625,7 +12184,7 @@
       </p:sp>
       <p:sp>
         <p:nvSpPr>
-          <p:cNvPr id="8" name="TextBox 7"/>
+          <p:cNvPr id="7" name="TextBox 6"/>
           <p:cNvSpPr txBox="1"/>
           <p:nvPr/>
         </p:nvSpPr>
@@ -13660,7 +12219,7 @@
       </p:sp>
       <p:pic>
         <p:nvPicPr>
-          <p:cNvPr id="9" name="Picture 8" descr="7d2314fb4fc5114f.png"/>
+          <p:cNvPr id="8" name="Picture 7" descr="7d2314fb4fc5114f.png"/>
           <p:cNvPicPr>
             <a:picLocks noChangeAspect="1"/>
           </p:cNvPicPr>
@@ -13684,60 +12243,7 @@
       </p:pic>
       <p:sp>
         <p:nvSpPr>
-          <p:cNvPr id="10" name="TextBox 9"/>
-          <p:cNvSpPr txBox="1"/>
-          <p:nvPr/>
-        </p:nvSpPr>
-        <p:spPr>
-          <a:xfrm>
-            <a:off x="1828800" y="3236975"/>
-            <a:ext cx="8503920" cy="548640"/>
-          </a:xfrm>
-          <a:prstGeom prst="rect">
-            <a:avLst/>
-          </a:prstGeom>
-          <a:noFill/>
-        </p:spPr>
-        <p:txBody>
-          <a:bodyPr wrap="square" lIns="45720" rIns="45720" tIns="18288" bIns="18288" anchor="t">
-            <a:spAutoFit/>
-          </a:bodyPr>
-          <a:lstStyle/>
-          <a:p>
-            <a:pPr algn="ctr"/>
-            <a:r>
-              <a:rPr sz="2400" b="0" i="0">
-                <a:solidFill>
-                  <a:srgbClr val="6B6B6B"/>
-                </a:solidFill>
-                <a:latin typeface="Century Schoolbook"/>
-              </a:rPr>
-              <a:t>(2/3)</a:t>
-            </a:r>
-            <a:r>
-              <a:rPr sz="2400" b="0" i="0" baseline="30000">
-                <a:solidFill>
-                  <a:srgbClr val="6B6B6B"/>
-                </a:solidFill>
-                <a:latin typeface="Century Schoolbook"/>
-              </a:rPr>
-              <a:t>3</a:t>
-            </a:r>
-            <a:r>
-              <a:rPr sz="2400" b="0" i="0">
-                <a:solidFill>
-                  <a:srgbClr val="6B6B6B"/>
-                </a:solidFill>
-                <a:latin typeface="Century Schoolbook"/>
-              </a:rPr>
-              <a:t> inside, then power of a power</a:t>
-            </a:r>
-          </a:p>
-        </p:txBody>
-      </p:sp>
-      <p:sp>
-        <p:nvSpPr>
-          <p:cNvPr id="11" name="TextBox 10"/>
+          <p:cNvPr id="9" name="TextBox 8"/>
           <p:cNvSpPr txBox="1"/>
           <p:nvPr/>
         </p:nvSpPr>
@@ -13772,7 +12278,7 @@
       </p:sp>
       <p:pic>
         <p:nvPicPr>
-          <p:cNvPr id="12" name="Picture 11" descr="2e17728107926c07.png"/>
+          <p:cNvPr id="10" name="Picture 9" descr="2e17728107926c07.png"/>
           <p:cNvPicPr>
             <a:picLocks noChangeAspect="1"/>
           </p:cNvPicPr>
@@ -13917,44 +12423,9 @@
           </a:fontRef>
         </p:style>
       </p:cxnSp>
-      <p:sp>
-        <p:nvSpPr>
-          <p:cNvPr id="5" name="TextBox 4"/>
-          <p:cNvSpPr txBox="1"/>
-          <p:nvPr/>
-        </p:nvSpPr>
-        <p:spPr>
-          <a:xfrm>
-            <a:off x="777240" y="1261872"/>
-            <a:ext cx="10607040" cy="310896"/>
-          </a:xfrm>
-          <a:prstGeom prst="rect">
-            <a:avLst/>
-          </a:prstGeom>
-          <a:noFill/>
-        </p:spPr>
-        <p:txBody>
-          <a:bodyPr wrap="square" lIns="45720" rIns="45720" tIns="18288" bIns="18288" anchor="t">
-            <a:spAutoFit/>
-          </a:bodyPr>
-          <a:lstStyle/>
-          <a:p>
-            <a:pPr algn="l"/>
-            <a:r>
-              <a:rPr sz="1700" b="0" i="1">
-                <a:solidFill>
-                  <a:srgbClr val="6B6B6B"/>
-                </a:solidFill>
-                <a:latin typeface="Century Schoolbook"/>
-              </a:rPr>
-              <a:t>Take your time. Boards up when you have written it.</a:t>
-            </a:r>
-          </a:p>
-        </p:txBody>
-      </p:sp>
       <p:cxnSp>
         <p:nvCxnSpPr>
-          <p:cNvPr id="6" name="Connector 5"/>
+          <p:cNvPr id="5" name="Connector 4"/>
           <p:cNvCxnSpPr/>
           <p:nvPr/>
         </p:nvCxnSpPr>
@@ -13989,7 +12460,7 @@
       </p:cxnSp>
       <p:sp>
         <p:nvSpPr>
-          <p:cNvPr id="7" name="TextBox 6"/>
+          <p:cNvPr id="6" name="TextBox 5"/>
           <p:cNvSpPr txBox="1"/>
           <p:nvPr/>
         </p:nvSpPr>
@@ -14024,7 +12495,7 @@
       </p:sp>
       <p:sp>
         <p:nvSpPr>
-          <p:cNvPr id="8" name="TextBox 7"/>
+          <p:cNvPr id="7" name="TextBox 6"/>
           <p:cNvSpPr txBox="1"/>
           <p:nvPr/>
         </p:nvSpPr>
@@ -14059,7 +12530,7 @@
       </p:sp>
       <p:sp>
         <p:nvSpPr>
-          <p:cNvPr id="9" name="TextBox 8"/>
+          <p:cNvPr id="8" name="TextBox 7"/>
           <p:cNvSpPr txBox="1"/>
           <p:nvPr/>
         </p:nvSpPr>
@@ -14094,7 +12565,7 @@
       </p:sp>
       <p:pic>
         <p:nvPicPr>
-          <p:cNvPr id="10" name="Picture 9" descr="bcbcbf803cfe7ecd.png"/>
+          <p:cNvPr id="9" name="Picture 8" descr="bcbcbf803cfe7ecd.png"/>
           <p:cNvPicPr>
             <a:picLocks noChangeAspect="1"/>
           </p:cNvPicPr>
@@ -14118,7 +12589,7 @@
       </p:pic>
       <p:sp>
         <p:nvSpPr>
-          <p:cNvPr id="11" name="TextBox 10"/>
+          <p:cNvPr id="10" name="TextBox 9"/>
           <p:cNvSpPr txBox="1"/>
           <p:nvPr/>
         </p:nvSpPr>
@@ -14153,7 +12624,7 @@
       </p:sp>
       <p:pic>
         <p:nvPicPr>
-          <p:cNvPr id="12" name="Picture 11" descr="9b43b28c9551277e.png"/>
+          <p:cNvPr id="11" name="Picture 10" descr="9b43b28c9551277e.png"/>
           <p:cNvPicPr>
             <a:picLocks noChangeAspect="1"/>
           </p:cNvPicPr>
@@ -14177,7 +12648,7 @@
       </p:pic>
       <p:sp>
         <p:nvSpPr>
-          <p:cNvPr id="13" name="TextBox 12"/>
+          <p:cNvPr id="12" name="TextBox 11"/>
           <p:cNvSpPr txBox="1"/>
           <p:nvPr/>
         </p:nvSpPr>
@@ -14212,7 +12683,7 @@
       </p:sp>
       <p:sp>
         <p:nvSpPr>
-          <p:cNvPr id="14" name="TextBox 13"/>
+          <p:cNvPr id="13" name="TextBox 12"/>
           <p:cNvSpPr txBox="1"/>
           <p:nvPr/>
         </p:nvSpPr>
@@ -14241,41 +12712,6 @@
                 <a:latin typeface="Century Schoolbook"/>
               </a:rPr>
               <a:t>Write your answer in sentences.</a:t>
-            </a:r>
-          </a:p>
-        </p:txBody>
-      </p:sp>
-      <p:sp>
-        <p:nvSpPr>
-          <p:cNvPr id="15" name="TextBox 14"/>
-          <p:cNvSpPr txBox="1"/>
-          <p:nvPr/>
-        </p:nvSpPr>
-        <p:spPr>
-          <a:xfrm>
-            <a:off x="777240" y="4828032"/>
-            <a:ext cx="10607040" cy="365760"/>
-          </a:xfrm>
-          <a:prstGeom prst="rect">
-            <a:avLst/>
-          </a:prstGeom>
-          <a:noFill/>
-        </p:spPr>
-        <p:txBody>
-          <a:bodyPr wrap="square" lIns="45720" rIns="45720" tIns="18288" bIns="18288" anchor="t">
-            <a:spAutoFit/>
-          </a:bodyPr>
-          <a:lstStyle/>
-          <a:p>
-            <a:pPr algn="ctr"/>
-            <a:r>
-              <a:rPr sz="1900" b="0" i="1">
-                <a:solidFill>
-                  <a:srgbClr val="6B6B6B"/>
-                </a:solidFill>
-                <a:latin typeface="Century Schoolbook"/>
-              </a:rPr>
-              <a:t>Say what the negative exponent does, and what it does not do. Give the correct rewrite.</a:t>
             </a:r>
           </a:p>
         </p:txBody>
@@ -14403,44 +12839,9 @@
           </a:fontRef>
         </p:style>
       </p:cxnSp>
-      <p:sp>
-        <p:nvSpPr>
-          <p:cNvPr id="5" name="TextBox 4"/>
-          <p:cNvSpPr txBox="1"/>
-          <p:nvPr/>
-        </p:nvSpPr>
-        <p:spPr>
-          <a:xfrm>
-            <a:off x="777240" y="1261872"/>
-            <a:ext cx="10607040" cy="310896"/>
-          </a:xfrm>
-          <a:prstGeom prst="rect">
-            <a:avLst/>
-          </a:prstGeom>
-          <a:noFill/>
-        </p:spPr>
-        <p:txBody>
-          <a:bodyPr wrap="square" lIns="45720" rIns="45720" tIns="18288" bIns="18288" anchor="t">
-            <a:spAutoFit/>
-          </a:bodyPr>
-          <a:lstStyle/>
-          <a:p>
-            <a:pPr algn="l"/>
-            <a:r>
-              <a:rPr sz="1700" b="0" i="1">
-                <a:solidFill>
-                  <a:srgbClr val="6B6B6B"/>
-                </a:solidFill>
-                <a:latin typeface="Century Schoolbook"/>
-              </a:rPr>
-              <a:t>Answer.</a:t>
-            </a:r>
-          </a:p>
-        </p:txBody>
-      </p:sp>
       <p:cxnSp>
         <p:nvCxnSpPr>
-          <p:cNvPr id="6" name="Connector 5"/>
+          <p:cNvPr id="5" name="Connector 4"/>
           <p:cNvCxnSpPr/>
           <p:nvPr/>
         </p:nvCxnSpPr>
@@ -14475,7 +12876,7 @@
       </p:cxnSp>
       <p:sp>
         <p:nvSpPr>
-          <p:cNvPr id="7" name="TextBox 6"/>
+          <p:cNvPr id="6" name="TextBox 5"/>
           <p:cNvSpPr txBox="1"/>
           <p:nvPr/>
         </p:nvSpPr>
@@ -14510,7 +12911,7 @@
       </p:sp>
       <p:sp>
         <p:nvSpPr>
-          <p:cNvPr id="8" name="TextBox 7"/>
+          <p:cNvPr id="7" name="TextBox 6"/>
           <p:cNvSpPr txBox="1"/>
           <p:nvPr/>
         </p:nvSpPr>
@@ -14545,7 +12946,7 @@
       </p:sp>
       <p:sp>
         <p:nvSpPr>
-          <p:cNvPr id="9" name="TextBox 8"/>
+          <p:cNvPr id="8" name="TextBox 7"/>
           <p:cNvSpPr txBox="1"/>
           <p:nvPr/>
         </p:nvSpPr>
@@ -14580,7 +12981,7 @@
       </p:sp>
       <p:pic>
         <p:nvPicPr>
-          <p:cNvPr id="10" name="Picture 9" descr="61e0767165f6b191.png"/>
+          <p:cNvPr id="9" name="Picture 8" descr="61e0767165f6b191.png"/>
           <p:cNvPicPr>
             <a:picLocks noChangeAspect="1"/>
           </p:cNvPicPr>
@@ -14604,7 +13005,7 @@
       </p:pic>
       <p:sp>
         <p:nvSpPr>
-          <p:cNvPr id="11" name="TextBox 10"/>
+          <p:cNvPr id="10" name="TextBox 9"/>
           <p:cNvSpPr txBox="1"/>
           <p:nvPr/>
         </p:nvSpPr>
@@ -14639,7 +13040,7 @@
       </p:sp>
       <p:pic>
         <p:nvPicPr>
-          <p:cNvPr id="12" name="Picture 11" descr="5c0a9d4ef3b8e54c.png"/>
+          <p:cNvPr id="11" name="Picture 10" descr="5c0a9d4ef3b8e54c.png"/>
           <p:cNvPicPr>
             <a:picLocks noChangeAspect="1"/>
           </p:cNvPicPr>
@@ -14663,7 +13064,7 @@
       </p:pic>
       <p:sp>
         <p:nvSpPr>
-          <p:cNvPr id="13" name="TextBox 12"/>
+          <p:cNvPr id="12" name="TextBox 11"/>
           <p:cNvSpPr txBox="1"/>
           <p:nvPr/>
         </p:nvSpPr>
@@ -14698,42 +13099,7 @@
       </p:sp>
       <p:sp>
         <p:nvSpPr>
-          <p:cNvPr id="14" name="TextBox 13"/>
-          <p:cNvSpPr txBox="1"/>
-          <p:nvPr/>
-        </p:nvSpPr>
-        <p:spPr>
-          <a:xfrm>
-            <a:off x="1828800" y="3680791"/>
-            <a:ext cx="8503920" cy="548640"/>
-          </a:xfrm>
-          <a:prstGeom prst="rect">
-            <a:avLst/>
-          </a:prstGeom>
-          <a:noFill/>
-        </p:spPr>
-        <p:txBody>
-          <a:bodyPr wrap="square" lIns="45720" rIns="45720" tIns="18288" bIns="18288" anchor="t">
-            <a:spAutoFit/>
-          </a:bodyPr>
-          <a:lstStyle/>
-          <a:p>
-            <a:pPr algn="ctr"/>
-            <a:r>
-              <a:rPr sz="2400" b="0" i="0">
-                <a:solidFill>
-                  <a:srgbClr val="6B6B6B"/>
-                </a:solidFill>
-                <a:latin typeface="Century Schoolbook"/>
-              </a:rPr>
-              <a:t>the exponent flips the fraction; it never touches the sign</a:t>
-            </a:r>
-          </a:p>
-        </p:txBody>
-      </p:sp>
-      <p:sp>
-        <p:nvSpPr>
-          <p:cNvPr id="15" name="TextBox 14"/>
+          <p:cNvPr id="13" name="TextBox 12"/>
           <p:cNvSpPr txBox="1"/>
           <p:nvPr/>
         </p:nvSpPr>
@@ -14916,44 +13282,9 @@
           </a:fontRef>
         </p:style>
       </p:cxnSp>
-      <p:sp>
-        <p:nvSpPr>
-          <p:cNvPr id="5" name="TextBox 4"/>
-          <p:cNvSpPr txBox="1"/>
-          <p:nvPr/>
-        </p:nvSpPr>
-        <p:spPr>
-          <a:xfrm>
-            <a:off x="777240" y="1261872"/>
-            <a:ext cx="10607040" cy="310896"/>
-          </a:xfrm>
-          <a:prstGeom prst="rect">
-            <a:avLst/>
-          </a:prstGeom>
-          <a:noFill/>
-        </p:spPr>
-        <p:txBody>
-          <a:bodyPr wrap="square" lIns="45720" rIns="45720" tIns="18288" bIns="18288" anchor="t">
-            <a:spAutoFit/>
-          </a:bodyPr>
-          <a:lstStyle/>
-          <a:p>
-            <a:pPr algn="l"/>
-            <a:r>
-              <a:rPr sz="1700" b="0" i="1">
-                <a:solidFill>
-                  <a:srgbClr val="6B6B6B"/>
-                </a:solidFill>
-                <a:latin typeface="Century Schoolbook"/>
-              </a:rPr>
-              <a:t>Six questions. On your own, in silence.</a:t>
-            </a:r>
-          </a:p>
-        </p:txBody>
-      </p:sp>
       <p:cxnSp>
         <p:nvCxnSpPr>
-          <p:cNvPr id="6" name="Connector 5"/>
+          <p:cNvPr id="5" name="Connector 4"/>
           <p:cNvCxnSpPr/>
           <p:nvPr/>
         </p:nvCxnSpPr>
@@ -14988,7 +13319,7 @@
       </p:cxnSp>
       <p:sp>
         <p:nvSpPr>
-          <p:cNvPr id="7" name="TextBox 6"/>
+          <p:cNvPr id="6" name="TextBox 5"/>
           <p:cNvSpPr txBox="1"/>
           <p:nvPr/>
         </p:nvSpPr>
@@ -15023,7 +13354,7 @@
       </p:sp>
       <p:sp>
         <p:nvSpPr>
-          <p:cNvPr id="8" name="TextBox 7"/>
+          <p:cNvPr id="7" name="TextBox 6"/>
           <p:cNvSpPr txBox="1"/>
           <p:nvPr/>
         </p:nvSpPr>
@@ -15058,7 +13389,7 @@
       </p:sp>
       <p:sp>
         <p:nvSpPr>
-          <p:cNvPr id="9" name="TextBox 8"/>
+          <p:cNvPr id="8" name="TextBox 7"/>
           <p:cNvSpPr txBox="1"/>
           <p:nvPr/>
         </p:nvSpPr>
@@ -15093,7 +13424,7 @@
       </p:sp>
       <p:sp>
         <p:nvSpPr>
-          <p:cNvPr id="10" name="TextBox 9"/>
+          <p:cNvPr id="9" name="TextBox 8"/>
           <p:cNvSpPr txBox="1"/>
           <p:nvPr/>
         </p:nvSpPr>
@@ -15128,7 +13459,7 @@
       </p:sp>
       <p:sp>
         <p:nvSpPr>
-          <p:cNvPr id="11" name="TextBox 10"/>
+          <p:cNvPr id="10" name="TextBox 9"/>
           <p:cNvSpPr txBox="1"/>
           <p:nvPr/>
         </p:nvSpPr>
@@ -15163,7 +13494,7 @@
       </p:sp>
       <p:sp>
         <p:nvSpPr>
-          <p:cNvPr id="12" name="TextBox 11"/>
+          <p:cNvPr id="11" name="TextBox 10"/>
           <p:cNvSpPr txBox="1"/>
           <p:nvPr/>
         </p:nvSpPr>
@@ -15198,7 +13529,7 @@
       </p:sp>
       <p:sp>
         <p:nvSpPr>
-          <p:cNvPr id="13" name="TextBox 12"/>
+          <p:cNvPr id="12" name="TextBox 11"/>
           <p:cNvSpPr txBox="1"/>
           <p:nvPr/>
         </p:nvSpPr>
@@ -15233,7 +13564,7 @@
       </p:sp>
       <p:sp>
         <p:nvSpPr>
-          <p:cNvPr id="14" name="TextBox 13"/>
+          <p:cNvPr id="13" name="TextBox 12"/>
           <p:cNvSpPr txBox="1"/>
           <p:nvPr/>
         </p:nvSpPr>
@@ -15389,44 +13720,9 @@
           </a:fontRef>
         </p:style>
       </p:cxnSp>
-      <p:sp>
-        <p:nvSpPr>
-          <p:cNvPr id="5" name="TextBox 4"/>
-          <p:cNvSpPr txBox="1"/>
-          <p:nvPr/>
-        </p:nvSpPr>
-        <p:spPr>
-          <a:xfrm>
-            <a:off x="777240" y="1261872"/>
-            <a:ext cx="10607040" cy="310896"/>
-          </a:xfrm>
-          <a:prstGeom prst="rect">
-            <a:avLst/>
-          </a:prstGeom>
-          <a:noFill/>
-        </p:spPr>
-        <p:txBody>
-          <a:bodyPr wrap="square" lIns="45720" rIns="45720" tIns="18288" bIns="18288" anchor="t">
-            <a:spAutoFit/>
-          </a:bodyPr>
-          <a:lstStyle/>
-          <a:p>
-            <a:pPr algn="l"/>
-            <a:r>
-              <a:rPr sz="1700" b="0" i="1">
-                <a:solidFill>
-                  <a:srgbClr val="6B6B6B"/>
-                </a:solidFill>
-                <a:latin typeface="Century Schoolbook"/>
-              </a:rPr>
-              <a:t>Last five minutes.</a:t>
-            </a:r>
-          </a:p>
-        </p:txBody>
-      </p:sp>
       <p:cxnSp>
         <p:nvCxnSpPr>
-          <p:cNvPr id="6" name="Connector 5"/>
+          <p:cNvPr id="5" name="Connector 4"/>
           <p:cNvCxnSpPr/>
           <p:nvPr/>
         </p:nvCxnSpPr>
@@ -15461,7 +13757,7 @@
       </p:cxnSp>
       <p:sp>
         <p:nvSpPr>
-          <p:cNvPr id="7" name="TextBox 6"/>
+          <p:cNvPr id="6" name="TextBox 5"/>
           <p:cNvSpPr txBox="1"/>
           <p:nvPr/>
         </p:nvSpPr>
@@ -15496,7 +13792,7 @@
       </p:sp>
       <p:sp>
         <p:nvSpPr>
-          <p:cNvPr id="8" name="TextBox 7"/>
+          <p:cNvPr id="7" name="TextBox 6"/>
           <p:cNvSpPr txBox="1"/>
           <p:nvPr/>
         </p:nvSpPr>
@@ -15531,7 +13827,7 @@
       </p:sp>
       <p:sp>
         <p:nvSpPr>
-          <p:cNvPr id="9" name="TextBox 8"/>
+          <p:cNvPr id="8" name="TextBox 7"/>
           <p:cNvSpPr txBox="1"/>
           <p:nvPr/>
         </p:nvSpPr>
@@ -15566,7 +13862,7 @@
       </p:sp>
       <p:sp>
         <p:nvSpPr>
-          <p:cNvPr id="10" name="TextBox 9"/>
+          <p:cNvPr id="9" name="TextBox 8"/>
           <p:cNvSpPr txBox="1"/>
           <p:nvPr/>
         </p:nvSpPr>
@@ -15601,7 +13897,7 @@
       </p:sp>
       <p:sp>
         <p:nvSpPr>
-          <p:cNvPr id="11" name="TextBox 10"/>
+          <p:cNvPr id="10" name="TextBox 9"/>
           <p:cNvSpPr txBox="1"/>
           <p:nvPr/>
         </p:nvSpPr>
@@ -15636,7 +13932,7 @@
       </p:sp>
       <p:sp>
         <p:nvSpPr>
-          <p:cNvPr id="12" name="TextBox 11"/>
+          <p:cNvPr id="11" name="TextBox 10"/>
           <p:cNvSpPr txBox="1"/>
           <p:nvPr/>
         </p:nvSpPr>
@@ -15671,7 +13967,7 @@
       </p:sp>
       <p:sp>
         <p:nvSpPr>
-          <p:cNvPr id="13" name="TextBox 12"/>
+          <p:cNvPr id="12" name="TextBox 11"/>
           <p:cNvSpPr txBox="1"/>
           <p:nvPr/>
         </p:nvSpPr>
@@ -15706,7 +14002,7 @@
       </p:sp>
       <p:sp>
         <p:nvSpPr>
-          <p:cNvPr id="14" name="TextBox 13"/>
+          <p:cNvPr id="13" name="TextBox 12"/>
           <p:cNvSpPr txBox="1"/>
           <p:nvPr/>
         </p:nvSpPr>
@@ -15741,7 +14037,7 @@
       </p:sp>
       <p:sp>
         <p:nvSpPr>
-          <p:cNvPr id="15" name="TextBox 14"/>
+          <p:cNvPr id="14" name="TextBox 13"/>
           <p:cNvSpPr txBox="1"/>
           <p:nvPr/>
         </p:nvSpPr>
@@ -15776,7 +14072,7 @@
       </p:sp>
       <p:sp>
         <p:nvSpPr>
-          <p:cNvPr id="16" name="TextBox 15"/>
+          <p:cNvPr id="15" name="TextBox 14"/>
           <p:cNvSpPr txBox="1"/>
           <p:nvPr/>
         </p:nvSpPr>
@@ -15932,44 +14228,9 @@
           </a:fontRef>
         </p:style>
       </p:cxnSp>
-      <p:sp>
-        <p:nvSpPr>
-          <p:cNvPr id="5" name="TextBox 4"/>
-          <p:cNvSpPr txBox="1"/>
-          <p:nvPr/>
-        </p:nvSpPr>
-        <p:spPr>
-          <a:xfrm>
-            <a:off x="777240" y="1261872"/>
-            <a:ext cx="10607040" cy="310896"/>
-          </a:xfrm>
-          <a:prstGeom prst="rect">
-            <a:avLst/>
-          </a:prstGeom>
-          <a:noFill/>
-        </p:spPr>
-        <p:txBody>
-          <a:bodyPr wrap="square" lIns="45720" rIns="45720" tIns="18288" bIns="18288" anchor="t">
-            <a:spAutoFit/>
-          </a:bodyPr>
-          <a:lstStyle/>
-          <a:p>
-            <a:pPr algn="l"/>
-            <a:r>
-              <a:rPr sz="1700" b="0" i="1">
-                <a:solidFill>
-                  <a:srgbClr val="6B6B6B"/>
-                </a:solidFill>
-                <a:latin typeface="Century Schoolbook"/>
-              </a:rPr>
-              <a:t>Copy the table.</a:t>
-            </a:r>
-          </a:p>
-        </p:txBody>
-      </p:sp>
       <p:cxnSp>
         <p:nvCxnSpPr>
-          <p:cNvPr id="6" name="Connector 5"/>
+          <p:cNvPr id="5" name="Connector 4"/>
           <p:cNvCxnSpPr/>
           <p:nvPr/>
         </p:nvCxnSpPr>
@@ -16004,7 +14265,7 @@
       </p:cxnSp>
       <p:sp>
         <p:nvSpPr>
-          <p:cNvPr id="7" name="TextBox 6"/>
+          <p:cNvPr id="6" name="TextBox 5"/>
           <p:cNvSpPr txBox="1"/>
           <p:nvPr/>
         </p:nvSpPr>
@@ -16039,7 +14300,7 @@
       </p:sp>
       <p:sp>
         <p:nvSpPr>
-          <p:cNvPr id="8" name="TextBox 7"/>
+          <p:cNvPr id="7" name="TextBox 6"/>
           <p:cNvSpPr txBox="1"/>
           <p:nvPr/>
         </p:nvSpPr>
@@ -16074,13 +14335,13 @@
       </p:sp>
       <p:sp>
         <p:nvSpPr>
-          <p:cNvPr id="9" name="TextBox 8"/>
-          <p:cNvSpPr txBox="1"/>
-          <p:nvPr/>
-        </p:nvSpPr>
-        <p:spPr>
-          <a:xfrm>
-            <a:off x="777240" y="1737360"/>
+          <p:cNvPr id="8" name="TextBox 7"/>
+          <p:cNvSpPr txBox="1"/>
+          <p:nvPr/>
+        </p:nvSpPr>
+        <p:spPr>
+          <a:xfrm>
+            <a:off x="777240" y="1389888"/>
             <a:ext cx="10607040" cy="402336"/>
           </a:xfrm>
           <a:prstGeom prst="rect">
@@ -16109,13 +14370,13 @@
       </p:sp>
       <p:cxnSp>
         <p:nvCxnSpPr>
-          <p:cNvPr id="10" name="Connector 9"/>
+          <p:cNvPr id="9" name="Connector 8"/>
           <p:cNvCxnSpPr/>
           <p:nvPr/>
         </p:nvCxnSpPr>
         <p:spPr>
           <a:xfrm>
-            <a:off x="777240" y="2176272"/>
+            <a:off x="777240" y="1828800"/>
             <a:ext cx="10607040" cy="0"/>
           </a:xfrm>
           <a:prstGeom prst="line">
@@ -16144,14 +14405,14 @@
       </p:cxnSp>
       <p:graphicFrame>
         <p:nvGraphicFramePr>
-          <p:cNvPr id="11" name="Table 10"/>
+          <p:cNvPr id="10" name="Table 9"/>
           <p:cNvGraphicFramePr>
             <a:graphicFrameLocks noGrp="1"/>
           </p:cNvGraphicFramePr>
           <p:nvPr/>
         </p:nvGraphicFramePr>
         <p:xfrm>
-          <a:off x="2651760" y="2340864"/>
+          <a:off x="2651760" y="1993392"/>
           <a:ext cx="6858000" cy="2304288"/>
         </p:xfrm>
         <a:graphic>
@@ -17308,7 +15569,7 @@
         </p:nvSpPr>
         <p:spPr>
           <a:xfrm>
-            <a:off x="777240" y="1737360"/>
+            <a:off x="777240" y="1389888"/>
             <a:ext cx="10607040" cy="402336"/>
           </a:xfrm>
           <a:prstGeom prst="rect">
@@ -17343,7 +15604,7 @@
         </p:nvCxnSpPr>
         <p:spPr>
           <a:xfrm>
-            <a:off x="777240" y="2176272"/>
+            <a:off x="777240" y="1828800"/>
             <a:ext cx="10607040" cy="0"/>
           </a:xfrm>
           <a:prstGeom prst="line">
@@ -17386,7 +15647,7 @@
         </p:blipFill>
         <p:spPr>
           <a:xfrm>
-            <a:off x="3761785" y="2340864"/>
+            <a:off x="3761785" y="1993392"/>
             <a:ext cx="2133600" cy="691896"/>
           </a:xfrm>
           <a:prstGeom prst="rect">
@@ -17402,7 +15663,7 @@
         </p:nvSpPr>
         <p:spPr>
           <a:xfrm>
-            <a:off x="5895385" y="2458212"/>
+            <a:off x="5895385" y="2110740"/>
             <a:ext cx="1299682" cy="457200"/>
           </a:xfrm>
           <a:prstGeom prst="rect">
@@ -17445,7 +15706,7 @@
         </p:blipFill>
         <p:spPr>
           <a:xfrm>
-            <a:off x="7057907" y="2516124"/>
+            <a:off x="7057907" y="2168652"/>
             <a:ext cx="1152144" cy="341376"/>
           </a:xfrm>
           <a:prstGeom prst="rect">
@@ -17461,7 +15722,7 @@
         </p:nvSpPr>
         <p:spPr>
           <a:xfrm>
-            <a:off x="8210051" y="2458212"/>
+            <a:off x="8210051" y="2110740"/>
             <a:ext cx="326842" cy="457200"/>
           </a:xfrm>
           <a:prstGeom prst="rect">
@@ -17504,7 +15765,7 @@
         </p:blipFill>
         <p:spPr>
           <a:xfrm>
-            <a:off x="2625588" y="3307080"/>
+            <a:off x="2625588" y="2959608"/>
             <a:ext cx="3075432" cy="697992"/>
           </a:xfrm>
           <a:prstGeom prst="rect">
@@ -17520,7 +15781,7 @@
         </p:nvSpPr>
         <p:spPr>
           <a:xfrm>
-            <a:off x="5701020" y="3427476"/>
+            <a:off x="5701020" y="3080004"/>
             <a:ext cx="1183151" cy="457200"/>
           </a:xfrm>
           <a:prstGeom prst="rect">
@@ -17563,7 +15824,7 @@
         </p:blipFill>
         <p:spPr>
           <a:xfrm>
-            <a:off x="6747011" y="3311652"/>
+            <a:off x="6747011" y="2964180"/>
             <a:ext cx="2788920" cy="688848"/>
           </a:xfrm>
           <a:prstGeom prst="rect">
@@ -17579,7 +15840,7 @@
         </p:nvSpPr>
         <p:spPr>
           <a:xfrm>
-            <a:off x="987552" y="4343400"/>
+            <a:off x="987552" y="3995928"/>
             <a:ext cx="10131551" cy="475488"/>
           </a:xfrm>
           <a:prstGeom prst="rect">
@@ -17614,7 +15875,7 @@
         </p:nvSpPr>
         <p:spPr>
           <a:xfrm>
-            <a:off x="987552" y="5166359"/>
+            <a:off x="987552" y="4818888"/>
             <a:ext cx="5545365" cy="457200"/>
           </a:xfrm>
           <a:prstGeom prst="rect">
@@ -17657,7 +15918,7 @@
         </p:blipFill>
         <p:spPr>
           <a:xfrm>
-            <a:off x="6395757" y="5056631"/>
+            <a:off x="6395757" y="4709159"/>
             <a:ext cx="3230880" cy="676656"/>
           </a:xfrm>
           <a:prstGeom prst="rect">
@@ -17901,7 +16162,7 @@
         </p:nvSpPr>
         <p:spPr>
           <a:xfrm>
-            <a:off x="777240" y="1737360"/>
+            <a:off x="777240" y="1389888"/>
             <a:ext cx="10607040" cy="402336"/>
           </a:xfrm>
           <a:prstGeom prst="rect">
@@ -17936,7 +16197,7 @@
         </p:nvCxnSpPr>
         <p:spPr>
           <a:xfrm>
-            <a:off x="777240" y="2176272"/>
+            <a:off x="777240" y="1828800"/>
             <a:ext cx="10607040" cy="0"/>
           </a:xfrm>
           <a:prstGeom prst="line">
@@ -17979,7 +16240,7 @@
         </p:blipFill>
         <p:spPr>
           <a:xfrm>
-            <a:off x="2074163" y="2340864"/>
+            <a:off x="2074163" y="1993392"/>
             <a:ext cx="8013192" cy="816864"/>
           </a:xfrm>
           <a:prstGeom prst="rect">
@@ -17995,7 +16256,7 @@
         </p:nvSpPr>
         <p:spPr>
           <a:xfrm>
-            <a:off x="987552" y="3496055"/>
+            <a:off x="987552" y="3148583"/>
             <a:ext cx="10131551" cy="475488"/>
           </a:xfrm>
           <a:prstGeom prst="rect">
@@ -18145,44 +16406,9 @@
           </a:fontRef>
         </p:style>
       </p:cxnSp>
-      <p:sp>
-        <p:nvSpPr>
-          <p:cNvPr id="5" name="TextBox 4"/>
-          <p:cNvSpPr txBox="1"/>
-          <p:nvPr/>
-        </p:nvSpPr>
-        <p:spPr>
-          <a:xfrm>
-            <a:off x="777240" y="1261872"/>
-            <a:ext cx="10607040" cy="310896"/>
-          </a:xfrm>
-          <a:prstGeom prst="rect">
-            <a:avLst/>
-          </a:prstGeom>
-          <a:noFill/>
-        </p:spPr>
-        <p:txBody>
-          <a:bodyPr wrap="square" lIns="45720" rIns="45720" tIns="18288" bIns="18288" anchor="t">
-            <a:spAutoFit/>
-          </a:bodyPr>
-          <a:lstStyle/>
-          <a:p>
-            <a:pPr algn="l"/>
-            <a:r>
-              <a:rPr sz="1700" b="0" i="1">
-                <a:solidFill>
-                  <a:srgbClr val="6B6B6B"/>
-                </a:solidFill>
-                <a:latin typeface="Century Schoolbook"/>
-              </a:rPr>
-              <a:t>Flip, then evaluate.</a:t>
-            </a:r>
-          </a:p>
-        </p:txBody>
-      </p:sp>
       <p:cxnSp>
         <p:nvCxnSpPr>
-          <p:cNvPr id="6" name="Connector 5"/>
+          <p:cNvPr id="5" name="Connector 4"/>
           <p:cNvCxnSpPr/>
           <p:nvPr/>
         </p:nvCxnSpPr>
@@ -18217,7 +16443,7 @@
       </p:cxnSp>
       <p:sp>
         <p:nvSpPr>
-          <p:cNvPr id="7" name="TextBox 6"/>
+          <p:cNvPr id="6" name="TextBox 5"/>
           <p:cNvSpPr txBox="1"/>
           <p:nvPr/>
         </p:nvSpPr>
@@ -18252,7 +16478,7 @@
       </p:sp>
       <p:sp>
         <p:nvSpPr>
-          <p:cNvPr id="8" name="TextBox 7"/>
+          <p:cNvPr id="7" name="TextBox 6"/>
           <p:cNvSpPr txBox="1"/>
           <p:nvPr/>
         </p:nvSpPr>
@@ -18287,7 +16513,7 @@
       </p:sp>
       <p:pic>
         <p:nvPicPr>
-          <p:cNvPr id="9" name="Picture 8" descr="9ed1bed15013a3f1.png"/>
+          <p:cNvPr id="8" name="Picture 7" descr="9ed1bed15013a3f1.png"/>
           <p:cNvPicPr>
             <a:picLocks noChangeAspect="1"/>
           </p:cNvPicPr>
@@ -18311,7 +16537,7 @@
       </p:pic>
       <p:sp>
         <p:nvSpPr>
-          <p:cNvPr id="10" name="TextBox 9"/>
+          <p:cNvPr id="9" name="TextBox 8"/>
           <p:cNvSpPr txBox="1"/>
           <p:nvPr/>
         </p:nvSpPr>
@@ -18467,44 +16693,9 @@
           </a:fontRef>
         </p:style>
       </p:cxnSp>
-      <p:sp>
-        <p:nvSpPr>
-          <p:cNvPr id="5" name="TextBox 4"/>
-          <p:cNvSpPr txBox="1"/>
-          <p:nvPr/>
-        </p:nvSpPr>
-        <p:spPr>
-          <a:xfrm>
-            <a:off x="777240" y="1261872"/>
-            <a:ext cx="10607040" cy="310896"/>
-          </a:xfrm>
-          <a:prstGeom prst="rect">
-            <a:avLst/>
-          </a:prstGeom>
-          <a:noFill/>
-        </p:spPr>
-        <p:txBody>
-          <a:bodyPr wrap="square" lIns="45720" rIns="45720" tIns="18288" bIns="18288" anchor="t">
-            <a:spAutoFit/>
-          </a:bodyPr>
-          <a:lstStyle/>
-          <a:p>
-            <a:pPr algn="l"/>
-            <a:r>
-              <a:rPr sz="1700" b="0" i="1">
-                <a:solidFill>
-                  <a:srgbClr val="6B6B6B"/>
-                </a:solidFill>
-                <a:latin typeface="Century Schoolbook"/>
-              </a:rPr>
-              <a:t>Worked.</a:t>
-            </a:r>
-          </a:p>
-        </p:txBody>
-      </p:sp>
       <p:cxnSp>
         <p:nvCxnSpPr>
-          <p:cNvPr id="6" name="Connector 5"/>
+          <p:cNvPr id="5" name="Connector 4"/>
           <p:cNvCxnSpPr/>
           <p:nvPr/>
         </p:nvCxnSpPr>
@@ -18539,7 +16730,7 @@
       </p:cxnSp>
       <p:sp>
         <p:nvSpPr>
-          <p:cNvPr id="7" name="TextBox 6"/>
+          <p:cNvPr id="6" name="TextBox 5"/>
           <p:cNvSpPr txBox="1"/>
           <p:nvPr/>
         </p:nvSpPr>
@@ -18574,7 +16765,7 @@
       </p:sp>
       <p:sp>
         <p:nvSpPr>
-          <p:cNvPr id="8" name="TextBox 7"/>
+          <p:cNvPr id="7" name="TextBox 6"/>
           <p:cNvSpPr txBox="1"/>
           <p:nvPr/>
         </p:nvSpPr>
@@ -18609,7 +16800,7 @@
       </p:sp>
       <p:pic>
         <p:nvPicPr>
-          <p:cNvPr id="9" name="Picture 8" descr="8e941bf8846b5513.png"/>
+          <p:cNvPr id="8" name="Picture 7" descr="8e941bf8846b5513.png"/>
           <p:cNvPicPr>
             <a:picLocks noChangeAspect="1"/>
           </p:cNvPicPr>
@@ -18631,44 +16822,9 @@
           </a:prstGeom>
         </p:spPr>
       </p:pic>
-      <p:sp>
-        <p:nvSpPr>
-          <p:cNvPr id="10" name="TextBox 9"/>
-          <p:cNvSpPr txBox="1"/>
-          <p:nvPr/>
-        </p:nvSpPr>
-        <p:spPr>
-          <a:xfrm>
-            <a:off x="5084064" y="2037588"/>
-            <a:ext cx="6300215" cy="502920"/>
-          </a:xfrm>
-          <a:prstGeom prst="rect">
-            <a:avLst/>
-          </a:prstGeom>
-          <a:noFill/>
-        </p:spPr>
-        <p:txBody>
-          <a:bodyPr wrap="square" lIns="45720" rIns="45720" tIns="18288" bIns="18288" anchor="ctr">
-            <a:spAutoFit/>
-          </a:bodyPr>
-          <a:lstStyle/>
-          <a:p>
-            <a:pPr algn="l"/>
-            <a:r>
-              <a:rPr sz="2100" b="0" i="1">
-                <a:solidFill>
-                  <a:srgbClr val="6B6B6B"/>
-                </a:solidFill>
-                <a:latin typeface="Century Schoolbook"/>
-              </a:rPr>
-              <a:t>flip the base; the sign stays</a:t>
-            </a:r>
-          </a:p>
-        </p:txBody>
-      </p:sp>
       <p:pic>
         <p:nvPicPr>
-          <p:cNvPr id="11" name="Picture 10" descr="b75e3c313a78d69c.png"/>
+          <p:cNvPr id="9" name="Picture 8" descr="b75e3c313a78d69c.png"/>
           <p:cNvPicPr>
             <a:picLocks noChangeAspect="1"/>
           </p:cNvPicPr>
@@ -18692,42 +16848,7 @@
       </p:pic>
       <p:sp>
         <p:nvSpPr>
-          <p:cNvPr id="12" name="TextBox 11"/>
-          <p:cNvSpPr txBox="1"/>
-          <p:nvPr/>
-        </p:nvSpPr>
-        <p:spPr>
-          <a:xfrm>
-            <a:off x="4175760" y="3006852"/>
-            <a:ext cx="6400800" cy="502920"/>
-          </a:xfrm>
-          <a:prstGeom prst="rect">
-            <a:avLst/>
-          </a:prstGeom>
-          <a:noFill/>
-        </p:spPr>
-        <p:txBody>
-          <a:bodyPr wrap="square" lIns="45720" rIns="45720" tIns="18288" bIns="18288" anchor="ctr">
-            <a:spAutoFit/>
-          </a:bodyPr>
-          <a:lstStyle/>
-          <a:p>
-            <a:pPr algn="l"/>
-            <a:r>
-              <a:rPr sz="2100" b="0" i="1">
-                <a:solidFill>
-                  <a:srgbClr val="6B6B6B"/>
-                </a:solidFill>
-                <a:latin typeface="Century Schoolbook"/>
-              </a:rPr>
-              <a:t>even power: positive</a:t>
-            </a:r>
-          </a:p>
-        </p:txBody>
-      </p:sp>
-      <p:sp>
-        <p:nvSpPr>
-          <p:cNvPr id="13" name="TextBox 12"/>
+          <p:cNvPr id="10" name="TextBox 9"/>
           <p:cNvSpPr txBox="1"/>
           <p:nvPr/>
         </p:nvSpPr>
@@ -18883,44 +17004,9 @@
           </a:fontRef>
         </p:style>
       </p:cxnSp>
-      <p:sp>
-        <p:nvSpPr>
-          <p:cNvPr id="5" name="TextBox 4"/>
-          <p:cNvSpPr txBox="1"/>
-          <p:nvPr/>
-        </p:nvSpPr>
-        <p:spPr>
-          <a:xfrm>
-            <a:off x="777240" y="1261872"/>
-            <a:ext cx="10607040" cy="310896"/>
-          </a:xfrm>
-          <a:prstGeom prst="rect">
-            <a:avLst/>
-          </a:prstGeom>
-          <a:noFill/>
-        </p:spPr>
-        <p:txBody>
-          <a:bodyPr wrap="square" lIns="45720" rIns="45720" tIns="18288" bIns="18288" anchor="t">
-            <a:spAutoFit/>
-          </a:bodyPr>
-          <a:lstStyle/>
-          <a:p>
-            <a:pPr algn="l"/>
-            <a:r>
-              <a:rPr sz="1700" b="0" i="1">
-                <a:solidFill>
-                  <a:srgbClr val="6B6B6B"/>
-                </a:solidFill>
-                <a:latin typeface="Century Schoolbook"/>
-              </a:rPr>
-              <a:t>Same steps, your numbers. Boards up when done.</a:t>
-            </a:r>
-          </a:p>
-        </p:txBody>
-      </p:sp>
       <p:cxnSp>
         <p:nvCxnSpPr>
-          <p:cNvPr id="6" name="Connector 5"/>
+          <p:cNvPr id="5" name="Connector 4"/>
           <p:cNvCxnSpPr/>
           <p:nvPr/>
         </p:nvCxnSpPr>
@@ -18955,7 +17041,7 @@
       </p:cxnSp>
       <p:sp>
         <p:nvSpPr>
-          <p:cNvPr id="7" name="TextBox 6"/>
+          <p:cNvPr id="6" name="TextBox 5"/>
           <p:cNvSpPr txBox="1"/>
           <p:nvPr/>
         </p:nvSpPr>
@@ -18990,7 +17076,7 @@
       </p:sp>
       <p:sp>
         <p:nvSpPr>
-          <p:cNvPr id="8" name="TextBox 7"/>
+          <p:cNvPr id="7" name="TextBox 6"/>
           <p:cNvSpPr txBox="1"/>
           <p:nvPr/>
         </p:nvSpPr>
@@ -19025,7 +17111,7 @@
       </p:sp>
       <p:pic>
         <p:nvPicPr>
-          <p:cNvPr id="9" name="Picture 8" descr="a7f1f688f77ec613.png"/>
+          <p:cNvPr id="8" name="Picture 7" descr="a7f1f688f77ec613.png"/>
           <p:cNvPicPr>
             <a:picLocks noChangeAspect="1"/>
           </p:cNvPicPr>
@@ -19047,6 +17133,41 @@
           </a:prstGeom>
         </p:spPr>
       </p:pic>
+      <p:sp>
+        <p:nvSpPr>
+          <p:cNvPr id="9" name="TextBox 8"/>
+          <p:cNvSpPr txBox="1"/>
+          <p:nvPr/>
+        </p:nvSpPr>
+        <p:spPr>
+          <a:xfrm>
+            <a:off x="777240" y="3560064"/>
+            <a:ext cx="10607040" cy="429370"/>
+          </a:xfrm>
+          <a:prstGeom prst="rect">
+            <a:avLst/>
+          </a:prstGeom>
+          <a:noFill/>
+        </p:spPr>
+        <p:txBody>
+          <a:bodyPr wrap="square" lIns="45720" rIns="45720" tIns="18288" bIns="18288" anchor="t">
+            <a:spAutoFit/>
+          </a:bodyPr>
+          <a:lstStyle/>
+          <a:p>
+            <a:pPr algn="ctr"/>
+            <a:r>
+              <a:rPr sz="2400" b="1" i="0">
+                <a:solidFill>
+                  <a:srgbClr val="1A1A1A"/>
+                </a:solidFill>
+                <a:latin typeface="Century Schoolbook"/>
+              </a:rPr>
+              <a:t>Rewrite with a positive exponent, then find the value.</a:t>
+            </a:r>
+          </a:p>
+        </p:txBody>
+      </p:sp>
     </p:spTree>
   </p:cSld>
   <p:clrMapOvr>

--- a/a7/packages/A7 Unit 3 - Exponents and Scientific Notation/Lessons/3.05/A7 3.05 Applying Exponent Laws - Slides.pptx
+++ b/a7/packages/A7 Unit 3 - Exponents and Scientific Notation/Lessons/3.05/A7 3.05 Applying Exponent Laws - Slides.pptx
@@ -13395,23 +13395,23 @@
         </p:nvSpPr>
         <p:spPr>
           <a:xfrm>
-            <a:off x="960120" y="2011680"/>
-            <a:ext cx="548640" cy="356616"/>
-          </a:xfrm>
-          <a:prstGeom prst="rect">
-            <a:avLst/>
-          </a:prstGeom>
-          <a:noFill/>
-        </p:spPr>
-        <p:txBody>
-          <a:bodyPr wrap="square" lIns="45720" rIns="45720" tIns="18288" bIns="18288" anchor="t">
+            <a:off x="960120" y="1568195"/>
+            <a:ext cx="548640" cy="457200"/>
+          </a:xfrm>
+          <a:prstGeom prst="rect">
+            <a:avLst/>
+          </a:prstGeom>
+          <a:noFill/>
+        </p:spPr>
+        <p:txBody>
+          <a:bodyPr wrap="square" lIns="45720" rIns="45720" tIns="18288" bIns="18288" anchor="ctr">
             <a:spAutoFit/>
           </a:bodyPr>
           <a:lstStyle/>
           <a:p>
             <a:pPr algn="l"/>
             <a:r>
-              <a:rPr sz="2100" b="1" i="0">
+              <a:rPr sz="2300" b="1" i="0">
                 <a:solidFill>
                   <a:srgbClr val="0B5394"/>
                 </a:solidFill>
@@ -13430,173 +13430,586 @@
         </p:nvSpPr>
         <p:spPr>
           <a:xfrm>
-            <a:off x="1554480" y="2011680"/>
-            <a:ext cx="9829800" cy="411480"/>
-          </a:xfrm>
-          <a:prstGeom prst="rect">
-            <a:avLst/>
-          </a:prstGeom>
-          <a:noFill/>
-        </p:spPr>
-        <p:txBody>
-          <a:bodyPr wrap="square" lIns="45720" rIns="45720" tIns="18288" bIns="18288" anchor="t">
+            <a:off x="1554480" y="1568195"/>
+            <a:ext cx="5166904" cy="457200"/>
+          </a:xfrm>
+          <a:prstGeom prst="rect">
+            <a:avLst/>
+          </a:prstGeom>
+          <a:noFill/>
+        </p:spPr>
+        <p:txBody>
+          <a:bodyPr wrap="none" lIns="45720" rIns="45720" tIns="18288" bIns="18288" anchor="ctr">
+            <a:noAutofit/>
+          </a:bodyPr>
+          <a:lstStyle/>
+          <a:p>
+            <a:pPr algn="l"/>
+            <a:r>
+              <a:rPr sz="2300" b="0" i="0">
+                <a:solidFill>
+                  <a:srgbClr val="1A1A1A"/>
+                </a:solidFill>
+                <a:latin typeface="Century Schoolbook"/>
+              </a:rPr>
+              <a:t>Rewrite with a positive exponent.  </a:t>
+            </a:r>
+          </a:p>
+        </p:txBody>
+      </p:sp>
+      <p:pic>
+        <p:nvPicPr>
+          <p:cNvPr id="10" name="Picture 9" descr="b9b133d5c474e0a9.png"/>
+          <p:cNvPicPr>
+            <a:picLocks noChangeAspect="1"/>
+          </p:cNvPicPr>
+          <p:nvPr/>
+        </p:nvPicPr>
+        <p:blipFill>
+          <a:blip r:embed="rId2"/>
+          <a:stretch>
+            <a:fillRect/>
+          </a:stretch>
+        </p:blipFill>
+        <p:spPr>
+          <a:xfrm>
+            <a:off x="6584224" y="1517904"/>
+            <a:ext cx="798576" cy="557784"/>
+          </a:xfrm>
+          <a:prstGeom prst="rect">
+            <a:avLst/>
+          </a:prstGeom>
+        </p:spPr>
+      </p:pic>
+      <p:sp>
+        <p:nvSpPr>
+          <p:cNvPr id="11" name="TextBox 10"/>
+          <p:cNvSpPr txBox="1"/>
+          <p:nvPr/>
+        </p:nvSpPr>
+        <p:spPr>
+          <a:xfrm>
+            <a:off x="960120" y="2310383"/>
+            <a:ext cx="548640" cy="457200"/>
+          </a:xfrm>
+          <a:prstGeom prst="rect">
+            <a:avLst/>
+          </a:prstGeom>
+          <a:noFill/>
+        </p:spPr>
+        <p:txBody>
+          <a:bodyPr wrap="square" lIns="45720" rIns="45720" tIns="18288" bIns="18288" anchor="ctr">
             <a:spAutoFit/>
           </a:bodyPr>
           <a:lstStyle/>
           <a:p>
             <a:pPr algn="l"/>
             <a:r>
-              <a:rPr sz="2100" b="0" i="0">
+              <a:rPr sz="2300" b="1" i="0">
+                <a:solidFill>
+                  <a:srgbClr val="0B5394"/>
+                </a:solidFill>
+                <a:latin typeface="Century Schoolbook"/>
+              </a:rPr>
+              <a:t>2.</a:t>
+            </a:r>
+          </a:p>
+        </p:txBody>
+      </p:sp>
+      <p:sp>
+        <p:nvSpPr>
+          <p:cNvPr id="12" name="TextBox 11"/>
+          <p:cNvSpPr txBox="1"/>
+          <p:nvPr/>
+        </p:nvSpPr>
+        <p:spPr>
+          <a:xfrm>
+            <a:off x="1554480" y="2310383"/>
+            <a:ext cx="2548440" cy="457200"/>
+          </a:xfrm>
+          <a:prstGeom prst="rect">
+            <a:avLst/>
+          </a:prstGeom>
+          <a:noFill/>
+        </p:spPr>
+        <p:txBody>
+          <a:bodyPr wrap="none" lIns="45720" rIns="45720" tIns="18288" bIns="18288" anchor="ctr">
+            <a:noAutofit/>
+          </a:bodyPr>
+          <a:lstStyle/>
+          <a:p>
+            <a:pPr algn="l"/>
+            <a:r>
+              <a:rPr sz="2300" b="0" i="0">
                 <a:solidFill>
                   <a:srgbClr val="1A1A1A"/>
                 </a:solidFill>
                 <a:latin typeface="Century Schoolbook"/>
               </a:rPr>
-              <a:t>Six questions. Work down the page.</a:t>
-            </a:r>
-          </a:p>
-        </p:txBody>
-      </p:sp>
-      <p:sp>
-        <p:nvSpPr>
-          <p:cNvPr id="10" name="TextBox 9"/>
-          <p:cNvSpPr txBox="1"/>
-          <p:nvPr/>
-        </p:nvSpPr>
-        <p:spPr>
-          <a:xfrm>
-            <a:off x="960120" y="2551176"/>
-            <a:ext cx="548640" cy="356616"/>
-          </a:xfrm>
-          <a:prstGeom prst="rect">
-            <a:avLst/>
-          </a:prstGeom>
-          <a:noFill/>
-        </p:spPr>
-        <p:txBody>
-          <a:bodyPr wrap="square" lIns="45720" rIns="45720" tIns="18288" bIns="18288" anchor="t">
+              <a:t>Find the value.  </a:t>
+            </a:r>
+          </a:p>
+        </p:txBody>
+      </p:sp>
+      <p:pic>
+        <p:nvPicPr>
+          <p:cNvPr id="13" name="Picture 12" descr="3fba44314d6758c9.png"/>
+          <p:cNvPicPr>
+            <a:picLocks noChangeAspect="1"/>
+          </p:cNvPicPr>
+          <p:nvPr/>
+        </p:nvPicPr>
+        <p:blipFill>
+          <a:blip r:embed="rId3"/>
+          <a:stretch>
+            <a:fillRect/>
+          </a:stretch>
+        </p:blipFill>
+        <p:spPr>
+          <a:xfrm>
+            <a:off x="3965760" y="2258568"/>
+            <a:ext cx="801624" cy="560832"/>
+          </a:xfrm>
+          <a:prstGeom prst="rect">
+            <a:avLst/>
+          </a:prstGeom>
+        </p:spPr>
+      </p:pic>
+      <p:sp>
+        <p:nvSpPr>
+          <p:cNvPr id="14" name="TextBox 13"/>
+          <p:cNvSpPr txBox="1"/>
+          <p:nvPr/>
+        </p:nvSpPr>
+        <p:spPr>
+          <a:xfrm>
+            <a:off x="960120" y="3060192"/>
+            <a:ext cx="548640" cy="457200"/>
+          </a:xfrm>
+          <a:prstGeom prst="rect">
+            <a:avLst/>
+          </a:prstGeom>
+          <a:noFill/>
+        </p:spPr>
+        <p:txBody>
+          <a:bodyPr wrap="square" lIns="45720" rIns="45720" tIns="18288" bIns="18288" anchor="ctr">
             <a:spAutoFit/>
           </a:bodyPr>
           <a:lstStyle/>
           <a:p>
             <a:pPr algn="l"/>
             <a:r>
-              <a:rPr sz="2100" b="1" i="0">
+              <a:rPr sz="2300" b="1" i="0">
                 <a:solidFill>
                   <a:srgbClr val="0B5394"/>
                 </a:solidFill>
                 <a:latin typeface="Century Schoolbook"/>
               </a:rPr>
-              <a:t>2.</a:t>
-            </a:r>
-          </a:p>
-        </p:txBody>
-      </p:sp>
-      <p:sp>
-        <p:nvSpPr>
-          <p:cNvPr id="11" name="TextBox 10"/>
-          <p:cNvSpPr txBox="1"/>
-          <p:nvPr/>
-        </p:nvSpPr>
-        <p:spPr>
-          <a:xfrm>
-            <a:off x="1554480" y="2551176"/>
-            <a:ext cx="9829800" cy="411480"/>
-          </a:xfrm>
-          <a:prstGeom prst="rect">
-            <a:avLst/>
-          </a:prstGeom>
-          <a:noFill/>
-        </p:spPr>
-        <p:txBody>
-          <a:bodyPr wrap="square" lIns="45720" rIns="45720" tIns="18288" bIns="18288" anchor="t">
+              <a:t>3.</a:t>
+            </a:r>
+          </a:p>
+        </p:txBody>
+      </p:sp>
+      <p:sp>
+        <p:nvSpPr>
+          <p:cNvPr id="15" name="TextBox 14"/>
+          <p:cNvSpPr txBox="1"/>
+          <p:nvPr/>
+        </p:nvSpPr>
+        <p:spPr>
+          <a:xfrm>
+            <a:off x="1554480" y="3060192"/>
+            <a:ext cx="5166904" cy="457200"/>
+          </a:xfrm>
+          <a:prstGeom prst="rect">
+            <a:avLst/>
+          </a:prstGeom>
+          <a:noFill/>
+        </p:spPr>
+        <p:txBody>
+          <a:bodyPr wrap="none" lIns="45720" rIns="45720" tIns="18288" bIns="18288" anchor="ctr">
+            <a:noAutofit/>
+          </a:bodyPr>
+          <a:lstStyle/>
+          <a:p>
+            <a:pPr algn="l"/>
+            <a:r>
+              <a:rPr sz="2300" b="0" i="0">
+                <a:solidFill>
+                  <a:srgbClr val="1A1A1A"/>
+                </a:solidFill>
+                <a:latin typeface="Century Schoolbook"/>
+              </a:rPr>
+              <a:t>Rewrite with a positive exponent.  </a:t>
+            </a:r>
+          </a:p>
+        </p:txBody>
+      </p:sp>
+      <p:pic>
+        <p:nvPicPr>
+          <p:cNvPr id="16" name="Picture 15" descr="1d4029ad0054a1d3.png"/>
+          <p:cNvPicPr>
+            <a:picLocks noChangeAspect="1"/>
+          </p:cNvPicPr>
+          <p:nvPr/>
+        </p:nvPicPr>
+        <p:blipFill>
+          <a:blip r:embed="rId4"/>
+          <a:stretch>
+            <a:fillRect/>
+          </a:stretch>
+        </p:blipFill>
+        <p:spPr>
+          <a:xfrm>
+            <a:off x="6584224" y="3002280"/>
+            <a:ext cx="1021080" cy="573024"/>
+          </a:xfrm>
+          <a:prstGeom prst="rect">
+            <a:avLst/>
+          </a:prstGeom>
+        </p:spPr>
+      </p:pic>
+      <p:sp>
+        <p:nvSpPr>
+          <p:cNvPr id="17" name="TextBox 16"/>
+          <p:cNvSpPr txBox="1"/>
+          <p:nvPr/>
+        </p:nvSpPr>
+        <p:spPr>
+          <a:xfrm>
+            <a:off x="960120" y="3803903"/>
+            <a:ext cx="548640" cy="457200"/>
+          </a:xfrm>
+          <a:prstGeom prst="rect">
+            <a:avLst/>
+          </a:prstGeom>
+          <a:noFill/>
+        </p:spPr>
+        <p:txBody>
+          <a:bodyPr wrap="square" lIns="45720" rIns="45720" tIns="18288" bIns="18288" anchor="ctr">
             <a:spAutoFit/>
           </a:bodyPr>
           <a:lstStyle/>
           <a:p>
             <a:pPr algn="l"/>
             <a:r>
-              <a:rPr sz="2100" b="0" i="0">
+              <a:rPr sz="2300" b="1" i="0">
+                <a:solidFill>
+                  <a:srgbClr val="0B5394"/>
+                </a:solidFill>
+                <a:latin typeface="Century Schoolbook"/>
+              </a:rPr>
+              <a:t>4.</a:t>
+            </a:r>
+          </a:p>
+        </p:txBody>
+      </p:sp>
+      <p:sp>
+        <p:nvSpPr>
+          <p:cNvPr id="18" name="TextBox 17"/>
+          <p:cNvSpPr txBox="1"/>
+          <p:nvPr/>
+        </p:nvSpPr>
+        <p:spPr>
+          <a:xfrm>
+            <a:off x="1554480" y="3803903"/>
+            <a:ext cx="2548440" cy="457200"/>
+          </a:xfrm>
+          <a:prstGeom prst="rect">
+            <a:avLst/>
+          </a:prstGeom>
+          <a:noFill/>
+        </p:spPr>
+        <p:txBody>
+          <a:bodyPr wrap="none" lIns="45720" rIns="45720" tIns="18288" bIns="18288" anchor="ctr">
+            <a:noAutofit/>
+          </a:bodyPr>
+          <a:lstStyle/>
+          <a:p>
+            <a:pPr algn="l"/>
+            <a:r>
+              <a:rPr sz="2300" b="0" i="0">
                 <a:solidFill>
                   <a:srgbClr val="1A1A1A"/>
                 </a:solidFill>
                 <a:latin typeface="Century Schoolbook"/>
               </a:rPr>
-              <a:t>Show the step that does the work, not just the answer.</a:t>
-            </a:r>
-          </a:p>
-        </p:txBody>
-      </p:sp>
-      <p:sp>
-        <p:nvSpPr>
-          <p:cNvPr id="12" name="TextBox 11"/>
-          <p:cNvSpPr txBox="1"/>
-          <p:nvPr/>
-        </p:nvSpPr>
-        <p:spPr>
-          <a:xfrm>
-            <a:off x="960120" y="3090672"/>
-            <a:ext cx="548640" cy="356616"/>
-          </a:xfrm>
-          <a:prstGeom prst="rect">
-            <a:avLst/>
-          </a:prstGeom>
-          <a:noFill/>
-        </p:spPr>
-        <p:txBody>
-          <a:bodyPr wrap="square" lIns="45720" rIns="45720" tIns="18288" bIns="18288" anchor="t">
+              <a:t>Find the value.  </a:t>
+            </a:r>
+          </a:p>
+        </p:txBody>
+      </p:sp>
+      <p:pic>
+        <p:nvPicPr>
+          <p:cNvPr id="19" name="Picture 18" descr="8b0a8d1200928482.png"/>
+          <p:cNvPicPr>
+            <a:picLocks noChangeAspect="1"/>
+          </p:cNvPicPr>
+          <p:nvPr/>
+        </p:nvPicPr>
+        <p:blipFill>
+          <a:blip r:embed="rId5"/>
+          <a:stretch>
+            <a:fillRect/>
+          </a:stretch>
+        </p:blipFill>
+        <p:spPr>
+          <a:xfrm>
+            <a:off x="3965760" y="3758183"/>
+            <a:ext cx="795528" cy="548640"/>
+          </a:xfrm>
+          <a:prstGeom prst="rect">
+            <a:avLst/>
+          </a:prstGeom>
+        </p:spPr>
+      </p:pic>
+      <p:sp>
+        <p:nvSpPr>
+          <p:cNvPr id="20" name="TextBox 19"/>
+          <p:cNvSpPr txBox="1"/>
+          <p:nvPr/>
+        </p:nvSpPr>
+        <p:spPr>
+          <a:xfrm>
+            <a:off x="960120" y="4538472"/>
+            <a:ext cx="548640" cy="457200"/>
+          </a:xfrm>
+          <a:prstGeom prst="rect">
+            <a:avLst/>
+          </a:prstGeom>
+          <a:noFill/>
+        </p:spPr>
+        <p:txBody>
+          <a:bodyPr wrap="square" lIns="45720" rIns="45720" tIns="18288" bIns="18288" anchor="ctr">
             <a:spAutoFit/>
           </a:bodyPr>
           <a:lstStyle/>
           <a:p>
             <a:pPr algn="l"/>
             <a:r>
-              <a:rPr sz="2100" b="1" i="0">
+              <a:rPr sz="2300" b="1" i="0">
                 <a:solidFill>
                   <a:srgbClr val="0B5394"/>
                 </a:solidFill>
                 <a:latin typeface="Century Schoolbook"/>
               </a:rPr>
-              <a:t>3.</a:t>
-            </a:r>
-          </a:p>
-        </p:txBody>
-      </p:sp>
-      <p:sp>
-        <p:nvSpPr>
-          <p:cNvPr id="13" name="TextBox 12"/>
-          <p:cNvSpPr txBox="1"/>
-          <p:nvPr/>
-        </p:nvSpPr>
-        <p:spPr>
-          <a:xfrm>
-            <a:off x="1554480" y="3090672"/>
-            <a:ext cx="9829800" cy="411480"/>
-          </a:xfrm>
-          <a:prstGeom prst="rect">
-            <a:avLst/>
-          </a:prstGeom>
-          <a:noFill/>
-        </p:spPr>
-        <p:txBody>
-          <a:bodyPr wrap="square" lIns="45720" rIns="45720" tIns="18288" bIns="18288" anchor="t">
+              <a:t>5.</a:t>
+            </a:r>
+          </a:p>
+        </p:txBody>
+      </p:sp>
+      <p:sp>
+        <p:nvSpPr>
+          <p:cNvPr id="21" name="TextBox 20"/>
+          <p:cNvSpPr txBox="1"/>
+          <p:nvPr/>
+        </p:nvSpPr>
+        <p:spPr>
+          <a:xfrm>
+            <a:off x="1554480" y="4538472"/>
+            <a:ext cx="2548440" cy="457200"/>
+          </a:xfrm>
+          <a:prstGeom prst="rect">
+            <a:avLst/>
+          </a:prstGeom>
+          <a:noFill/>
+        </p:spPr>
+        <p:txBody>
+          <a:bodyPr wrap="none" lIns="45720" rIns="45720" tIns="18288" bIns="18288" anchor="ctr">
+            <a:noAutofit/>
+          </a:bodyPr>
+          <a:lstStyle/>
+          <a:p>
+            <a:pPr algn="l"/>
+            <a:r>
+              <a:rPr sz="2300" b="0" i="0">
+                <a:solidFill>
+                  <a:srgbClr val="1A1A1A"/>
+                </a:solidFill>
+                <a:latin typeface="Century Schoolbook"/>
+              </a:rPr>
+              <a:t>Find the value.  </a:t>
+            </a:r>
+          </a:p>
+        </p:txBody>
+      </p:sp>
+      <p:pic>
+        <p:nvPicPr>
+          <p:cNvPr id="22" name="Picture 21" descr="be7b6b1f4326d3a3.png"/>
+          <p:cNvPicPr>
+            <a:picLocks noChangeAspect="1"/>
+          </p:cNvPicPr>
+          <p:nvPr/>
+        </p:nvPicPr>
+        <p:blipFill>
+          <a:blip r:embed="rId6"/>
+          <a:stretch>
+            <a:fillRect/>
+          </a:stretch>
+        </p:blipFill>
+        <p:spPr>
+          <a:xfrm>
+            <a:off x="3965760" y="4489703"/>
+            <a:ext cx="1676400" cy="554736"/>
+          </a:xfrm>
+          <a:prstGeom prst="rect">
+            <a:avLst/>
+          </a:prstGeom>
+        </p:spPr>
+      </p:pic>
+      <p:sp>
+        <p:nvSpPr>
+          <p:cNvPr id="23" name="TextBox 22"/>
+          <p:cNvSpPr txBox="1"/>
+          <p:nvPr/>
+        </p:nvSpPr>
+        <p:spPr>
+          <a:xfrm>
+            <a:off x="960120" y="5274563"/>
+            <a:ext cx="548640" cy="457200"/>
+          </a:xfrm>
+          <a:prstGeom prst="rect">
+            <a:avLst/>
+          </a:prstGeom>
+          <a:noFill/>
+        </p:spPr>
+        <p:txBody>
+          <a:bodyPr wrap="square" lIns="45720" rIns="45720" tIns="18288" bIns="18288" anchor="ctr">
             <a:spAutoFit/>
           </a:bodyPr>
           <a:lstStyle/>
           <a:p>
             <a:pPr algn="l"/>
             <a:r>
-              <a:rPr sz="2100" b="0" i="0">
+              <a:rPr sz="2300" b="1" i="0">
+                <a:solidFill>
+                  <a:srgbClr val="0B5394"/>
+                </a:solidFill>
+                <a:latin typeface="Century Schoolbook"/>
+              </a:rPr>
+              <a:t>6.</a:t>
+            </a:r>
+          </a:p>
+        </p:txBody>
+      </p:sp>
+      <p:sp>
+        <p:nvSpPr>
+          <p:cNvPr id="24" name="TextBox 23"/>
+          <p:cNvSpPr txBox="1"/>
+          <p:nvPr/>
+        </p:nvSpPr>
+        <p:spPr>
+          <a:xfrm>
+            <a:off x="1554480" y="5274563"/>
+            <a:ext cx="2720291" cy="457200"/>
+          </a:xfrm>
+          <a:prstGeom prst="rect">
+            <a:avLst/>
+          </a:prstGeom>
+          <a:noFill/>
+        </p:spPr>
+        <p:txBody>
+          <a:bodyPr wrap="none" lIns="45720" rIns="45720" tIns="18288" bIns="18288" anchor="ctr">
+            <a:noAutofit/>
+          </a:bodyPr>
+          <a:lstStyle/>
+          <a:p>
+            <a:pPr algn="l"/>
+            <a:r>
+              <a:rPr sz="2300" b="0" i="0">
                 <a:solidFill>
                   <a:srgbClr val="1A1A1A"/>
                 </a:solidFill>
                 <a:latin typeface="Century Schoolbook"/>
               </a:rPr>
-              <a:t>Silence until the six minutes are up.</a:t>
-            </a:r>
-          </a:p>
-        </p:txBody>
-      </p:sp>
+              <a:t>Find the value of </a:t>
+            </a:r>
+          </a:p>
+        </p:txBody>
+      </p:sp>
+      <p:pic>
+        <p:nvPicPr>
+          <p:cNvPr id="25" name="Picture 24" descr="0afe177f69dd5e06.png"/>
+          <p:cNvPicPr>
+            <a:picLocks noChangeAspect="1"/>
+          </p:cNvPicPr>
+          <p:nvPr/>
+        </p:nvPicPr>
+        <p:blipFill>
+          <a:blip r:embed="rId7"/>
+          <a:stretch>
+            <a:fillRect/>
+          </a:stretch>
+        </p:blipFill>
+        <p:spPr>
+          <a:xfrm>
+            <a:off x="4137611" y="5428487"/>
+            <a:ext cx="155448" cy="149352"/>
+          </a:xfrm>
+          <a:prstGeom prst="rect">
+            <a:avLst/>
+          </a:prstGeom>
+        </p:spPr>
+      </p:pic>
+      <p:sp>
+        <p:nvSpPr>
+          <p:cNvPr id="26" name="TextBox 25"/>
+          <p:cNvSpPr txBox="1"/>
+          <p:nvPr/>
+        </p:nvSpPr>
+        <p:spPr>
+          <a:xfrm>
+            <a:off x="4293059" y="5274563"/>
+            <a:ext cx="468561" cy="457200"/>
+          </a:xfrm>
+          <a:prstGeom prst="rect">
+            <a:avLst/>
+          </a:prstGeom>
+          <a:noFill/>
+        </p:spPr>
+        <p:txBody>
+          <a:bodyPr wrap="none" lIns="45720" rIns="45720" tIns="18288" bIns="18288" anchor="ctr">
+            <a:noAutofit/>
+          </a:bodyPr>
+          <a:lstStyle/>
+          <a:p>
+            <a:pPr algn="l"/>
+            <a:r>
+              <a:rPr sz="2300" b="0" i="0">
+                <a:solidFill>
+                  <a:srgbClr val="1A1A1A"/>
+                </a:solidFill>
+                <a:latin typeface="Century Schoolbook"/>
+              </a:rPr>
+              <a:t>.  </a:t>
+            </a:r>
+          </a:p>
+        </p:txBody>
+      </p:sp>
+      <p:pic>
+        <p:nvPicPr>
+          <p:cNvPr id="27" name="Picture 26" descr="1915fd5a07894488.png"/>
+          <p:cNvPicPr>
+            <a:picLocks noChangeAspect="1"/>
+          </p:cNvPicPr>
+          <p:nvPr/>
+        </p:nvPicPr>
+        <p:blipFill>
+          <a:blip r:embed="rId8"/>
+          <a:stretch>
+            <a:fillRect/>
+          </a:stretch>
+        </p:blipFill>
+        <p:spPr>
+          <a:xfrm>
+            <a:off x="4624460" y="5227319"/>
+            <a:ext cx="1645920" cy="551688"/>
+          </a:xfrm>
+          <a:prstGeom prst="rect">
+            <a:avLst/>
+          </a:prstGeom>
+        </p:spPr>
+      </p:pic>
     </p:spTree>
   </p:cSld>
   <p:clrMapOvr>

--- a/a7/packages/A7 Unit 3 - Exponents and Scientific Notation/Lessons/3.05/A7 3.05 Applying Exponent Laws - Slides.pptx
+++ b/a7/packages/A7 Unit 3 - Exponents and Scientific Notation/Lessons/3.05/A7 3.05 Applying Exponent Laws - Slides.pptx
@@ -3145,11 +3145,11 @@
           <a:p>
             <a:pPr algn="ctr"/>
             <a:r>
-              <a:rPr sz="1500" b="0" i="0">
+              <a:rPr sz="1420" b="0" i="0">
                 <a:solidFill>
                   <a:srgbClr val="6B6B6B"/>
                 </a:solidFill>
-                <a:latin typeface="Century Schoolbook"/>
+                <a:latin typeface="Lexend"/>
               </a:rPr>
               <a:t>GRADE 7 ACCELERATED  ·  UNIT 3  ·  LESSON 5</a:t>
             </a:r>
@@ -3180,11 +3180,11 @@
           <a:p>
             <a:pPr algn="ctr"/>
             <a:r>
-              <a:rPr sz="3400" b="1" i="0">
+              <a:rPr sz="3229" b="1" i="0">
                 <a:solidFill>
                   <a:srgbClr val="1A1A1A"/>
                 </a:solidFill>
-                <a:latin typeface="Century Schoolbook"/>
+                <a:latin typeface="Lexend"/>
               </a:rPr>
               <a:t>Applying Exponent Laws</a:t>
             </a:r>
@@ -3285,11 +3285,11 @@
           <a:p>
             <a:pPr algn="ctr"/>
             <a:r>
-              <a:rPr sz="1600" b="1" i="0">
+              <a:rPr sz="1520" b="1" i="0">
                 <a:solidFill>
                   <a:srgbClr val="1A1A1A"/>
                 </a:solidFill>
-                <a:latin typeface="Century Schoolbook"/>
+                <a:latin typeface="Lexend"/>
               </a:rPr>
               <a:t>MA.8.NSO.1.3</a:t>
             </a:r>
@@ -3320,11 +3320,11 @@
           <a:p>
             <a:pPr algn="ctr"/>
             <a:r>
-              <a:rPr sz="1900" b="0" i="1">
+              <a:rPr sz="1810" b="0" i="0">
                 <a:solidFill>
                   <a:srgbClr val="1A1A1A"/>
                 </a:solidFill>
-                <a:latin typeface="Century Schoolbook"/>
+                <a:latin typeface="Lexend"/>
               </a:rPr>
               <a:t>I can rewrite a rational base with a negative exponent using a positive exponent, and apply several laws to generate an equivalent expression.</a:t>
             </a:r>
@@ -3390,11 +3390,11 @@
           <a:p>
             <a:pPr algn="l"/>
             <a:r>
-              <a:rPr sz="1100" b="0" i="1">
+              <a:rPr sz="1040" b="0" i="0">
                 <a:solidFill>
                   <a:srgbClr val="6B6B6B"/>
                 </a:solidFill>
-                <a:latin typeface="Century Schoolbook"/>
+                <a:latin typeface="Lexend"/>
               </a:rPr>
               <a:t>Grade 7 Accelerated · Unit 3 · Lesson 5 — Applying Exponent Laws</a:t>
             </a:r>
@@ -3425,11 +3425,11 @@
           <a:p>
             <a:pPr algn="r"/>
             <a:r>
-              <a:rPr sz="1100" b="0" i="0">
+              <a:rPr sz="1040" b="0" i="0">
                 <a:solidFill>
                   <a:srgbClr val="6B6B6B"/>
                 </a:solidFill>
-                <a:latin typeface="Century Schoolbook"/>
+                <a:latin typeface="Lexend"/>
               </a:rPr>
               <a:t>1</a:t>
             </a:r>
@@ -3478,11 +3478,11 @@
           <a:p>
             <a:pPr algn="l"/>
             <a:r>
-              <a:rPr sz="3600" b="1" i="0">
+              <a:rPr sz="3420" b="1" i="0">
                 <a:solidFill>
                   <a:srgbClr val="1A1A1A"/>
                 </a:solidFill>
-                <a:latin typeface="Century Schoolbook"/>
+                <a:latin typeface="Lexend"/>
               </a:rPr>
               <a:t>Your Turn</a:t>
             </a:r>
@@ -3618,11 +3618,11 @@
           <a:p>
             <a:pPr algn="l"/>
             <a:r>
-              <a:rPr sz="1100" b="0" i="1">
+              <a:rPr sz="1040" b="0" i="0">
                 <a:solidFill>
                   <a:srgbClr val="6B6B6B"/>
                 </a:solidFill>
-                <a:latin typeface="Century Schoolbook"/>
+                <a:latin typeface="Lexend"/>
               </a:rPr>
               <a:t>Grade 7 Accelerated · Unit 3 · Lesson 5 — Applying Exponent Laws</a:t>
             </a:r>
@@ -3653,11 +3653,11 @@
           <a:p>
             <a:pPr algn="r"/>
             <a:r>
-              <a:rPr sz="1100" b="0" i="0">
+              <a:rPr sz="1040" b="0" i="0">
                 <a:solidFill>
                   <a:srgbClr val="6B6B6B"/>
                 </a:solidFill>
-                <a:latin typeface="Century Schoolbook"/>
+                <a:latin typeface="Lexend"/>
               </a:rPr>
               <a:t>10</a:t>
             </a:r>
@@ -3666,7 +3666,7 @@
       </p:sp>
       <p:pic>
         <p:nvPicPr>
-          <p:cNvPr id="8" name="Picture 7" descr="055ea4267017cf05.png"/>
+          <p:cNvPr id="8" name="Picture 7" descr="8d211e9c6d2b33d7.png"/>
           <p:cNvPicPr>
             <a:picLocks noChangeAspect="1"/>
           </p:cNvPicPr>
@@ -3680,8 +3680,8 @@
         </p:blipFill>
         <p:spPr>
           <a:xfrm>
-            <a:off x="5297424" y="2194560"/>
-            <a:ext cx="1566672" cy="862584"/>
+            <a:off x="5350764" y="1600200"/>
+            <a:ext cx="1459992" cy="835152"/>
           </a:xfrm>
           <a:prstGeom prst="rect">
             <a:avLst/>
@@ -3696,7 +3696,7 @@
         </p:nvSpPr>
         <p:spPr>
           <a:xfrm>
-            <a:off x="777240" y="3560064"/>
+            <a:off x="777240" y="2938272"/>
             <a:ext cx="10607040" cy="429370"/>
           </a:xfrm>
           <a:prstGeom prst="rect">
@@ -3712,11 +3712,11 @@
           <a:p>
             <a:pPr algn="ctr"/>
             <a:r>
-              <a:rPr sz="2400" b="1" i="0">
+              <a:rPr sz="2280" b="1" i="0">
                 <a:solidFill>
                   <a:srgbClr val="1A1A1A"/>
                 </a:solidFill>
-                <a:latin typeface="Century Schoolbook"/>
+                <a:latin typeface="Lexend"/>
               </a:rPr>
               <a:t>Rewrite with a positive exponent, then find the value.</a:t>
             </a:r>
@@ -3731,36 +3731,36 @@
         </p:nvSpPr>
         <p:spPr>
           <a:xfrm>
-            <a:off x="4578095" y="4642104"/>
-            <a:ext cx="1920240" cy="548640"/>
-          </a:xfrm>
-          <a:prstGeom prst="rect">
-            <a:avLst/>
-          </a:prstGeom>
-          <a:noFill/>
-        </p:spPr>
-        <p:txBody>
-          <a:bodyPr wrap="square" lIns="45720" rIns="45720" tIns="18288" bIns="18288" anchor="ctr">
-            <a:spAutoFit/>
+            <a:off x="3287326" y="3629770"/>
+            <a:ext cx="3358779" cy="457200"/>
+          </a:xfrm>
+          <a:prstGeom prst="rect">
+            <a:avLst/>
+          </a:prstGeom>
+          <a:noFill/>
+        </p:spPr>
+        <p:txBody>
+          <a:bodyPr wrap="none" lIns="45720" rIns="45720" tIns="18288" bIns="18288" anchor="ctr">
+            <a:noAutofit/>
           </a:bodyPr>
           <a:lstStyle/>
           <a:p>
             <a:pPr algn="l"/>
             <a:r>
-              <a:rPr sz="3200" b="1" i="0">
-                <a:solidFill>
-                  <a:srgbClr val="9E1B32"/>
-                </a:solidFill>
-                <a:latin typeface="Century Schoolbook"/>
-              </a:rPr>
-              <a:t>Answer:</a:t>
+              <a:rPr sz="2750" b="0" i="0">
+                <a:solidFill>
+                  <a:srgbClr val="1A1A1A"/>
+                </a:solidFill>
+                <a:latin typeface="Lexend"/>
+              </a:rPr>
+              <a:t>Flip the fraction:  </a:t>
             </a:r>
           </a:p>
         </p:txBody>
       </p:sp>
       <p:pic>
         <p:nvPicPr>
-          <p:cNvPr id="11" name="Picture 10" descr="cacffea294d43135.png"/>
+          <p:cNvPr id="11" name="Picture 10" descr="196afe9826da4a0e.png"/>
           <p:cNvPicPr>
             <a:picLocks noChangeAspect="1"/>
           </p:cNvPicPr>
@@ -3774,8 +3774,91 @@
         </p:blipFill>
         <p:spPr>
           <a:xfrm>
-            <a:off x="6498335" y="4480560"/>
-            <a:ext cx="1085088" cy="871728"/>
+            <a:off x="6508945" y="3550522"/>
+            <a:ext cx="2368296" cy="615696"/>
+          </a:xfrm>
+          <a:prstGeom prst="rect">
+            <a:avLst/>
+          </a:prstGeom>
+        </p:spPr>
+      </p:pic>
+      <p:pic>
+        <p:nvPicPr>
+          <p:cNvPr id="12" name="Picture 11" descr="31d33b28236bfbfe.png"/>
+          <p:cNvPicPr>
+            <a:picLocks noChangeAspect="1"/>
+          </p:cNvPicPr>
+          <p:nvPr/>
+        </p:nvPicPr>
+        <p:blipFill>
+          <a:blip r:embed="rId4"/>
+          <a:stretch>
+            <a:fillRect/>
+          </a:stretch>
+        </p:blipFill>
+        <p:spPr>
+          <a:xfrm>
+            <a:off x="3342190" y="4294234"/>
+            <a:ext cx="2029968" cy="615696"/>
+          </a:xfrm>
+          <a:prstGeom prst="rect">
+            <a:avLst/>
+          </a:prstGeom>
+        </p:spPr>
+      </p:pic>
+      <p:sp>
+        <p:nvSpPr>
+          <p:cNvPr id="13" name="TextBox 12"/>
+          <p:cNvSpPr txBox="1"/>
+          <p:nvPr/>
+        </p:nvSpPr>
+        <p:spPr>
+          <a:xfrm>
+            <a:off x="4599431" y="5191870"/>
+            <a:ext cx="1920240" cy="548640"/>
+          </a:xfrm>
+          <a:prstGeom prst="rect">
+            <a:avLst/>
+          </a:prstGeom>
+          <a:noFill/>
+        </p:spPr>
+        <p:txBody>
+          <a:bodyPr wrap="square" lIns="45720" rIns="45720" tIns="18288" bIns="18288" anchor="ctr">
+            <a:spAutoFit/>
+          </a:bodyPr>
+          <a:lstStyle/>
+          <a:p>
+            <a:pPr algn="l"/>
+            <a:r>
+              <a:rPr sz="3040" b="1" i="0">
+                <a:solidFill>
+                  <a:srgbClr val="9E1B32"/>
+                </a:solidFill>
+                <a:latin typeface="Lexend"/>
+              </a:rPr>
+              <a:t>Answer:</a:t>
+            </a:r>
+          </a:p>
+        </p:txBody>
+      </p:sp>
+      <p:pic>
+        <p:nvPicPr>
+          <p:cNvPr id="14" name="Picture 13" descr="314171b6a1b287cc.png"/>
+          <p:cNvPicPr>
+            <a:picLocks noChangeAspect="1"/>
+          </p:cNvPicPr>
+          <p:nvPr/>
+        </p:nvPicPr>
+        <p:blipFill>
+          <a:blip r:embed="rId5"/>
+          <a:stretch>
+            <a:fillRect/>
+          </a:stretch>
+        </p:blipFill>
+        <p:spPr>
+          <a:xfrm>
+            <a:off x="6519671" y="5047090"/>
+            <a:ext cx="1042415" cy="838200"/>
           </a:xfrm>
           <a:prstGeom prst="rect">
             <a:avLst/>
@@ -3824,11 +3907,11 @@
           <a:p>
             <a:pPr algn="l"/>
             <a:r>
-              <a:rPr sz="3600" b="1" i="0">
+              <a:rPr sz="3420" b="1" i="0">
                 <a:solidFill>
                   <a:srgbClr val="1A1A1A"/>
                 </a:solidFill>
-                <a:latin typeface="Century Schoolbook"/>
+                <a:latin typeface="Lexend"/>
               </a:rPr>
               <a:t>Example 2</a:t>
             </a:r>
@@ -3964,11 +4047,11 @@
           <a:p>
             <a:pPr algn="l"/>
             <a:r>
-              <a:rPr sz="1100" b="0" i="1">
+              <a:rPr sz="1040" b="0" i="0">
                 <a:solidFill>
                   <a:srgbClr val="6B6B6B"/>
                 </a:solidFill>
-                <a:latin typeface="Century Schoolbook"/>
+                <a:latin typeface="Lexend"/>
               </a:rPr>
               <a:t>Grade 7 Accelerated · Unit 3 · Lesson 5 — Applying Exponent Laws</a:t>
             </a:r>
@@ -3999,11 +4082,11 @@
           <a:p>
             <a:pPr algn="r"/>
             <a:r>
-              <a:rPr sz="1100" b="0" i="0">
+              <a:rPr sz="1040" b="0" i="0">
                 <a:solidFill>
                   <a:srgbClr val="6B6B6B"/>
                 </a:solidFill>
-                <a:latin typeface="Century Schoolbook"/>
+                <a:latin typeface="Lexend"/>
               </a:rPr>
               <a:t>11</a:t>
             </a:r>
@@ -4012,7 +4095,7 @@
       </p:sp>
       <p:pic>
         <p:nvPicPr>
-          <p:cNvPr id="8" name="Picture 7" descr="b8ecac4debf08671.png"/>
+          <p:cNvPr id="8" name="Picture 7" descr="17b9fb3163beebb1.png"/>
           <p:cNvPicPr>
             <a:picLocks noChangeAspect="1"/>
           </p:cNvPicPr>
@@ -4026,8 +4109,8 @@
         </p:blipFill>
         <p:spPr>
           <a:xfrm>
-            <a:off x="5036820" y="2103120"/>
-            <a:ext cx="2087880" cy="691896"/>
+            <a:off x="5045963" y="2103120"/>
+            <a:ext cx="2069591" cy="664464"/>
           </a:xfrm>
           <a:prstGeom prst="rect">
             <a:avLst/>
@@ -4042,7 +4125,7 @@
         </p:nvSpPr>
         <p:spPr>
           <a:xfrm>
-            <a:off x="777240" y="3297936"/>
+            <a:off x="777240" y="3270504"/>
             <a:ext cx="10607040" cy="858740"/>
           </a:xfrm>
           <a:prstGeom prst="rect">
@@ -4058,11 +4141,11 @@
           <a:p>
             <a:pPr algn="ctr"/>
             <a:r>
-              <a:rPr sz="2400" b="1" i="0">
+              <a:rPr sz="2280" b="1" i="0">
                 <a:solidFill>
                   <a:srgbClr val="1A1A1A"/>
                 </a:solidFill>
-                <a:latin typeface="Century Schoolbook"/>
+                <a:latin typeface="Lexend"/>
               </a:rPr>
               <a:t>Write an equivalent expression with one base and a positive exponent.</a:t>
             </a:r>
@@ -4111,11 +4194,11 @@
           <a:p>
             <a:pPr algn="l"/>
             <a:r>
-              <a:rPr sz="3600" b="1" i="0">
+              <a:rPr sz="3420" b="1" i="0">
                 <a:solidFill>
                   <a:srgbClr val="1A1A1A"/>
                 </a:solidFill>
-                <a:latin typeface="Century Schoolbook"/>
+                <a:latin typeface="Lexend"/>
               </a:rPr>
               <a:t>Example 2</a:t>
             </a:r>
@@ -4251,11 +4334,11 @@
           <a:p>
             <a:pPr algn="l"/>
             <a:r>
-              <a:rPr sz="1100" b="0" i="1">
+              <a:rPr sz="1040" b="0" i="0">
                 <a:solidFill>
                   <a:srgbClr val="6B6B6B"/>
                 </a:solidFill>
-                <a:latin typeface="Century Schoolbook"/>
+                <a:latin typeface="Lexend"/>
               </a:rPr>
               <a:t>Grade 7 Accelerated · Unit 3 · Lesson 5 — Applying Exponent Laws</a:t>
             </a:r>
@@ -4286,11 +4369,11 @@
           <a:p>
             <a:pPr algn="r"/>
             <a:r>
-              <a:rPr sz="1100" b="0" i="0">
+              <a:rPr sz="1040" b="0" i="0">
                 <a:solidFill>
                   <a:srgbClr val="6B6B6B"/>
                 </a:solidFill>
-                <a:latin typeface="Century Schoolbook"/>
+                <a:latin typeface="Lexend"/>
               </a:rPr>
               <a:t>12</a:t>
             </a:r>
@@ -4299,7 +4382,7 @@
       </p:sp>
       <p:pic>
         <p:nvPicPr>
-          <p:cNvPr id="8" name="Picture 7" descr="10be869d41e0dd57.png"/>
+          <p:cNvPr id="8" name="Picture 7" descr="415161a3488c782b.png"/>
           <p:cNvPicPr>
             <a:picLocks noChangeAspect="1"/>
           </p:cNvPicPr>
@@ -4314,7 +4397,7 @@
         <p:spPr>
           <a:xfrm>
             <a:off x="1828800" y="1920240"/>
-            <a:ext cx="5239512" cy="694944"/>
+            <a:ext cx="5111496" cy="667512"/>
           </a:xfrm>
           <a:prstGeom prst="rect">
             <a:avLst/>
@@ -4323,7 +4406,7 @@
       </p:pic>
       <p:pic>
         <p:nvPicPr>
-          <p:cNvPr id="9" name="Picture 8" descr="268771bcd93959c7.png"/>
+          <p:cNvPr id="9" name="Picture 8" descr="0b481a76517fb38f.png"/>
           <p:cNvPicPr>
             <a:picLocks noChangeAspect="1"/>
           </p:cNvPicPr>
@@ -4337,8 +4420,8 @@
         </p:blipFill>
         <p:spPr>
           <a:xfrm>
-            <a:off x="1828800" y="2889504"/>
-            <a:ext cx="1621536" cy="694944"/>
+            <a:off x="1828800" y="2862072"/>
+            <a:ext cx="1630680" cy="673608"/>
           </a:xfrm>
           <a:prstGeom prst="rect">
             <a:avLst/>
@@ -4369,29 +4452,29 @@
           <a:p>
             <a:pPr algn="ctr"/>
             <a:r>
-              <a:rPr sz="3200" b="1" i="0">
+              <a:rPr sz="3040" b="1" i="0">
                 <a:solidFill>
                   <a:srgbClr val="9E1B32"/>
                 </a:solidFill>
-                <a:latin typeface="Century Schoolbook"/>
+                <a:latin typeface="Lexend"/>
               </a:rPr>
               <a:t>Answer:   (5/8)</a:t>
             </a:r>
             <a:r>
-              <a:rPr sz="3200" b="1" i="0" baseline="30000">
+              <a:rPr sz="3040" b="1" i="0" baseline="30000">
                 <a:solidFill>
                   <a:srgbClr val="9E1B32"/>
                 </a:solidFill>
-                <a:latin typeface="Century Schoolbook"/>
+                <a:latin typeface="Lexend"/>
               </a:rPr>
               <a:t>2</a:t>
             </a:r>
             <a:r>
-              <a:rPr sz="3200" b="1" i="0">
+              <a:rPr sz="3040" b="1" i="0">
                 <a:solidFill>
                   <a:srgbClr val="9E1B32"/>
                 </a:solidFill>
-                <a:latin typeface="Century Schoolbook"/>
+                <a:latin typeface="Lexend"/>
               </a:rPr>
               <a:t> = 25/64</a:t>
             </a:r>
@@ -4440,11 +4523,11 @@
           <a:p>
             <a:pPr algn="l"/>
             <a:r>
-              <a:rPr sz="3600" b="1" i="0">
+              <a:rPr sz="3420" b="1" i="0">
                 <a:solidFill>
                   <a:srgbClr val="1A1A1A"/>
                 </a:solidFill>
-                <a:latin typeface="Century Schoolbook"/>
+                <a:latin typeface="Lexend"/>
               </a:rPr>
               <a:t>Your Turn</a:t>
             </a:r>
@@ -4580,11 +4663,11 @@
           <a:p>
             <a:pPr algn="l"/>
             <a:r>
-              <a:rPr sz="1100" b="0" i="1">
+              <a:rPr sz="1040" b="0" i="0">
                 <a:solidFill>
                   <a:srgbClr val="6B6B6B"/>
                 </a:solidFill>
-                <a:latin typeface="Century Schoolbook"/>
+                <a:latin typeface="Lexend"/>
               </a:rPr>
               <a:t>Grade 7 Accelerated · Unit 3 · Lesson 5 — Applying Exponent Laws</a:t>
             </a:r>
@@ -4615,11 +4698,11 @@
           <a:p>
             <a:pPr algn="r"/>
             <a:r>
-              <a:rPr sz="1100" b="0" i="0">
+              <a:rPr sz="1040" b="0" i="0">
                 <a:solidFill>
                   <a:srgbClr val="6B6B6B"/>
                 </a:solidFill>
-                <a:latin typeface="Century Schoolbook"/>
+                <a:latin typeface="Lexend"/>
               </a:rPr>
               <a:t>13</a:t>
             </a:r>
@@ -4628,7 +4711,7 @@
       </p:sp>
       <p:pic>
         <p:nvPicPr>
-          <p:cNvPr id="8" name="Picture 7" descr="a7f97d6945899edc.png"/>
+          <p:cNvPr id="8" name="Picture 7" descr="726f578657118a7a.png"/>
           <p:cNvPicPr>
             <a:picLocks noChangeAspect="1"/>
           </p:cNvPicPr>
@@ -4642,8 +4725,8 @@
         </p:blipFill>
         <p:spPr>
           <a:xfrm>
-            <a:off x="4315968" y="2194560"/>
-            <a:ext cx="3529584" cy="862584"/>
+            <a:off x="4405883" y="1600200"/>
+            <a:ext cx="3349752" cy="832104"/>
           </a:xfrm>
           <a:prstGeom prst="rect">
             <a:avLst/>
@@ -4658,7 +4741,7 @@
         </p:nvSpPr>
         <p:spPr>
           <a:xfrm>
-            <a:off x="777240" y="3560064"/>
+            <a:off x="777240" y="2935224"/>
             <a:ext cx="10607040" cy="858740"/>
           </a:xfrm>
           <a:prstGeom prst="rect">
@@ -4674,11 +4757,11 @@
           <a:p>
             <a:pPr algn="ctr"/>
             <a:r>
-              <a:rPr sz="2400" b="1" i="0">
+              <a:rPr sz="2280" b="1" i="0">
                 <a:solidFill>
                   <a:srgbClr val="1A1A1A"/>
                 </a:solidFill>
-                <a:latin typeface="Century Schoolbook"/>
+                <a:latin typeface="Lexend"/>
               </a:rPr>
               <a:t>Write an equivalent expression with one base and a positive exponent.</a:t>
             </a:r>
@@ -4727,11 +4810,11 @@
           <a:p>
             <a:pPr algn="l"/>
             <a:r>
-              <a:rPr sz="3600" b="1" i="0">
+              <a:rPr sz="3420" b="1" i="0">
                 <a:solidFill>
                   <a:srgbClr val="1A1A1A"/>
                 </a:solidFill>
-                <a:latin typeface="Century Schoolbook"/>
+                <a:latin typeface="Lexend"/>
               </a:rPr>
               <a:t>Your Turn</a:t>
             </a:r>
@@ -4867,11 +4950,11 @@
           <a:p>
             <a:pPr algn="l"/>
             <a:r>
-              <a:rPr sz="1100" b="0" i="1">
+              <a:rPr sz="1040" b="0" i="0">
                 <a:solidFill>
                   <a:srgbClr val="6B6B6B"/>
                 </a:solidFill>
-                <a:latin typeface="Century Schoolbook"/>
+                <a:latin typeface="Lexend"/>
               </a:rPr>
               <a:t>Grade 7 Accelerated · Unit 3 · Lesson 5 — Applying Exponent Laws</a:t>
             </a:r>
@@ -4902,11 +4985,11 @@
           <a:p>
             <a:pPr algn="r"/>
             <a:r>
-              <a:rPr sz="1100" b="0" i="0">
+              <a:rPr sz="1040" b="0" i="0">
                 <a:solidFill>
                   <a:srgbClr val="6B6B6B"/>
                 </a:solidFill>
-                <a:latin typeface="Century Schoolbook"/>
+                <a:latin typeface="Lexend"/>
               </a:rPr>
               <a:t>14</a:t>
             </a:r>
@@ -4915,7 +4998,7 @@
       </p:sp>
       <p:pic>
         <p:nvPicPr>
-          <p:cNvPr id="8" name="Picture 7" descr="40cdd198e5060778.png"/>
+          <p:cNvPr id="8" name="Picture 7" descr="0084f7f2bc8d15b5.png"/>
           <p:cNvPicPr>
             <a:picLocks noChangeAspect="1"/>
           </p:cNvPicPr>
@@ -4929,8 +5012,8 @@
         </p:blipFill>
         <p:spPr>
           <a:xfrm>
-            <a:off x="4314444" y="2194560"/>
-            <a:ext cx="3532632" cy="862584"/>
+            <a:off x="4402836" y="1600200"/>
+            <a:ext cx="3355848" cy="835152"/>
           </a:xfrm>
           <a:prstGeom prst="rect">
             <a:avLst/>
@@ -4945,7 +5028,7 @@
         </p:nvSpPr>
         <p:spPr>
           <a:xfrm>
-            <a:off x="777240" y="3560064"/>
+            <a:off x="777240" y="2938272"/>
             <a:ext cx="10607040" cy="858740"/>
           </a:xfrm>
           <a:prstGeom prst="rect">
@@ -4961,11 +5044,11 @@
           <a:p>
             <a:pPr algn="ctr"/>
             <a:r>
-              <a:rPr sz="2400" b="1" i="0">
+              <a:rPr sz="2280" b="1" i="0">
                 <a:solidFill>
                   <a:srgbClr val="1A1A1A"/>
                 </a:solidFill>
-                <a:latin typeface="Century Schoolbook"/>
+                <a:latin typeface="Lexend"/>
               </a:rPr>
               <a:t>Write an equivalent expression with one base and a positive exponent.</a:t>
             </a:r>
@@ -4980,36 +5063,36 @@
         </p:nvSpPr>
         <p:spPr>
           <a:xfrm>
-            <a:off x="4364735" y="4868384"/>
-            <a:ext cx="1920240" cy="548640"/>
-          </a:xfrm>
-          <a:prstGeom prst="rect">
-            <a:avLst/>
-          </a:prstGeom>
-          <a:noFill/>
-        </p:spPr>
-        <p:txBody>
-          <a:bodyPr wrap="square" lIns="45720" rIns="45720" tIns="18288" bIns="18288" anchor="ctr">
-            <a:spAutoFit/>
+            <a:off x="2366900" y="3957032"/>
+            <a:ext cx="7564878" cy="457200"/>
+          </a:xfrm>
+          <a:prstGeom prst="rect">
+            <a:avLst/>
+          </a:prstGeom>
+          <a:noFill/>
+        </p:spPr>
+        <p:txBody>
+          <a:bodyPr wrap="none" lIns="45720" rIns="45720" tIns="18288" bIns="18288" anchor="ctr">
+            <a:noAutofit/>
           </a:bodyPr>
           <a:lstStyle/>
           <a:p>
             <a:pPr algn="l"/>
             <a:r>
-              <a:rPr sz="3200" b="1" i="0">
-                <a:solidFill>
-                  <a:srgbClr val="9E1B32"/>
-                </a:solidFill>
-                <a:latin typeface="Century Schoolbook"/>
-              </a:rPr>
-              <a:t>Answer:</a:t>
+              <a:rPr sz="2750" b="0" i="0">
+                <a:solidFill>
+                  <a:srgbClr val="1A1A1A"/>
+                </a:solidFill>
+                <a:latin typeface="Lexend"/>
+              </a:rPr>
+              <a:t>Add the exponents, then flip the fraction:</a:t>
             </a:r>
           </a:p>
         </p:txBody>
       </p:sp>
       <p:pic>
         <p:nvPicPr>
-          <p:cNvPr id="11" name="Picture 10" descr="3269d301dd5e8afa.png"/>
+          <p:cNvPr id="11" name="Picture 10" descr="42824fa219a1c39e.png"/>
           <p:cNvPicPr>
             <a:picLocks noChangeAspect="1"/>
           </p:cNvPicPr>
@@ -5023,8 +5106,67 @@
         </p:blipFill>
         <p:spPr>
           <a:xfrm>
-            <a:off x="6284976" y="4711412"/>
-            <a:ext cx="1511808" cy="862584"/>
+            <a:off x="2421764" y="4519388"/>
+            <a:ext cx="4834128" cy="606552"/>
+          </a:xfrm>
+          <a:prstGeom prst="rect">
+            <a:avLst/>
+          </a:prstGeom>
+        </p:spPr>
+      </p:pic>
+      <p:sp>
+        <p:nvSpPr>
+          <p:cNvPr id="12" name="TextBox 11"/>
+          <p:cNvSpPr txBox="1"/>
+          <p:nvPr/>
+        </p:nvSpPr>
+        <p:spPr>
+          <a:xfrm>
+            <a:off x="4381499" y="5404832"/>
+            <a:ext cx="1920240" cy="548640"/>
+          </a:xfrm>
+          <a:prstGeom prst="rect">
+            <a:avLst/>
+          </a:prstGeom>
+          <a:noFill/>
+        </p:spPr>
+        <p:txBody>
+          <a:bodyPr wrap="square" lIns="45720" rIns="45720" tIns="18288" bIns="18288" anchor="ctr">
+            <a:spAutoFit/>
+          </a:bodyPr>
+          <a:lstStyle/>
+          <a:p>
+            <a:pPr algn="l"/>
+            <a:r>
+              <a:rPr sz="3040" b="1" i="0">
+                <a:solidFill>
+                  <a:srgbClr val="9E1B32"/>
+                </a:solidFill>
+                <a:latin typeface="Lexend"/>
+              </a:rPr>
+              <a:t>Answer:</a:t>
+            </a:r>
+          </a:p>
+        </p:txBody>
+      </p:sp>
+      <p:pic>
+        <p:nvPicPr>
+          <p:cNvPr id="13" name="Picture 12" descr="364254372aca3eb2.png"/>
+          <p:cNvPicPr>
+            <a:picLocks noChangeAspect="1"/>
+          </p:cNvPicPr>
+          <p:nvPr/>
+        </p:nvPicPr>
+        <p:blipFill>
+          <a:blip r:embed="rId4"/>
+          <a:stretch>
+            <a:fillRect/>
+          </a:stretch>
+        </p:blipFill>
+        <p:spPr>
+          <a:xfrm>
+            <a:off x="6301739" y="5263100"/>
+            <a:ext cx="1478280" cy="832104"/>
           </a:xfrm>
           <a:prstGeom prst="rect">
             <a:avLst/>
@@ -5073,11 +5215,11 @@
           <a:p>
             <a:pPr algn="l"/>
             <a:r>
-              <a:rPr sz="3400" b="1" i="0">
+              <a:rPr sz="3229" b="1" i="0">
                 <a:solidFill>
                   <a:srgbClr val="1A1A1A"/>
                 </a:solidFill>
-                <a:latin typeface="Century Schoolbook"/>
+                <a:latin typeface="Lexend"/>
               </a:rPr>
               <a:t>Whiteboards   ·   Question 1 of 9</a:t>
             </a:r>
@@ -5213,11 +5355,11 @@
           <a:p>
             <a:pPr algn="l"/>
             <a:r>
-              <a:rPr sz="1100" b="0" i="1">
+              <a:rPr sz="1040" b="0" i="0">
                 <a:solidFill>
                   <a:srgbClr val="6B6B6B"/>
                 </a:solidFill>
-                <a:latin typeface="Century Schoolbook"/>
+                <a:latin typeface="Lexend"/>
               </a:rPr>
               <a:t>Grade 7 Accelerated · Unit 3 · Lesson 5 — Applying Exponent Laws</a:t>
             </a:r>
@@ -5248,11 +5390,11 @@
           <a:p>
             <a:pPr algn="r"/>
             <a:r>
-              <a:rPr sz="1100" b="0" i="0">
+              <a:rPr sz="1040" b="0" i="0">
                 <a:solidFill>
                   <a:srgbClr val="6B6B6B"/>
                 </a:solidFill>
-                <a:latin typeface="Century Schoolbook"/>
+                <a:latin typeface="Lexend"/>
               </a:rPr>
               <a:t>15</a:t>
             </a:r>
@@ -5267,8 +5409,8 @@
         </p:nvSpPr>
         <p:spPr>
           <a:xfrm>
-            <a:off x="1234440" y="1921764"/>
-            <a:ext cx="5357739" cy="457200"/>
+            <a:off x="1234440" y="1917192"/>
+            <a:ext cx="5364138" cy="457200"/>
           </a:xfrm>
           <a:prstGeom prst="rect">
             <a:avLst/>
@@ -5283,11 +5425,11 @@
           <a:p>
             <a:pPr algn="l"/>
             <a:r>
-              <a:rPr sz="2400" b="0" i="0">
+              <a:rPr sz="2280" b="0" i="0">
                 <a:solidFill>
                   <a:srgbClr val="1A1A1A"/>
                 </a:solidFill>
-                <a:latin typeface="Century Schoolbook"/>
+                <a:latin typeface="Lexend"/>
               </a:rPr>
               <a:t>A copier is set to shrink a page to  </a:t>
             </a:r>
@@ -5296,7 +5438,7 @@
       </p:sp>
       <p:pic>
         <p:nvPicPr>
-          <p:cNvPr id="9" name="Picture 8" descr="e8022fa09c25c018.png"/>
+          <p:cNvPr id="9" name="Picture 8" descr="6fa687cf29161665.png"/>
           <p:cNvPicPr>
             <a:picLocks noChangeAspect="1"/>
           </p:cNvPicPr>
@@ -5310,8 +5452,8 @@
         </p:blipFill>
         <p:spPr>
           <a:xfrm>
-            <a:off x="6455019" y="1874519"/>
-            <a:ext cx="170688" cy="551688"/>
+            <a:off x="6461418" y="1874519"/>
+            <a:ext cx="176784" cy="542544"/>
           </a:xfrm>
           <a:prstGeom prst="rect">
             <a:avLst/>
@@ -5326,8 +5468,8 @@
         </p:nvSpPr>
         <p:spPr>
           <a:xfrm>
-            <a:off x="6625707" y="1921764"/>
-            <a:ext cx="1873868" cy="457200"/>
+            <a:off x="6638202" y="1917192"/>
+            <a:ext cx="1841346" cy="457200"/>
           </a:xfrm>
           <a:prstGeom prst="rect">
             <a:avLst/>
@@ -5342,11 +5484,11 @@
           <a:p>
             <a:pPr algn="l"/>
             <a:r>
-              <a:rPr sz="2400" b="0" i="0">
+              <a:rPr sz="2280" b="0" i="0">
                 <a:solidFill>
                   <a:srgbClr val="1A1A1A"/>
                 </a:solidFill>
-                <a:latin typeface="Century Schoolbook"/>
+                <a:latin typeface="Lexend"/>
               </a:rPr>
               <a:t>  of its size.</a:t>
             </a:r>
@@ -5361,7 +5503,7 @@
         </p:nvSpPr>
         <p:spPr>
           <a:xfrm>
-            <a:off x="1234440" y="2627376"/>
+            <a:off x="1234440" y="2618232"/>
             <a:ext cx="10058400" cy="858740"/>
           </a:xfrm>
           <a:prstGeom prst="rect">
@@ -5377,11 +5519,11 @@
           <a:p>
             <a:pPr algn="l"/>
             <a:r>
-              <a:rPr sz="2400" b="0" i="0">
+              <a:rPr sz="2280" b="0" i="0">
                 <a:solidFill>
                   <a:srgbClr val="1A1A1A"/>
                 </a:solidFill>
-                <a:latin typeface="Century Schoolbook"/>
+                <a:latin typeface="Lexend"/>
               </a:rPr>
               <a:t>A page 6 inches wide is copied 4 times in a row, each copy from the last.</a:t>
             </a:r>
@@ -5396,7 +5538,7 @@
         </p:nvSpPr>
         <p:spPr>
           <a:xfrm>
-            <a:off x="1234440" y="3595844"/>
+            <a:off x="1234440" y="3586700"/>
             <a:ext cx="10058400" cy="429370"/>
           </a:xfrm>
           <a:prstGeom prst="rect">
@@ -5412,11 +5554,11 @@
           <a:p>
             <a:pPr algn="l"/>
             <a:r>
-              <a:rPr sz="2400" b="1" i="0">
+              <a:rPr sz="2280" b="1" i="0">
                 <a:solidFill>
                   <a:srgbClr val="1A1A1A"/>
                 </a:solidFill>
-                <a:latin typeface="Century Schoolbook"/>
+                <a:latin typeface="Lexend"/>
               </a:rPr>
               <a:t>What fraction of the original page's size is the last copy?</a:t>
             </a:r>
@@ -5447,11 +5589,11 @@
           <a:p>
             <a:pPr algn="ctr"/>
             <a:r>
-              <a:rPr sz="2600" b="1" i="0">
+              <a:rPr sz="2470" b="1" i="0">
                 <a:solidFill>
                   <a:srgbClr val="1A1A1A"/>
                 </a:solidFill>
-                <a:latin typeface="Century Schoolbook"/>
+                <a:latin typeface="Lexend"/>
               </a:rPr>
               <a:t>Answer it.</a:t>
             </a:r>
@@ -5500,11 +5642,11 @@
           <a:p>
             <a:pPr algn="l"/>
             <a:r>
-              <a:rPr sz="3400" b="1" i="0">
+              <a:rPr sz="3229" b="1" i="0">
                 <a:solidFill>
                   <a:srgbClr val="1A1A1A"/>
                 </a:solidFill>
-                <a:latin typeface="Century Schoolbook"/>
+                <a:latin typeface="Lexend"/>
               </a:rPr>
               <a:t>Whiteboards   ·   Question 1 of 9</a:t>
             </a:r>
@@ -5640,11 +5782,11 @@
           <a:p>
             <a:pPr algn="l"/>
             <a:r>
-              <a:rPr sz="1100" b="0" i="1">
+              <a:rPr sz="1040" b="0" i="0">
                 <a:solidFill>
                   <a:srgbClr val="6B6B6B"/>
                 </a:solidFill>
-                <a:latin typeface="Century Schoolbook"/>
+                <a:latin typeface="Lexend"/>
               </a:rPr>
               <a:t>Grade 7 Accelerated · Unit 3 · Lesson 5 — Applying Exponent Laws</a:t>
             </a:r>
@@ -5675,11 +5817,11 @@
           <a:p>
             <a:pPr algn="r"/>
             <a:r>
-              <a:rPr sz="1100" b="0" i="0">
+              <a:rPr sz="1040" b="0" i="0">
                 <a:solidFill>
                   <a:srgbClr val="6B6B6B"/>
                 </a:solidFill>
-                <a:latin typeface="Century Schoolbook"/>
+                <a:latin typeface="Lexend"/>
               </a:rPr>
               <a:t>16</a:t>
             </a:r>
@@ -5694,8 +5836,8 @@
         </p:nvSpPr>
         <p:spPr>
           <a:xfrm>
-            <a:off x="1234440" y="1923287"/>
-            <a:ext cx="5357739" cy="457200"/>
+            <a:off x="1234440" y="1917192"/>
+            <a:ext cx="5364138" cy="457200"/>
           </a:xfrm>
           <a:prstGeom prst="rect">
             <a:avLst/>
@@ -5710,11 +5852,11 @@
           <a:p>
             <a:pPr algn="l"/>
             <a:r>
-              <a:rPr sz="2400" b="0" i="0">
+              <a:rPr sz="2280" b="0" i="0">
                 <a:solidFill>
                   <a:srgbClr val="1A1A1A"/>
                 </a:solidFill>
-                <a:latin typeface="Century Schoolbook"/>
+                <a:latin typeface="Lexend"/>
               </a:rPr>
               <a:t>A copier is set to shrink a page to  </a:t>
             </a:r>
@@ -5723,7 +5865,7 @@
       </p:sp>
       <p:pic>
         <p:nvPicPr>
-          <p:cNvPr id="9" name="Picture 8" descr="024e90b41a6caf45.png"/>
+          <p:cNvPr id="9" name="Picture 8" descr="82207df6c9253501.png"/>
           <p:cNvPicPr>
             <a:picLocks noChangeAspect="1"/>
           </p:cNvPicPr>
@@ -5737,8 +5879,8 @@
         </p:blipFill>
         <p:spPr>
           <a:xfrm>
-            <a:off x="6455019" y="1874519"/>
-            <a:ext cx="164592" cy="554736"/>
+            <a:off x="6461418" y="1874519"/>
+            <a:ext cx="170688" cy="542544"/>
           </a:xfrm>
           <a:prstGeom prst="rect">
             <a:avLst/>
@@ -5753,8 +5895,8 @@
         </p:nvSpPr>
         <p:spPr>
           <a:xfrm>
-            <a:off x="6619611" y="1923287"/>
-            <a:ext cx="1873868" cy="457200"/>
+            <a:off x="6632106" y="1917192"/>
+            <a:ext cx="1841346" cy="457200"/>
           </a:xfrm>
           <a:prstGeom prst="rect">
             <a:avLst/>
@@ -5769,11 +5911,11 @@
           <a:p>
             <a:pPr algn="l"/>
             <a:r>
-              <a:rPr sz="2400" b="0" i="0">
+              <a:rPr sz="2280" b="0" i="0">
                 <a:solidFill>
                   <a:srgbClr val="1A1A1A"/>
                 </a:solidFill>
-                <a:latin typeface="Century Schoolbook"/>
+                <a:latin typeface="Lexend"/>
               </a:rPr>
               <a:t>  of its size.</a:t>
             </a:r>
@@ -5788,7 +5930,7 @@
         </p:nvSpPr>
         <p:spPr>
           <a:xfrm>
-            <a:off x="1234440" y="2630424"/>
+            <a:off x="1234440" y="2618232"/>
             <a:ext cx="10058400" cy="858740"/>
           </a:xfrm>
           <a:prstGeom prst="rect">
@@ -5804,11 +5946,11 @@
           <a:p>
             <a:pPr algn="l"/>
             <a:r>
-              <a:rPr sz="2400" b="0" i="0">
+              <a:rPr sz="2280" b="0" i="0">
                 <a:solidFill>
                   <a:srgbClr val="1A1A1A"/>
                 </a:solidFill>
-                <a:latin typeface="Century Schoolbook"/>
+                <a:latin typeface="Lexend"/>
               </a:rPr>
               <a:t>A page 6 inches wide is copied 4 times in a row, each copy from the last.</a:t>
             </a:r>
@@ -5823,7 +5965,7 @@
         </p:nvSpPr>
         <p:spPr>
           <a:xfrm>
-            <a:off x="1234440" y="3598892"/>
+            <a:off x="1234440" y="3586700"/>
             <a:ext cx="10058400" cy="429370"/>
           </a:xfrm>
           <a:prstGeom prst="rect">
@@ -5839,11 +5981,11 @@
           <a:p>
             <a:pPr algn="l"/>
             <a:r>
-              <a:rPr sz="2400" b="1" i="0">
+              <a:rPr sz="2280" b="1" i="0">
                 <a:solidFill>
                   <a:srgbClr val="1A1A1A"/>
                 </a:solidFill>
-                <a:latin typeface="Century Schoolbook"/>
+                <a:latin typeface="Lexend"/>
               </a:rPr>
               <a:t>What fraction of the original page's size is the last copy?</a:t>
             </a:r>
@@ -5858,36 +6000,36 @@
         </p:nvSpPr>
         <p:spPr>
           <a:xfrm>
-            <a:off x="4864607" y="4823459"/>
-            <a:ext cx="1920240" cy="548640"/>
-          </a:xfrm>
-          <a:prstGeom prst="rect">
-            <a:avLst/>
-          </a:prstGeom>
-          <a:noFill/>
-        </p:spPr>
-        <p:txBody>
-          <a:bodyPr wrap="square" lIns="45720" rIns="45720" tIns="18288" bIns="18288" anchor="ctr">
-            <a:spAutoFit/>
+            <a:off x="3765755" y="4372687"/>
+            <a:ext cx="2584801" cy="457200"/>
+          </a:xfrm>
+          <a:prstGeom prst="rect">
+            <a:avLst/>
+          </a:prstGeom>
+          <a:noFill/>
+        </p:spPr>
+        <p:txBody>
+          <a:bodyPr wrap="none" lIns="45720" rIns="45720" tIns="18288" bIns="18288" anchor="ctr">
+            <a:noAutofit/>
           </a:bodyPr>
           <a:lstStyle/>
           <a:p>
             <a:pPr algn="l"/>
             <a:r>
-              <a:rPr sz="3200" b="1" i="0">
-                <a:solidFill>
-                  <a:srgbClr val="9E1B32"/>
-                </a:solidFill>
-                <a:latin typeface="Century Schoolbook"/>
-              </a:rPr>
-              <a:t>Answer:</a:t>
+              <a:rPr sz="2750" b="0" i="0">
+                <a:solidFill>
+                  <a:srgbClr val="1A1A1A"/>
+                </a:solidFill>
+                <a:latin typeface="Lexend"/>
+              </a:rPr>
+              <a:t>Four copies:  </a:t>
             </a:r>
           </a:p>
         </p:txBody>
       </p:sp>
       <p:pic>
         <p:nvPicPr>
-          <p:cNvPr id="14" name="Picture 13" descr="7dd35ac51a0ee44c.png"/>
+          <p:cNvPr id="14" name="Picture 13" descr="d5a448eea451177a.png"/>
           <p:cNvPicPr>
             <a:picLocks noChangeAspect="1"/>
           </p:cNvPicPr>
@@ -5901,8 +6043,67 @@
         </p:blipFill>
         <p:spPr>
           <a:xfrm>
-            <a:off x="6784848" y="4663440"/>
-            <a:ext cx="512064" cy="868680"/>
+            <a:off x="6213396" y="4244671"/>
+            <a:ext cx="2176272" cy="713232"/>
+          </a:xfrm>
+          <a:prstGeom prst="rect">
+            <a:avLst/>
+          </a:prstGeom>
+        </p:spPr>
+      </p:pic>
+      <p:sp>
+        <p:nvSpPr>
+          <p:cNvPr id="15" name="TextBox 14"/>
+          <p:cNvSpPr txBox="1"/>
+          <p:nvPr/>
+        </p:nvSpPr>
+        <p:spPr>
+          <a:xfrm>
+            <a:off x="4858511" y="5239843"/>
+            <a:ext cx="1920240" cy="548640"/>
+          </a:xfrm>
+          <a:prstGeom prst="rect">
+            <a:avLst/>
+          </a:prstGeom>
+          <a:noFill/>
+        </p:spPr>
+        <p:txBody>
+          <a:bodyPr wrap="square" lIns="45720" rIns="45720" tIns="18288" bIns="18288" anchor="ctr">
+            <a:spAutoFit/>
+          </a:bodyPr>
+          <a:lstStyle/>
+          <a:p>
+            <a:pPr algn="l"/>
+            <a:r>
+              <a:rPr sz="3040" b="1" i="0">
+                <a:solidFill>
+                  <a:srgbClr val="9E1B32"/>
+                </a:solidFill>
+                <a:latin typeface="Lexend"/>
+              </a:rPr>
+              <a:t>Answer:</a:t>
+            </a:r>
+          </a:p>
+        </p:txBody>
+      </p:sp>
+      <p:pic>
+        <p:nvPicPr>
+          <p:cNvPr id="16" name="Picture 15" descr="62bc59a32308df59.png"/>
+          <p:cNvPicPr>
+            <a:picLocks noChangeAspect="1"/>
+          </p:cNvPicPr>
+          <p:nvPr/>
+        </p:nvPicPr>
+        <p:blipFill>
+          <a:blip r:embed="rId4"/>
+          <a:stretch>
+            <a:fillRect/>
+          </a:stretch>
+        </p:blipFill>
+        <p:spPr>
+          <a:xfrm>
+            <a:off x="6778751" y="5095063"/>
+            <a:ext cx="524256" cy="838200"/>
           </a:xfrm>
           <a:prstGeom prst="rect">
             <a:avLst/>
@@ -5951,11 +6152,11 @@
           <a:p>
             <a:pPr algn="l"/>
             <a:r>
-              <a:rPr sz="3400" b="1" i="0">
+              <a:rPr sz="3229" b="1" i="0">
                 <a:solidFill>
                   <a:srgbClr val="1A1A1A"/>
                 </a:solidFill>
-                <a:latin typeface="Century Schoolbook"/>
+                <a:latin typeface="Lexend"/>
               </a:rPr>
               <a:t>Whiteboards   ·   Question 2 of 9</a:t>
             </a:r>
@@ -6091,11 +6292,11 @@
           <a:p>
             <a:pPr algn="l"/>
             <a:r>
-              <a:rPr sz="1100" b="0" i="1">
+              <a:rPr sz="1040" b="0" i="0">
                 <a:solidFill>
                   <a:srgbClr val="6B6B6B"/>
                 </a:solidFill>
-                <a:latin typeface="Century Schoolbook"/>
+                <a:latin typeface="Lexend"/>
               </a:rPr>
               <a:t>Grade 7 Accelerated · Unit 3 · Lesson 5 — Applying Exponent Laws</a:t>
             </a:r>
@@ -6126,11 +6327,11 @@
           <a:p>
             <a:pPr algn="r"/>
             <a:r>
-              <a:rPr sz="1100" b="0" i="0">
+              <a:rPr sz="1040" b="0" i="0">
                 <a:solidFill>
                   <a:srgbClr val="6B6B6B"/>
                 </a:solidFill>
-                <a:latin typeface="Century Schoolbook"/>
+                <a:latin typeface="Lexend"/>
               </a:rPr>
               <a:t>17</a:t>
             </a:r>
@@ -6139,7 +6340,7 @@
       </p:sp>
       <p:pic>
         <p:nvPicPr>
-          <p:cNvPr id="8" name="Picture 7" descr="23a87bc643d7e5a2.png"/>
+          <p:cNvPr id="8" name="Picture 7" descr="60a7160d7e15e922.png"/>
           <p:cNvPicPr>
             <a:picLocks noChangeAspect="1"/>
           </p:cNvPicPr>
@@ -6153,8 +6354,8 @@
         </p:blipFill>
         <p:spPr>
           <a:xfrm>
-            <a:off x="5292852" y="2194560"/>
-            <a:ext cx="1575816" cy="868680"/>
+            <a:off x="5346191" y="2194560"/>
+            <a:ext cx="1469136" cy="835152"/>
           </a:xfrm>
           <a:prstGeom prst="rect">
             <a:avLst/>
@@ -6185,11 +6386,11 @@
           <a:p>
             <a:pPr algn="ctr"/>
             <a:r>
-              <a:rPr sz="2600" b="1" i="0">
+              <a:rPr sz="2470" b="1" i="0">
                 <a:solidFill>
                   <a:srgbClr val="1A1A1A"/>
                 </a:solidFill>
-                <a:latin typeface="Century Schoolbook"/>
+                <a:latin typeface="Lexend"/>
               </a:rPr>
               <a:t>Answer it.</a:t>
             </a:r>
@@ -6238,11 +6439,11 @@
           <a:p>
             <a:pPr algn="l"/>
             <a:r>
-              <a:rPr sz="3400" b="1" i="0">
+              <a:rPr sz="3229" b="1" i="0">
                 <a:solidFill>
                   <a:srgbClr val="1A1A1A"/>
                 </a:solidFill>
-                <a:latin typeface="Century Schoolbook"/>
+                <a:latin typeface="Lexend"/>
               </a:rPr>
               <a:t>Whiteboards   ·   Question 2 of 9</a:t>
             </a:r>
@@ -6378,11 +6579,11 @@
           <a:p>
             <a:pPr algn="l"/>
             <a:r>
-              <a:rPr sz="1100" b="0" i="1">
+              <a:rPr sz="1040" b="0" i="0">
                 <a:solidFill>
                   <a:srgbClr val="6B6B6B"/>
                 </a:solidFill>
-                <a:latin typeface="Century Schoolbook"/>
+                <a:latin typeface="Lexend"/>
               </a:rPr>
               <a:t>Grade 7 Accelerated · Unit 3 · Lesson 5 — Applying Exponent Laws</a:t>
             </a:r>
@@ -6413,11 +6614,11 @@
           <a:p>
             <a:pPr algn="r"/>
             <a:r>
-              <a:rPr sz="1100" b="0" i="0">
+              <a:rPr sz="1040" b="0" i="0">
                 <a:solidFill>
                   <a:srgbClr val="6B6B6B"/>
                 </a:solidFill>
-                <a:latin typeface="Century Schoolbook"/>
+                <a:latin typeface="Lexend"/>
               </a:rPr>
               <a:t>18</a:t>
             </a:r>
@@ -6426,7 +6627,7 @@
       </p:sp>
       <p:pic>
         <p:nvPicPr>
-          <p:cNvPr id="8" name="Picture 7" descr="7b4aab4c0a6cc8a0.png"/>
+          <p:cNvPr id="8" name="Picture 7" descr="ccbe016419b287a3.png"/>
           <p:cNvPicPr>
             <a:picLocks noChangeAspect="1"/>
           </p:cNvPicPr>
@@ -6440,8 +6641,8 @@
         </p:blipFill>
         <p:spPr>
           <a:xfrm>
-            <a:off x="5291328" y="2103120"/>
-            <a:ext cx="1578864" cy="868680"/>
+            <a:off x="5346191" y="2103120"/>
+            <a:ext cx="1469136" cy="835152"/>
           </a:xfrm>
           <a:prstGeom prst="rect">
             <a:avLst/>
@@ -6456,36 +6657,36 @@
         </p:nvSpPr>
         <p:spPr>
           <a:xfrm>
-            <a:off x="4454651" y="4823459"/>
-            <a:ext cx="1920240" cy="548640"/>
-          </a:xfrm>
-          <a:prstGeom prst="rect">
-            <a:avLst/>
-          </a:prstGeom>
-          <a:noFill/>
-        </p:spPr>
-        <p:txBody>
-          <a:bodyPr wrap="square" lIns="45720" rIns="45720" tIns="18288" bIns="18288" anchor="ctr">
-            <a:spAutoFit/>
+            <a:off x="3282754" y="3319272"/>
+            <a:ext cx="3358779" cy="457200"/>
+          </a:xfrm>
+          <a:prstGeom prst="rect">
+            <a:avLst/>
+          </a:prstGeom>
+          <a:noFill/>
+        </p:spPr>
+        <p:txBody>
+          <a:bodyPr wrap="none" lIns="45720" rIns="45720" tIns="18288" bIns="18288" anchor="ctr">
+            <a:noAutofit/>
           </a:bodyPr>
           <a:lstStyle/>
           <a:p>
             <a:pPr algn="l"/>
             <a:r>
-              <a:rPr sz="3200" b="1" i="0">
-                <a:solidFill>
-                  <a:srgbClr val="9E1B32"/>
-                </a:solidFill>
-                <a:latin typeface="Century Schoolbook"/>
-              </a:rPr>
-              <a:t>Answer:</a:t>
+              <a:rPr sz="2750" b="0" i="0">
+                <a:solidFill>
+                  <a:srgbClr val="1A1A1A"/>
+                </a:solidFill>
+                <a:latin typeface="Lexend"/>
+              </a:rPr>
+              <a:t>Flip the fraction:  </a:t>
             </a:r>
           </a:p>
         </p:txBody>
       </p:sp>
       <p:pic>
         <p:nvPicPr>
-          <p:cNvPr id="10" name="Picture 9" descr="837676bd53bd7ebc.png"/>
+          <p:cNvPr id="10" name="Picture 9" descr="8696ad001dd2b684.png"/>
           <p:cNvPicPr>
             <a:picLocks noChangeAspect="1"/>
           </p:cNvPicPr>
@@ -6499,8 +6700,67 @@
         </p:blipFill>
         <p:spPr>
           <a:xfrm>
-            <a:off x="6374891" y="4663440"/>
-            <a:ext cx="1331976" cy="868680"/>
+            <a:off x="6504373" y="3240023"/>
+            <a:ext cx="2377440" cy="615696"/>
+          </a:xfrm>
+          <a:prstGeom prst="rect">
+            <a:avLst/>
+          </a:prstGeom>
+        </p:spPr>
+      </p:pic>
+      <p:sp>
+        <p:nvSpPr>
+          <p:cNvPr id="11" name="TextBox 10"/>
+          <p:cNvSpPr txBox="1"/>
+          <p:nvPr/>
+        </p:nvSpPr>
+        <p:spPr>
+          <a:xfrm>
+            <a:off x="4483608" y="4806695"/>
+            <a:ext cx="1920240" cy="548640"/>
+          </a:xfrm>
+          <a:prstGeom prst="rect">
+            <a:avLst/>
+          </a:prstGeom>
+          <a:noFill/>
+        </p:spPr>
+        <p:txBody>
+          <a:bodyPr wrap="square" lIns="45720" rIns="45720" tIns="18288" bIns="18288" anchor="ctr">
+            <a:spAutoFit/>
+          </a:bodyPr>
+          <a:lstStyle/>
+          <a:p>
+            <a:pPr algn="l"/>
+            <a:r>
+              <a:rPr sz="3040" b="1" i="0">
+                <a:solidFill>
+                  <a:srgbClr val="9E1B32"/>
+                </a:solidFill>
+                <a:latin typeface="Lexend"/>
+              </a:rPr>
+              <a:t>Answer:</a:t>
+            </a:r>
+          </a:p>
+        </p:txBody>
+      </p:sp>
+      <p:pic>
+        <p:nvPicPr>
+          <p:cNvPr id="12" name="Picture 11" descr="c0f8e1841d70d188.png"/>
+          <p:cNvPicPr>
+            <a:picLocks noChangeAspect="1"/>
+          </p:cNvPicPr>
+          <p:nvPr/>
+        </p:nvPicPr>
+        <p:blipFill>
+          <a:blip r:embed="rId4"/>
+          <a:stretch>
+            <a:fillRect/>
+          </a:stretch>
+        </p:blipFill>
+        <p:spPr>
+          <a:xfrm>
+            <a:off x="6403848" y="4663440"/>
+            <a:ext cx="1274064" cy="835152"/>
           </a:xfrm>
           <a:prstGeom prst="rect">
             <a:avLst/>
@@ -6549,11 +6809,11 @@
           <a:p>
             <a:pPr algn="l"/>
             <a:r>
-              <a:rPr sz="3400" b="1" i="0">
+              <a:rPr sz="3229" b="1" i="0">
                 <a:solidFill>
                   <a:srgbClr val="1A1A1A"/>
                 </a:solidFill>
-                <a:latin typeface="Century Schoolbook"/>
+                <a:latin typeface="Lexend"/>
               </a:rPr>
               <a:t>Whiteboards   ·   Question 3 of 9</a:t>
             </a:r>
@@ -6689,11 +6949,11 @@
           <a:p>
             <a:pPr algn="l"/>
             <a:r>
-              <a:rPr sz="1100" b="0" i="1">
+              <a:rPr sz="1040" b="0" i="0">
                 <a:solidFill>
                   <a:srgbClr val="6B6B6B"/>
                 </a:solidFill>
-                <a:latin typeface="Century Schoolbook"/>
+                <a:latin typeface="Lexend"/>
               </a:rPr>
               <a:t>Grade 7 Accelerated · Unit 3 · Lesson 5 — Applying Exponent Laws</a:t>
             </a:r>
@@ -6724,11 +6984,11 @@
           <a:p>
             <a:pPr algn="r"/>
             <a:r>
-              <a:rPr sz="1100" b="0" i="0">
+              <a:rPr sz="1040" b="0" i="0">
                 <a:solidFill>
                   <a:srgbClr val="6B6B6B"/>
                 </a:solidFill>
-                <a:latin typeface="Century Schoolbook"/>
+                <a:latin typeface="Lexend"/>
               </a:rPr>
               <a:t>19</a:t>
             </a:r>
@@ -6737,7 +6997,7 @@
       </p:sp>
       <p:pic>
         <p:nvPicPr>
-          <p:cNvPr id="8" name="Picture 7" descr="c08fd56f1b4e345e.png"/>
+          <p:cNvPr id="8" name="Picture 7" descr="202d2f9edf4ff6c5.png"/>
           <p:cNvPicPr>
             <a:picLocks noChangeAspect="1"/>
           </p:cNvPicPr>
@@ -6751,8 +7011,8 @@
         </p:blipFill>
         <p:spPr>
           <a:xfrm>
-            <a:off x="5288280" y="2194560"/>
-            <a:ext cx="1584960" cy="871728"/>
+            <a:off x="5343144" y="2194560"/>
+            <a:ext cx="1475232" cy="835152"/>
           </a:xfrm>
           <a:prstGeom prst="rect">
             <a:avLst/>
@@ -6783,11 +7043,11 @@
           <a:p>
             <a:pPr algn="ctr"/>
             <a:r>
-              <a:rPr sz="2600" b="1" i="0">
+              <a:rPr sz="2470" b="1" i="0">
                 <a:solidFill>
                   <a:srgbClr val="1A1A1A"/>
                 </a:solidFill>
-                <a:latin typeface="Century Schoolbook"/>
+                <a:latin typeface="Lexend"/>
               </a:rPr>
               <a:t>Answer it.</a:t>
             </a:r>
@@ -6836,11 +7096,11 @@
           <a:p>
             <a:pPr algn="l"/>
             <a:r>
-              <a:rPr sz="3600" b="1" i="0">
+              <a:rPr sz="3420" b="1" i="0">
                 <a:solidFill>
                   <a:srgbClr val="1A1A1A"/>
                 </a:solidFill>
-                <a:latin typeface="Century Schoolbook"/>
+                <a:latin typeface="Lexend"/>
               </a:rPr>
               <a:t>Warm-Up</a:t>
             </a:r>
@@ -6976,11 +7236,11 @@
           <a:p>
             <a:pPr algn="l"/>
             <a:r>
-              <a:rPr sz="1100" b="0" i="1">
+              <a:rPr sz="1040" b="0" i="0">
                 <a:solidFill>
                   <a:srgbClr val="6B6B6B"/>
                 </a:solidFill>
-                <a:latin typeface="Century Schoolbook"/>
+                <a:latin typeface="Lexend"/>
               </a:rPr>
               <a:t>Grade 7 Accelerated · Unit 3 · Lesson 5 — Applying Exponent Laws</a:t>
             </a:r>
@@ -7011,11 +7271,11 @@
           <a:p>
             <a:pPr algn="r"/>
             <a:r>
-              <a:rPr sz="1100" b="0" i="0">
+              <a:rPr sz="1040" b="0" i="0">
                 <a:solidFill>
                   <a:srgbClr val="6B6B6B"/>
                 </a:solidFill>
-                <a:latin typeface="Century Schoolbook"/>
+                <a:latin typeface="Lexend"/>
               </a:rPr>
               <a:t>2</a:t>
             </a:r>
@@ -7031,7 +7291,7 @@
         <p:spPr>
           <a:xfrm>
             <a:off x="1874519" y="1440180"/>
-            <a:ext cx="3058734" cy="457200"/>
+            <a:ext cx="2921808" cy="457200"/>
           </a:xfrm>
           <a:prstGeom prst="rect">
             <a:avLst/>
@@ -7046,11 +7306,11 @@
           <a:p>
             <a:pPr algn="l"/>
             <a:r>
-              <a:rPr sz="2300" b="0" i="0">
+              <a:rPr sz="2180" b="0" i="0">
                 <a:solidFill>
                   <a:srgbClr val="1A1A1A"/>
                 </a:solidFill>
-                <a:latin typeface="Century Schoolbook"/>
+                <a:latin typeface="Lexend"/>
               </a:rPr>
               <a:t>1.   Find the value:  </a:t>
             </a:r>
@@ -7059,7 +7319,7 @@
       </p:sp>
       <p:pic>
         <p:nvPicPr>
-          <p:cNvPr id="9" name="Picture 8" descr="1538ef9a323bca44.png"/>
+          <p:cNvPr id="9" name="Picture 8" descr="dfd26d8ad0c54914.png"/>
           <p:cNvPicPr>
             <a:picLocks noChangeAspect="1"/>
           </p:cNvPicPr>
@@ -7073,8 +7333,8 @@
         </p:blipFill>
         <p:spPr>
           <a:xfrm>
-            <a:off x="4796094" y="1531620"/>
-            <a:ext cx="417576" cy="274320"/>
+            <a:off x="4659168" y="1534668"/>
+            <a:ext cx="396240" cy="268224"/>
           </a:xfrm>
           <a:prstGeom prst="rect">
             <a:avLst/>
@@ -7089,8 +7349,8 @@
         </p:nvSpPr>
         <p:spPr>
           <a:xfrm>
-            <a:off x="1874519" y="2148840"/>
-            <a:ext cx="5677198" cy="457200"/>
+            <a:off x="1874519" y="2142744"/>
+            <a:ext cx="5584547" cy="457200"/>
           </a:xfrm>
           <a:prstGeom prst="rect">
             <a:avLst/>
@@ -7105,11 +7365,11 @@
           <a:p>
             <a:pPr algn="l"/>
             <a:r>
-              <a:rPr sz="2300" b="0" i="0">
+              <a:rPr sz="2180" b="0" i="0">
                 <a:solidFill>
                   <a:srgbClr val="1A1A1A"/>
                 </a:solidFill>
-                <a:latin typeface="Century Schoolbook"/>
+                <a:latin typeface="Lexend"/>
               </a:rPr>
               <a:t>2.   Rewrite with a positive exponent:  </a:t>
             </a:r>
@@ -7118,7 +7378,7 @@
       </p:sp>
       <p:pic>
         <p:nvPicPr>
-          <p:cNvPr id="11" name="Picture 10" descr="82be0161615a5d7f.png"/>
+          <p:cNvPr id="11" name="Picture 10" descr="592658f90555273d.png"/>
           <p:cNvPicPr>
             <a:picLocks noChangeAspect="1"/>
           </p:cNvPicPr>
@@ -7132,8 +7392,8 @@
         </p:blipFill>
         <p:spPr>
           <a:xfrm>
-            <a:off x="7414558" y="2075688"/>
-            <a:ext cx="463296" cy="603504"/>
+            <a:off x="7321907" y="2075688"/>
+            <a:ext cx="432816" cy="591312"/>
           </a:xfrm>
           <a:prstGeom prst="rect">
             <a:avLst/>
@@ -7148,8 +7408,8 @@
         </p:nvSpPr>
         <p:spPr>
           <a:xfrm>
-            <a:off x="1874519" y="2857500"/>
-            <a:ext cx="3065570" cy="457200"/>
+            <a:off x="1874519" y="2845308"/>
+            <a:ext cx="2942940" cy="457200"/>
           </a:xfrm>
           <a:prstGeom prst="rect">
             <a:avLst/>
@@ -7164,11 +7424,11 @@
           <a:p>
             <a:pPr algn="l"/>
             <a:r>
-              <a:rPr sz="2300" b="0" i="0">
+              <a:rPr sz="2180" b="0" i="0">
                 <a:solidFill>
                   <a:srgbClr val="1A1A1A"/>
                 </a:solidFill>
-                <a:latin typeface="Century Schoolbook"/>
+                <a:latin typeface="Lexend"/>
               </a:rPr>
               <a:t>3.   Which is larger, </a:t>
             </a:r>
@@ -7177,7 +7437,7 @@
       </p:sp>
       <p:pic>
         <p:nvPicPr>
-          <p:cNvPr id="13" name="Picture 12" descr="5fa67493f2d0b1ad.png"/>
+          <p:cNvPr id="13" name="Picture 12" descr="6e3fb6dc69f29d2d.png"/>
           <p:cNvPicPr>
             <a:picLocks noChangeAspect="1"/>
           </p:cNvPicPr>
@@ -7191,8 +7451,8 @@
         </p:blipFill>
         <p:spPr>
           <a:xfrm>
-            <a:off x="4802930" y="2948940"/>
-            <a:ext cx="265176" cy="274320"/>
+            <a:off x="4680300" y="2939796"/>
+            <a:ext cx="295656" cy="268224"/>
           </a:xfrm>
           <a:prstGeom prst="rect">
             <a:avLst/>
@@ -7207,8 +7467,8 @@
         </p:nvSpPr>
         <p:spPr>
           <a:xfrm>
-            <a:off x="5068106" y="2857500"/>
-            <a:ext cx="674751" cy="457200"/>
+            <a:off x="4975956" y="2845308"/>
+            <a:ext cx="674509" cy="457200"/>
           </a:xfrm>
           <a:prstGeom prst="rect">
             <a:avLst/>
@@ -7223,11 +7483,11 @@
           <a:p>
             <a:pPr algn="l"/>
             <a:r>
-              <a:rPr sz="2300" b="0" i="0">
+              <a:rPr sz="2180" b="0" i="0">
                 <a:solidFill>
                   <a:srgbClr val="1A1A1A"/>
                 </a:solidFill>
-                <a:latin typeface="Century Schoolbook"/>
+                <a:latin typeface="Lexend"/>
               </a:rPr>
               <a:t> or </a:t>
             </a:r>
@@ -7236,7 +7496,7 @@
       </p:sp>
       <p:pic>
         <p:nvPicPr>
-          <p:cNvPr id="15" name="Picture 14" descr="cd79bb74d01bc946.png"/>
+          <p:cNvPr id="15" name="Picture 14" descr="f5c888b6c84690f7.png"/>
           <p:cNvPicPr>
             <a:picLocks noChangeAspect="1"/>
           </p:cNvPicPr>
@@ -7250,8 +7510,8 @@
         </p:blipFill>
         <p:spPr>
           <a:xfrm>
-            <a:off x="5605697" y="2944368"/>
-            <a:ext cx="265176" cy="283464"/>
+            <a:off x="5513305" y="2938272"/>
+            <a:ext cx="289560" cy="271272"/>
           </a:xfrm>
           <a:prstGeom prst="rect">
             <a:avLst/>
@@ -7266,8 +7526,8 @@
         </p:nvSpPr>
         <p:spPr>
           <a:xfrm>
-            <a:off x="5870873" y="2857500"/>
-            <a:ext cx="347771" cy="457200"/>
+            <a:off x="5802865" y="2845308"/>
+            <a:ext cx="360631" cy="457200"/>
           </a:xfrm>
           <a:prstGeom prst="rect">
             <a:avLst/>
@@ -7282,11 +7542,11 @@
           <a:p>
             <a:pPr algn="l"/>
             <a:r>
-              <a:rPr sz="2300" b="0" i="0">
+              <a:rPr sz="2180" b="0" i="0">
                 <a:solidFill>
                   <a:srgbClr val="1A1A1A"/>
                 </a:solidFill>
-                <a:latin typeface="Century Schoolbook"/>
+                <a:latin typeface="Lexend"/>
               </a:rPr>
               <a:t>?</a:t>
             </a:r>
@@ -7301,8 +7561,8 @@
         </p:nvSpPr>
         <p:spPr>
           <a:xfrm>
-            <a:off x="1874519" y="3543300"/>
-            <a:ext cx="4084107" cy="457200"/>
+            <a:off x="1874519" y="3521964"/>
+            <a:ext cx="4065366" cy="457200"/>
           </a:xfrm>
           <a:prstGeom prst="rect">
             <a:avLst/>
@@ -7317,11 +7577,11 @@
           <a:p>
             <a:pPr algn="l"/>
             <a:r>
-              <a:rPr sz="2300" b="0" i="0">
+              <a:rPr sz="2180" b="0" i="0">
                 <a:solidFill>
                   <a:srgbClr val="1A1A1A"/>
                 </a:solidFill>
-                <a:latin typeface="Century Schoolbook"/>
+                <a:latin typeface="Lexend"/>
               </a:rPr>
               <a:t>4.   Write the reciprocal of  </a:t>
             </a:r>
@@ -7330,7 +7590,7 @@
       </p:sp>
       <p:pic>
         <p:nvPicPr>
-          <p:cNvPr id="18" name="Picture 17" descr="e5446a4e89f9a3af.png"/>
+          <p:cNvPr id="18" name="Picture 17" descr="1a683e70796a000f.png"/>
           <p:cNvPicPr>
             <a:picLocks noChangeAspect="1"/>
           </p:cNvPicPr>
@@ -7344,8 +7604,8 @@
         </p:blipFill>
         <p:spPr>
           <a:xfrm>
-            <a:off x="5821467" y="3493008"/>
-            <a:ext cx="377952" cy="557784"/>
+            <a:off x="5802726" y="3480816"/>
+            <a:ext cx="350520" cy="539496"/>
           </a:xfrm>
           <a:prstGeom prst="rect">
             <a:avLst/>
@@ -7394,11 +7654,11 @@
           <a:p>
             <a:pPr algn="l"/>
             <a:r>
-              <a:rPr sz="3400" b="1" i="0">
+              <a:rPr sz="3229" b="1" i="0">
                 <a:solidFill>
                   <a:srgbClr val="1A1A1A"/>
                 </a:solidFill>
-                <a:latin typeface="Century Schoolbook"/>
+                <a:latin typeface="Lexend"/>
               </a:rPr>
               <a:t>Whiteboards   ·   Question 3 of 9</a:t>
             </a:r>
@@ -7534,11 +7794,11 @@
           <a:p>
             <a:pPr algn="l"/>
             <a:r>
-              <a:rPr sz="1100" b="0" i="1">
+              <a:rPr sz="1040" b="0" i="0">
                 <a:solidFill>
                   <a:srgbClr val="6B6B6B"/>
                 </a:solidFill>
-                <a:latin typeface="Century Schoolbook"/>
+                <a:latin typeface="Lexend"/>
               </a:rPr>
               <a:t>Grade 7 Accelerated · Unit 3 · Lesson 5 — Applying Exponent Laws</a:t>
             </a:r>
@@ -7569,11 +7829,11 @@
           <a:p>
             <a:pPr algn="r"/>
             <a:r>
-              <a:rPr sz="1100" b="0" i="0">
+              <a:rPr sz="1040" b="0" i="0">
                 <a:solidFill>
                   <a:srgbClr val="6B6B6B"/>
                 </a:solidFill>
-                <a:latin typeface="Century Schoolbook"/>
+                <a:latin typeface="Lexend"/>
               </a:rPr>
               <a:t>20</a:t>
             </a:r>
@@ -7582,7 +7842,7 @@
       </p:sp>
       <p:pic>
         <p:nvPicPr>
-          <p:cNvPr id="8" name="Picture 7" descr="bc194338a8886ecd.png"/>
+          <p:cNvPr id="8" name="Picture 7" descr="434b7f64e448db1e.png"/>
           <p:cNvPicPr>
             <a:picLocks noChangeAspect="1"/>
           </p:cNvPicPr>
@@ -7596,8 +7856,8 @@
         </p:blipFill>
         <p:spPr>
           <a:xfrm>
-            <a:off x="5288280" y="2103120"/>
-            <a:ext cx="1584960" cy="868680"/>
+            <a:off x="5343144" y="2103120"/>
+            <a:ext cx="1475232" cy="838200"/>
           </a:xfrm>
           <a:prstGeom prst="rect">
             <a:avLst/>
@@ -7612,36 +7872,36 @@
         </p:nvSpPr>
         <p:spPr>
           <a:xfrm>
-            <a:off x="4864607" y="4823459"/>
-            <a:ext cx="1920240" cy="548640"/>
-          </a:xfrm>
-          <a:prstGeom prst="rect">
-            <a:avLst/>
-          </a:prstGeom>
-          <a:noFill/>
-        </p:spPr>
-        <p:txBody>
-          <a:bodyPr wrap="square" lIns="45720" rIns="45720" tIns="18288" bIns="18288" anchor="ctr">
-            <a:spAutoFit/>
+            <a:off x="3278182" y="3319272"/>
+            <a:ext cx="3358779" cy="457200"/>
+          </a:xfrm>
+          <a:prstGeom prst="rect">
+            <a:avLst/>
+          </a:prstGeom>
+          <a:noFill/>
+        </p:spPr>
+        <p:txBody>
+          <a:bodyPr wrap="none" lIns="45720" rIns="45720" tIns="18288" bIns="18288" anchor="ctr">
+            <a:noAutofit/>
           </a:bodyPr>
           <a:lstStyle/>
           <a:p>
             <a:pPr algn="l"/>
             <a:r>
-              <a:rPr sz="3200" b="1" i="0">
-                <a:solidFill>
-                  <a:srgbClr val="9E1B32"/>
-                </a:solidFill>
-                <a:latin typeface="Century Schoolbook"/>
-              </a:rPr>
-              <a:t>Answer:</a:t>
+              <a:rPr sz="2750" b="0" i="0">
+                <a:solidFill>
+                  <a:srgbClr val="1A1A1A"/>
+                </a:solidFill>
+                <a:latin typeface="Lexend"/>
+              </a:rPr>
+              <a:t>Flip the fraction:  </a:t>
             </a:r>
           </a:p>
         </p:txBody>
       </p:sp>
       <p:pic>
         <p:nvPicPr>
-          <p:cNvPr id="10" name="Picture 9" descr="3148abf2051aaac1.png"/>
+          <p:cNvPr id="10" name="Picture 9" descr="0c11b020145ca0a8.png"/>
           <p:cNvPicPr>
             <a:picLocks noChangeAspect="1"/>
           </p:cNvPicPr>
@@ -7655,8 +7915,91 @@
         </p:blipFill>
         <p:spPr>
           <a:xfrm>
-            <a:off x="6784848" y="4663440"/>
-            <a:ext cx="512064" cy="868680"/>
+            <a:off x="6499801" y="3243072"/>
+            <a:ext cx="2383536" cy="609600"/>
+          </a:xfrm>
+          <a:prstGeom prst="rect">
+            <a:avLst/>
+          </a:prstGeom>
+        </p:spPr>
+      </p:pic>
+      <p:pic>
+        <p:nvPicPr>
+          <p:cNvPr id="11" name="Picture 10" descr="7480f7bb64380121.png"/>
+          <p:cNvPicPr>
+            <a:picLocks noChangeAspect="1"/>
+          </p:cNvPicPr>
+          <p:nvPr/>
+        </p:nvPicPr>
+        <p:blipFill>
+          <a:blip r:embed="rId4"/>
+          <a:stretch>
+            <a:fillRect/>
+          </a:stretch>
+        </p:blipFill>
+        <p:spPr>
+          <a:xfrm>
+            <a:off x="3333046" y="3980688"/>
+            <a:ext cx="1679448" cy="609600"/>
+          </a:xfrm>
+          <a:prstGeom prst="rect">
+            <a:avLst/>
+          </a:prstGeom>
+        </p:spPr>
+      </p:pic>
+      <p:sp>
+        <p:nvSpPr>
+          <p:cNvPr id="12" name="TextBox 11"/>
+          <p:cNvSpPr txBox="1"/>
+          <p:nvPr/>
+        </p:nvSpPr>
+        <p:spPr>
+          <a:xfrm>
+            <a:off x="4834128" y="4872228"/>
+            <a:ext cx="1920240" cy="548640"/>
+          </a:xfrm>
+          <a:prstGeom prst="rect">
+            <a:avLst/>
+          </a:prstGeom>
+          <a:noFill/>
+        </p:spPr>
+        <p:txBody>
+          <a:bodyPr wrap="square" lIns="45720" rIns="45720" tIns="18288" bIns="18288" anchor="ctr">
+            <a:spAutoFit/>
+          </a:bodyPr>
+          <a:lstStyle/>
+          <a:p>
+            <a:pPr algn="l"/>
+            <a:r>
+              <a:rPr sz="3040" b="1" i="0">
+                <a:solidFill>
+                  <a:srgbClr val="9E1B32"/>
+                </a:solidFill>
+                <a:latin typeface="Lexend"/>
+              </a:rPr>
+              <a:t>Answer:</a:t>
+            </a:r>
+          </a:p>
+        </p:txBody>
+      </p:sp>
+      <p:pic>
+        <p:nvPicPr>
+          <p:cNvPr id="13" name="Picture 12" descr="8b23c582eb8d136b.png"/>
+          <p:cNvPicPr>
+            <a:picLocks noChangeAspect="1"/>
+          </p:cNvPicPr>
+          <p:nvPr/>
+        </p:nvPicPr>
+        <p:blipFill>
+          <a:blip r:embed="rId5"/>
+          <a:stretch>
+            <a:fillRect/>
+          </a:stretch>
+        </p:blipFill>
+        <p:spPr>
+          <a:xfrm>
+            <a:off x="6754368" y="4727448"/>
+            <a:ext cx="573024" cy="838200"/>
           </a:xfrm>
           <a:prstGeom prst="rect">
             <a:avLst/>
@@ -7705,11 +8048,11 @@
           <a:p>
             <a:pPr algn="l"/>
             <a:r>
-              <a:rPr sz="3400" b="1" i="0">
+              <a:rPr sz="3229" b="1" i="0">
                 <a:solidFill>
                   <a:srgbClr val="1A1A1A"/>
                 </a:solidFill>
-                <a:latin typeface="Century Schoolbook"/>
+                <a:latin typeface="Lexend"/>
               </a:rPr>
               <a:t>Whiteboards   ·   Question 4 of 9</a:t>
             </a:r>
@@ -7845,11 +8188,11 @@
           <a:p>
             <a:pPr algn="l"/>
             <a:r>
-              <a:rPr sz="1100" b="0" i="1">
+              <a:rPr sz="1040" b="0" i="0">
                 <a:solidFill>
                   <a:srgbClr val="6B6B6B"/>
                 </a:solidFill>
-                <a:latin typeface="Century Schoolbook"/>
+                <a:latin typeface="Lexend"/>
               </a:rPr>
               <a:t>Grade 7 Accelerated · Unit 3 · Lesson 5 — Applying Exponent Laws</a:t>
             </a:r>
@@ -7880,11 +8223,11 @@
           <a:p>
             <a:pPr algn="r"/>
             <a:r>
-              <a:rPr sz="1100" b="0" i="0">
+              <a:rPr sz="1040" b="0" i="0">
                 <a:solidFill>
                   <a:srgbClr val="6B6B6B"/>
                 </a:solidFill>
-                <a:latin typeface="Century Schoolbook"/>
+                <a:latin typeface="Lexend"/>
               </a:rPr>
               <a:t>21</a:t>
             </a:r>
@@ -7893,7 +8236,7 @@
       </p:sp>
       <p:pic>
         <p:nvPicPr>
-          <p:cNvPr id="8" name="Picture 7" descr="c2285e954aff8d61.png"/>
+          <p:cNvPr id="8" name="Picture 7" descr="aad42ec8f13de129.png"/>
           <p:cNvPicPr>
             <a:picLocks noChangeAspect="1"/>
           </p:cNvPicPr>
@@ -7907,8 +8250,8 @@
         </p:blipFill>
         <p:spPr>
           <a:xfrm>
-            <a:off x="5347715" y="2194560"/>
-            <a:ext cx="1466088" cy="853440"/>
+            <a:off x="5372099" y="2194560"/>
+            <a:ext cx="1417320" cy="835152"/>
           </a:xfrm>
           <a:prstGeom prst="rect">
             <a:avLst/>
@@ -7939,11 +8282,11 @@
           <a:p>
             <a:pPr algn="ctr"/>
             <a:r>
-              <a:rPr sz="2600" b="1" i="0">
+              <a:rPr sz="2470" b="1" i="0">
                 <a:solidFill>
                   <a:srgbClr val="1A1A1A"/>
                 </a:solidFill>
-                <a:latin typeface="Century Schoolbook"/>
+                <a:latin typeface="Lexend"/>
               </a:rPr>
               <a:t>Answer it.</a:t>
             </a:r>
@@ -7992,11 +8335,11 @@
           <a:p>
             <a:pPr algn="l"/>
             <a:r>
-              <a:rPr sz="3400" b="1" i="0">
+              <a:rPr sz="3229" b="1" i="0">
                 <a:solidFill>
                   <a:srgbClr val="1A1A1A"/>
                 </a:solidFill>
-                <a:latin typeface="Century Schoolbook"/>
+                <a:latin typeface="Lexend"/>
               </a:rPr>
               <a:t>Whiteboards   ·   Question 4 of 9</a:t>
             </a:r>
@@ -8132,11 +8475,11 @@
           <a:p>
             <a:pPr algn="l"/>
             <a:r>
-              <a:rPr sz="1100" b="0" i="1">
+              <a:rPr sz="1040" b="0" i="0">
                 <a:solidFill>
                   <a:srgbClr val="6B6B6B"/>
                 </a:solidFill>
-                <a:latin typeface="Century Schoolbook"/>
+                <a:latin typeface="Lexend"/>
               </a:rPr>
               <a:t>Grade 7 Accelerated · Unit 3 · Lesson 5 — Applying Exponent Laws</a:t>
             </a:r>
@@ -8167,11 +8510,11 @@
           <a:p>
             <a:pPr algn="r"/>
             <a:r>
-              <a:rPr sz="1100" b="0" i="0">
+              <a:rPr sz="1040" b="0" i="0">
                 <a:solidFill>
                   <a:srgbClr val="6B6B6B"/>
                 </a:solidFill>
-                <a:latin typeface="Century Schoolbook"/>
+                <a:latin typeface="Lexend"/>
               </a:rPr>
               <a:t>22</a:t>
             </a:r>
@@ -8180,7 +8523,7 @@
       </p:sp>
       <p:pic>
         <p:nvPicPr>
-          <p:cNvPr id="8" name="Picture 7" descr="bf10b2e2dc356d3c.png"/>
+          <p:cNvPr id="8" name="Picture 7" descr="8a3193cda974bd83.png"/>
           <p:cNvPicPr>
             <a:picLocks noChangeAspect="1"/>
           </p:cNvPicPr>
@@ -8194,8 +8537,8 @@
         </p:blipFill>
         <p:spPr>
           <a:xfrm>
-            <a:off x="5349240" y="2103120"/>
-            <a:ext cx="1463040" cy="850392"/>
+            <a:off x="5370576" y="2103120"/>
+            <a:ext cx="1420368" cy="835152"/>
           </a:xfrm>
           <a:prstGeom prst="rect">
             <a:avLst/>
@@ -8210,36 +8553,36 @@
         </p:nvSpPr>
         <p:spPr>
           <a:xfrm>
-            <a:off x="4509516" y="4815840"/>
-            <a:ext cx="1920240" cy="548640"/>
-          </a:xfrm>
-          <a:prstGeom prst="rect">
-            <a:avLst/>
-          </a:prstGeom>
-          <a:noFill/>
-        </p:spPr>
-        <p:txBody>
-          <a:bodyPr wrap="square" lIns="45720" rIns="45720" tIns="18288" bIns="18288" anchor="ctr">
-            <a:spAutoFit/>
+            <a:off x="3317806" y="3314699"/>
+            <a:ext cx="3358779" cy="457200"/>
+          </a:xfrm>
+          <a:prstGeom prst="rect">
+            <a:avLst/>
+          </a:prstGeom>
+          <a:noFill/>
+        </p:spPr>
+        <p:txBody>
+          <a:bodyPr wrap="none" lIns="45720" rIns="45720" tIns="18288" bIns="18288" anchor="ctr">
+            <a:noAutofit/>
           </a:bodyPr>
           <a:lstStyle/>
           <a:p>
             <a:pPr algn="l"/>
             <a:r>
-              <a:rPr sz="3200" b="1" i="0">
-                <a:solidFill>
-                  <a:srgbClr val="9E1B32"/>
-                </a:solidFill>
-                <a:latin typeface="Century Schoolbook"/>
-              </a:rPr>
-              <a:t>Answer:</a:t>
+              <a:rPr sz="2750" b="0" i="0">
+                <a:solidFill>
+                  <a:srgbClr val="1A1A1A"/>
+                </a:solidFill>
+                <a:latin typeface="Lexend"/>
+              </a:rPr>
+              <a:t>Flip the fraction:  </a:t>
             </a:r>
           </a:p>
         </p:txBody>
       </p:sp>
       <p:pic>
         <p:nvPicPr>
-          <p:cNvPr id="10" name="Picture 9" descr="c2c7971114380740.png"/>
+          <p:cNvPr id="10" name="Picture 9" descr="f8fd36b400e40608.png"/>
           <p:cNvPicPr>
             <a:picLocks noChangeAspect="1"/>
           </p:cNvPicPr>
@@ -8253,8 +8596,67 @@
         </p:blipFill>
         <p:spPr>
           <a:xfrm>
+            <a:off x="6539425" y="3240023"/>
+            <a:ext cx="2304288" cy="606552"/>
+          </a:xfrm>
+          <a:prstGeom prst="rect">
+            <a:avLst/>
+          </a:prstGeom>
+        </p:spPr>
+      </p:pic>
+      <p:sp>
+        <p:nvSpPr>
+          <p:cNvPr id="11" name="TextBox 10"/>
+          <p:cNvSpPr txBox="1"/>
+          <p:nvPr/>
+        </p:nvSpPr>
+        <p:spPr>
+          <a:xfrm>
+            <a:off x="4509516" y="4806695"/>
+            <a:ext cx="1920240" cy="548640"/>
+          </a:xfrm>
+          <a:prstGeom prst="rect">
+            <a:avLst/>
+          </a:prstGeom>
+          <a:noFill/>
+        </p:spPr>
+        <p:txBody>
+          <a:bodyPr wrap="square" lIns="45720" rIns="45720" tIns="18288" bIns="18288" anchor="ctr">
+            <a:spAutoFit/>
+          </a:bodyPr>
+          <a:lstStyle/>
+          <a:p>
+            <a:pPr algn="l"/>
+            <a:r>
+              <a:rPr sz="3040" b="1" i="0">
+                <a:solidFill>
+                  <a:srgbClr val="9E1B32"/>
+                </a:solidFill>
+                <a:latin typeface="Lexend"/>
+              </a:rPr>
+              <a:t>Answer:</a:t>
+            </a:r>
+          </a:p>
+        </p:txBody>
+      </p:sp>
+      <p:pic>
+        <p:nvPicPr>
+          <p:cNvPr id="12" name="Picture 11" descr="d8c9697ca2338903.png"/>
+          <p:cNvPicPr>
+            <a:picLocks noChangeAspect="1"/>
+          </p:cNvPicPr>
+          <p:nvPr/>
+        </p:nvPicPr>
+        <p:blipFill>
+          <a:blip r:embed="rId4"/>
+          <a:stretch>
+            <a:fillRect/>
+          </a:stretch>
+        </p:blipFill>
+        <p:spPr>
+          <a:xfrm>
             <a:off x="6429756" y="4663440"/>
-            <a:ext cx="1222248" cy="853440"/>
+            <a:ext cx="1222248" cy="835152"/>
           </a:xfrm>
           <a:prstGeom prst="rect">
             <a:avLst/>
@@ -8303,11 +8705,11 @@
           <a:p>
             <a:pPr algn="l"/>
             <a:r>
-              <a:rPr sz="3400" b="1" i="0">
+              <a:rPr sz="3229" b="1" i="0">
                 <a:solidFill>
                   <a:srgbClr val="1A1A1A"/>
                 </a:solidFill>
-                <a:latin typeface="Century Schoolbook"/>
+                <a:latin typeface="Lexend"/>
               </a:rPr>
               <a:t>Whiteboards   ·   Question 5 of 9</a:t>
             </a:r>
@@ -8443,11 +8845,11 @@
           <a:p>
             <a:pPr algn="l"/>
             <a:r>
-              <a:rPr sz="1100" b="0" i="1">
+              <a:rPr sz="1040" b="0" i="0">
                 <a:solidFill>
                   <a:srgbClr val="6B6B6B"/>
                 </a:solidFill>
-                <a:latin typeface="Century Schoolbook"/>
+                <a:latin typeface="Lexend"/>
               </a:rPr>
               <a:t>Grade 7 Accelerated · Unit 3 · Lesson 5 — Applying Exponent Laws</a:t>
             </a:r>
@@ -8478,11 +8880,11 @@
           <a:p>
             <a:pPr algn="r"/>
             <a:r>
-              <a:rPr sz="1100" b="0" i="0">
+              <a:rPr sz="1040" b="0" i="0">
                 <a:solidFill>
                   <a:srgbClr val="6B6B6B"/>
                 </a:solidFill>
-                <a:latin typeface="Century Schoolbook"/>
+                <a:latin typeface="Lexend"/>
               </a:rPr>
               <a:t>23</a:t>
             </a:r>
@@ -8491,7 +8893,7 @@
       </p:sp>
       <p:pic>
         <p:nvPicPr>
-          <p:cNvPr id="8" name="Picture 7" descr="fb95563de51335d3.png"/>
+          <p:cNvPr id="8" name="Picture 7" descr="a6f8febe7f997dd5.png"/>
           <p:cNvPicPr>
             <a:picLocks noChangeAspect="1"/>
           </p:cNvPicPr>
@@ -8505,8 +8907,8 @@
         </p:blipFill>
         <p:spPr>
           <a:xfrm>
-            <a:off x="5301996" y="2194560"/>
-            <a:ext cx="1557528" cy="853440"/>
+            <a:off x="5349240" y="2194560"/>
+            <a:ext cx="1463040" cy="832104"/>
           </a:xfrm>
           <a:prstGeom prst="rect">
             <a:avLst/>
@@ -8521,7 +8923,7 @@
         </p:nvSpPr>
         <p:spPr>
           <a:xfrm>
-            <a:off x="777240" y="3276599"/>
+            <a:off x="777240" y="3255264"/>
             <a:ext cx="10607040" cy="465151"/>
           </a:xfrm>
           <a:prstGeom prst="rect">
@@ -8537,11 +8939,11 @@
           <a:p>
             <a:pPr algn="ctr"/>
             <a:r>
-              <a:rPr sz="2600" b="0" i="0">
+              <a:rPr sz="2470" b="0" i="0">
                 <a:solidFill>
                   <a:srgbClr val="1A1A1A"/>
                 </a:solidFill>
-                <a:latin typeface="Century Schoolbook"/>
+                <a:latin typeface="Lexend"/>
               </a:rPr>
               <a:t>Which expression is equivalent?</a:t>
             </a:r>
@@ -8556,7 +8958,7 @@
         </p:nvSpPr>
         <p:spPr>
           <a:xfrm>
-            <a:off x="1874519" y="3942919"/>
+            <a:off x="1874519" y="3921583"/>
             <a:ext cx="4572000" cy="548640"/>
           </a:xfrm>
           <a:prstGeom prst="rect">
@@ -8572,29 +8974,29 @@
           <a:p>
             <a:pPr algn="l"/>
             <a:r>
-              <a:rPr sz="2400" b="1" i="0">
+              <a:rPr sz="2280" b="1" i="0">
                 <a:solidFill>
                   <a:srgbClr val="1A1A1A"/>
                 </a:solidFill>
-                <a:latin typeface="Century Schoolbook"/>
+                <a:latin typeface="Lexend"/>
               </a:rPr>
               <a:t>A.   </a:t>
             </a:r>
             <a:r>
-              <a:rPr sz="2400" b="0" i="0">
+              <a:rPr sz="2280" b="0" i="0">
                 <a:solidFill>
                   <a:srgbClr val="1A1A1A"/>
                 </a:solidFill>
-                <a:latin typeface="Century Schoolbook"/>
+                <a:latin typeface="Lexend"/>
               </a:rPr>
               <a:t>(7/8)</a:t>
             </a:r>
             <a:r>
-              <a:rPr sz="2400" b="0" i="0" baseline="30000">
+              <a:rPr sz="2280" b="0" i="0" baseline="30000">
                 <a:solidFill>
                   <a:srgbClr val="1A1A1A"/>
                 </a:solidFill>
-                <a:latin typeface="Century Schoolbook"/>
+                <a:latin typeface="Lexend"/>
               </a:rPr>
               <a:t>3</a:t>
             </a:r>
@@ -8609,7 +9011,7 @@
         </p:nvSpPr>
         <p:spPr>
           <a:xfrm>
-            <a:off x="6629400" y="3942919"/>
+            <a:off x="6629400" y="3921583"/>
             <a:ext cx="4572000" cy="548640"/>
           </a:xfrm>
           <a:prstGeom prst="rect">
@@ -8625,29 +9027,29 @@
           <a:p>
             <a:pPr algn="l"/>
             <a:r>
-              <a:rPr sz="2400" b="1" i="0">
+              <a:rPr sz="2280" b="1" i="0">
                 <a:solidFill>
                   <a:srgbClr val="1A1A1A"/>
                 </a:solidFill>
-                <a:latin typeface="Century Schoolbook"/>
+                <a:latin typeface="Lexend"/>
               </a:rPr>
               <a:t>B.   </a:t>
             </a:r>
             <a:r>
-              <a:rPr sz="2400" b="0" i="0">
+              <a:rPr sz="2280" b="0" i="0">
                 <a:solidFill>
                   <a:srgbClr val="1A1A1A"/>
                 </a:solidFill>
-                <a:latin typeface="Century Schoolbook"/>
+                <a:latin typeface="Lexend"/>
               </a:rPr>
               <a:t>(−8/7)</a:t>
             </a:r>
             <a:r>
-              <a:rPr sz="2400" b="0" i="0" baseline="30000">
+              <a:rPr sz="2280" b="0" i="0" baseline="30000">
                 <a:solidFill>
                   <a:srgbClr val="1A1A1A"/>
                 </a:solidFill>
-                <a:latin typeface="Century Schoolbook"/>
+                <a:latin typeface="Lexend"/>
               </a:rPr>
               <a:t>3</a:t>
             </a:r>
@@ -8662,7 +9064,7 @@
         </p:nvSpPr>
         <p:spPr>
           <a:xfrm>
-            <a:off x="1874519" y="4628719"/>
+            <a:off x="1874519" y="4607383"/>
             <a:ext cx="4572000" cy="548640"/>
           </a:xfrm>
           <a:prstGeom prst="rect">
@@ -8678,29 +9080,29 @@
           <a:p>
             <a:pPr algn="l"/>
             <a:r>
-              <a:rPr sz="2400" b="1" i="0">
+              <a:rPr sz="2280" b="1" i="0">
                 <a:solidFill>
                   <a:srgbClr val="1A1A1A"/>
                 </a:solidFill>
-                <a:latin typeface="Century Schoolbook"/>
+                <a:latin typeface="Lexend"/>
               </a:rPr>
               <a:t>C.   </a:t>
             </a:r>
             <a:r>
-              <a:rPr sz="2400" b="0" i="0">
+              <a:rPr sz="2280" b="0" i="0">
                 <a:solidFill>
                   <a:srgbClr val="1A1A1A"/>
                 </a:solidFill>
-                <a:latin typeface="Century Schoolbook"/>
+                <a:latin typeface="Lexend"/>
               </a:rPr>
               <a:t>(−7/8)</a:t>
             </a:r>
             <a:r>
-              <a:rPr sz="2400" b="0" i="0" baseline="30000">
+              <a:rPr sz="2280" b="0" i="0" baseline="30000">
                 <a:solidFill>
                   <a:srgbClr val="1A1A1A"/>
                 </a:solidFill>
-                <a:latin typeface="Century Schoolbook"/>
+                <a:latin typeface="Lexend"/>
               </a:rPr>
               <a:t>3</a:t>
             </a:r>
@@ -8715,7 +9117,7 @@
         </p:nvSpPr>
         <p:spPr>
           <a:xfrm>
-            <a:off x="6629400" y="4628719"/>
+            <a:off x="6629400" y="4607383"/>
             <a:ext cx="4572000" cy="548640"/>
           </a:xfrm>
           <a:prstGeom prst="rect">
@@ -8731,29 +9133,29 @@
           <a:p>
             <a:pPr algn="l"/>
             <a:r>
-              <a:rPr sz="2400" b="1" i="0">
+              <a:rPr sz="2280" b="1" i="0">
                 <a:solidFill>
                   <a:srgbClr val="1A1A1A"/>
                 </a:solidFill>
-                <a:latin typeface="Century Schoolbook"/>
+                <a:latin typeface="Lexend"/>
               </a:rPr>
               <a:t>D.   </a:t>
             </a:r>
             <a:r>
-              <a:rPr sz="2400" b="0" i="0">
+              <a:rPr sz="2280" b="0" i="0">
                 <a:solidFill>
                   <a:srgbClr val="1A1A1A"/>
                 </a:solidFill>
-                <a:latin typeface="Century Schoolbook"/>
+                <a:latin typeface="Lexend"/>
               </a:rPr>
               <a:t>(8/7)</a:t>
             </a:r>
             <a:r>
-              <a:rPr sz="2400" b="0" i="0" baseline="30000">
+              <a:rPr sz="2280" b="0" i="0" baseline="30000">
                 <a:solidFill>
                   <a:srgbClr val="1A1A1A"/>
                 </a:solidFill>
-                <a:latin typeface="Century Schoolbook"/>
+                <a:latin typeface="Lexend"/>
               </a:rPr>
               <a:t>3</a:t>
             </a:r>
@@ -8768,7 +9170,7 @@
         </p:nvSpPr>
         <p:spPr>
           <a:xfrm>
-            <a:off x="777240" y="5634559"/>
+            <a:off x="777240" y="5613223"/>
             <a:ext cx="10607040" cy="457200"/>
           </a:xfrm>
           <a:prstGeom prst="rect">
@@ -8784,11 +9186,11 @@
           <a:p>
             <a:pPr algn="ctr"/>
             <a:r>
-              <a:rPr sz="2600" b="1" i="0">
+              <a:rPr sz="2470" b="1" i="0">
                 <a:solidFill>
                   <a:srgbClr val="1A1A1A"/>
                 </a:solidFill>
-                <a:latin typeface="Century Schoolbook"/>
+                <a:latin typeface="Lexend"/>
               </a:rPr>
               <a:t>Answer it.</a:t>
             </a:r>
@@ -8837,11 +9239,11 @@
           <a:p>
             <a:pPr algn="l"/>
             <a:r>
-              <a:rPr sz="3400" b="1" i="0">
+              <a:rPr sz="3229" b="1" i="0">
                 <a:solidFill>
                   <a:srgbClr val="1A1A1A"/>
                 </a:solidFill>
-                <a:latin typeface="Century Schoolbook"/>
+                <a:latin typeface="Lexend"/>
               </a:rPr>
               <a:t>Whiteboards   ·   Question 5 of 9</a:t>
             </a:r>
@@ -8977,11 +9379,11 @@
           <a:p>
             <a:pPr algn="l"/>
             <a:r>
-              <a:rPr sz="1100" b="0" i="1">
+              <a:rPr sz="1040" b="0" i="0">
                 <a:solidFill>
                   <a:srgbClr val="6B6B6B"/>
                 </a:solidFill>
-                <a:latin typeface="Century Schoolbook"/>
+                <a:latin typeface="Lexend"/>
               </a:rPr>
               <a:t>Grade 7 Accelerated · Unit 3 · Lesson 5 — Applying Exponent Laws</a:t>
             </a:r>
@@ -9012,11 +9414,11 @@
           <a:p>
             <a:pPr algn="r"/>
             <a:r>
-              <a:rPr sz="1100" b="0" i="0">
+              <a:rPr sz="1040" b="0" i="0">
                 <a:solidFill>
                   <a:srgbClr val="6B6B6B"/>
                 </a:solidFill>
-                <a:latin typeface="Century Schoolbook"/>
+                <a:latin typeface="Lexend"/>
               </a:rPr>
               <a:t>24</a:t>
             </a:r>
@@ -9025,7 +9427,7 @@
       </p:sp>
       <p:pic>
         <p:nvPicPr>
-          <p:cNvPr id="8" name="Picture 7" descr="de3072ed6d5fe593.png"/>
+          <p:cNvPr id="8" name="Picture 7" descr="718f106a310bdb79.png"/>
           <p:cNvPicPr>
             <a:picLocks noChangeAspect="1"/>
           </p:cNvPicPr>
@@ -9039,8 +9441,8 @@
         </p:blipFill>
         <p:spPr>
           <a:xfrm>
-            <a:off x="5300471" y="2103120"/>
-            <a:ext cx="1560576" cy="853440"/>
+            <a:off x="5347715" y="2103120"/>
+            <a:ext cx="1466088" cy="829056"/>
           </a:xfrm>
           <a:prstGeom prst="rect">
             <a:avLst/>
@@ -9055,7 +9457,7 @@
         </p:nvSpPr>
         <p:spPr>
           <a:xfrm>
-            <a:off x="777240" y="3185160"/>
+            <a:off x="777240" y="3160776"/>
             <a:ext cx="10607040" cy="465151"/>
           </a:xfrm>
           <a:prstGeom prst="rect">
@@ -9071,11 +9473,11 @@
           <a:p>
             <a:pPr algn="ctr"/>
             <a:r>
-              <a:rPr sz="2600" b="0" i="0">
+              <a:rPr sz="2470" b="0" i="0">
                 <a:solidFill>
                   <a:srgbClr val="1A1A1A"/>
                 </a:solidFill>
-                <a:latin typeface="Century Schoolbook"/>
+                <a:latin typeface="Lexend"/>
               </a:rPr>
               <a:t>Which expression is equivalent?</a:t>
             </a:r>
@@ -9090,8 +9492,67 @@
         </p:nvSpPr>
         <p:spPr>
           <a:xfrm>
-            <a:off x="1874519" y="3851479"/>
-            <a:ext cx="4572000" cy="548640"/>
+            <a:off x="1920387" y="3885007"/>
+            <a:ext cx="6086561" cy="457200"/>
+          </a:xfrm>
+          <a:prstGeom prst="rect">
+            <a:avLst/>
+          </a:prstGeom>
+          <a:noFill/>
+        </p:spPr>
+        <p:txBody>
+          <a:bodyPr wrap="none" lIns="45720" rIns="45720" tIns="18288" bIns="18288" anchor="ctr">
+            <a:noAutofit/>
+          </a:bodyPr>
+          <a:lstStyle/>
+          <a:p>
+            <a:pPr algn="l"/>
+            <a:r>
+              <a:rPr sz="2750" b="0" i="0">
+                <a:solidFill>
+                  <a:srgbClr val="1A1A1A"/>
+                </a:solidFill>
+                <a:latin typeface="Lexend"/>
+              </a:rPr>
+              <a:t>Flip the fraction. The sign stays:  </a:t>
+            </a:r>
+          </a:p>
+        </p:txBody>
+      </p:sp>
+      <p:pic>
+        <p:nvPicPr>
+          <p:cNvPr id="11" name="Picture 10" descr="363a60b00e1ac413.png"/>
+          <p:cNvPicPr>
+            <a:picLocks noChangeAspect="1"/>
+          </p:cNvPicPr>
+          <p:nvPr/>
+        </p:nvPicPr>
+        <p:blipFill>
+          <a:blip r:embed="rId3"/>
+          <a:stretch>
+            <a:fillRect/>
+          </a:stretch>
+        </p:blipFill>
+        <p:spPr>
+          <a:xfrm>
+            <a:off x="7869788" y="3808807"/>
+            <a:ext cx="2368296" cy="609600"/>
+          </a:xfrm>
+          <a:prstGeom prst="rect">
+            <a:avLst/>
+          </a:prstGeom>
+        </p:spPr>
+      </p:pic>
+      <p:sp>
+        <p:nvSpPr>
+          <p:cNvPr id="12" name="TextBox 11"/>
+          <p:cNvSpPr txBox="1"/>
+          <p:nvPr/>
+        </p:nvSpPr>
+        <p:spPr>
+          <a:xfrm>
+            <a:off x="777240" y="4663440"/>
+            <a:ext cx="10607040" cy="548640"/>
           </a:xfrm>
           <a:prstGeom prst="rect">
             <a:avLst/>
@@ -9104,234 +9565,22 @@
           </a:bodyPr>
           <a:lstStyle/>
           <a:p>
-            <a:pPr algn="l"/>
-            <a:r>
-              <a:rPr sz="2400" b="1" i="0">
-                <a:solidFill>
-                  <a:srgbClr val="1A1A1A"/>
-                </a:solidFill>
-                <a:latin typeface="Century Schoolbook"/>
-              </a:rPr>
-              <a:t>A.   </a:t>
-            </a:r>
-            <a:r>
-              <a:rPr sz="2400" b="0" i="0">
-                <a:solidFill>
-                  <a:srgbClr val="1A1A1A"/>
-                </a:solidFill>
-                <a:latin typeface="Century Schoolbook"/>
-              </a:rPr>
-              <a:t>(7/8)</a:t>
-            </a:r>
-            <a:r>
-              <a:rPr sz="2400" b="0" i="0" baseline="30000">
-                <a:solidFill>
-                  <a:srgbClr val="1A1A1A"/>
-                </a:solidFill>
-                <a:latin typeface="Century Schoolbook"/>
-              </a:rPr>
-              <a:t>3</a:t>
-            </a:r>
-          </a:p>
-        </p:txBody>
-      </p:sp>
-      <p:sp>
-        <p:nvSpPr>
-          <p:cNvPr id="11" name="TextBox 10"/>
-          <p:cNvSpPr txBox="1"/>
-          <p:nvPr/>
-        </p:nvSpPr>
-        <p:spPr>
-          <a:xfrm>
-            <a:off x="6629400" y="3851479"/>
-            <a:ext cx="4572000" cy="548640"/>
-          </a:xfrm>
-          <a:prstGeom prst="rect">
-            <a:avLst/>
-          </a:prstGeom>
-          <a:noFill/>
-        </p:spPr>
-        <p:txBody>
-          <a:bodyPr wrap="square" lIns="45720" rIns="45720" tIns="18288" bIns="18288" anchor="t">
-            <a:spAutoFit/>
-          </a:bodyPr>
-          <a:lstStyle/>
-          <a:p>
-            <a:pPr algn="l"/>
-            <a:r>
-              <a:rPr sz="2400" b="1" i="0">
+            <a:pPr algn="ctr"/>
+            <a:r>
+              <a:rPr sz="3040" b="1" i="0">
                 <a:solidFill>
                   <a:srgbClr val="9E1B32"/>
                 </a:solidFill>
-                <a:latin typeface="Century Schoolbook"/>
-              </a:rPr>
-              <a:t>B.   </a:t>
-            </a:r>
-            <a:r>
-              <a:rPr sz="2400" b="1" i="0">
+                <a:latin typeface="Lexend"/>
+              </a:rPr>
+              <a:t>Answer:   B — (−8/7)</a:t>
+            </a:r>
+            <a:r>
+              <a:rPr sz="3040" b="1" i="0" baseline="30000">
                 <a:solidFill>
                   <a:srgbClr val="9E1B32"/>
                 </a:solidFill>
-                <a:latin typeface="Century Schoolbook"/>
-              </a:rPr>
-              <a:t>(−8/7)</a:t>
-            </a:r>
-            <a:r>
-              <a:rPr sz="2400" b="1" i="0" baseline="30000">
-                <a:solidFill>
-                  <a:srgbClr val="9E1B32"/>
-                </a:solidFill>
-                <a:latin typeface="Century Schoolbook"/>
-              </a:rPr>
-              <a:t>3</a:t>
-            </a:r>
-          </a:p>
-        </p:txBody>
-      </p:sp>
-      <p:sp>
-        <p:nvSpPr>
-          <p:cNvPr id="12" name="TextBox 11"/>
-          <p:cNvSpPr txBox="1"/>
-          <p:nvPr/>
-        </p:nvSpPr>
-        <p:spPr>
-          <a:xfrm>
-            <a:off x="1874519" y="4537279"/>
-            <a:ext cx="4572000" cy="548640"/>
-          </a:xfrm>
-          <a:prstGeom prst="rect">
-            <a:avLst/>
-          </a:prstGeom>
-          <a:noFill/>
-        </p:spPr>
-        <p:txBody>
-          <a:bodyPr wrap="square" lIns="45720" rIns="45720" tIns="18288" bIns="18288" anchor="t">
-            <a:spAutoFit/>
-          </a:bodyPr>
-          <a:lstStyle/>
-          <a:p>
-            <a:pPr algn="l"/>
-            <a:r>
-              <a:rPr sz="2400" b="1" i="0">
-                <a:solidFill>
-                  <a:srgbClr val="1A1A1A"/>
-                </a:solidFill>
-                <a:latin typeface="Century Schoolbook"/>
-              </a:rPr>
-              <a:t>C.   </a:t>
-            </a:r>
-            <a:r>
-              <a:rPr sz="2400" b="0" i="0">
-                <a:solidFill>
-                  <a:srgbClr val="1A1A1A"/>
-                </a:solidFill>
-                <a:latin typeface="Century Schoolbook"/>
-              </a:rPr>
-              <a:t>(−7/8)</a:t>
-            </a:r>
-            <a:r>
-              <a:rPr sz="2400" b="0" i="0" baseline="30000">
-                <a:solidFill>
-                  <a:srgbClr val="1A1A1A"/>
-                </a:solidFill>
-                <a:latin typeface="Century Schoolbook"/>
-              </a:rPr>
-              <a:t>3</a:t>
-            </a:r>
-          </a:p>
-        </p:txBody>
-      </p:sp>
-      <p:sp>
-        <p:nvSpPr>
-          <p:cNvPr id="13" name="TextBox 12"/>
-          <p:cNvSpPr txBox="1"/>
-          <p:nvPr/>
-        </p:nvSpPr>
-        <p:spPr>
-          <a:xfrm>
-            <a:off x="6629400" y="4537279"/>
-            <a:ext cx="4572000" cy="548640"/>
-          </a:xfrm>
-          <a:prstGeom prst="rect">
-            <a:avLst/>
-          </a:prstGeom>
-          <a:noFill/>
-        </p:spPr>
-        <p:txBody>
-          <a:bodyPr wrap="square" lIns="45720" rIns="45720" tIns="18288" bIns="18288" anchor="t">
-            <a:spAutoFit/>
-          </a:bodyPr>
-          <a:lstStyle/>
-          <a:p>
-            <a:pPr algn="l"/>
-            <a:r>
-              <a:rPr sz="2400" b="1" i="0">
-                <a:solidFill>
-                  <a:srgbClr val="1A1A1A"/>
-                </a:solidFill>
-                <a:latin typeface="Century Schoolbook"/>
-              </a:rPr>
-              <a:t>D.   </a:t>
-            </a:r>
-            <a:r>
-              <a:rPr sz="2400" b="0" i="0">
-                <a:solidFill>
-                  <a:srgbClr val="1A1A1A"/>
-                </a:solidFill>
-                <a:latin typeface="Century Schoolbook"/>
-              </a:rPr>
-              <a:t>(8/7)</a:t>
-            </a:r>
-            <a:r>
-              <a:rPr sz="2400" b="0" i="0" baseline="30000">
-                <a:solidFill>
-                  <a:srgbClr val="1A1A1A"/>
-                </a:solidFill>
-                <a:latin typeface="Century Schoolbook"/>
-              </a:rPr>
-              <a:t>3</a:t>
-            </a:r>
-          </a:p>
-        </p:txBody>
-      </p:sp>
-      <p:sp>
-        <p:nvSpPr>
-          <p:cNvPr id="14" name="TextBox 13"/>
-          <p:cNvSpPr txBox="1"/>
-          <p:nvPr/>
-        </p:nvSpPr>
-        <p:spPr>
-          <a:xfrm>
-            <a:off x="777240" y="5543119"/>
-            <a:ext cx="10607040" cy="548640"/>
-          </a:xfrm>
-          <a:prstGeom prst="rect">
-            <a:avLst/>
-          </a:prstGeom>
-          <a:noFill/>
-        </p:spPr>
-        <p:txBody>
-          <a:bodyPr wrap="square" lIns="45720" rIns="45720" tIns="18288" bIns="18288" anchor="t">
-            <a:spAutoFit/>
-          </a:bodyPr>
-          <a:lstStyle/>
-          <a:p>
-            <a:pPr algn="ctr"/>
-            <a:r>
-              <a:rPr sz="3200" b="1" i="0">
-                <a:solidFill>
-                  <a:srgbClr val="9E1B32"/>
-                </a:solidFill>
-                <a:latin typeface="Century Schoolbook"/>
-              </a:rPr>
-              <a:t>Answer:   B — (−8/7)</a:t>
-            </a:r>
-            <a:r>
-              <a:rPr sz="3200" b="1" i="0" baseline="30000">
-                <a:solidFill>
-                  <a:srgbClr val="9E1B32"/>
-                </a:solidFill>
-                <a:latin typeface="Century Schoolbook"/>
+                <a:latin typeface="Lexend"/>
               </a:rPr>
               <a:t>3</a:t>
             </a:r>
@@ -9380,11 +9629,11 @@
           <a:p>
             <a:pPr algn="l"/>
             <a:r>
-              <a:rPr sz="3400" b="1" i="0">
+              <a:rPr sz="3229" b="1" i="0">
                 <a:solidFill>
                   <a:srgbClr val="1A1A1A"/>
                 </a:solidFill>
-                <a:latin typeface="Century Schoolbook"/>
+                <a:latin typeface="Lexend"/>
               </a:rPr>
               <a:t>Whiteboards   ·   Question 6 of 9</a:t>
             </a:r>
@@ -9520,11 +9769,11 @@
           <a:p>
             <a:pPr algn="l"/>
             <a:r>
-              <a:rPr sz="1100" b="0" i="1">
+              <a:rPr sz="1040" b="0" i="0">
                 <a:solidFill>
                   <a:srgbClr val="6B6B6B"/>
                 </a:solidFill>
-                <a:latin typeface="Century Schoolbook"/>
+                <a:latin typeface="Lexend"/>
               </a:rPr>
               <a:t>Grade 7 Accelerated · Unit 3 · Lesson 5 — Applying Exponent Laws</a:t>
             </a:r>
@@ -9555,11 +9804,11 @@
           <a:p>
             <a:pPr algn="r"/>
             <a:r>
-              <a:rPr sz="1100" b="0" i="0">
+              <a:rPr sz="1040" b="0" i="0">
                 <a:solidFill>
                   <a:srgbClr val="6B6B6B"/>
                 </a:solidFill>
-                <a:latin typeface="Century Schoolbook"/>
+                <a:latin typeface="Lexend"/>
               </a:rPr>
               <a:t>25</a:t>
             </a:r>
@@ -9568,7 +9817,7 @@
       </p:sp>
       <p:pic>
         <p:nvPicPr>
-          <p:cNvPr id="8" name="Picture 7" descr="e9242358ed1b2b8f.png"/>
+          <p:cNvPr id="8" name="Picture 7" descr="10298acefb5a4b50.png"/>
           <p:cNvPicPr>
             <a:picLocks noChangeAspect="1"/>
           </p:cNvPicPr>
@@ -9582,8 +9831,8 @@
         </p:blipFill>
         <p:spPr>
           <a:xfrm>
-            <a:off x="4579620" y="2194560"/>
-            <a:ext cx="3002280" cy="871728"/>
+            <a:off x="4604003" y="2194560"/>
+            <a:ext cx="2953512" cy="835152"/>
           </a:xfrm>
           <a:prstGeom prst="rect">
             <a:avLst/>
@@ -9598,7 +9847,7 @@
         </p:nvSpPr>
         <p:spPr>
           <a:xfrm>
-            <a:off x="777240" y="3294888"/>
+            <a:off x="777240" y="3258312"/>
             <a:ext cx="10607040" cy="465151"/>
           </a:xfrm>
           <a:prstGeom prst="rect">
@@ -9614,11 +9863,11 @@
           <a:p>
             <a:pPr algn="ctr"/>
             <a:r>
-              <a:rPr sz="2600" b="0" i="0">
+              <a:rPr sz="2470" b="0" i="0">
                 <a:solidFill>
                   <a:srgbClr val="1A1A1A"/>
                 </a:solidFill>
-                <a:latin typeface="Century Schoolbook"/>
+                <a:latin typeface="Lexend"/>
               </a:rPr>
               <a:t>Which expression is equivalent?</a:t>
             </a:r>
@@ -9633,7 +9882,7 @@
         </p:nvSpPr>
         <p:spPr>
           <a:xfrm>
-            <a:off x="1874519" y="3961207"/>
+            <a:off x="1874519" y="3924631"/>
             <a:ext cx="4572000" cy="548640"/>
           </a:xfrm>
           <a:prstGeom prst="rect">
@@ -9649,29 +9898,29 @@
           <a:p>
             <a:pPr algn="l"/>
             <a:r>
-              <a:rPr sz="2400" b="1" i="0">
+              <a:rPr sz="2280" b="1" i="0">
                 <a:solidFill>
                   <a:srgbClr val="1A1A1A"/>
                 </a:solidFill>
-                <a:latin typeface="Century Schoolbook"/>
+                <a:latin typeface="Lexend"/>
               </a:rPr>
               <a:t>A.   </a:t>
             </a:r>
             <a:r>
-              <a:rPr sz="2400" b="0" i="0">
+              <a:rPr sz="2280" b="0" i="0">
                 <a:solidFill>
                   <a:srgbClr val="1A1A1A"/>
                 </a:solidFill>
-                <a:latin typeface="Century Schoolbook"/>
+                <a:latin typeface="Lexend"/>
               </a:rPr>
               <a:t>(8/5)</a:t>
             </a:r>
             <a:r>
-              <a:rPr sz="2400" b="0" i="0" baseline="30000">
+              <a:rPr sz="2280" b="0" i="0" baseline="30000">
                 <a:solidFill>
                   <a:srgbClr val="1A1A1A"/>
                 </a:solidFill>
-                <a:latin typeface="Century Schoolbook"/>
+                <a:latin typeface="Lexend"/>
               </a:rPr>
               <a:t>2</a:t>
             </a:r>
@@ -9686,7 +9935,7 @@
         </p:nvSpPr>
         <p:spPr>
           <a:xfrm>
-            <a:off x="6629400" y="3961207"/>
+            <a:off x="6629400" y="3924631"/>
             <a:ext cx="4572000" cy="548640"/>
           </a:xfrm>
           <a:prstGeom prst="rect">
@@ -9702,29 +9951,29 @@
           <a:p>
             <a:pPr algn="l"/>
             <a:r>
-              <a:rPr sz="2400" b="1" i="0">
+              <a:rPr sz="2280" b="1" i="0">
                 <a:solidFill>
                   <a:srgbClr val="1A1A1A"/>
                 </a:solidFill>
-                <a:latin typeface="Century Schoolbook"/>
+                <a:latin typeface="Lexend"/>
               </a:rPr>
               <a:t>B.   </a:t>
             </a:r>
             <a:r>
-              <a:rPr sz="2400" b="0" i="0">
+              <a:rPr sz="2280" b="0" i="0">
                 <a:solidFill>
                   <a:srgbClr val="1A1A1A"/>
                 </a:solidFill>
-                <a:latin typeface="Century Schoolbook"/>
+                <a:latin typeface="Lexend"/>
               </a:rPr>
               <a:t>(5/8)</a:t>
             </a:r>
             <a:r>
-              <a:rPr sz="2400" b="0" i="0" baseline="30000">
+              <a:rPr sz="2280" b="0" i="0" baseline="30000">
                 <a:solidFill>
                   <a:srgbClr val="1A1A1A"/>
                 </a:solidFill>
-                <a:latin typeface="Century Schoolbook"/>
+                <a:latin typeface="Lexend"/>
               </a:rPr>
               <a:t>-6</a:t>
             </a:r>
@@ -9739,7 +9988,7 @@
         </p:nvSpPr>
         <p:spPr>
           <a:xfrm>
-            <a:off x="1874519" y="4647007"/>
+            <a:off x="1874519" y="4610431"/>
             <a:ext cx="4572000" cy="548640"/>
           </a:xfrm>
           <a:prstGeom prst="rect">
@@ -9755,29 +10004,29 @@
           <a:p>
             <a:pPr algn="l"/>
             <a:r>
-              <a:rPr sz="2400" b="1" i="0">
+              <a:rPr sz="2280" b="1" i="0">
                 <a:solidFill>
                   <a:srgbClr val="1A1A1A"/>
                 </a:solidFill>
-                <a:latin typeface="Century Schoolbook"/>
+                <a:latin typeface="Lexend"/>
               </a:rPr>
               <a:t>C.   </a:t>
             </a:r>
             <a:r>
-              <a:rPr sz="2400" b="0" i="0">
+              <a:rPr sz="2280" b="0" i="0">
                 <a:solidFill>
                   <a:srgbClr val="1A1A1A"/>
                 </a:solidFill>
-                <a:latin typeface="Century Schoolbook"/>
+                <a:latin typeface="Lexend"/>
               </a:rPr>
               <a:t>(5/8)</a:t>
             </a:r>
             <a:r>
-              <a:rPr sz="2400" b="0" i="0" baseline="30000">
+              <a:rPr sz="2280" b="0" i="0" baseline="30000">
                 <a:solidFill>
                   <a:srgbClr val="1A1A1A"/>
                 </a:solidFill>
-                <a:latin typeface="Century Schoolbook"/>
+                <a:latin typeface="Lexend"/>
               </a:rPr>
               <a:t>2</a:t>
             </a:r>
@@ -9792,7 +10041,7 @@
         </p:nvSpPr>
         <p:spPr>
           <a:xfrm>
-            <a:off x="6629400" y="4647007"/>
+            <a:off x="6629400" y="4610431"/>
             <a:ext cx="4572000" cy="548640"/>
           </a:xfrm>
           <a:prstGeom prst="rect">
@@ -9808,29 +10057,29 @@
           <a:p>
             <a:pPr algn="l"/>
             <a:r>
-              <a:rPr sz="2400" b="1" i="0">
+              <a:rPr sz="2280" b="1" i="0">
                 <a:solidFill>
                   <a:srgbClr val="1A1A1A"/>
                 </a:solidFill>
-                <a:latin typeface="Century Schoolbook"/>
+                <a:latin typeface="Lexend"/>
               </a:rPr>
               <a:t>D.   </a:t>
             </a:r>
             <a:r>
-              <a:rPr sz="2400" b="0" i="0">
+              <a:rPr sz="2280" b="0" i="0">
                 <a:solidFill>
                   <a:srgbClr val="1A1A1A"/>
                 </a:solidFill>
-                <a:latin typeface="Century Schoolbook"/>
+                <a:latin typeface="Lexend"/>
               </a:rPr>
               <a:t>(5/8)</a:t>
             </a:r>
             <a:r>
-              <a:rPr sz="2400" b="0" i="0" baseline="30000">
+              <a:rPr sz="2280" b="0" i="0" baseline="30000">
                 <a:solidFill>
                   <a:srgbClr val="1A1A1A"/>
                 </a:solidFill>
-                <a:latin typeface="Century Schoolbook"/>
+                <a:latin typeface="Lexend"/>
               </a:rPr>
               <a:t>8</a:t>
             </a:r>
@@ -9845,7 +10094,7 @@
         </p:nvSpPr>
         <p:spPr>
           <a:xfrm>
-            <a:off x="777240" y="5652847"/>
+            <a:off x="777240" y="5616271"/>
             <a:ext cx="10607040" cy="457200"/>
           </a:xfrm>
           <a:prstGeom prst="rect">
@@ -9861,11 +10110,11 @@
           <a:p>
             <a:pPr algn="ctr"/>
             <a:r>
-              <a:rPr sz="2600" b="1" i="0">
+              <a:rPr sz="2470" b="1" i="0">
                 <a:solidFill>
                   <a:srgbClr val="1A1A1A"/>
                 </a:solidFill>
-                <a:latin typeface="Century Schoolbook"/>
+                <a:latin typeface="Lexend"/>
               </a:rPr>
               <a:t>Answer it.</a:t>
             </a:r>
@@ -9914,11 +10163,11 @@
           <a:p>
             <a:pPr algn="l"/>
             <a:r>
-              <a:rPr sz="3400" b="1" i="0">
+              <a:rPr sz="3229" b="1" i="0">
                 <a:solidFill>
                   <a:srgbClr val="1A1A1A"/>
                 </a:solidFill>
-                <a:latin typeface="Century Schoolbook"/>
+                <a:latin typeface="Lexend"/>
               </a:rPr>
               <a:t>Whiteboards   ·   Question 6 of 9</a:t>
             </a:r>
@@ -10054,11 +10303,11 @@
           <a:p>
             <a:pPr algn="l"/>
             <a:r>
-              <a:rPr sz="1100" b="0" i="1">
+              <a:rPr sz="1040" b="0" i="0">
                 <a:solidFill>
                   <a:srgbClr val="6B6B6B"/>
                 </a:solidFill>
-                <a:latin typeface="Century Schoolbook"/>
+                <a:latin typeface="Lexend"/>
               </a:rPr>
               <a:t>Grade 7 Accelerated · Unit 3 · Lesson 5 — Applying Exponent Laws</a:t>
             </a:r>
@@ -10089,11 +10338,11 @@
           <a:p>
             <a:pPr algn="r"/>
             <a:r>
-              <a:rPr sz="1100" b="0" i="0">
+              <a:rPr sz="1040" b="0" i="0">
                 <a:solidFill>
                   <a:srgbClr val="6B6B6B"/>
                 </a:solidFill>
-                <a:latin typeface="Century Schoolbook"/>
+                <a:latin typeface="Lexend"/>
               </a:rPr>
               <a:t>26</a:t>
             </a:r>
@@ -10102,7 +10351,7 @@
       </p:sp>
       <p:pic>
         <p:nvPicPr>
-          <p:cNvPr id="8" name="Picture 7" descr="77243053f2f7c3fe.png"/>
+          <p:cNvPr id="8" name="Picture 7" descr="b36e025e50608c39.png"/>
           <p:cNvPicPr>
             <a:picLocks noChangeAspect="1"/>
           </p:cNvPicPr>
@@ -10116,8 +10365,8 @@
         </p:blipFill>
         <p:spPr>
           <a:xfrm>
-            <a:off x="4579620" y="2103120"/>
-            <a:ext cx="3002280" cy="871728"/>
+            <a:off x="4600956" y="2103120"/>
+            <a:ext cx="2959608" cy="835152"/>
           </a:xfrm>
           <a:prstGeom prst="rect">
             <a:avLst/>
@@ -10132,7 +10381,7 @@
         </p:nvSpPr>
         <p:spPr>
           <a:xfrm>
-            <a:off x="777240" y="3203447"/>
+            <a:off x="777240" y="3166871"/>
             <a:ext cx="10607040" cy="465151"/>
           </a:xfrm>
           <a:prstGeom prst="rect">
@@ -10148,27 +10397,51 @@
           <a:p>
             <a:pPr algn="ctr"/>
             <a:r>
-              <a:rPr sz="2600" b="0" i="0">
+              <a:rPr sz="2470" b="0" i="0">
                 <a:solidFill>
                   <a:srgbClr val="1A1A1A"/>
                 </a:solidFill>
-                <a:latin typeface="Century Schoolbook"/>
+                <a:latin typeface="Lexend"/>
               </a:rPr>
               <a:t>Which expression is equivalent?</a:t>
             </a:r>
           </a:p>
         </p:txBody>
       </p:sp>
-      <p:sp>
-        <p:nvSpPr>
-          <p:cNvPr id="10" name="TextBox 9"/>
-          <p:cNvSpPr txBox="1"/>
-          <p:nvPr/>
-        </p:nvSpPr>
-        <p:spPr>
-          <a:xfrm>
-            <a:off x="1874519" y="3869767"/>
-            <a:ext cx="4572000" cy="548640"/>
+      <p:pic>
+        <p:nvPicPr>
+          <p:cNvPr id="10" name="Picture 9" descr="898488e370c2978b.png"/>
+          <p:cNvPicPr>
+            <a:picLocks noChangeAspect="1"/>
+          </p:cNvPicPr>
+          <p:nvPr/>
+        </p:nvPicPr>
+        <p:blipFill>
+          <a:blip r:embed="rId3"/>
+          <a:stretch>
+            <a:fillRect/>
+          </a:stretch>
+        </p:blipFill>
+        <p:spPr>
+          <a:xfrm>
+            <a:off x="3528060" y="3814903"/>
+            <a:ext cx="5215128" cy="603504"/>
+          </a:xfrm>
+          <a:prstGeom prst="rect">
+            <a:avLst/>
+          </a:prstGeom>
+        </p:spPr>
+      </p:pic>
+      <p:sp>
+        <p:nvSpPr>
+          <p:cNvPr id="11" name="TextBox 10"/>
+          <p:cNvSpPr txBox="1"/>
+          <p:nvPr/>
+        </p:nvSpPr>
+        <p:spPr>
+          <a:xfrm>
+            <a:off x="777240" y="4663440"/>
+            <a:ext cx="10607040" cy="548640"/>
           </a:xfrm>
           <a:prstGeom prst="rect">
             <a:avLst/>
@@ -10181,234 +10454,22 @@
           </a:bodyPr>
           <a:lstStyle/>
           <a:p>
-            <a:pPr algn="l"/>
-            <a:r>
-              <a:rPr sz="2400" b="1" i="0">
-                <a:solidFill>
-                  <a:srgbClr val="1A1A1A"/>
-                </a:solidFill>
-                <a:latin typeface="Century Schoolbook"/>
-              </a:rPr>
-              <a:t>A.   </a:t>
-            </a:r>
-            <a:r>
-              <a:rPr sz="2400" b="0" i="0">
-                <a:solidFill>
-                  <a:srgbClr val="1A1A1A"/>
-                </a:solidFill>
-                <a:latin typeface="Century Schoolbook"/>
-              </a:rPr>
-              <a:t>(8/5)</a:t>
-            </a:r>
-            <a:r>
-              <a:rPr sz="2400" b="0" i="0" baseline="30000">
-                <a:solidFill>
-                  <a:srgbClr val="1A1A1A"/>
-                </a:solidFill>
-                <a:latin typeface="Century Schoolbook"/>
-              </a:rPr>
-              <a:t>2</a:t>
-            </a:r>
-          </a:p>
-        </p:txBody>
-      </p:sp>
-      <p:sp>
-        <p:nvSpPr>
-          <p:cNvPr id="11" name="TextBox 10"/>
-          <p:cNvSpPr txBox="1"/>
-          <p:nvPr/>
-        </p:nvSpPr>
-        <p:spPr>
-          <a:xfrm>
-            <a:off x="6629400" y="3869767"/>
-            <a:ext cx="4572000" cy="548640"/>
-          </a:xfrm>
-          <a:prstGeom prst="rect">
-            <a:avLst/>
-          </a:prstGeom>
-          <a:noFill/>
-        </p:spPr>
-        <p:txBody>
-          <a:bodyPr wrap="square" lIns="45720" rIns="45720" tIns="18288" bIns="18288" anchor="t">
-            <a:spAutoFit/>
-          </a:bodyPr>
-          <a:lstStyle/>
-          <a:p>
-            <a:pPr algn="l"/>
-            <a:r>
-              <a:rPr sz="2400" b="1" i="0">
-                <a:solidFill>
-                  <a:srgbClr val="1A1A1A"/>
-                </a:solidFill>
-                <a:latin typeface="Century Schoolbook"/>
-              </a:rPr>
-              <a:t>B.   </a:t>
-            </a:r>
-            <a:r>
-              <a:rPr sz="2400" b="0" i="0">
-                <a:solidFill>
-                  <a:srgbClr val="1A1A1A"/>
-                </a:solidFill>
-                <a:latin typeface="Century Schoolbook"/>
-              </a:rPr>
-              <a:t>(5/8)</a:t>
-            </a:r>
-            <a:r>
-              <a:rPr sz="2400" b="0" i="0" baseline="30000">
-                <a:solidFill>
-                  <a:srgbClr val="1A1A1A"/>
-                </a:solidFill>
-                <a:latin typeface="Century Schoolbook"/>
-              </a:rPr>
-              <a:t>-6</a:t>
-            </a:r>
-          </a:p>
-        </p:txBody>
-      </p:sp>
-      <p:sp>
-        <p:nvSpPr>
-          <p:cNvPr id="12" name="TextBox 11"/>
-          <p:cNvSpPr txBox="1"/>
-          <p:nvPr/>
-        </p:nvSpPr>
-        <p:spPr>
-          <a:xfrm>
-            <a:off x="1874519" y="4555567"/>
-            <a:ext cx="4572000" cy="548640"/>
-          </a:xfrm>
-          <a:prstGeom prst="rect">
-            <a:avLst/>
-          </a:prstGeom>
-          <a:noFill/>
-        </p:spPr>
-        <p:txBody>
-          <a:bodyPr wrap="square" lIns="45720" rIns="45720" tIns="18288" bIns="18288" anchor="t">
-            <a:spAutoFit/>
-          </a:bodyPr>
-          <a:lstStyle/>
-          <a:p>
-            <a:pPr algn="l"/>
-            <a:r>
-              <a:rPr sz="2400" b="1" i="0">
+            <a:pPr algn="ctr"/>
+            <a:r>
+              <a:rPr sz="3040" b="1" i="0">
                 <a:solidFill>
                   <a:srgbClr val="9E1B32"/>
                 </a:solidFill>
-                <a:latin typeface="Century Schoolbook"/>
-              </a:rPr>
-              <a:t>C.   </a:t>
-            </a:r>
-            <a:r>
-              <a:rPr sz="2400" b="1" i="0">
+                <a:latin typeface="Lexend"/>
+              </a:rPr>
+              <a:t>Answer:   C — (5/8)</a:t>
+            </a:r>
+            <a:r>
+              <a:rPr sz="3040" b="1" i="0" baseline="30000">
                 <a:solidFill>
                   <a:srgbClr val="9E1B32"/>
                 </a:solidFill>
-                <a:latin typeface="Century Schoolbook"/>
-              </a:rPr>
-              <a:t>(5/8)</a:t>
-            </a:r>
-            <a:r>
-              <a:rPr sz="2400" b="1" i="0" baseline="30000">
-                <a:solidFill>
-                  <a:srgbClr val="9E1B32"/>
-                </a:solidFill>
-                <a:latin typeface="Century Schoolbook"/>
-              </a:rPr>
-              <a:t>2</a:t>
-            </a:r>
-          </a:p>
-        </p:txBody>
-      </p:sp>
-      <p:sp>
-        <p:nvSpPr>
-          <p:cNvPr id="13" name="TextBox 12"/>
-          <p:cNvSpPr txBox="1"/>
-          <p:nvPr/>
-        </p:nvSpPr>
-        <p:spPr>
-          <a:xfrm>
-            <a:off x="6629400" y="4555567"/>
-            <a:ext cx="4572000" cy="548640"/>
-          </a:xfrm>
-          <a:prstGeom prst="rect">
-            <a:avLst/>
-          </a:prstGeom>
-          <a:noFill/>
-        </p:spPr>
-        <p:txBody>
-          <a:bodyPr wrap="square" lIns="45720" rIns="45720" tIns="18288" bIns="18288" anchor="t">
-            <a:spAutoFit/>
-          </a:bodyPr>
-          <a:lstStyle/>
-          <a:p>
-            <a:pPr algn="l"/>
-            <a:r>
-              <a:rPr sz="2400" b="1" i="0">
-                <a:solidFill>
-                  <a:srgbClr val="1A1A1A"/>
-                </a:solidFill>
-                <a:latin typeface="Century Schoolbook"/>
-              </a:rPr>
-              <a:t>D.   </a:t>
-            </a:r>
-            <a:r>
-              <a:rPr sz="2400" b="0" i="0">
-                <a:solidFill>
-                  <a:srgbClr val="1A1A1A"/>
-                </a:solidFill>
-                <a:latin typeface="Century Schoolbook"/>
-              </a:rPr>
-              <a:t>(5/8)</a:t>
-            </a:r>
-            <a:r>
-              <a:rPr sz="2400" b="0" i="0" baseline="30000">
-                <a:solidFill>
-                  <a:srgbClr val="1A1A1A"/>
-                </a:solidFill>
-                <a:latin typeface="Century Schoolbook"/>
-              </a:rPr>
-              <a:t>8</a:t>
-            </a:r>
-          </a:p>
-        </p:txBody>
-      </p:sp>
-      <p:sp>
-        <p:nvSpPr>
-          <p:cNvPr id="14" name="TextBox 13"/>
-          <p:cNvSpPr txBox="1"/>
-          <p:nvPr/>
-        </p:nvSpPr>
-        <p:spPr>
-          <a:xfrm>
-            <a:off x="777240" y="5561407"/>
-            <a:ext cx="10607040" cy="548640"/>
-          </a:xfrm>
-          <a:prstGeom prst="rect">
-            <a:avLst/>
-          </a:prstGeom>
-          <a:noFill/>
-        </p:spPr>
-        <p:txBody>
-          <a:bodyPr wrap="square" lIns="45720" rIns="45720" tIns="18288" bIns="18288" anchor="t">
-            <a:spAutoFit/>
-          </a:bodyPr>
-          <a:lstStyle/>
-          <a:p>
-            <a:pPr algn="ctr"/>
-            <a:r>
-              <a:rPr sz="3200" b="1" i="0">
-                <a:solidFill>
-                  <a:srgbClr val="9E1B32"/>
-                </a:solidFill>
-                <a:latin typeface="Century Schoolbook"/>
-              </a:rPr>
-              <a:t>Answer:   C — (5/8)</a:t>
-            </a:r>
-            <a:r>
-              <a:rPr sz="3200" b="1" i="0" baseline="30000">
-                <a:solidFill>
-                  <a:srgbClr val="9E1B32"/>
-                </a:solidFill>
-                <a:latin typeface="Century Schoolbook"/>
+                <a:latin typeface="Lexend"/>
               </a:rPr>
               <a:t>2</a:t>
             </a:r>
@@ -10457,11 +10518,11 @@
           <a:p>
             <a:pPr algn="l"/>
             <a:r>
-              <a:rPr sz="3400" b="1" i="0">
+              <a:rPr sz="3229" b="1" i="0">
                 <a:solidFill>
                   <a:srgbClr val="1A1A1A"/>
                 </a:solidFill>
-                <a:latin typeface="Century Schoolbook"/>
+                <a:latin typeface="Lexend"/>
               </a:rPr>
               <a:t>Whiteboards   ·   Question 7 of 9</a:t>
             </a:r>
@@ -10597,11 +10658,11 @@
           <a:p>
             <a:pPr algn="l"/>
             <a:r>
-              <a:rPr sz="1100" b="0" i="1">
+              <a:rPr sz="1040" b="0" i="0">
                 <a:solidFill>
                   <a:srgbClr val="6B6B6B"/>
                 </a:solidFill>
-                <a:latin typeface="Century Schoolbook"/>
+                <a:latin typeface="Lexend"/>
               </a:rPr>
               <a:t>Grade 7 Accelerated · Unit 3 · Lesson 5 — Applying Exponent Laws</a:t>
             </a:r>
@@ -10632,11 +10693,11 @@
           <a:p>
             <a:pPr algn="r"/>
             <a:r>
-              <a:rPr sz="1100" b="0" i="0">
+              <a:rPr sz="1040" b="0" i="0">
                 <a:solidFill>
                   <a:srgbClr val="6B6B6B"/>
                 </a:solidFill>
-                <a:latin typeface="Century Schoolbook"/>
+                <a:latin typeface="Lexend"/>
               </a:rPr>
               <a:t>27</a:t>
             </a:r>
@@ -10645,7 +10706,7 @@
       </p:sp>
       <p:pic>
         <p:nvPicPr>
-          <p:cNvPr id="8" name="Picture 7" descr="983316d8a340e399.png"/>
+          <p:cNvPr id="8" name="Picture 7" descr="d311d29764bdd385.png"/>
           <p:cNvPicPr>
             <a:picLocks noChangeAspect="1"/>
           </p:cNvPicPr>
@@ -10659,8 +10720,8 @@
         </p:blipFill>
         <p:spPr>
           <a:xfrm>
-            <a:off x="4792980" y="2194560"/>
-            <a:ext cx="2575560" cy="877824"/>
+            <a:off x="4820412" y="2194560"/>
+            <a:ext cx="2520696" cy="838200"/>
           </a:xfrm>
           <a:prstGeom prst="rect">
             <a:avLst/>
@@ -10691,11 +10752,11 @@
           <a:p>
             <a:pPr algn="ctr"/>
             <a:r>
-              <a:rPr sz="2600" b="1" i="0">
+              <a:rPr sz="2470" b="1" i="0">
                 <a:solidFill>
                   <a:srgbClr val="1A1A1A"/>
                 </a:solidFill>
-                <a:latin typeface="Century Schoolbook"/>
+                <a:latin typeface="Lexend"/>
               </a:rPr>
               <a:t>Answer it.</a:t>
             </a:r>
@@ -10744,11 +10805,11 @@
           <a:p>
             <a:pPr algn="l"/>
             <a:r>
-              <a:rPr sz="3400" b="1" i="0">
+              <a:rPr sz="3229" b="1" i="0">
                 <a:solidFill>
                   <a:srgbClr val="1A1A1A"/>
                 </a:solidFill>
-                <a:latin typeface="Century Schoolbook"/>
+                <a:latin typeface="Lexend"/>
               </a:rPr>
               <a:t>Whiteboards   ·   Question 7 of 9</a:t>
             </a:r>
@@ -10884,11 +10945,11 @@
           <a:p>
             <a:pPr algn="l"/>
             <a:r>
-              <a:rPr sz="1100" b="0" i="1">
+              <a:rPr sz="1040" b="0" i="0">
                 <a:solidFill>
                   <a:srgbClr val="6B6B6B"/>
                 </a:solidFill>
-                <a:latin typeface="Century Schoolbook"/>
+                <a:latin typeface="Lexend"/>
               </a:rPr>
               <a:t>Grade 7 Accelerated · Unit 3 · Lesson 5 — Applying Exponent Laws</a:t>
             </a:r>
@@ -10919,11 +10980,11 @@
           <a:p>
             <a:pPr algn="r"/>
             <a:r>
-              <a:rPr sz="1100" b="0" i="0">
+              <a:rPr sz="1040" b="0" i="0">
                 <a:solidFill>
                   <a:srgbClr val="6B6B6B"/>
                 </a:solidFill>
-                <a:latin typeface="Century Schoolbook"/>
+                <a:latin typeface="Lexend"/>
               </a:rPr>
               <a:t>28</a:t>
             </a:r>
@@ -10932,7 +10993,7 @@
       </p:sp>
       <p:pic>
         <p:nvPicPr>
-          <p:cNvPr id="8" name="Picture 7" descr="cccf2e6aacb49bf9.png"/>
+          <p:cNvPr id="8" name="Picture 7" descr="8959dbceac072f91.png"/>
           <p:cNvPicPr>
             <a:picLocks noChangeAspect="1"/>
           </p:cNvPicPr>
@@ -10946,52 +11007,17 @@
         </p:blipFill>
         <p:spPr>
           <a:xfrm>
-            <a:off x="4791455" y="2103120"/>
-            <a:ext cx="2578608" cy="877824"/>
+            <a:off x="4820412" y="2103120"/>
+            <a:ext cx="2520696" cy="838200"/>
           </a:xfrm>
           <a:prstGeom prst="rect">
             <a:avLst/>
           </a:prstGeom>
         </p:spPr>
       </p:pic>
-      <p:sp>
-        <p:nvSpPr>
-          <p:cNvPr id="9" name="TextBox 8"/>
-          <p:cNvSpPr txBox="1"/>
-          <p:nvPr/>
-        </p:nvSpPr>
-        <p:spPr>
-          <a:xfrm>
-            <a:off x="4864607" y="4820412"/>
-            <a:ext cx="1920240" cy="548640"/>
-          </a:xfrm>
-          <a:prstGeom prst="rect">
-            <a:avLst/>
-          </a:prstGeom>
-          <a:noFill/>
-        </p:spPr>
-        <p:txBody>
-          <a:bodyPr wrap="square" lIns="45720" rIns="45720" tIns="18288" bIns="18288" anchor="ctr">
-            <a:spAutoFit/>
-          </a:bodyPr>
-          <a:lstStyle/>
-          <a:p>
-            <a:pPr algn="l"/>
-            <a:r>
-              <a:rPr sz="3200" b="1" i="0">
-                <a:solidFill>
-                  <a:srgbClr val="9E1B32"/>
-                </a:solidFill>
-                <a:latin typeface="Century Schoolbook"/>
-              </a:rPr>
-              <a:t>Answer:</a:t>
-            </a:r>
-          </a:p>
-        </p:txBody>
-      </p:sp>
       <p:pic>
         <p:nvPicPr>
-          <p:cNvPr id="10" name="Picture 9" descr="c37c2f03a9ba8642.png"/>
+          <p:cNvPr id="9" name="Picture 8" descr="ffce3c700a0e00c9.png"/>
           <p:cNvPicPr>
             <a:picLocks noChangeAspect="1"/>
           </p:cNvPicPr>
@@ -11005,8 +11031,91 @@
         </p:blipFill>
         <p:spPr>
           <a:xfrm>
-            <a:off x="6784848" y="4663440"/>
-            <a:ext cx="512064" cy="862584"/>
+            <a:off x="4367783" y="3243072"/>
+            <a:ext cx="1941576" cy="615696"/>
+          </a:xfrm>
+          <a:prstGeom prst="rect">
+            <a:avLst/>
+          </a:prstGeom>
+        </p:spPr>
+      </p:pic>
+      <p:pic>
+        <p:nvPicPr>
+          <p:cNvPr id="10" name="Picture 9" descr="d84f4ec980f8ffbd.png"/>
+          <p:cNvPicPr>
+            <a:picLocks noChangeAspect="1"/>
+          </p:cNvPicPr>
+          <p:nvPr/>
+        </p:nvPicPr>
+        <p:blipFill>
+          <a:blip r:embed="rId4"/>
+          <a:stretch>
+            <a:fillRect/>
+          </a:stretch>
+        </p:blipFill>
+        <p:spPr>
+          <a:xfrm>
+            <a:off x="4367783" y="3986783"/>
+            <a:ext cx="3532632" cy="612648"/>
+          </a:xfrm>
+          <a:prstGeom prst="rect">
+            <a:avLst/>
+          </a:prstGeom>
+        </p:spPr>
+      </p:pic>
+      <p:sp>
+        <p:nvSpPr>
+          <p:cNvPr id="11" name="TextBox 10"/>
+          <p:cNvSpPr txBox="1"/>
+          <p:nvPr/>
+        </p:nvSpPr>
+        <p:spPr>
+          <a:xfrm>
+            <a:off x="4849367" y="4879848"/>
+            <a:ext cx="1920240" cy="548640"/>
+          </a:xfrm>
+          <a:prstGeom prst="rect">
+            <a:avLst/>
+          </a:prstGeom>
+          <a:noFill/>
+        </p:spPr>
+        <p:txBody>
+          <a:bodyPr wrap="square" lIns="45720" rIns="45720" tIns="18288" bIns="18288" anchor="ctr">
+            <a:spAutoFit/>
+          </a:bodyPr>
+          <a:lstStyle/>
+          <a:p>
+            <a:pPr algn="l"/>
+            <a:r>
+              <a:rPr sz="3040" b="1" i="0">
+                <a:solidFill>
+                  <a:srgbClr val="9E1B32"/>
+                </a:solidFill>
+                <a:latin typeface="Lexend"/>
+              </a:rPr>
+              <a:t>Answer:</a:t>
+            </a:r>
+          </a:p>
+        </p:txBody>
+      </p:sp>
+      <p:pic>
+        <p:nvPicPr>
+          <p:cNvPr id="12" name="Picture 11" descr="6ae3029025b12a09.png"/>
+          <p:cNvPicPr>
+            <a:picLocks noChangeAspect="1"/>
+          </p:cNvPicPr>
+          <p:nvPr/>
+        </p:nvPicPr>
+        <p:blipFill>
+          <a:blip r:embed="rId5"/>
+          <a:stretch>
+            <a:fillRect/>
+          </a:stretch>
+        </p:blipFill>
+        <p:spPr>
+          <a:xfrm>
+            <a:off x="6769607" y="4736592"/>
+            <a:ext cx="542544" cy="835152"/>
           </a:xfrm>
           <a:prstGeom prst="rect">
             <a:avLst/>
@@ -11055,11 +11164,11 @@
           <a:p>
             <a:pPr algn="l"/>
             <a:r>
-              <a:rPr sz="3400" b="1" i="0">
+              <a:rPr sz="3229" b="1" i="0">
                 <a:solidFill>
                   <a:srgbClr val="1A1A1A"/>
                 </a:solidFill>
-                <a:latin typeface="Century Schoolbook"/>
+                <a:latin typeface="Lexend"/>
               </a:rPr>
               <a:t>Whiteboards   ·   Question 8 of 9</a:t>
             </a:r>
@@ -11195,11 +11304,11 @@
           <a:p>
             <a:pPr algn="l"/>
             <a:r>
-              <a:rPr sz="1100" b="0" i="1">
+              <a:rPr sz="1040" b="0" i="0">
                 <a:solidFill>
                   <a:srgbClr val="6B6B6B"/>
                 </a:solidFill>
-                <a:latin typeface="Century Schoolbook"/>
+                <a:latin typeface="Lexend"/>
               </a:rPr>
               <a:t>Grade 7 Accelerated · Unit 3 · Lesson 5 — Applying Exponent Laws</a:t>
             </a:r>
@@ -11230,11 +11339,11 @@
           <a:p>
             <a:pPr algn="r"/>
             <a:r>
-              <a:rPr sz="1100" b="0" i="0">
+              <a:rPr sz="1040" b="0" i="0">
                 <a:solidFill>
                   <a:srgbClr val="6B6B6B"/>
                 </a:solidFill>
-                <a:latin typeface="Century Schoolbook"/>
+                <a:latin typeface="Lexend"/>
               </a:rPr>
               <a:t>29</a:t>
             </a:r>
@@ -11243,7 +11352,7 @@
       </p:sp>
       <p:pic>
         <p:nvPicPr>
-          <p:cNvPr id="8" name="Picture 7" descr="c18abdc6135bde12.png"/>
+          <p:cNvPr id="8" name="Picture 7" descr="bf74f091e96668de.png"/>
           <p:cNvPicPr>
             <a:picLocks noChangeAspect="1"/>
           </p:cNvPicPr>
@@ -11257,8 +11366,8 @@
         </p:blipFill>
         <p:spPr>
           <a:xfrm>
-            <a:off x="4486656" y="2194560"/>
-            <a:ext cx="3188208" cy="856488"/>
+            <a:off x="4509516" y="2194560"/>
+            <a:ext cx="3142488" cy="844296"/>
           </a:xfrm>
           <a:prstGeom prst="rect">
             <a:avLst/>
@@ -11289,11 +11398,11 @@
           <a:p>
             <a:pPr algn="ctr"/>
             <a:r>
-              <a:rPr sz="2600" b="1" i="0">
+              <a:rPr sz="2470" b="1" i="0">
                 <a:solidFill>
                   <a:srgbClr val="1A1A1A"/>
                 </a:solidFill>
-                <a:latin typeface="Century Schoolbook"/>
+                <a:latin typeface="Lexend"/>
               </a:rPr>
               <a:t>Answer it.</a:t>
             </a:r>
@@ -11342,11 +11451,11 @@
           <a:p>
             <a:pPr algn="l"/>
             <a:r>
-              <a:rPr sz="3600" b="1" i="0">
+              <a:rPr sz="3420" b="1" i="0">
                 <a:solidFill>
                   <a:srgbClr val="1A1A1A"/>
                 </a:solidFill>
-                <a:latin typeface="Century Schoolbook"/>
+                <a:latin typeface="Lexend"/>
               </a:rPr>
               <a:t>Warm-Up</a:t>
             </a:r>
@@ -11482,11 +11591,11 @@
           <a:p>
             <a:pPr algn="l"/>
             <a:r>
-              <a:rPr sz="1100" b="0" i="1">
+              <a:rPr sz="1040" b="0" i="0">
                 <a:solidFill>
                   <a:srgbClr val="6B6B6B"/>
                 </a:solidFill>
-                <a:latin typeface="Century Schoolbook"/>
+                <a:latin typeface="Lexend"/>
               </a:rPr>
               <a:t>Grade 7 Accelerated · Unit 3 · Lesson 5 — Applying Exponent Laws</a:t>
             </a:r>
@@ -11517,11 +11626,11 @@
           <a:p>
             <a:pPr algn="r"/>
             <a:r>
-              <a:rPr sz="1100" b="0" i="0">
+              <a:rPr sz="1040" b="0" i="0">
                 <a:solidFill>
                   <a:srgbClr val="6B6B6B"/>
                 </a:solidFill>
-                <a:latin typeface="Century Schoolbook"/>
+                <a:latin typeface="Lexend"/>
               </a:rPr>
               <a:t>3</a:t>
             </a:r>
@@ -11537,7 +11646,7 @@
         <p:spPr>
           <a:xfrm>
             <a:off x="1874519" y="1440180"/>
-            <a:ext cx="3058734" cy="457200"/>
+            <a:ext cx="2921808" cy="457200"/>
           </a:xfrm>
           <a:prstGeom prst="rect">
             <a:avLst/>
@@ -11552,11 +11661,11 @@
           <a:p>
             <a:pPr algn="l"/>
             <a:r>
-              <a:rPr sz="2300" b="0" i="0">
+              <a:rPr sz="2180" b="0" i="0">
                 <a:solidFill>
                   <a:srgbClr val="1A1A1A"/>
                 </a:solidFill>
-                <a:latin typeface="Century Schoolbook"/>
+                <a:latin typeface="Lexend"/>
               </a:rPr>
               <a:t>1.   Find the value:  </a:t>
             </a:r>
@@ -11565,7 +11674,7 @@
       </p:sp>
       <p:pic>
         <p:nvPicPr>
-          <p:cNvPr id="9" name="Picture 8" descr="1538ef9a323bca44.png"/>
+          <p:cNvPr id="9" name="Picture 8" descr="dfd26d8ad0c54914.png"/>
           <p:cNvPicPr>
             <a:picLocks noChangeAspect="1"/>
           </p:cNvPicPr>
@@ -11579,8 +11688,8 @@
         </p:blipFill>
         <p:spPr>
           <a:xfrm>
-            <a:off x="4796094" y="1531620"/>
-            <a:ext cx="417576" cy="274320"/>
+            <a:off x="4659168" y="1534668"/>
+            <a:ext cx="396240" cy="268224"/>
           </a:xfrm>
           <a:prstGeom prst="rect">
             <a:avLst/>
@@ -11589,7 +11698,7 @@
       </p:pic>
       <p:pic>
         <p:nvPicPr>
-          <p:cNvPr id="10" name="Picture 9" descr="0f45754c59884ba0.png"/>
+          <p:cNvPr id="10" name="Picture 9" descr="9353f77b4d8885f0.png"/>
           <p:cNvPicPr>
             <a:picLocks noChangeAspect="1"/>
           </p:cNvPicPr>
@@ -11603,8 +11712,8 @@
         </p:blipFill>
         <p:spPr>
           <a:xfrm>
-            <a:off x="5762310" y="1463040"/>
-            <a:ext cx="170688" cy="554736"/>
+            <a:off x="5604048" y="1463040"/>
+            <a:ext cx="185928" cy="539496"/>
           </a:xfrm>
           <a:prstGeom prst="rect">
             <a:avLst/>
@@ -11619,8 +11728,8 @@
         </p:nvSpPr>
         <p:spPr>
           <a:xfrm>
-            <a:off x="1874519" y="2148840"/>
-            <a:ext cx="5677198" cy="457200"/>
+            <a:off x="1874519" y="2142744"/>
+            <a:ext cx="5584547" cy="457200"/>
           </a:xfrm>
           <a:prstGeom prst="rect">
             <a:avLst/>
@@ -11635,11 +11744,11 @@
           <a:p>
             <a:pPr algn="l"/>
             <a:r>
-              <a:rPr sz="2300" b="0" i="0">
+              <a:rPr sz="2180" b="0" i="0">
                 <a:solidFill>
                   <a:srgbClr val="1A1A1A"/>
                 </a:solidFill>
-                <a:latin typeface="Century Schoolbook"/>
+                <a:latin typeface="Lexend"/>
               </a:rPr>
               <a:t>2.   Rewrite with a positive exponent:  </a:t>
             </a:r>
@@ -11648,7 +11757,7 @@
       </p:sp>
       <p:pic>
         <p:nvPicPr>
-          <p:cNvPr id="12" name="Picture 11" descr="82be0161615a5d7f.png"/>
+          <p:cNvPr id="12" name="Picture 11" descr="592658f90555273d.png"/>
           <p:cNvPicPr>
             <a:picLocks noChangeAspect="1"/>
           </p:cNvPicPr>
@@ -11662,8 +11771,8 @@
         </p:blipFill>
         <p:spPr>
           <a:xfrm>
-            <a:off x="7414558" y="2075688"/>
-            <a:ext cx="463296" cy="603504"/>
+            <a:off x="7321907" y="2075688"/>
+            <a:ext cx="432816" cy="591312"/>
           </a:xfrm>
           <a:prstGeom prst="rect">
             <a:avLst/>
@@ -11672,7 +11781,7 @@
       </p:pic>
       <p:pic>
         <p:nvPicPr>
-          <p:cNvPr id="13" name="Picture 12" descr="b031d4b8beeb8414.png"/>
+          <p:cNvPr id="13" name="Picture 12" descr="54c7ca2f4972dcbc.png"/>
           <p:cNvPicPr>
             <a:picLocks noChangeAspect="1"/>
           </p:cNvPicPr>
@@ -11686,8 +11795,8 @@
         </p:blipFill>
         <p:spPr>
           <a:xfrm>
-            <a:off x="8426494" y="2142744"/>
-            <a:ext cx="271272" cy="277368"/>
+            <a:off x="8303363" y="2144268"/>
+            <a:ext cx="268224" cy="274320"/>
           </a:xfrm>
           <a:prstGeom prst="rect">
             <a:avLst/>
@@ -11702,8 +11811,8 @@
         </p:nvSpPr>
         <p:spPr>
           <a:xfrm>
-            <a:off x="1874519" y="2857500"/>
-            <a:ext cx="3065570" cy="457200"/>
+            <a:off x="1874519" y="2845308"/>
+            <a:ext cx="2942940" cy="457200"/>
           </a:xfrm>
           <a:prstGeom prst="rect">
             <a:avLst/>
@@ -11718,11 +11827,11 @@
           <a:p>
             <a:pPr algn="l"/>
             <a:r>
-              <a:rPr sz="2300" b="0" i="0">
+              <a:rPr sz="2180" b="0" i="0">
                 <a:solidFill>
                   <a:srgbClr val="1A1A1A"/>
                 </a:solidFill>
-                <a:latin typeface="Century Schoolbook"/>
+                <a:latin typeface="Lexend"/>
               </a:rPr>
               <a:t>3.   Which is larger, </a:t>
             </a:r>
@@ -11731,7 +11840,7 @@
       </p:sp>
       <p:pic>
         <p:nvPicPr>
-          <p:cNvPr id="15" name="Picture 14" descr="5fa67493f2d0b1ad.png"/>
+          <p:cNvPr id="15" name="Picture 14" descr="6e3fb6dc69f29d2d.png"/>
           <p:cNvPicPr>
             <a:picLocks noChangeAspect="1"/>
           </p:cNvPicPr>
@@ -11745,8 +11854,8 @@
         </p:blipFill>
         <p:spPr>
           <a:xfrm>
-            <a:off x="4802930" y="2948940"/>
-            <a:ext cx="265176" cy="274320"/>
+            <a:off x="4680300" y="2939796"/>
+            <a:ext cx="295656" cy="268224"/>
           </a:xfrm>
           <a:prstGeom prst="rect">
             <a:avLst/>
@@ -11761,8 +11870,8 @@
         </p:nvSpPr>
         <p:spPr>
           <a:xfrm>
-            <a:off x="5068106" y="2857500"/>
-            <a:ext cx="674751" cy="457200"/>
+            <a:off x="4975956" y="2845308"/>
+            <a:ext cx="674509" cy="457200"/>
           </a:xfrm>
           <a:prstGeom prst="rect">
             <a:avLst/>
@@ -11777,11 +11886,11 @@
           <a:p>
             <a:pPr algn="l"/>
             <a:r>
-              <a:rPr sz="2300" b="0" i="0">
+              <a:rPr sz="2180" b="0" i="0">
                 <a:solidFill>
                   <a:srgbClr val="1A1A1A"/>
                 </a:solidFill>
-                <a:latin typeface="Century Schoolbook"/>
+                <a:latin typeface="Lexend"/>
               </a:rPr>
               <a:t> or </a:t>
             </a:r>
@@ -11790,7 +11899,7 @@
       </p:sp>
       <p:pic>
         <p:nvPicPr>
-          <p:cNvPr id="17" name="Picture 16" descr="cd79bb74d01bc946.png"/>
+          <p:cNvPr id="17" name="Picture 16" descr="f5c888b6c84690f7.png"/>
           <p:cNvPicPr>
             <a:picLocks noChangeAspect="1"/>
           </p:cNvPicPr>
@@ -11804,8 +11913,8 @@
         </p:blipFill>
         <p:spPr>
           <a:xfrm>
-            <a:off x="5605697" y="2944368"/>
-            <a:ext cx="265176" cy="283464"/>
+            <a:off x="5513305" y="2938272"/>
+            <a:ext cx="289560" cy="271272"/>
           </a:xfrm>
           <a:prstGeom prst="rect">
             <a:avLst/>
@@ -11820,8 +11929,8 @@
         </p:nvSpPr>
         <p:spPr>
           <a:xfrm>
-            <a:off x="5870873" y="2857500"/>
-            <a:ext cx="347771" cy="457200"/>
+            <a:off x="5802865" y="2845308"/>
+            <a:ext cx="360631" cy="457200"/>
           </a:xfrm>
           <a:prstGeom prst="rect">
             <a:avLst/>
@@ -11836,11 +11945,11 @@
           <a:p>
             <a:pPr algn="l"/>
             <a:r>
-              <a:rPr sz="2300" b="0" i="0">
+              <a:rPr sz="2180" b="0" i="0">
                 <a:solidFill>
                   <a:srgbClr val="1A1A1A"/>
                 </a:solidFill>
-                <a:latin typeface="Century Schoolbook"/>
+                <a:latin typeface="Lexend"/>
               </a:rPr>
               <a:t>?</a:t>
             </a:r>
@@ -11849,7 +11958,7 @@
       </p:sp>
       <p:pic>
         <p:nvPicPr>
-          <p:cNvPr id="19" name="Picture 18" descr="0663332b63521aed.png"/>
+          <p:cNvPr id="19" name="Picture 18" descr="3cd5a7bd49e1112a.png"/>
           <p:cNvPicPr>
             <a:picLocks noChangeAspect="1"/>
           </p:cNvPicPr>
@@ -11863,8 +11972,8 @@
         </p:blipFill>
         <p:spPr>
           <a:xfrm>
-            <a:off x="6630125" y="2944368"/>
-            <a:ext cx="265176" cy="283464"/>
+            <a:off x="6574976" y="2938272"/>
+            <a:ext cx="289560" cy="271272"/>
           </a:xfrm>
           <a:prstGeom prst="rect">
             <a:avLst/>
@@ -11879,8 +11988,8 @@
         </p:nvSpPr>
         <p:spPr>
           <a:xfrm>
-            <a:off x="6895301" y="2857500"/>
-            <a:ext cx="1616354" cy="457200"/>
+            <a:off x="6864536" y="2845308"/>
+            <a:ext cx="1583020" cy="457200"/>
           </a:xfrm>
           <a:prstGeom prst="rect">
             <a:avLst/>
@@ -11895,11 +12004,11 @@
           <a:p>
             <a:pPr algn="l"/>
             <a:r>
-              <a:rPr sz="2300" b="1" i="0">
+              <a:rPr sz="2180" b="1" i="0">
                 <a:solidFill>
                   <a:srgbClr val="9E1B32"/>
                 </a:solidFill>
-                <a:latin typeface="Century Schoolbook"/>
+                <a:latin typeface="Lexend"/>
               </a:rPr>
               <a:t> (81 &gt; 64)</a:t>
             </a:r>
@@ -11914,8 +12023,8 @@
         </p:nvSpPr>
         <p:spPr>
           <a:xfrm>
-            <a:off x="1874519" y="3543300"/>
-            <a:ext cx="4084107" cy="457200"/>
+            <a:off x="1874519" y="3521964"/>
+            <a:ext cx="4065366" cy="457200"/>
           </a:xfrm>
           <a:prstGeom prst="rect">
             <a:avLst/>
@@ -11930,11 +12039,11 @@
           <a:p>
             <a:pPr algn="l"/>
             <a:r>
-              <a:rPr sz="2300" b="0" i="0">
+              <a:rPr sz="2180" b="0" i="0">
                 <a:solidFill>
                   <a:srgbClr val="1A1A1A"/>
                 </a:solidFill>
-                <a:latin typeface="Century Schoolbook"/>
+                <a:latin typeface="Lexend"/>
               </a:rPr>
               <a:t>4.   Write the reciprocal of  </a:t>
             </a:r>
@@ -11943,7 +12052,7 @@
       </p:sp>
       <p:pic>
         <p:nvPicPr>
-          <p:cNvPr id="22" name="Picture 21" descr="e5446a4e89f9a3af.png"/>
+          <p:cNvPr id="22" name="Picture 21" descr="1a683e70796a000f.png"/>
           <p:cNvPicPr>
             <a:picLocks noChangeAspect="1"/>
           </p:cNvPicPr>
@@ -11957,8 +12066,8 @@
         </p:blipFill>
         <p:spPr>
           <a:xfrm>
-            <a:off x="5821467" y="3493008"/>
-            <a:ext cx="377952" cy="557784"/>
+            <a:off x="5802726" y="3480816"/>
+            <a:ext cx="350520" cy="539496"/>
           </a:xfrm>
           <a:prstGeom prst="rect">
             <a:avLst/>
@@ -11967,7 +12076,7 @@
       </p:pic>
       <p:pic>
         <p:nvPicPr>
-          <p:cNvPr id="23" name="Picture 22" descr="84c4e18228051985.png"/>
+          <p:cNvPr id="23" name="Picture 22" descr="bf8821cf3198a95c.png"/>
           <p:cNvPicPr>
             <a:picLocks noChangeAspect="1"/>
           </p:cNvPicPr>
@@ -11981,8 +12090,8 @@
         </p:blipFill>
         <p:spPr>
           <a:xfrm>
-            <a:off x="6748059" y="3493008"/>
-            <a:ext cx="377952" cy="557784"/>
+            <a:off x="6701886" y="3480816"/>
+            <a:ext cx="350520" cy="539496"/>
           </a:xfrm>
           <a:prstGeom prst="rect">
             <a:avLst/>
@@ -12031,11 +12140,11 @@
           <a:p>
             <a:pPr algn="l"/>
             <a:r>
-              <a:rPr sz="3400" b="1" i="0">
+              <a:rPr sz="3229" b="1" i="0">
                 <a:solidFill>
                   <a:srgbClr val="1A1A1A"/>
                 </a:solidFill>
-                <a:latin typeface="Century Schoolbook"/>
+                <a:latin typeface="Lexend"/>
               </a:rPr>
               <a:t>Whiteboards   ·   Question 8 of 9</a:t>
             </a:r>
@@ -12171,11 +12280,11 @@
           <a:p>
             <a:pPr algn="l"/>
             <a:r>
-              <a:rPr sz="1100" b="0" i="1">
+              <a:rPr sz="1040" b="0" i="0">
                 <a:solidFill>
                   <a:srgbClr val="6B6B6B"/>
                 </a:solidFill>
-                <a:latin typeface="Century Schoolbook"/>
+                <a:latin typeface="Lexend"/>
               </a:rPr>
               <a:t>Grade 7 Accelerated · Unit 3 · Lesson 5 — Applying Exponent Laws</a:t>
             </a:r>
@@ -12206,11 +12315,11 @@
           <a:p>
             <a:pPr algn="r"/>
             <a:r>
-              <a:rPr sz="1100" b="0" i="0">
+              <a:rPr sz="1040" b="0" i="0">
                 <a:solidFill>
                   <a:srgbClr val="6B6B6B"/>
                 </a:solidFill>
-                <a:latin typeface="Century Schoolbook"/>
+                <a:latin typeface="Lexend"/>
               </a:rPr>
               <a:t>30</a:t>
             </a:r>
@@ -12219,7 +12328,7 @@
       </p:sp>
       <p:pic>
         <p:nvPicPr>
-          <p:cNvPr id="8" name="Picture 7" descr="7d2314fb4fc5114f.png"/>
+          <p:cNvPr id="8" name="Picture 7" descr="0c942442683f51c6.png"/>
           <p:cNvPicPr>
             <a:picLocks noChangeAspect="1"/>
           </p:cNvPicPr>
@@ -12233,8 +12342,8 @@
         </p:blipFill>
         <p:spPr>
           <a:xfrm>
-            <a:off x="4483607" y="2103120"/>
-            <a:ext cx="3194304" cy="859536"/>
+            <a:off x="4509516" y="2103120"/>
+            <a:ext cx="3142488" cy="841248"/>
           </a:xfrm>
           <a:prstGeom prst="rect">
             <a:avLst/>
@@ -12249,36 +12358,36 @@
         </p:nvSpPr>
         <p:spPr>
           <a:xfrm>
-            <a:off x="4632960" y="4815840"/>
-            <a:ext cx="1920240" cy="548640"/>
-          </a:xfrm>
-          <a:prstGeom prst="rect">
-            <a:avLst/>
-          </a:prstGeom>
-          <a:noFill/>
-        </p:spPr>
-        <p:txBody>
-          <a:bodyPr wrap="square" lIns="45720" rIns="45720" tIns="18288" bIns="18288" anchor="ctr">
-            <a:spAutoFit/>
+            <a:off x="2964155" y="3323844"/>
+            <a:ext cx="1633776" cy="457200"/>
+          </a:xfrm>
+          <a:prstGeom prst="rect">
+            <a:avLst/>
+          </a:prstGeom>
+          <a:noFill/>
+        </p:spPr>
+        <p:txBody>
+          <a:bodyPr wrap="none" lIns="45720" rIns="45720" tIns="18288" bIns="18288" anchor="ctr">
+            <a:noAutofit/>
           </a:bodyPr>
           <a:lstStyle/>
           <a:p>
             <a:pPr algn="l"/>
             <a:r>
-              <a:rPr sz="3200" b="1" i="0">
-                <a:solidFill>
-                  <a:srgbClr val="9E1B32"/>
-                </a:solidFill>
-                <a:latin typeface="Century Schoolbook"/>
-              </a:rPr>
-              <a:t>Answer:</a:t>
+              <a:rPr sz="2750" b="0" i="0">
+                <a:solidFill>
+                  <a:srgbClr val="1A1A1A"/>
+                </a:solidFill>
+                <a:latin typeface="Lexend"/>
+              </a:rPr>
+              <a:t>Inside:  </a:t>
             </a:r>
           </a:p>
         </p:txBody>
       </p:sp>
       <p:pic>
         <p:nvPicPr>
-          <p:cNvPr id="10" name="Picture 9" descr="2e17728107926c07.png"/>
+          <p:cNvPr id="10" name="Picture 9" descr="91fa5aa22598ea80.png"/>
           <p:cNvPicPr>
             <a:picLocks noChangeAspect="1"/>
           </p:cNvPicPr>
@@ -12292,8 +12401,91 @@
         </p:blipFill>
         <p:spPr>
           <a:xfrm>
-            <a:off x="6553199" y="4663440"/>
-            <a:ext cx="975360" cy="853440"/>
+            <a:off x="4460772" y="3246120"/>
+            <a:ext cx="4745736" cy="612648"/>
+          </a:xfrm>
+          <a:prstGeom prst="rect">
+            <a:avLst/>
+          </a:prstGeom>
+        </p:spPr>
+      </p:pic>
+      <p:pic>
+        <p:nvPicPr>
+          <p:cNvPr id="11" name="Picture 10" descr="339da7c30fdc7d4e.png"/>
+          <p:cNvPicPr>
+            <a:picLocks noChangeAspect="1"/>
+          </p:cNvPicPr>
+          <p:nvPr/>
+        </p:nvPicPr>
+        <p:blipFill>
+          <a:blip r:embed="rId4"/>
+          <a:stretch>
+            <a:fillRect/>
+          </a:stretch>
+        </p:blipFill>
+        <p:spPr>
+          <a:xfrm>
+            <a:off x="3019019" y="3986783"/>
+            <a:ext cx="3724656" cy="612648"/>
+          </a:xfrm>
+          <a:prstGeom prst="rect">
+            <a:avLst/>
+          </a:prstGeom>
+        </p:spPr>
+      </p:pic>
+      <p:sp>
+        <p:nvSpPr>
+          <p:cNvPr id="12" name="TextBox 11"/>
+          <p:cNvSpPr txBox="1"/>
+          <p:nvPr/>
+        </p:nvSpPr>
+        <p:spPr>
+          <a:xfrm>
+            <a:off x="4626864" y="4882896"/>
+            <a:ext cx="1920240" cy="548640"/>
+          </a:xfrm>
+          <a:prstGeom prst="rect">
+            <a:avLst/>
+          </a:prstGeom>
+          <a:noFill/>
+        </p:spPr>
+        <p:txBody>
+          <a:bodyPr wrap="square" lIns="45720" rIns="45720" tIns="18288" bIns="18288" anchor="ctr">
+            <a:spAutoFit/>
+          </a:bodyPr>
+          <a:lstStyle/>
+          <a:p>
+            <a:pPr algn="l"/>
+            <a:r>
+              <a:rPr sz="3040" b="1" i="0">
+                <a:solidFill>
+                  <a:srgbClr val="9E1B32"/>
+                </a:solidFill>
+                <a:latin typeface="Lexend"/>
+              </a:rPr>
+              <a:t>Answer:</a:t>
+            </a:r>
+          </a:p>
+        </p:txBody>
+      </p:sp>
+      <p:pic>
+        <p:nvPicPr>
+          <p:cNvPr id="13" name="Picture 12" descr="72cf4eeb1d6aaf7f.png"/>
+          <p:cNvPicPr>
+            <a:picLocks noChangeAspect="1"/>
+          </p:cNvPicPr>
+          <p:nvPr/>
+        </p:nvPicPr>
+        <p:blipFill>
+          <a:blip r:embed="rId5"/>
+          <a:stretch>
+            <a:fillRect/>
+          </a:stretch>
+        </p:blipFill>
+        <p:spPr>
+          <a:xfrm>
+            <a:off x="6547104" y="4736592"/>
+            <a:ext cx="987552" cy="841248"/>
           </a:xfrm>
           <a:prstGeom prst="rect">
             <a:avLst/>
@@ -12342,11 +12534,11 @@
           <a:p>
             <a:pPr algn="l"/>
             <a:r>
-              <a:rPr sz="3400" b="1" i="0">
+              <a:rPr sz="3229" b="1" i="0">
                 <a:solidFill>
                   <a:srgbClr val="1A1A1A"/>
                 </a:solidFill>
-                <a:latin typeface="Century Schoolbook"/>
+                <a:latin typeface="Lexend"/>
               </a:rPr>
               <a:t>Whiteboards   ·   Question 9 of 9</a:t>
             </a:r>
@@ -12482,11 +12674,11 @@
           <a:p>
             <a:pPr algn="l"/>
             <a:r>
-              <a:rPr sz="1100" b="0" i="1">
+              <a:rPr sz="1040" b="0" i="0">
                 <a:solidFill>
                   <a:srgbClr val="6B6B6B"/>
                 </a:solidFill>
-                <a:latin typeface="Century Schoolbook"/>
+                <a:latin typeface="Lexend"/>
               </a:rPr>
               <a:t>Grade 7 Accelerated · Unit 3 · Lesson 5 — Applying Exponent Laws</a:t>
             </a:r>
@@ -12517,11 +12709,11 @@
           <a:p>
             <a:pPr algn="r"/>
             <a:r>
-              <a:rPr sz="1100" b="0" i="0">
+              <a:rPr sz="1040" b="0" i="0">
                 <a:solidFill>
                   <a:srgbClr val="6B6B6B"/>
                 </a:solidFill>
-                <a:latin typeface="Century Schoolbook"/>
+                <a:latin typeface="Lexend"/>
               </a:rPr>
               <a:t>31</a:t>
             </a:r>
@@ -12536,8 +12728,8 @@
         </p:nvSpPr>
         <p:spPr>
           <a:xfrm>
-            <a:off x="2253551" y="2304288"/>
-            <a:ext cx="2202162" cy="457200"/>
+            <a:off x="2301793" y="2299715"/>
+            <a:ext cx="2211325" cy="457200"/>
           </a:xfrm>
           <a:prstGeom prst="rect">
             <a:avLst/>
@@ -12552,11 +12744,11 @@
           <a:p>
             <a:pPr algn="l"/>
             <a:r>
-              <a:rPr sz="2600" b="0" i="0">
+              <a:rPr sz="2470" b="0" i="0">
                 <a:solidFill>
                   <a:srgbClr val="1A1A1A"/>
                 </a:solidFill>
-                <a:latin typeface="Century Schoolbook"/>
+                <a:latin typeface="Lexend"/>
               </a:rPr>
               <a:t>Marco says  </a:t>
             </a:r>
@@ -12565,7 +12757,7 @@
       </p:sp>
       <p:pic>
         <p:nvPicPr>
-          <p:cNvPr id="9" name="Picture 8" descr="bcbcbf803cfe7ecd.png"/>
+          <p:cNvPr id="9" name="Picture 8" descr="dc9bb23a8d85d0e2.png"/>
           <p:cNvPicPr>
             <a:picLocks noChangeAspect="1"/>
           </p:cNvPicPr>
@@ -12579,8 +12771,8 @@
         </p:blipFill>
         <p:spPr>
           <a:xfrm>
-            <a:off x="4318553" y="2194560"/>
-            <a:ext cx="1246632" cy="676656"/>
+            <a:off x="4375959" y="2194560"/>
+            <a:ext cx="1161288" cy="667512"/>
           </a:xfrm>
           <a:prstGeom prst="rect">
             <a:avLst/>
@@ -12595,8 +12787,8 @@
         </p:nvSpPr>
         <p:spPr>
           <a:xfrm>
-            <a:off x="5565185" y="2304288"/>
-            <a:ext cx="3705751" cy="457200"/>
+            <a:off x="5537247" y="2299715"/>
+            <a:ext cx="3679351" cy="457200"/>
           </a:xfrm>
           <a:prstGeom prst="rect">
             <a:avLst/>
@@ -12611,11 +12803,11 @@
           <a:p>
             <a:pPr algn="l"/>
             <a:r>
-              <a:rPr sz="2600" b="0" i="0">
+              <a:rPr sz="2470" b="0" i="0">
                 <a:solidFill>
                   <a:srgbClr val="1A1A1A"/>
                 </a:solidFill>
-                <a:latin typeface="Century Schoolbook"/>
+                <a:latin typeface="Lexend"/>
               </a:rPr>
               <a:t>  can be rewritten as  </a:t>
             </a:r>
@@ -12624,7 +12816,7 @@
       </p:sp>
       <p:pic>
         <p:nvPicPr>
-          <p:cNvPr id="11" name="Picture 10" descr="9b43b28c9551277e.png"/>
+          <p:cNvPr id="11" name="Picture 10" descr="75b3b503a37e46e7.png"/>
           <p:cNvPicPr>
             <a:picLocks noChangeAspect="1"/>
           </p:cNvPicPr>
@@ -12638,8 +12830,8 @@
         </p:blipFill>
         <p:spPr>
           <a:xfrm>
-            <a:off x="9133776" y="2194560"/>
-            <a:ext cx="774192" cy="676656"/>
+            <a:off x="9079438" y="2194560"/>
+            <a:ext cx="780288" cy="667512"/>
           </a:xfrm>
           <a:prstGeom prst="rect">
             <a:avLst/>
@@ -12654,7 +12846,7 @@
         </p:nvSpPr>
         <p:spPr>
           <a:xfrm>
-            <a:off x="777240" y="3145535"/>
+            <a:off x="777240" y="3136391"/>
             <a:ext cx="10607040" cy="465151"/>
           </a:xfrm>
           <a:prstGeom prst="rect">
@@ -12670,11 +12862,11 @@
           <a:p>
             <a:pPr algn="ctr"/>
             <a:r>
-              <a:rPr sz="2600" b="0" i="0">
+              <a:rPr sz="2470" b="0" i="0">
                 <a:solidFill>
                   <a:srgbClr val="1A1A1A"/>
                 </a:solidFill>
-                <a:latin typeface="Century Schoolbook"/>
+                <a:latin typeface="Lexend"/>
               </a:rPr>
               <a:t>because 'two negatives make a positive.'  Is he right?</a:t>
             </a:r>
@@ -12705,11 +12897,11 @@
           <a:p>
             <a:pPr algn="ctr"/>
             <a:r>
-              <a:rPr sz="2600" b="1" i="0">
+              <a:rPr sz="2470" b="1" i="0">
                 <a:solidFill>
                   <a:srgbClr val="1A1A1A"/>
                 </a:solidFill>
-                <a:latin typeface="Century Schoolbook"/>
+                <a:latin typeface="Lexend"/>
               </a:rPr>
               <a:t>Write your answer in sentences.</a:t>
             </a:r>
@@ -12758,11 +12950,11 @@
           <a:p>
             <a:pPr algn="l"/>
             <a:r>
-              <a:rPr sz="3400" b="1" i="0">
+              <a:rPr sz="3229" b="1" i="0">
                 <a:solidFill>
                   <a:srgbClr val="1A1A1A"/>
                 </a:solidFill>
-                <a:latin typeface="Century Schoolbook"/>
+                <a:latin typeface="Lexend"/>
               </a:rPr>
               <a:t>Whiteboards   ·   Question 9 of 9</a:t>
             </a:r>
@@ -12898,11 +13090,11 @@
           <a:p>
             <a:pPr algn="l"/>
             <a:r>
-              <a:rPr sz="1100" b="0" i="1">
+              <a:rPr sz="1040" b="0" i="0">
                 <a:solidFill>
                   <a:srgbClr val="6B6B6B"/>
                 </a:solidFill>
-                <a:latin typeface="Century Schoolbook"/>
+                <a:latin typeface="Lexend"/>
               </a:rPr>
               <a:t>Grade 7 Accelerated · Unit 3 · Lesson 5 — Applying Exponent Laws</a:t>
             </a:r>
@@ -12933,11 +13125,11 @@
           <a:p>
             <a:pPr algn="r"/>
             <a:r>
-              <a:rPr sz="1100" b="0" i="0">
+              <a:rPr sz="1040" b="0" i="0">
                 <a:solidFill>
                   <a:srgbClr val="6B6B6B"/>
                 </a:solidFill>
-                <a:latin typeface="Century Schoolbook"/>
+                <a:latin typeface="Lexend"/>
               </a:rPr>
               <a:t>32</a:t>
             </a:r>
@@ -12952,8 +13144,8 @@
         </p:nvSpPr>
         <p:spPr>
           <a:xfrm>
-            <a:off x="2248979" y="2215896"/>
-            <a:ext cx="2202162" cy="457200"/>
+            <a:off x="2295697" y="2211323"/>
+            <a:ext cx="2211325" cy="457200"/>
           </a:xfrm>
           <a:prstGeom prst="rect">
             <a:avLst/>
@@ -12968,11 +13160,11 @@
           <a:p>
             <a:pPr algn="l"/>
             <a:r>
-              <a:rPr sz="2600" b="0" i="0">
+              <a:rPr sz="2470" b="0" i="0">
                 <a:solidFill>
                   <a:srgbClr val="1A1A1A"/>
                 </a:solidFill>
-                <a:latin typeface="Century Schoolbook"/>
+                <a:latin typeface="Lexend"/>
               </a:rPr>
               <a:t>Marco says  </a:t>
             </a:r>
@@ -12981,7 +13173,7 @@
       </p:sp>
       <p:pic>
         <p:nvPicPr>
-          <p:cNvPr id="9" name="Picture 8" descr="61e0767165f6b191.png"/>
+          <p:cNvPr id="9" name="Picture 8" descr="337392e9b7df8f62.png"/>
           <p:cNvPicPr>
             <a:picLocks noChangeAspect="1"/>
           </p:cNvPicPr>
@@ -12995,8 +13187,8 @@
         </p:blipFill>
         <p:spPr>
           <a:xfrm>
-            <a:off x="4313981" y="2103120"/>
-            <a:ext cx="1252728" cy="682752"/>
+            <a:off x="4369863" y="2103120"/>
+            <a:ext cx="1167384" cy="673608"/>
           </a:xfrm>
           <a:prstGeom prst="rect">
             <a:avLst/>
@@ -13011,8 +13203,8 @@
         </p:nvSpPr>
         <p:spPr>
           <a:xfrm>
-            <a:off x="5566709" y="2215896"/>
-            <a:ext cx="3705751" cy="457200"/>
+            <a:off x="5537247" y="2211323"/>
+            <a:ext cx="3679351" cy="457200"/>
           </a:xfrm>
           <a:prstGeom prst="rect">
             <a:avLst/>
@@ -13027,11 +13219,11 @@
           <a:p>
             <a:pPr algn="l"/>
             <a:r>
-              <a:rPr sz="2600" b="0" i="0">
+              <a:rPr sz="2470" b="0" i="0">
                 <a:solidFill>
                   <a:srgbClr val="1A1A1A"/>
                 </a:solidFill>
-                <a:latin typeface="Century Schoolbook"/>
+                <a:latin typeface="Lexend"/>
               </a:rPr>
               <a:t>  can be rewritten as  </a:t>
             </a:r>
@@ -13040,7 +13232,7 @@
       </p:sp>
       <p:pic>
         <p:nvPicPr>
-          <p:cNvPr id="11" name="Picture 10" descr="5c0a9d4ef3b8e54c.png"/>
+          <p:cNvPr id="11" name="Picture 10" descr="35a9c06a4a4a8536.png"/>
           <p:cNvPicPr>
             <a:picLocks noChangeAspect="1"/>
           </p:cNvPicPr>
@@ -13054,8 +13246,8 @@
         </p:blipFill>
         <p:spPr>
           <a:xfrm>
-            <a:off x="9135300" y="2103120"/>
-            <a:ext cx="777240" cy="682752"/>
+            <a:off x="9079438" y="2103120"/>
+            <a:ext cx="786384" cy="673608"/>
           </a:xfrm>
           <a:prstGeom prst="rect">
             <a:avLst/>
@@ -13070,7 +13262,7 @@
         </p:nvSpPr>
         <p:spPr>
           <a:xfrm>
-            <a:off x="777240" y="3060191"/>
+            <a:off x="777240" y="3051048"/>
             <a:ext cx="10607040" cy="465151"/>
           </a:xfrm>
           <a:prstGeom prst="rect">
@@ -13086,11 +13278,11 @@
           <a:p>
             <a:pPr algn="ctr"/>
             <a:r>
-              <a:rPr sz="2600" b="0" i="0">
+              <a:rPr sz="2470" b="0" i="0">
                 <a:solidFill>
                   <a:srgbClr val="1A1A1A"/>
                 </a:solidFill>
-                <a:latin typeface="Century Schoolbook"/>
+                <a:latin typeface="Lexend"/>
               </a:rPr>
               <a:t>because 'two negatives make a positive.'  Is he right?</a:t>
             </a:r>
@@ -13105,7 +13297,66 @@
         </p:nvSpPr>
         <p:spPr>
           <a:xfrm>
-            <a:off x="777240" y="4663440"/>
+            <a:off x="1819625" y="3676219"/>
+            <a:ext cx="8659428" cy="457200"/>
+          </a:xfrm>
+          <a:prstGeom prst="rect">
+            <a:avLst/>
+          </a:prstGeom>
+          <a:noFill/>
+        </p:spPr>
+        <p:txBody>
+          <a:bodyPr wrap="none" lIns="45720" rIns="45720" tIns="18288" bIns="18288" anchor="ctr">
+            <a:noAutofit/>
+          </a:bodyPr>
+          <a:lstStyle/>
+          <a:p>
+            <a:pPr algn="l"/>
+            <a:r>
+              <a:rPr sz="2330" b="0" i="0">
+                <a:solidFill>
+                  <a:srgbClr val="1A1A1A"/>
+                </a:solidFill>
+                <a:latin typeface="Lexend"/>
+              </a:rPr>
+              <a:t>The negative exponent flips the fraction. The sign stays.</a:t>
+            </a:r>
+          </a:p>
+        </p:txBody>
+      </p:sp>
+      <p:pic>
+        <p:nvPicPr>
+          <p:cNvPr id="14" name="Picture 13" descr="e6d15a07a9b81810.png"/>
+          <p:cNvPicPr>
+            <a:picLocks noChangeAspect="1"/>
+          </p:cNvPicPr>
+          <p:nvPr/>
+        </p:nvPicPr>
+        <p:blipFill>
+          <a:blip r:embed="rId4"/>
+          <a:stretch>
+            <a:fillRect/>
+          </a:stretch>
+        </p:blipFill>
+        <p:spPr>
+          <a:xfrm>
+            <a:off x="1874489" y="4201999"/>
+            <a:ext cx="2002536" cy="515112"/>
+          </a:xfrm>
+          <a:prstGeom prst="rect">
+            <a:avLst/>
+          </a:prstGeom>
+        </p:spPr>
+      </p:pic>
+      <p:sp>
+        <p:nvSpPr>
+          <p:cNvPr id="15" name="TextBox 14"/>
+          <p:cNvSpPr txBox="1"/>
+          <p:nvPr/>
+        </p:nvSpPr>
+        <p:spPr>
+          <a:xfrm>
+            <a:off x="777240" y="4854271"/>
             <a:ext cx="10607040" cy="548640"/>
           </a:xfrm>
           <a:prstGeom prst="rect">
@@ -13121,38 +13372,38 @@
           <a:p>
             <a:pPr algn="ctr"/>
             <a:r>
-              <a:rPr sz="3200" b="1" i="0">
+              <a:rPr sz="3040" b="1" i="0">
                 <a:solidFill>
                   <a:srgbClr val="9E1B32"/>
                 </a:solidFill>
-                <a:latin typeface="Century Schoolbook"/>
+                <a:latin typeface="Lexend"/>
               </a:rPr>
               <a:t>Answer:   No — (−2/3)</a:t>
             </a:r>
             <a:r>
-              <a:rPr sz="3200" b="1" i="0" baseline="30000">
+              <a:rPr sz="3040" b="1" i="0" baseline="30000">
                 <a:solidFill>
                   <a:srgbClr val="9E1B32"/>
                 </a:solidFill>
-                <a:latin typeface="Century Schoolbook"/>
+                <a:latin typeface="Lexend"/>
               </a:rPr>
               <a:t>-5</a:t>
             </a:r>
             <a:r>
-              <a:rPr sz="3200" b="1" i="0">
+              <a:rPr sz="3040" b="1" i="0">
                 <a:solidFill>
                   <a:srgbClr val="9E1B32"/>
                 </a:solidFill>
-                <a:latin typeface="Century Schoolbook"/>
+                <a:latin typeface="Lexend"/>
               </a:rPr>
               <a:t> = (−3/2)</a:t>
             </a:r>
             <a:r>
-              <a:rPr sz="3200" b="1" i="0" baseline="30000">
+              <a:rPr sz="3040" b="1" i="0" baseline="30000">
                 <a:solidFill>
                   <a:srgbClr val="9E1B32"/>
                 </a:solidFill>
-                <a:latin typeface="Century Schoolbook"/>
+                <a:latin typeface="Lexend"/>
               </a:rPr>
               <a:t>5</a:t>
             </a:r>
@@ -13201,11 +13452,11 @@
           <a:p>
             <a:pPr algn="l"/>
             <a:r>
-              <a:rPr sz="3600" b="1" i="0">
+              <a:rPr sz="3420" b="1" i="0">
                 <a:solidFill>
                   <a:srgbClr val="1A1A1A"/>
                 </a:solidFill>
-                <a:latin typeface="Century Schoolbook"/>
+                <a:latin typeface="Lexend"/>
               </a:rPr>
               <a:t>Independent Set</a:t>
             </a:r>
@@ -13341,11 +13592,11 @@
           <a:p>
             <a:pPr algn="l"/>
             <a:r>
-              <a:rPr sz="1100" b="0" i="1">
+              <a:rPr sz="1040" b="0" i="0">
                 <a:solidFill>
                   <a:srgbClr val="6B6B6B"/>
                 </a:solidFill>
-                <a:latin typeface="Century Schoolbook"/>
+                <a:latin typeface="Lexend"/>
               </a:rPr>
               <a:t>Grade 7 Accelerated · Unit 3 · Lesson 5 — Applying Exponent Laws</a:t>
             </a:r>
@@ -13376,11 +13627,11 @@
           <a:p>
             <a:pPr algn="r"/>
             <a:r>
-              <a:rPr sz="1100" b="0" i="0">
+              <a:rPr sz="1040" b="0" i="0">
                 <a:solidFill>
                   <a:srgbClr val="6B6B6B"/>
                 </a:solidFill>
-                <a:latin typeface="Century Schoolbook"/>
+                <a:latin typeface="Lexend"/>
               </a:rPr>
               <a:t>33</a:t>
             </a:r>
@@ -13395,7 +13646,7 @@
         </p:nvSpPr>
         <p:spPr>
           <a:xfrm>
-            <a:off x="960120" y="1568195"/>
+            <a:off x="960120" y="1559051"/>
             <a:ext cx="548640" cy="457200"/>
           </a:xfrm>
           <a:prstGeom prst="rect">
@@ -13411,11 +13662,11 @@
           <a:p>
             <a:pPr algn="l"/>
             <a:r>
-              <a:rPr sz="2300" b="1" i="0">
+              <a:rPr sz="2180" b="1" i="0">
                 <a:solidFill>
                   <a:srgbClr val="0B5394"/>
                 </a:solidFill>
-                <a:latin typeface="Century Schoolbook"/>
+                <a:latin typeface="Lexend"/>
               </a:rPr>
               <a:t>1.</a:t>
             </a:r>
@@ -13430,8 +13681,8 @@
         </p:nvSpPr>
         <p:spPr>
           <a:xfrm>
-            <a:off x="1554480" y="1568195"/>
-            <a:ext cx="5166904" cy="457200"/>
+            <a:off x="1554480" y="1559051"/>
+            <a:ext cx="5109160" cy="457200"/>
           </a:xfrm>
           <a:prstGeom prst="rect">
             <a:avLst/>
@@ -13446,11 +13697,11 @@
           <a:p>
             <a:pPr algn="l"/>
             <a:r>
-              <a:rPr sz="2300" b="0" i="0">
+              <a:rPr sz="2180" b="0" i="0">
                 <a:solidFill>
                   <a:srgbClr val="1A1A1A"/>
                 </a:solidFill>
-                <a:latin typeface="Century Schoolbook"/>
+                <a:latin typeface="Lexend"/>
               </a:rPr>
               <a:t>Rewrite with a positive exponent.  </a:t>
             </a:r>
@@ -13459,7 +13710,7 @@
       </p:sp>
       <p:pic>
         <p:nvPicPr>
-          <p:cNvPr id="10" name="Picture 9" descr="b9b133d5c474e0a9.png"/>
+          <p:cNvPr id="10" name="Picture 9" descr="8957ceb11154703f.png"/>
           <p:cNvPicPr>
             <a:picLocks noChangeAspect="1"/>
           </p:cNvPicPr>
@@ -13473,8 +13724,8 @@
         </p:blipFill>
         <p:spPr>
           <a:xfrm>
-            <a:off x="6584224" y="1517904"/>
-            <a:ext cx="798576" cy="557784"/>
+            <a:off x="6526480" y="1517904"/>
+            <a:ext cx="786384" cy="539496"/>
           </a:xfrm>
           <a:prstGeom prst="rect">
             <a:avLst/>
@@ -13489,7 +13740,7 @@
         </p:nvSpPr>
         <p:spPr>
           <a:xfrm>
-            <a:off x="960120" y="2310383"/>
+            <a:off x="960120" y="2281428"/>
             <a:ext cx="548640" cy="457200"/>
           </a:xfrm>
           <a:prstGeom prst="rect">
@@ -13505,11 +13756,11 @@
           <a:p>
             <a:pPr algn="l"/>
             <a:r>
-              <a:rPr sz="2300" b="1" i="0">
+              <a:rPr sz="2180" b="1" i="0">
                 <a:solidFill>
                   <a:srgbClr val="0B5394"/>
                 </a:solidFill>
-                <a:latin typeface="Century Schoolbook"/>
+                <a:latin typeface="Lexend"/>
               </a:rPr>
               <a:t>2.</a:t>
             </a:r>
@@ -13524,8 +13775,8 @@
         </p:nvSpPr>
         <p:spPr>
           <a:xfrm>
-            <a:off x="1554480" y="2310383"/>
-            <a:ext cx="2548440" cy="457200"/>
+            <a:off x="1554480" y="2281428"/>
+            <a:ext cx="2460558" cy="457200"/>
           </a:xfrm>
           <a:prstGeom prst="rect">
             <a:avLst/>
@@ -13540,11 +13791,11 @@
           <a:p>
             <a:pPr algn="l"/>
             <a:r>
-              <a:rPr sz="2300" b="0" i="0">
+              <a:rPr sz="2180" b="0" i="0">
                 <a:solidFill>
                   <a:srgbClr val="1A1A1A"/>
                 </a:solidFill>
-                <a:latin typeface="Century Schoolbook"/>
+                <a:latin typeface="Lexend"/>
               </a:rPr>
               <a:t>Find the value.  </a:t>
             </a:r>
@@ -13553,7 +13804,7 @@
       </p:sp>
       <p:pic>
         <p:nvPicPr>
-          <p:cNvPr id="13" name="Picture 12" descr="3fba44314d6758c9.png"/>
+          <p:cNvPr id="13" name="Picture 12" descr="8047be576e0f8206.png"/>
           <p:cNvPicPr>
             <a:picLocks noChangeAspect="1"/>
           </p:cNvPicPr>
@@ -13567,8 +13818,8 @@
         </p:blipFill>
         <p:spPr>
           <a:xfrm>
-            <a:off x="3965760" y="2258568"/>
-            <a:ext cx="801624" cy="560832"/>
+            <a:off x="3877878" y="2240280"/>
+            <a:ext cx="771144" cy="539496"/>
           </a:xfrm>
           <a:prstGeom prst="rect">
             <a:avLst/>
@@ -13583,7 +13834,7 @@
         </p:nvSpPr>
         <p:spPr>
           <a:xfrm>
-            <a:off x="960120" y="3060192"/>
+            <a:off x="960120" y="3003804"/>
             <a:ext cx="548640" cy="457200"/>
           </a:xfrm>
           <a:prstGeom prst="rect">
@@ -13599,11 +13850,11 @@
           <a:p>
             <a:pPr algn="l"/>
             <a:r>
-              <a:rPr sz="2300" b="1" i="0">
+              <a:rPr sz="2180" b="1" i="0">
                 <a:solidFill>
                   <a:srgbClr val="0B5394"/>
                 </a:solidFill>
-                <a:latin typeface="Century Schoolbook"/>
+                <a:latin typeface="Lexend"/>
               </a:rPr>
               <a:t>3.</a:t>
             </a:r>
@@ -13618,8 +13869,8 @@
         </p:nvSpPr>
         <p:spPr>
           <a:xfrm>
-            <a:off x="1554480" y="3060192"/>
-            <a:ext cx="5166904" cy="457200"/>
+            <a:off x="1554480" y="3003804"/>
+            <a:ext cx="5109160" cy="457200"/>
           </a:xfrm>
           <a:prstGeom prst="rect">
             <a:avLst/>
@@ -13634,11 +13885,11 @@
           <a:p>
             <a:pPr algn="l"/>
             <a:r>
-              <a:rPr sz="2300" b="0" i="0">
+              <a:rPr sz="2180" b="0" i="0">
                 <a:solidFill>
                   <a:srgbClr val="1A1A1A"/>
                 </a:solidFill>
-                <a:latin typeface="Century Schoolbook"/>
+                <a:latin typeface="Lexend"/>
               </a:rPr>
               <a:t>Rewrite with a positive exponent.  </a:t>
             </a:r>
@@ -13647,7 +13898,7 @@
       </p:sp>
       <p:pic>
         <p:nvPicPr>
-          <p:cNvPr id="16" name="Picture 15" descr="1d4029ad0054a1d3.png"/>
+          <p:cNvPr id="16" name="Picture 15" descr="6754f41029653ff7.png"/>
           <p:cNvPicPr>
             <a:picLocks noChangeAspect="1"/>
           </p:cNvPicPr>
@@ -13661,8 +13912,8 @@
         </p:blipFill>
         <p:spPr>
           <a:xfrm>
-            <a:off x="6584224" y="3002280"/>
-            <a:ext cx="1021080" cy="573024"/>
+            <a:off x="6526480" y="2962656"/>
+            <a:ext cx="944880" cy="539496"/>
           </a:xfrm>
           <a:prstGeom prst="rect">
             <a:avLst/>
@@ -13677,7 +13928,7 @@
         </p:nvSpPr>
         <p:spPr>
           <a:xfrm>
-            <a:off x="960120" y="3803903"/>
+            <a:off x="960120" y="3727704"/>
             <a:ext cx="548640" cy="457200"/>
           </a:xfrm>
           <a:prstGeom prst="rect">
@@ -13693,11 +13944,11 @@
           <a:p>
             <a:pPr algn="l"/>
             <a:r>
-              <a:rPr sz="2300" b="1" i="0">
+              <a:rPr sz="2180" b="1" i="0">
                 <a:solidFill>
                   <a:srgbClr val="0B5394"/>
                 </a:solidFill>
-                <a:latin typeface="Century Schoolbook"/>
+                <a:latin typeface="Lexend"/>
               </a:rPr>
               <a:t>4.</a:t>
             </a:r>
@@ -13712,8 +13963,8 @@
         </p:nvSpPr>
         <p:spPr>
           <a:xfrm>
-            <a:off x="1554480" y="3803903"/>
-            <a:ext cx="2548440" cy="457200"/>
+            <a:off x="1554480" y="3727704"/>
+            <a:ext cx="2460558" cy="457200"/>
           </a:xfrm>
           <a:prstGeom prst="rect">
             <a:avLst/>
@@ -13728,11 +13979,11 @@
           <a:p>
             <a:pPr algn="l"/>
             <a:r>
-              <a:rPr sz="2300" b="0" i="0">
+              <a:rPr sz="2180" b="0" i="0">
                 <a:solidFill>
                   <a:srgbClr val="1A1A1A"/>
                 </a:solidFill>
-                <a:latin typeface="Century Schoolbook"/>
+                <a:latin typeface="Lexend"/>
               </a:rPr>
               <a:t>Find the value.  </a:t>
             </a:r>
@@ -13741,7 +13992,7 @@
       </p:sp>
       <p:pic>
         <p:nvPicPr>
-          <p:cNvPr id="19" name="Picture 18" descr="8b0a8d1200928482.png"/>
+          <p:cNvPr id="19" name="Picture 18" descr="5d72cdcfdc86596d.png"/>
           <p:cNvPicPr>
             <a:picLocks noChangeAspect="1"/>
           </p:cNvPicPr>
@@ -13755,8 +14006,8 @@
         </p:blipFill>
         <p:spPr>
           <a:xfrm>
-            <a:off x="3965760" y="3758183"/>
-            <a:ext cx="795528" cy="548640"/>
+            <a:off x="3877878" y="3685032"/>
+            <a:ext cx="777240" cy="542544"/>
           </a:xfrm>
           <a:prstGeom prst="rect">
             <a:avLst/>
@@ -13771,7 +14022,7 @@
         </p:nvSpPr>
         <p:spPr>
           <a:xfrm>
-            <a:off x="960120" y="4538472"/>
+            <a:off x="960120" y="4453128"/>
             <a:ext cx="548640" cy="457200"/>
           </a:xfrm>
           <a:prstGeom prst="rect">
@@ -13787,11 +14038,11 @@
           <a:p>
             <a:pPr algn="l"/>
             <a:r>
-              <a:rPr sz="2300" b="1" i="0">
+              <a:rPr sz="2180" b="1" i="0">
                 <a:solidFill>
                   <a:srgbClr val="0B5394"/>
                 </a:solidFill>
-                <a:latin typeface="Century Schoolbook"/>
+                <a:latin typeface="Lexend"/>
               </a:rPr>
               <a:t>5.</a:t>
             </a:r>
@@ -13806,8 +14057,8 @@
         </p:nvSpPr>
         <p:spPr>
           <a:xfrm>
-            <a:off x="1554480" y="4538472"/>
-            <a:ext cx="2548440" cy="457200"/>
+            <a:off x="1554480" y="4453128"/>
+            <a:ext cx="2460558" cy="457200"/>
           </a:xfrm>
           <a:prstGeom prst="rect">
             <a:avLst/>
@@ -13822,11 +14073,11 @@
           <a:p>
             <a:pPr algn="l"/>
             <a:r>
-              <a:rPr sz="2300" b="0" i="0">
+              <a:rPr sz="2180" b="0" i="0">
                 <a:solidFill>
                   <a:srgbClr val="1A1A1A"/>
                 </a:solidFill>
-                <a:latin typeface="Century Schoolbook"/>
+                <a:latin typeface="Lexend"/>
               </a:rPr>
               <a:t>Find the value.  </a:t>
             </a:r>
@@ -13835,7 +14086,7 @@
       </p:sp>
       <p:pic>
         <p:nvPicPr>
-          <p:cNvPr id="22" name="Picture 21" descr="be7b6b1f4326d3a3.png"/>
+          <p:cNvPr id="22" name="Picture 21" descr="987c9144230c553a.png"/>
           <p:cNvPicPr>
             <a:picLocks noChangeAspect="1"/>
           </p:cNvPicPr>
@@ -13849,8 +14100,8 @@
         </p:blipFill>
         <p:spPr>
           <a:xfrm>
-            <a:off x="3965760" y="4489703"/>
-            <a:ext cx="1676400" cy="554736"/>
+            <a:off x="3877878" y="4410456"/>
+            <a:ext cx="1633728" cy="542544"/>
           </a:xfrm>
           <a:prstGeom prst="rect">
             <a:avLst/>
@@ -13865,7 +14116,7 @@
         </p:nvSpPr>
         <p:spPr>
           <a:xfrm>
-            <a:off x="960120" y="5274563"/>
+            <a:off x="960120" y="5175504"/>
             <a:ext cx="548640" cy="457200"/>
           </a:xfrm>
           <a:prstGeom prst="rect">
@@ -13881,11 +14132,11 @@
           <a:p>
             <a:pPr algn="l"/>
             <a:r>
-              <a:rPr sz="2300" b="1" i="0">
+              <a:rPr sz="2180" b="1" i="0">
                 <a:solidFill>
                   <a:srgbClr val="0B5394"/>
                 </a:solidFill>
-                <a:latin typeface="Century Schoolbook"/>
+                <a:latin typeface="Lexend"/>
               </a:rPr>
               <a:t>6.</a:t>
             </a:r>
@@ -13900,8 +14151,8 @@
         </p:nvSpPr>
         <p:spPr>
           <a:xfrm>
-            <a:off x="1554480" y="5274563"/>
-            <a:ext cx="2720291" cy="457200"/>
+            <a:off x="1554480" y="5175504"/>
+            <a:ext cx="2684114" cy="457200"/>
           </a:xfrm>
           <a:prstGeom prst="rect">
             <a:avLst/>
@@ -13916,11 +14167,11 @@
           <a:p>
             <a:pPr algn="l"/>
             <a:r>
-              <a:rPr sz="2300" b="0" i="0">
+              <a:rPr sz="2180" b="0" i="0">
                 <a:solidFill>
                   <a:srgbClr val="1A1A1A"/>
                 </a:solidFill>
-                <a:latin typeface="Century Schoolbook"/>
+                <a:latin typeface="Lexend"/>
               </a:rPr>
               <a:t>Find the value of </a:t>
             </a:r>
@@ -13929,7 +14180,7 @@
       </p:sp>
       <p:pic>
         <p:nvPicPr>
-          <p:cNvPr id="25" name="Picture 24" descr="0afe177f69dd5e06.png"/>
+          <p:cNvPr id="25" name="Picture 24" descr="6d78c2be12150bf5.png"/>
           <p:cNvPicPr>
             <a:picLocks noChangeAspect="1"/>
           </p:cNvPicPr>
@@ -13943,8 +14194,8 @@
         </p:blipFill>
         <p:spPr>
           <a:xfrm>
-            <a:off x="4137611" y="5428487"/>
-            <a:ext cx="155448" cy="149352"/>
+            <a:off x="4101434" y="5320284"/>
+            <a:ext cx="146304" cy="167640"/>
           </a:xfrm>
           <a:prstGeom prst="rect">
             <a:avLst/>
@@ -13959,8 +14210,8 @@
         </p:nvSpPr>
         <p:spPr>
           <a:xfrm>
-            <a:off x="4293059" y="5274563"/>
-            <a:ext cx="468561" cy="457200"/>
+            <a:off x="4247738" y="5175504"/>
+            <a:ext cx="442110" cy="457200"/>
           </a:xfrm>
           <a:prstGeom prst="rect">
             <a:avLst/>
@@ -13975,11 +14226,11 @@
           <a:p>
             <a:pPr algn="l"/>
             <a:r>
-              <a:rPr sz="2300" b="0" i="0">
+              <a:rPr sz="2180" b="0" i="0">
                 <a:solidFill>
                   <a:srgbClr val="1A1A1A"/>
                 </a:solidFill>
-                <a:latin typeface="Century Schoolbook"/>
+                <a:latin typeface="Lexend"/>
               </a:rPr>
               <a:t>.  </a:t>
             </a:r>
@@ -13988,7 +14239,7 @@
       </p:sp>
       <p:pic>
         <p:nvPicPr>
-          <p:cNvPr id="27" name="Picture 26" descr="1915fd5a07894488.png"/>
+          <p:cNvPr id="27" name="Picture 26" descr="2b417829a513b452.png"/>
           <p:cNvPicPr>
             <a:picLocks noChangeAspect="1"/>
           </p:cNvPicPr>
@@ -14002,8 +14253,8 @@
         </p:blipFill>
         <p:spPr>
           <a:xfrm>
-            <a:off x="4624460" y="5227319"/>
-            <a:ext cx="1645920" cy="551688"/>
+            <a:off x="4552689" y="5135880"/>
+            <a:ext cx="1664208" cy="536448"/>
           </a:xfrm>
           <a:prstGeom prst="rect">
             <a:avLst/>
@@ -14052,11 +14303,11 @@
           <a:p>
             <a:pPr algn="l"/>
             <a:r>
-              <a:rPr sz="3600" b="1" i="0">
+              <a:rPr sz="3420" b="1" i="0">
                 <a:solidFill>
                   <a:srgbClr val="1A1A1A"/>
                 </a:solidFill>
-                <a:latin typeface="Century Schoolbook"/>
+                <a:latin typeface="Lexend"/>
               </a:rPr>
               <a:t>IXL</a:t>
             </a:r>
@@ -14192,11 +14443,11 @@
           <a:p>
             <a:pPr algn="l"/>
             <a:r>
-              <a:rPr sz="1100" b="0" i="1">
+              <a:rPr sz="1040" b="0" i="0">
                 <a:solidFill>
                   <a:srgbClr val="6B6B6B"/>
                 </a:solidFill>
-                <a:latin typeface="Century Schoolbook"/>
+                <a:latin typeface="Lexend"/>
               </a:rPr>
               <a:t>Grade 7 Accelerated · Unit 3 · Lesson 5 — Applying Exponent Laws</a:t>
             </a:r>
@@ -14227,11 +14478,11 @@
           <a:p>
             <a:pPr algn="r"/>
             <a:r>
-              <a:rPr sz="1100" b="0" i="0">
+              <a:rPr sz="1040" b="0" i="0">
                 <a:solidFill>
                   <a:srgbClr val="6B6B6B"/>
                 </a:solidFill>
-                <a:latin typeface="Century Schoolbook"/>
+                <a:latin typeface="Lexend"/>
               </a:rPr>
               <a:t>34</a:t>
             </a:r>
@@ -14262,11 +14513,11 @@
           <a:p>
             <a:pPr algn="l"/>
             <a:r>
-              <a:rPr sz="2100" b="1" i="0">
+              <a:rPr sz="1989" b="1" i="0">
                 <a:solidFill>
                   <a:srgbClr val="0B5394"/>
                 </a:solidFill>
-                <a:latin typeface="Century Schoolbook"/>
+                <a:latin typeface="Lexend"/>
               </a:rPr>
               <a:t>1.</a:t>
             </a:r>
@@ -14297,11 +14548,11 @@
           <a:p>
             <a:pPr algn="l"/>
             <a:r>
-              <a:rPr sz="2100" b="0" i="0">
+              <a:rPr sz="1989" b="0" i="0">
                 <a:solidFill>
                   <a:srgbClr val="1A1A1A"/>
                 </a:solidFill>
-                <a:latin typeface="Century Schoolbook"/>
+                <a:latin typeface="Lexend"/>
               </a:rPr>
               <a:t>Open IXL and start today's skills.</a:t>
             </a:r>
@@ -14332,11 +14583,11 @@
           <a:p>
             <a:pPr algn="l"/>
             <a:r>
-              <a:rPr sz="2100" b="1" i="0">
+              <a:rPr sz="1989" b="1" i="0">
                 <a:solidFill>
                   <a:srgbClr val="0B5394"/>
                 </a:solidFill>
-                <a:latin typeface="Century Schoolbook"/>
+                <a:latin typeface="Lexend"/>
               </a:rPr>
               <a:t>2.</a:t>
             </a:r>
@@ -14367,11 +14618,11 @@
           <a:p>
             <a:pPr algn="l"/>
             <a:r>
-              <a:rPr sz="2100" b="0" i="0">
+              <a:rPr sz="1989" b="0" i="0">
                 <a:solidFill>
                   <a:srgbClr val="1A1A1A"/>
                 </a:solidFill>
-                <a:latin typeface="Century Schoolbook"/>
+                <a:latin typeface="Lexend"/>
               </a:rPr>
               <a:t>Work on paper where the question needs work. The answer box does not show it.</a:t>
             </a:r>
@@ -14402,11 +14653,11 @@
           <a:p>
             <a:pPr algn="l"/>
             <a:r>
-              <a:rPr sz="2100" b="1" i="0">
+              <a:rPr sz="1989" b="1" i="0">
                 <a:solidFill>
                   <a:srgbClr val="0B5394"/>
                 </a:solidFill>
-                <a:latin typeface="Century Schoolbook"/>
+                <a:latin typeface="Lexend"/>
               </a:rPr>
               <a:t>3.</a:t>
             </a:r>
@@ -14437,11 +14688,11 @@
           <a:p>
             <a:pPr algn="l"/>
             <a:r>
-              <a:rPr sz="2100" b="0" i="0">
+              <a:rPr sz="1989" b="0" i="0">
                 <a:solidFill>
                   <a:srgbClr val="1A1A1A"/>
                 </a:solidFill>
-                <a:latin typeface="Century Schoolbook"/>
+                <a:latin typeface="Lexend"/>
               </a:rPr>
               <a:t>Every skill listed is required, to a SmartScore of 67. Due at the start of the next class.</a:t>
             </a:r>
@@ -14472,11 +14723,11 @@
           <a:p>
             <a:pPr algn="l"/>
             <a:r>
-              <a:rPr sz="2100" b="1" i="0">
+              <a:rPr sz="1989" b="1" i="0">
                 <a:solidFill>
                   <a:srgbClr val="1A1A1A"/>
                 </a:solidFill>
-                <a:latin typeface="Century Schoolbook"/>
+                <a:latin typeface="Lexend"/>
               </a:rPr>
               <a:t>Today's skills — all required</a:t>
             </a:r>
@@ -14507,11 +14758,11 @@
           <a:p>
             <a:pPr algn="l"/>
             <a:r>
-              <a:rPr sz="1900" b="0" i="0">
+              <a:rPr sz="1810" b="0" i="0">
                 <a:solidFill>
                   <a:srgbClr val="1A1A1A"/>
                 </a:solidFill>
-                <a:latin typeface="Century Schoolbook"/>
+                <a:latin typeface="Lexend"/>
               </a:rPr>
               <a:t>Identify equivalent expressions involving exponents I — VLM</a:t>
             </a:r>
@@ -14560,11 +14811,11 @@
           <a:p>
             <a:pPr algn="l"/>
             <a:r>
-              <a:rPr sz="3600" b="1" i="0">
+              <a:rPr sz="3420" b="1" i="0">
                 <a:solidFill>
                   <a:srgbClr val="1A1A1A"/>
                 </a:solidFill>
-                <a:latin typeface="Century Schoolbook"/>
+                <a:latin typeface="Lexend"/>
               </a:rPr>
               <a:t>Notes</a:t>
             </a:r>
@@ -14700,11 +14951,11 @@
           <a:p>
             <a:pPr algn="l"/>
             <a:r>
-              <a:rPr sz="1100" b="0" i="1">
+              <a:rPr sz="1040" b="0" i="0">
                 <a:solidFill>
                   <a:srgbClr val="6B6B6B"/>
                 </a:solidFill>
-                <a:latin typeface="Century Schoolbook"/>
+                <a:latin typeface="Lexend"/>
               </a:rPr>
               <a:t>Grade 7 Accelerated · Unit 3 · Lesson 5 — Applying Exponent Laws</a:t>
             </a:r>
@@ -14735,11 +14986,11 @@
           <a:p>
             <a:pPr algn="r"/>
             <a:r>
-              <a:rPr sz="1100" b="0" i="0">
+              <a:rPr sz="1040" b="0" i="0">
                 <a:solidFill>
                   <a:srgbClr val="6B6B6B"/>
                 </a:solidFill>
-                <a:latin typeface="Century Schoolbook"/>
+                <a:latin typeface="Lexend"/>
               </a:rPr>
               <a:t>4</a:t>
             </a:r>
@@ -14770,11 +15021,11 @@
           <a:p>
             <a:pPr algn="l"/>
             <a:r>
-              <a:rPr sz="2500" b="1" i="0">
+              <a:rPr sz="2380" b="1" i="0">
                 <a:solidFill>
                   <a:srgbClr val="1A1A1A"/>
                 </a:solidFill>
-                <a:latin typeface="Century Schoolbook"/>
+                <a:latin typeface="Lexend"/>
               </a:rPr>
               <a:t>I.  The pattern with a fraction base</a:t>
             </a:r>
@@ -14847,11 +15098,11 @@
                     <a:p>
                       <a:pPr algn="ctr"/>
                       <a:r>
-                        <a:rPr sz="1700" b="1">
+                        <a:rPr sz="1610" b="1">
                           <a:solidFill>
                             <a:srgbClr val="1A1A1A"/>
                           </a:solidFill>
-                          <a:latin typeface="Century Schoolbook"/>
+                          <a:latin typeface="Lexend"/>
                         </a:rPr>
                         <a:t>Expression</a:t>
                       </a:r>
@@ -14894,11 +15145,11 @@
                     <a:p>
                       <a:pPr algn="ctr"/>
                       <a:r>
-                        <a:rPr sz="1700" b="1">
+                        <a:rPr sz="1610" b="1">
                           <a:solidFill>
                             <a:srgbClr val="1A1A1A"/>
                           </a:solidFill>
-                          <a:latin typeface="Century Schoolbook"/>
+                          <a:latin typeface="Lexend"/>
                         </a:rPr>
                         <a:t>Expanded</a:t>
                       </a:r>
@@ -14941,11 +15192,11 @@
                     <a:p>
                       <a:pPr algn="ctr"/>
                       <a:r>
-                        <a:rPr sz="1700" b="1">
+                        <a:rPr sz="1610" b="1">
                           <a:solidFill>
                             <a:srgbClr val="1A1A1A"/>
                           </a:solidFill>
-                          <a:latin typeface="Century Schoolbook"/>
+                          <a:latin typeface="Lexend"/>
                         </a:rPr>
                         <a:t>Value</a:t>
                       </a:r>
@@ -14990,20 +15241,20 @@
                     <a:p>
                       <a:pPr algn="ctr"/>
                       <a:r>
-                        <a:rPr sz="1700" b="0">
+                        <a:rPr sz="1610" b="0">
                           <a:solidFill>
                             <a:srgbClr val="1A1A1A"/>
                           </a:solidFill>
-                          <a:latin typeface="Century Schoolbook"/>
+                          <a:latin typeface="Lexend"/>
                         </a:rPr>
                         <a:t>(2/5)</a:t>
                       </a:r>
                       <a:r>
-                        <a:rPr sz="1700" b="0" baseline="30000">
+                        <a:rPr sz="1610" b="0" baseline="30000">
                           <a:solidFill>
                             <a:srgbClr val="1A1A1A"/>
                           </a:solidFill>
-                          <a:latin typeface="Century Schoolbook"/>
+                          <a:latin typeface="Lexend"/>
                         </a:rPr>
                         <a:t>2</a:t>
                       </a:r>
@@ -15046,11 +15297,11 @@
                     <a:p>
                       <a:pPr algn="ctr"/>
                       <a:r>
-                        <a:rPr sz="1700" b="0">
+                        <a:rPr sz="1610" b="0">
                           <a:solidFill>
                             <a:srgbClr val="1A1A1A"/>
                           </a:solidFill>
-                          <a:latin typeface="Century Schoolbook"/>
+                          <a:latin typeface="Lexend"/>
                         </a:rPr>
                         <a:t>2/5 · 2/5</a:t>
                       </a:r>
@@ -15093,11 +15344,11 @@
                     <a:p>
                       <a:pPr algn="ctr"/>
                       <a:r>
-                        <a:rPr sz="1700" b="0">
+                        <a:rPr sz="1610" b="0">
                           <a:solidFill>
                             <a:srgbClr val="1A1A1A"/>
                           </a:solidFill>
-                          <a:latin typeface="Century Schoolbook"/>
+                          <a:latin typeface="Lexend"/>
                         </a:rPr>
                         <a:t>4/25</a:t>
                       </a:r>
@@ -15142,20 +15393,20 @@
                     <a:p>
                       <a:pPr algn="ctr"/>
                       <a:r>
-                        <a:rPr sz="1700" b="0">
+                        <a:rPr sz="1610" b="0">
                           <a:solidFill>
                             <a:srgbClr val="1A1A1A"/>
                           </a:solidFill>
-                          <a:latin typeface="Century Schoolbook"/>
+                          <a:latin typeface="Lexend"/>
                         </a:rPr>
                         <a:t>(2/5)</a:t>
                       </a:r>
                       <a:r>
-                        <a:rPr sz="1700" b="0" baseline="30000">
+                        <a:rPr sz="1610" b="0" baseline="30000">
                           <a:solidFill>
                             <a:srgbClr val="1A1A1A"/>
                           </a:solidFill>
-                          <a:latin typeface="Century Schoolbook"/>
+                          <a:latin typeface="Lexend"/>
                         </a:rPr>
                         <a:t>1</a:t>
                       </a:r>
@@ -15198,11 +15449,11 @@
                     <a:p>
                       <a:pPr algn="ctr"/>
                       <a:r>
-                        <a:rPr sz="1700" b="0">
+                        <a:rPr sz="1610" b="0">
                           <a:solidFill>
                             <a:srgbClr val="1A1A1A"/>
                           </a:solidFill>
-                          <a:latin typeface="Century Schoolbook"/>
+                          <a:latin typeface="Lexend"/>
                         </a:rPr>
                         <a:t>2/5</a:t>
                       </a:r>
@@ -15245,11 +15496,11 @@
                     <a:p>
                       <a:pPr algn="ctr"/>
                       <a:r>
-                        <a:rPr sz="1700" b="0">
+                        <a:rPr sz="1610" b="0">
                           <a:solidFill>
                             <a:srgbClr val="1A1A1A"/>
                           </a:solidFill>
-                          <a:latin typeface="Century Schoolbook"/>
+                          <a:latin typeface="Lexend"/>
                         </a:rPr>
                         <a:t>2/5</a:t>
                       </a:r>
@@ -15294,20 +15545,20 @@
                     <a:p>
                       <a:pPr algn="ctr"/>
                       <a:r>
-                        <a:rPr sz="1700" b="0">
+                        <a:rPr sz="1610" b="0">
                           <a:solidFill>
                             <a:srgbClr val="1A1A1A"/>
                           </a:solidFill>
-                          <a:latin typeface="Century Schoolbook"/>
+                          <a:latin typeface="Lexend"/>
                         </a:rPr>
                         <a:t>(2/5)</a:t>
                       </a:r>
                       <a:r>
-                        <a:rPr sz="1700" b="0" baseline="30000">
+                        <a:rPr sz="1610" b="0" baseline="30000">
                           <a:solidFill>
                             <a:srgbClr val="1A1A1A"/>
                           </a:solidFill>
-                          <a:latin typeface="Century Schoolbook"/>
+                          <a:latin typeface="Lexend"/>
                         </a:rPr>
                         <a:t>0</a:t>
                       </a:r>
@@ -15350,11 +15601,11 @@
                     <a:p>
                       <a:pPr algn="ctr"/>
                       <a:r>
-                        <a:rPr sz="1700" b="0">
+                        <a:rPr sz="1610" b="0">
                           <a:solidFill>
                             <a:srgbClr val="1A1A1A"/>
                           </a:solidFill>
-                          <a:latin typeface="Century Schoolbook"/>
+                          <a:latin typeface="Lexend"/>
                         </a:rPr>
                         <a:t>1</a:t>
                       </a:r>
@@ -15397,11 +15648,11 @@
                     <a:p>
                       <a:pPr algn="ctr"/>
                       <a:r>
-                        <a:rPr sz="1700" b="0">
+                        <a:rPr sz="1610" b="0">
                           <a:solidFill>
                             <a:srgbClr val="1A1A1A"/>
                           </a:solidFill>
-                          <a:latin typeface="Century Schoolbook"/>
+                          <a:latin typeface="Lexend"/>
                         </a:rPr>
                         <a:t>1</a:t>
                       </a:r>
@@ -15446,20 +15697,20 @@
                     <a:p>
                       <a:pPr algn="ctr"/>
                       <a:r>
-                        <a:rPr sz="1700" b="0">
+                        <a:rPr sz="1610" b="0">
                           <a:solidFill>
                             <a:srgbClr val="1A1A1A"/>
                           </a:solidFill>
-                          <a:latin typeface="Century Schoolbook"/>
+                          <a:latin typeface="Lexend"/>
                         </a:rPr>
                         <a:t>(2/5)</a:t>
                       </a:r>
                       <a:r>
-                        <a:rPr sz="1700" b="0" baseline="30000">
+                        <a:rPr sz="1610" b="0" baseline="30000">
                           <a:solidFill>
                             <a:srgbClr val="1A1A1A"/>
                           </a:solidFill>
-                          <a:latin typeface="Century Schoolbook"/>
+                          <a:latin typeface="Lexend"/>
                         </a:rPr>
                         <a:t>-1</a:t>
                       </a:r>
@@ -15502,11 +15753,11 @@
                     <a:p>
                       <a:pPr algn="ctr"/>
                       <a:r>
-                        <a:rPr sz="1700" b="0">
+                        <a:rPr sz="1610" b="0">
                           <a:solidFill>
                             <a:srgbClr val="1A1A1A"/>
                           </a:solidFill>
-                          <a:latin typeface="Century Schoolbook"/>
+                          <a:latin typeface="Lexend"/>
                         </a:rPr>
                         <a:t>5/2</a:t>
                       </a:r>
@@ -15549,11 +15800,11 @@
                     <a:p>
                       <a:pPr algn="ctr"/>
                       <a:r>
-                        <a:rPr sz="1700" b="0">
+                        <a:rPr sz="1610" b="0">
                           <a:solidFill>
                             <a:srgbClr val="1A1A1A"/>
                           </a:solidFill>
-                          <a:latin typeface="Century Schoolbook"/>
+                          <a:latin typeface="Lexend"/>
                         </a:rPr>
                         <a:t>5/2</a:t>
                       </a:r>
@@ -15598,20 +15849,20 @@
                     <a:p>
                       <a:pPr algn="ctr"/>
                       <a:r>
-                        <a:rPr sz="1700" b="0">
+                        <a:rPr sz="1610" b="0">
                           <a:solidFill>
                             <a:srgbClr val="1A1A1A"/>
                           </a:solidFill>
-                          <a:latin typeface="Century Schoolbook"/>
+                          <a:latin typeface="Lexend"/>
                         </a:rPr>
                         <a:t>(2/5)</a:t>
                       </a:r>
                       <a:r>
-                        <a:rPr sz="1700" b="0" baseline="30000">
+                        <a:rPr sz="1610" b="0" baseline="30000">
                           <a:solidFill>
                             <a:srgbClr val="1A1A1A"/>
                           </a:solidFill>
-                          <a:latin typeface="Century Schoolbook"/>
+                          <a:latin typeface="Lexend"/>
                         </a:rPr>
                         <a:t>-2</a:t>
                       </a:r>
@@ -15654,11 +15905,11 @@
                     <a:p>
                       <a:pPr algn="ctr"/>
                       <a:r>
-                        <a:rPr sz="1700" b="0">
+                        <a:rPr sz="1610" b="0">
                           <a:solidFill>
                             <a:srgbClr val="1A1A1A"/>
                           </a:solidFill>
-                          <a:latin typeface="Century Schoolbook"/>
+                          <a:latin typeface="Lexend"/>
                         </a:rPr>
                         <a:t>5/2 · 5/2</a:t>
                       </a:r>
@@ -15701,11 +15952,11 @@
                     <a:p>
                       <a:pPr algn="ctr"/>
                       <a:r>
-                        <a:rPr sz="1700" b="0">
+                        <a:rPr sz="1610" b="0">
                           <a:solidFill>
                             <a:srgbClr val="1A1A1A"/>
                           </a:solidFill>
-                          <a:latin typeface="Century Schoolbook"/>
+                          <a:latin typeface="Lexend"/>
                         </a:rPr>
                         <a:t>25/4</a:t>
                       </a:r>
@@ -15788,11 +16039,11 @@
           <a:p>
             <a:pPr algn="l"/>
             <a:r>
-              <a:rPr sz="3600" b="1" i="0">
+              <a:rPr sz="3420" b="1" i="0">
                 <a:solidFill>
                   <a:srgbClr val="1A1A1A"/>
                 </a:solidFill>
-                <a:latin typeface="Century Schoolbook"/>
+                <a:latin typeface="Lexend"/>
               </a:rPr>
               <a:t>Notes</a:t>
             </a:r>
@@ -15928,11 +16179,11 @@
           <a:p>
             <a:pPr algn="l"/>
             <a:r>
-              <a:rPr sz="1100" b="0" i="1">
+              <a:rPr sz="1040" b="0" i="0">
                 <a:solidFill>
                   <a:srgbClr val="6B6B6B"/>
                 </a:solidFill>
-                <a:latin typeface="Century Schoolbook"/>
+                <a:latin typeface="Lexend"/>
               </a:rPr>
               <a:t>Grade 7 Accelerated · Unit 3 · Lesson 5 — Applying Exponent Laws</a:t>
             </a:r>
@@ -15963,11 +16214,11 @@
           <a:p>
             <a:pPr algn="r"/>
             <a:r>
-              <a:rPr sz="1100" b="0" i="0">
+              <a:rPr sz="1040" b="0" i="0">
                 <a:solidFill>
                   <a:srgbClr val="6B6B6B"/>
                 </a:solidFill>
-                <a:latin typeface="Century Schoolbook"/>
+                <a:latin typeface="Lexend"/>
               </a:rPr>
               <a:t>5</a:t>
             </a:r>
@@ -15998,11 +16249,11 @@
           <a:p>
             <a:pPr algn="l"/>
             <a:r>
-              <a:rPr sz="2500" b="1" i="0">
+              <a:rPr sz="2380" b="1" i="0">
                 <a:solidFill>
                   <a:srgbClr val="1A1A1A"/>
                 </a:solidFill>
-                <a:latin typeface="Century Schoolbook"/>
+                <a:latin typeface="Lexend"/>
               </a:rPr>
               <a:t>II.  Flip the base, make the exponent positive</a:t>
             </a:r>
@@ -16046,7 +16297,7 @@
       </p:cxnSp>
       <p:pic>
         <p:nvPicPr>
-          <p:cNvPr id="10" name="Picture 9" descr="105dd24fbf391055.png"/>
+          <p:cNvPr id="10" name="Picture 9" descr="938dc06abe520ba9.png"/>
           <p:cNvPicPr>
             <a:picLocks noChangeAspect="1"/>
           </p:cNvPicPr>
@@ -16060,8 +16311,8 @@
         </p:blipFill>
         <p:spPr>
           <a:xfrm>
-            <a:off x="3761785" y="1993392"/>
-            <a:ext cx="2133600" cy="691896"/>
+            <a:off x="3713437" y="1993392"/>
+            <a:ext cx="2185416" cy="704088"/>
           </a:xfrm>
           <a:prstGeom prst="rect">
             <a:avLst/>
@@ -16076,8 +16327,8 @@
         </p:nvSpPr>
         <p:spPr>
           <a:xfrm>
-            <a:off x="5895385" y="2110740"/>
-            <a:ext cx="1299682" cy="457200"/>
+            <a:off x="5898853" y="2116836"/>
+            <a:ext cx="1263198" cy="457200"/>
           </a:xfrm>
           <a:prstGeom prst="rect">
             <a:avLst/>
@@ -16092,11 +16343,11 @@
           <a:p>
             <a:pPr algn="l"/>
             <a:r>
-              <a:rPr sz="2600" b="0" i="0">
+              <a:rPr sz="2470" b="0" i="0">
                 <a:solidFill>
                   <a:srgbClr val="1A1A1A"/>
                 </a:solidFill>
-                <a:latin typeface="Century Schoolbook"/>
+                <a:latin typeface="Lexend"/>
               </a:rPr>
               <a:t>          (</a:t>
             </a:r>
@@ -16105,7 +16356,7 @@
       </p:sp>
       <p:pic>
         <p:nvPicPr>
-          <p:cNvPr id="12" name="Picture 11" descr="2e707716356433bc.png"/>
+          <p:cNvPr id="12" name="Picture 11" descr="e8ca827cacc61be6.png"/>
           <p:cNvPicPr>
             <a:picLocks noChangeAspect="1"/>
           </p:cNvPicPr>
@@ -16119,8 +16370,8 @@
         </p:blipFill>
         <p:spPr>
           <a:xfrm>
-            <a:off x="7057907" y="2168652"/>
-            <a:ext cx="1152144" cy="341376"/>
+            <a:off x="7024891" y="2165604"/>
+            <a:ext cx="1228344" cy="359664"/>
           </a:xfrm>
           <a:prstGeom prst="rect">
             <a:avLst/>
@@ -16135,8 +16386,8 @@
         </p:nvSpPr>
         <p:spPr>
           <a:xfrm>
-            <a:off x="8210051" y="2110740"/>
-            <a:ext cx="326842" cy="457200"/>
+            <a:off x="8253235" y="2116836"/>
+            <a:ext cx="332006" cy="457200"/>
           </a:xfrm>
           <a:prstGeom prst="rect">
             <a:avLst/>
@@ -16151,11 +16402,11 @@
           <a:p>
             <a:pPr algn="l"/>
             <a:r>
-              <a:rPr sz="2600" b="0" i="0">
+              <a:rPr sz="2470" b="0" i="0">
                 <a:solidFill>
                   <a:srgbClr val="1A1A1A"/>
                 </a:solidFill>
-                <a:latin typeface="Century Schoolbook"/>
+                <a:latin typeface="Lexend"/>
               </a:rPr>
               <a:t>)</a:t>
             </a:r>
@@ -16164,7 +16415,7 @@
       </p:sp>
       <p:pic>
         <p:nvPicPr>
-          <p:cNvPr id="14" name="Picture 13" descr="33556cc2e8273199.png"/>
+          <p:cNvPr id="14" name="Picture 13" descr="9169d867eb22c622.png"/>
           <p:cNvPicPr>
             <a:picLocks noChangeAspect="1"/>
           </p:cNvPicPr>
@@ -16178,8 +16429,8 @@
         </p:blipFill>
         <p:spPr>
           <a:xfrm>
-            <a:off x="2625588" y="2959608"/>
-            <a:ext cx="3075432" cy="697992"/>
+            <a:off x="2780524" y="2971800"/>
+            <a:ext cx="2983992" cy="676656"/>
           </a:xfrm>
           <a:prstGeom prst="rect">
             <a:avLst/>
@@ -16194,8 +16445,8 @@
         </p:nvSpPr>
         <p:spPr>
           <a:xfrm>
-            <a:off x="5701020" y="3080004"/>
-            <a:ext cx="1183151" cy="457200"/>
+            <a:off x="5764516" y="3081528"/>
+            <a:ext cx="1141503" cy="457200"/>
           </a:xfrm>
           <a:prstGeom prst="rect">
             <a:avLst/>
@@ -16210,11 +16461,11 @@
           <a:p>
             <a:pPr algn="l"/>
             <a:r>
-              <a:rPr sz="2600" b="0" i="0">
+              <a:rPr sz="2470" b="0" i="0">
                 <a:solidFill>
                   <a:srgbClr val="1A1A1A"/>
                 </a:solidFill>
-                <a:latin typeface="Century Schoolbook"/>
+                <a:latin typeface="Lexend"/>
               </a:rPr>
               <a:t>          </a:t>
             </a:r>
@@ -16223,7 +16474,7 @@
       </p:sp>
       <p:pic>
         <p:nvPicPr>
-          <p:cNvPr id="16" name="Picture 15" descr="7adc35e6f9ec4d06.png"/>
+          <p:cNvPr id="16" name="Picture 15" descr="f0e84f7b8a0e3082.png"/>
           <p:cNvPicPr>
             <a:picLocks noChangeAspect="1"/>
           </p:cNvPicPr>
@@ -16237,8 +16488,8 @@
         </p:blipFill>
         <p:spPr>
           <a:xfrm>
-            <a:off x="6747011" y="2964180"/>
-            <a:ext cx="2788920" cy="688848"/>
+            <a:off x="6768859" y="2973324"/>
+            <a:ext cx="2612136" cy="673608"/>
           </a:xfrm>
           <a:prstGeom prst="rect">
             <a:avLst/>
@@ -16253,7 +16504,7 @@
         </p:nvSpPr>
         <p:spPr>
           <a:xfrm>
-            <a:off x="987552" y="3995928"/>
+            <a:off x="987552" y="3986784"/>
             <a:ext cx="10131551" cy="475488"/>
           </a:xfrm>
           <a:prstGeom prst="rect">
@@ -16269,11 +16520,11 @@
           <a:p>
             <a:pPr algn="l"/>
             <a:r>
-              <a:rPr sz="2300" b="1" i="0">
+              <a:rPr sz="2180" b="1" i="0">
                 <a:solidFill>
                   <a:srgbClr val="1A1A1A"/>
                 </a:solidFill>
-                <a:latin typeface="Century Schoolbook"/>
+                <a:latin typeface="Lexend"/>
               </a:rPr>
               <a:t>The sign stays with the fraction. Flip the numbers, not the sign.</a:t>
             </a:r>
@@ -16288,8 +16539,8 @@
         </p:nvSpPr>
         <p:spPr>
           <a:xfrm>
-            <a:off x="987552" y="4818888"/>
-            <a:ext cx="5545365" cy="457200"/>
+            <a:off x="987552" y="4806695"/>
+            <a:ext cx="5468448" cy="457200"/>
           </a:xfrm>
           <a:prstGeom prst="rect">
             <a:avLst/>
@@ -16304,11 +16555,11 @@
           <a:p>
             <a:pPr algn="l"/>
             <a:r>
-              <a:rPr sz="2300" b="0" i="0">
+              <a:rPr sz="2180" b="0" i="0">
                 <a:solidFill>
                   <a:srgbClr val="1A1A1A"/>
                 </a:solidFill>
-                <a:latin typeface="Century Schoolbook"/>
+                <a:latin typeface="Lexend"/>
               </a:rPr>
               <a:t>A whole number is a fraction over 1:  </a:t>
             </a:r>
@@ -16317,7 +16568,7 @@
       </p:sp>
       <p:pic>
         <p:nvPicPr>
-          <p:cNvPr id="19" name="Picture 18" descr="dee9fbc307a9f902.png"/>
+          <p:cNvPr id="19" name="Picture 18" descr="b03f09abb77756a8.png"/>
           <p:cNvPicPr>
             <a:picLocks noChangeAspect="1"/>
           </p:cNvPicPr>
@@ -16331,8 +16582,8 @@
         </p:blipFill>
         <p:spPr>
           <a:xfrm>
-            <a:off x="6395757" y="4709159"/>
-            <a:ext cx="3230880" cy="676656"/>
+            <a:off x="6318840" y="4700016"/>
+            <a:ext cx="3151632" cy="670560"/>
           </a:xfrm>
           <a:prstGeom prst="rect">
             <a:avLst/>
@@ -16381,11 +16632,11 @@
           <a:p>
             <a:pPr algn="l"/>
             <a:r>
-              <a:rPr sz="3600" b="1" i="0">
+              <a:rPr sz="3420" b="1" i="0">
                 <a:solidFill>
                   <a:srgbClr val="1A1A1A"/>
                 </a:solidFill>
-                <a:latin typeface="Century Schoolbook"/>
+                <a:latin typeface="Lexend"/>
               </a:rPr>
               <a:t>Notes</a:t>
             </a:r>
@@ -16521,11 +16772,11 @@
           <a:p>
             <a:pPr algn="l"/>
             <a:r>
-              <a:rPr sz="1100" b="0" i="1">
+              <a:rPr sz="1040" b="0" i="0">
                 <a:solidFill>
                   <a:srgbClr val="6B6B6B"/>
                 </a:solidFill>
-                <a:latin typeface="Century Schoolbook"/>
+                <a:latin typeface="Lexend"/>
               </a:rPr>
               <a:t>Grade 7 Accelerated · Unit 3 · Lesson 5 — Applying Exponent Laws</a:t>
             </a:r>
@@ -16556,11 +16807,11 @@
           <a:p>
             <a:pPr algn="r"/>
             <a:r>
-              <a:rPr sz="1100" b="0" i="0">
+              <a:rPr sz="1040" b="0" i="0">
                 <a:solidFill>
                   <a:srgbClr val="6B6B6B"/>
                 </a:solidFill>
-                <a:latin typeface="Century Schoolbook"/>
+                <a:latin typeface="Lexend"/>
               </a:rPr>
               <a:t>6</a:t>
             </a:r>
@@ -16591,11 +16842,11 @@
           <a:p>
             <a:pPr algn="l"/>
             <a:r>
-              <a:rPr sz="2500" b="1" i="0">
+              <a:rPr sz="2380" b="1" i="0">
                 <a:solidFill>
                   <a:srgbClr val="1A1A1A"/>
                 </a:solidFill>
-                <a:latin typeface="Century Schoolbook"/>
+                <a:latin typeface="Lexend"/>
               </a:rPr>
               <a:t>III.  Several laws at once — the plan is still yours</a:t>
             </a:r>
@@ -16639,7 +16890,7 @@
       </p:cxnSp>
       <p:pic>
         <p:nvPicPr>
-          <p:cNvPr id="10" name="Picture 9" descr="1390af24b50c4cdc.png"/>
+          <p:cNvPr id="10" name="Picture 9" descr="0c7035540ba8a05b.png"/>
           <p:cNvPicPr>
             <a:picLocks noChangeAspect="1"/>
           </p:cNvPicPr>
@@ -16653,8 +16904,8 @@
         </p:blipFill>
         <p:spPr>
           <a:xfrm>
-            <a:off x="2074163" y="1993392"/>
-            <a:ext cx="8013192" cy="816864"/>
+            <a:off x="2250948" y="1993392"/>
+            <a:ext cx="7659624" cy="792480"/>
           </a:xfrm>
           <a:prstGeom prst="rect">
             <a:avLst/>
@@ -16669,7 +16920,7 @@
         </p:nvSpPr>
         <p:spPr>
           <a:xfrm>
-            <a:off x="987552" y="3148583"/>
+            <a:off x="987552" y="3124200"/>
             <a:ext cx="10131551" cy="475488"/>
           </a:xfrm>
           <a:prstGeom prst="rect">
@@ -16685,11 +16936,11 @@
           <a:p>
             <a:pPr algn="l"/>
             <a:r>
-              <a:rPr sz="2300" b="0" i="0">
+              <a:rPr sz="2180" b="0" i="0">
                 <a:solidFill>
                   <a:srgbClr val="1A1A1A"/>
                 </a:solidFill>
-                <a:latin typeface="Century Schoolbook"/>
+                <a:latin typeface="Lexend"/>
               </a:rPr>
               <a:t>Any correct order of laws gives the same value. Finish with a positive exponent.</a:t>
             </a:r>
@@ -16738,11 +16989,11 @@
           <a:p>
             <a:pPr algn="l"/>
             <a:r>
-              <a:rPr sz="3600" b="1" i="0">
+              <a:rPr sz="3420" b="1" i="0">
                 <a:solidFill>
                   <a:srgbClr val="1A1A1A"/>
                 </a:solidFill>
-                <a:latin typeface="Century Schoolbook"/>
+                <a:latin typeface="Lexend"/>
               </a:rPr>
               <a:t>Example 1</a:t>
             </a:r>
@@ -16878,11 +17129,11 @@
           <a:p>
             <a:pPr algn="l"/>
             <a:r>
-              <a:rPr sz="1100" b="0" i="1">
+              <a:rPr sz="1040" b="0" i="0">
                 <a:solidFill>
                   <a:srgbClr val="6B6B6B"/>
                 </a:solidFill>
-                <a:latin typeface="Century Schoolbook"/>
+                <a:latin typeface="Lexend"/>
               </a:rPr>
               <a:t>Grade 7 Accelerated · Unit 3 · Lesson 5 — Applying Exponent Laws</a:t>
             </a:r>
@@ -16913,11 +17164,11 @@
           <a:p>
             <a:pPr algn="r"/>
             <a:r>
-              <a:rPr sz="1100" b="0" i="0">
+              <a:rPr sz="1040" b="0" i="0">
                 <a:solidFill>
                   <a:srgbClr val="6B6B6B"/>
                 </a:solidFill>
-                <a:latin typeface="Century Schoolbook"/>
+                <a:latin typeface="Lexend"/>
               </a:rPr>
               <a:t>7</a:t>
             </a:r>
@@ -16926,7 +17177,7 @@
       </p:sp>
       <p:pic>
         <p:nvPicPr>
-          <p:cNvPr id="8" name="Picture 7" descr="9ed1bed15013a3f1.png"/>
+          <p:cNvPr id="8" name="Picture 7" descr="388277379d8e20c9.png"/>
           <p:cNvPicPr>
             <a:picLocks noChangeAspect="1"/>
           </p:cNvPicPr>
@@ -16940,8 +17191,8 @@
         </p:blipFill>
         <p:spPr>
           <a:xfrm>
-            <a:off x="5451347" y="2103120"/>
-            <a:ext cx="1258824" cy="676656"/>
+            <a:off x="5494020" y="2103120"/>
+            <a:ext cx="1173480" cy="661416"/>
           </a:xfrm>
           <a:prstGeom prst="rect">
             <a:avLst/>
@@ -16956,7 +17207,7 @@
         </p:nvSpPr>
         <p:spPr>
           <a:xfrm>
-            <a:off x="777240" y="3282696"/>
+            <a:off x="777240" y="3267456"/>
             <a:ext cx="10607040" cy="429370"/>
           </a:xfrm>
           <a:prstGeom prst="rect">
@@ -16972,11 +17223,11 @@
           <a:p>
             <a:pPr algn="ctr"/>
             <a:r>
-              <a:rPr sz="2400" b="1" i="0">
+              <a:rPr sz="2280" b="1" i="0">
                 <a:solidFill>
                   <a:srgbClr val="1A1A1A"/>
                 </a:solidFill>
-                <a:latin typeface="Century Schoolbook"/>
+                <a:latin typeface="Lexend"/>
               </a:rPr>
               <a:t>Rewrite with a positive exponent, then find the value.</a:t>
             </a:r>
@@ -17025,11 +17276,11 @@
           <a:p>
             <a:pPr algn="l"/>
             <a:r>
-              <a:rPr sz="3600" b="1" i="0">
+              <a:rPr sz="3420" b="1" i="0">
                 <a:solidFill>
                   <a:srgbClr val="1A1A1A"/>
                 </a:solidFill>
-                <a:latin typeface="Century Schoolbook"/>
+                <a:latin typeface="Lexend"/>
               </a:rPr>
               <a:t>Example 1</a:t>
             </a:r>
@@ -17165,11 +17416,11 @@
           <a:p>
             <a:pPr algn="l"/>
             <a:r>
-              <a:rPr sz="1100" b="0" i="1">
+              <a:rPr sz="1040" b="0" i="0">
                 <a:solidFill>
                   <a:srgbClr val="6B6B6B"/>
                 </a:solidFill>
-                <a:latin typeface="Century Schoolbook"/>
+                <a:latin typeface="Lexend"/>
               </a:rPr>
               <a:t>Grade 7 Accelerated · Unit 3 · Lesson 5 — Applying Exponent Laws</a:t>
             </a:r>
@@ -17200,11 +17451,11 @@
           <a:p>
             <a:pPr algn="r"/>
             <a:r>
-              <a:rPr sz="1100" b="0" i="0">
+              <a:rPr sz="1040" b="0" i="0">
                 <a:solidFill>
                   <a:srgbClr val="6B6B6B"/>
                 </a:solidFill>
-                <a:latin typeface="Century Schoolbook"/>
+                <a:latin typeface="Lexend"/>
               </a:rPr>
               <a:t>8</a:t>
             </a:r>
@@ -17213,7 +17464,7 @@
       </p:sp>
       <p:pic>
         <p:nvPicPr>
-          <p:cNvPr id="8" name="Picture 7" descr="8e941bf8846b5513.png"/>
+          <p:cNvPr id="8" name="Picture 7" descr="b545e90417d70ba5.png"/>
           <p:cNvPicPr>
             <a:picLocks noChangeAspect="1"/>
           </p:cNvPicPr>
@@ -17228,7 +17479,7 @@
         <p:spPr>
           <a:xfrm>
             <a:off x="1828800" y="1920240"/>
-            <a:ext cx="2798064" cy="691896"/>
+            <a:ext cx="2627376" cy="664464"/>
           </a:xfrm>
           <a:prstGeom prst="rect">
             <a:avLst/>
@@ -17237,7 +17488,7 @@
       </p:pic>
       <p:pic>
         <p:nvPicPr>
-          <p:cNvPr id="9" name="Picture 8" descr="b75e3c313a78d69c.png"/>
+          <p:cNvPr id="9" name="Picture 8" descr="8945cb43fcf3afe0.png"/>
           <p:cNvPicPr>
             <a:picLocks noChangeAspect="1"/>
           </p:cNvPicPr>
@@ -17251,8 +17502,8 @@
         </p:blipFill>
         <p:spPr>
           <a:xfrm>
-            <a:off x="1828800" y="2886456"/>
-            <a:ext cx="1889760" cy="697992"/>
+            <a:off x="1828800" y="2859024"/>
+            <a:ext cx="1853184" cy="673608"/>
           </a:xfrm>
           <a:prstGeom prst="rect">
             <a:avLst/>
@@ -17283,11 +17534,11 @@
           <a:p>
             <a:pPr algn="ctr"/>
             <a:r>
-              <a:rPr sz="3200" b="1" i="0">
+              <a:rPr sz="3040" b="1" i="0">
                 <a:solidFill>
                   <a:srgbClr val="9E1B32"/>
                 </a:solidFill>
-                <a:latin typeface="Century Schoolbook"/>
+                <a:latin typeface="Lexend"/>
               </a:rPr>
               <a:t>Answer:   64/49</a:t>
             </a:r>
@@ -17336,11 +17587,11 @@
           <a:p>
             <a:pPr algn="l"/>
             <a:r>
-              <a:rPr sz="3600" b="1" i="0">
+              <a:rPr sz="3420" b="1" i="0">
                 <a:solidFill>
                   <a:srgbClr val="1A1A1A"/>
                 </a:solidFill>
-                <a:latin typeface="Century Schoolbook"/>
+                <a:latin typeface="Lexend"/>
               </a:rPr>
               <a:t>Your Turn</a:t>
             </a:r>
@@ -17476,11 +17727,11 @@
           <a:p>
             <a:pPr algn="l"/>
             <a:r>
-              <a:rPr sz="1100" b="0" i="1">
+              <a:rPr sz="1040" b="0" i="0">
                 <a:solidFill>
                   <a:srgbClr val="6B6B6B"/>
                 </a:solidFill>
-                <a:latin typeface="Century Schoolbook"/>
+                <a:latin typeface="Lexend"/>
               </a:rPr>
               <a:t>Grade 7 Accelerated · Unit 3 · Lesson 5 — Applying Exponent Laws</a:t>
             </a:r>
@@ -17511,11 +17762,11 @@
           <a:p>
             <a:pPr algn="r"/>
             <a:r>
-              <a:rPr sz="1100" b="0" i="0">
+              <a:rPr sz="1040" b="0" i="0">
                 <a:solidFill>
                   <a:srgbClr val="6B6B6B"/>
                 </a:solidFill>
-                <a:latin typeface="Century Schoolbook"/>
+                <a:latin typeface="Lexend"/>
               </a:rPr>
               <a:t>9</a:t>
             </a:r>
@@ -17524,7 +17775,7 @@
       </p:sp>
       <p:pic>
         <p:nvPicPr>
-          <p:cNvPr id="8" name="Picture 7" descr="a7f1f688f77ec613.png"/>
+          <p:cNvPr id="8" name="Picture 7" descr="4e69c1d91f1a3f78.png"/>
           <p:cNvPicPr>
             <a:picLocks noChangeAspect="1"/>
           </p:cNvPicPr>
@@ -17538,8 +17789,8 @@
         </p:blipFill>
         <p:spPr>
           <a:xfrm>
-            <a:off x="5298948" y="2194560"/>
-            <a:ext cx="1563624" cy="862584"/>
+            <a:off x="5350764" y="1600200"/>
+            <a:ext cx="1459992" cy="835152"/>
           </a:xfrm>
           <a:prstGeom prst="rect">
             <a:avLst/>
@@ -17554,7 +17805,7 @@
         </p:nvSpPr>
         <p:spPr>
           <a:xfrm>
-            <a:off x="777240" y="3560064"/>
+            <a:off x="777240" y="2938272"/>
             <a:ext cx="10607040" cy="429370"/>
           </a:xfrm>
           <a:prstGeom prst="rect">
@@ -17570,11 +17821,11 @@
           <a:p>
             <a:pPr algn="ctr"/>
             <a:r>
-              <a:rPr sz="2400" b="1" i="0">
+              <a:rPr sz="2280" b="1" i="0">
                 <a:solidFill>
                   <a:srgbClr val="1A1A1A"/>
                 </a:solidFill>
-                <a:latin typeface="Century Schoolbook"/>
+                <a:latin typeface="Lexend"/>
               </a:rPr>
               <a:t>Rewrite with a positive exponent, then find the value.</a:t>
             </a:r>

--- a/a7/packages/A7 Unit 3 - Exponents and Scientific Notation/Lessons/3.05/A7 3.05 Applying Exponent Laws - Slides.pptx
+++ b/a7/packages/A7 Unit 3 - Exponents and Scientific Notation/Lessons/3.05/A7 3.05 Applying Exponent Laws - Slides.pptx
@@ -8893,7 +8893,7 @@
       </p:sp>
       <p:pic>
         <p:nvPicPr>
-          <p:cNvPr id="8" name="Picture 7" descr="a6f8febe7f997dd5.png"/>
+          <p:cNvPr id="8" name="Picture 7" descr="933a5614c6140507.png"/>
           <p:cNvPicPr>
             <a:picLocks noChangeAspect="1"/>
           </p:cNvPicPr>
@@ -8907,8 +8907,8 @@
         </p:blipFill>
         <p:spPr>
           <a:xfrm>
-            <a:off x="5349240" y="2194560"/>
-            <a:ext cx="1463040" cy="832104"/>
+            <a:off x="5219700" y="2194560"/>
+            <a:ext cx="1722120" cy="841248"/>
           </a:xfrm>
           <a:prstGeom prst="rect">
             <a:avLst/>
@@ -8923,7 +8923,7 @@
         </p:nvSpPr>
         <p:spPr>
           <a:xfrm>
-            <a:off x="777240" y="3255264"/>
+            <a:off x="777240" y="3264408"/>
             <a:ext cx="10607040" cy="465151"/>
           </a:xfrm>
           <a:prstGeom prst="rect">
@@ -8958,7 +8958,7 @@
         </p:nvSpPr>
         <p:spPr>
           <a:xfrm>
-            <a:off x="1874519" y="3921583"/>
+            <a:off x="1874519" y="3930727"/>
             <a:ext cx="4572000" cy="548640"/>
           </a:xfrm>
           <a:prstGeom prst="rect">
@@ -8989,7 +8989,7 @@
                 </a:solidFill>
                 <a:latin typeface="Lexend"/>
               </a:rPr>
-              <a:t>(7/8)</a:t>
+              <a:t>(7/10)</a:t>
             </a:r>
             <a:r>
               <a:rPr sz="2280" b="0" i="0" baseline="30000">
@@ -9011,7 +9011,7 @@
         </p:nvSpPr>
         <p:spPr>
           <a:xfrm>
-            <a:off x="6629400" y="3921583"/>
+            <a:off x="6629400" y="3930727"/>
             <a:ext cx="4572000" cy="548640"/>
           </a:xfrm>
           <a:prstGeom prst="rect">
@@ -9042,7 +9042,7 @@
                 </a:solidFill>
                 <a:latin typeface="Lexend"/>
               </a:rPr>
-              <a:t>(−8/7)</a:t>
+              <a:t>(−10/7)</a:t>
             </a:r>
             <a:r>
               <a:rPr sz="2280" b="0" i="0" baseline="30000">
@@ -9064,7 +9064,7 @@
         </p:nvSpPr>
         <p:spPr>
           <a:xfrm>
-            <a:off x="1874519" y="4607383"/>
+            <a:off x="1874519" y="4616527"/>
             <a:ext cx="4572000" cy="548640"/>
           </a:xfrm>
           <a:prstGeom prst="rect">
@@ -9095,7 +9095,7 @@
                 </a:solidFill>
                 <a:latin typeface="Lexend"/>
               </a:rPr>
-              <a:t>(−7/8)</a:t>
+              <a:t>(−7/10)</a:t>
             </a:r>
             <a:r>
               <a:rPr sz="2280" b="0" i="0" baseline="30000">
@@ -9117,7 +9117,7 @@
         </p:nvSpPr>
         <p:spPr>
           <a:xfrm>
-            <a:off x="6629400" y="4607383"/>
+            <a:off x="6629400" y="4616527"/>
             <a:ext cx="4572000" cy="548640"/>
           </a:xfrm>
           <a:prstGeom prst="rect">
@@ -9148,7 +9148,7 @@
                 </a:solidFill>
                 <a:latin typeface="Lexend"/>
               </a:rPr>
-              <a:t>(8/7)</a:t>
+              <a:t>(10/7)</a:t>
             </a:r>
             <a:r>
               <a:rPr sz="2280" b="0" i="0" baseline="30000">
@@ -9170,7 +9170,7 @@
         </p:nvSpPr>
         <p:spPr>
           <a:xfrm>
-            <a:off x="777240" y="5613223"/>
+            <a:off x="777240" y="5622367"/>
             <a:ext cx="10607040" cy="457200"/>
           </a:xfrm>
           <a:prstGeom prst="rect">
@@ -9427,7 +9427,7 @@
       </p:sp>
       <p:pic>
         <p:nvPicPr>
-          <p:cNvPr id="8" name="Picture 7" descr="718f106a310bdb79.png"/>
+          <p:cNvPr id="8" name="Picture 7" descr="c8cc7f17e57404d8.png"/>
           <p:cNvPicPr>
             <a:picLocks noChangeAspect="1"/>
           </p:cNvPicPr>
@@ -9441,8 +9441,8 @@
         </p:blipFill>
         <p:spPr>
           <a:xfrm>
-            <a:off x="5347715" y="2103120"/>
-            <a:ext cx="1466088" cy="829056"/>
+            <a:off x="5219700" y="2103120"/>
+            <a:ext cx="1722120" cy="841248"/>
           </a:xfrm>
           <a:prstGeom prst="rect">
             <a:avLst/>
@@ -9457,7 +9457,7 @@
         </p:nvSpPr>
         <p:spPr>
           <a:xfrm>
-            <a:off x="777240" y="3160776"/>
+            <a:off x="777240" y="3172968"/>
             <a:ext cx="10607040" cy="465151"/>
           </a:xfrm>
           <a:prstGeom prst="rect">
@@ -9492,7 +9492,7 @@
         </p:nvSpPr>
         <p:spPr>
           <a:xfrm>
-            <a:off x="1920387" y="3885007"/>
+            <a:off x="1734459" y="3903295"/>
             <a:ext cx="6086561" cy="457200"/>
           </a:xfrm>
           <a:prstGeom prst="rect">
@@ -9521,7 +9521,7 @@
       </p:sp>
       <p:pic>
         <p:nvPicPr>
-          <p:cNvPr id="11" name="Picture 10" descr="363a60b00e1ac413.png"/>
+          <p:cNvPr id="11" name="Picture 10" descr="30f8381f78b3ba23.png"/>
           <p:cNvPicPr>
             <a:picLocks noChangeAspect="1"/>
           </p:cNvPicPr>
@@ -9535,8 +9535,8 @@
         </p:blipFill>
         <p:spPr>
           <a:xfrm>
-            <a:off x="7869788" y="3808807"/>
-            <a:ext cx="2368296" cy="609600"/>
+            <a:off x="7683860" y="3820999"/>
+            <a:ext cx="2746248" cy="621792"/>
           </a:xfrm>
           <a:prstGeom prst="rect">
             <a:avLst/>
@@ -9573,7 +9573,7 @@
                 </a:solidFill>
                 <a:latin typeface="Lexend"/>
               </a:rPr>
-              <a:t>Answer:   B — (−8/7)</a:t>
+              <a:t>Answer:   B — (−10/7)</a:t>
             </a:r>
             <a:r>
               <a:rPr sz="3040" b="1" i="0" baseline="30000">
@@ -9817,7 +9817,7 @@
       </p:sp>
       <p:pic>
         <p:nvPicPr>
-          <p:cNvPr id="8" name="Picture 7" descr="10298acefb5a4b50.png"/>
+          <p:cNvPr id="8" name="Picture 7" descr="be0e3dab7c06cf75.png"/>
           <p:cNvPicPr>
             <a:picLocks noChangeAspect="1"/>
           </p:cNvPicPr>
@@ -9831,8 +9831,8 @@
         </p:blipFill>
         <p:spPr>
           <a:xfrm>
-            <a:off x="4604003" y="2194560"/>
-            <a:ext cx="2953512" cy="835152"/>
+            <a:off x="4626864" y="2194560"/>
+            <a:ext cx="2907792" cy="841248"/>
           </a:xfrm>
           <a:prstGeom prst="rect">
             <a:avLst/>
@@ -9847,7 +9847,7 @@
         </p:nvSpPr>
         <p:spPr>
           <a:xfrm>
-            <a:off x="777240" y="3258312"/>
+            <a:off x="777240" y="3264408"/>
             <a:ext cx="10607040" cy="465151"/>
           </a:xfrm>
           <a:prstGeom prst="rect">
@@ -9882,7 +9882,7 @@
         </p:nvSpPr>
         <p:spPr>
           <a:xfrm>
-            <a:off x="1874519" y="3924631"/>
+            <a:off x="1874519" y="3930727"/>
             <a:ext cx="4572000" cy="548640"/>
           </a:xfrm>
           <a:prstGeom prst="rect">
@@ -9913,7 +9913,7 @@
                 </a:solidFill>
                 <a:latin typeface="Lexend"/>
               </a:rPr>
-              <a:t>(8/5)</a:t>
+              <a:t>(9/2)</a:t>
             </a:r>
             <a:r>
               <a:rPr sz="2280" b="0" i="0" baseline="30000">
@@ -9922,7 +9922,7 @@
                 </a:solidFill>
                 <a:latin typeface="Lexend"/>
               </a:rPr>
-              <a:t>2</a:t>
+              <a:t>4</a:t>
             </a:r>
           </a:p>
         </p:txBody>
@@ -9935,7 +9935,7 @@
         </p:nvSpPr>
         <p:spPr>
           <a:xfrm>
-            <a:off x="6629400" y="3924631"/>
+            <a:off x="6629400" y="3930727"/>
             <a:ext cx="4572000" cy="548640"/>
           </a:xfrm>
           <a:prstGeom prst="rect">
@@ -9966,7 +9966,7 @@
                 </a:solidFill>
                 <a:latin typeface="Lexend"/>
               </a:rPr>
-              <a:t>(5/8)</a:t>
+              <a:t>(2/9)</a:t>
             </a:r>
             <a:r>
               <a:rPr sz="2280" b="0" i="0" baseline="30000">
@@ -9975,7 +9975,7 @@
                 </a:solidFill>
                 <a:latin typeface="Lexend"/>
               </a:rPr>
-              <a:t>-6</a:t>
+              <a:t>-10</a:t>
             </a:r>
           </a:p>
         </p:txBody>
@@ -9988,7 +9988,7 @@
         </p:nvSpPr>
         <p:spPr>
           <a:xfrm>
-            <a:off x="1874519" y="4610431"/>
+            <a:off x="1874519" y="4616527"/>
             <a:ext cx="4572000" cy="548640"/>
           </a:xfrm>
           <a:prstGeom prst="rect">
@@ -10019,7 +10019,7 @@
                 </a:solidFill>
                 <a:latin typeface="Lexend"/>
               </a:rPr>
-              <a:t>(5/8)</a:t>
+              <a:t>(2/9)</a:t>
             </a:r>
             <a:r>
               <a:rPr sz="2280" b="0" i="0" baseline="30000">
@@ -10028,7 +10028,7 @@
                 </a:solidFill>
                 <a:latin typeface="Lexend"/>
               </a:rPr>
-              <a:t>2</a:t>
+              <a:t>4</a:t>
             </a:r>
           </a:p>
         </p:txBody>
@@ -10041,7 +10041,7 @@
         </p:nvSpPr>
         <p:spPr>
           <a:xfrm>
-            <a:off x="6629400" y="4610431"/>
+            <a:off x="6629400" y="4616527"/>
             <a:ext cx="4572000" cy="548640"/>
           </a:xfrm>
           <a:prstGeom prst="rect">
@@ -10072,7 +10072,7 @@
                 </a:solidFill>
                 <a:latin typeface="Lexend"/>
               </a:rPr>
-              <a:t>(5/8)</a:t>
+              <a:t>(2/9)</a:t>
             </a:r>
             <a:r>
               <a:rPr sz="2280" b="0" i="0" baseline="30000">
@@ -10081,7 +10081,7 @@
                 </a:solidFill>
                 <a:latin typeface="Lexend"/>
               </a:rPr>
-              <a:t>8</a:t>
+              <a:t>21</a:t>
             </a:r>
           </a:p>
         </p:txBody>
@@ -10094,7 +10094,7 @@
         </p:nvSpPr>
         <p:spPr>
           <a:xfrm>
-            <a:off x="777240" y="5616271"/>
+            <a:off x="777240" y="5622367"/>
             <a:ext cx="10607040" cy="457200"/>
           </a:xfrm>
           <a:prstGeom prst="rect">
@@ -10351,7 +10351,7 @@
       </p:sp>
       <p:pic>
         <p:nvPicPr>
-          <p:cNvPr id="8" name="Picture 7" descr="b36e025e50608c39.png"/>
+          <p:cNvPr id="8" name="Picture 7" descr="c2209fde782f6b9f.png"/>
           <p:cNvPicPr>
             <a:picLocks noChangeAspect="1"/>
           </p:cNvPicPr>
@@ -10365,8 +10365,8 @@
         </p:blipFill>
         <p:spPr>
           <a:xfrm>
-            <a:off x="4600956" y="2103120"/>
-            <a:ext cx="2959608" cy="835152"/>
+            <a:off x="4626864" y="2103120"/>
+            <a:ext cx="2907792" cy="841248"/>
           </a:xfrm>
           <a:prstGeom prst="rect">
             <a:avLst/>
@@ -10381,7 +10381,7 @@
         </p:nvSpPr>
         <p:spPr>
           <a:xfrm>
-            <a:off x="777240" y="3166871"/>
+            <a:off x="777240" y="3172968"/>
             <a:ext cx="10607040" cy="465151"/>
           </a:xfrm>
           <a:prstGeom prst="rect">
@@ -10410,7 +10410,7 @@
       </p:sp>
       <p:pic>
         <p:nvPicPr>
-          <p:cNvPr id="10" name="Picture 9" descr="898488e370c2978b.png"/>
+          <p:cNvPr id="10" name="Picture 9" descr="8c530bb460efa165.png"/>
           <p:cNvPicPr>
             <a:picLocks noChangeAspect="1"/>
           </p:cNvPicPr>
@@ -10424,8 +10424,8 @@
         </p:blipFill>
         <p:spPr>
           <a:xfrm>
-            <a:off x="3528060" y="3814903"/>
-            <a:ext cx="5215128" cy="603504"/>
+            <a:off x="3563112" y="3820999"/>
+            <a:ext cx="5154168" cy="612648"/>
           </a:xfrm>
           <a:prstGeom prst="rect">
             <a:avLst/>
@@ -10462,7 +10462,7 @@
                 </a:solidFill>
                 <a:latin typeface="Lexend"/>
               </a:rPr>
-              <a:t>Answer:   C — (5/8)</a:t>
+              <a:t>Answer:   C — (2/9)</a:t>
             </a:r>
             <a:r>
               <a:rPr sz="3040" b="1" i="0" baseline="30000">
@@ -10471,7 +10471,7 @@
                 </a:solidFill>
                 <a:latin typeface="Lexend"/>
               </a:rPr>
-              <a:t>2</a:t>
+              <a:t>4</a:t>
             </a:r>
           </a:p>
         </p:txBody>
@@ -10706,7 +10706,7 @@
       </p:sp>
       <p:pic>
         <p:nvPicPr>
-          <p:cNvPr id="8" name="Picture 7" descr="d311d29764bdd385.png"/>
+          <p:cNvPr id="8" name="Picture 7" descr="6f7df90f5a7cc195.png"/>
           <p:cNvPicPr>
             <a:picLocks noChangeAspect="1"/>
           </p:cNvPicPr>
@@ -10720,8 +10720,8 @@
         </p:blipFill>
         <p:spPr>
           <a:xfrm>
-            <a:off x="4820412" y="2194560"/>
-            <a:ext cx="2520696" cy="838200"/>
+            <a:off x="4815839" y="2194560"/>
+            <a:ext cx="2529840" cy="838200"/>
           </a:xfrm>
           <a:prstGeom prst="rect">
             <a:avLst/>
@@ -10993,7 +10993,7 @@
       </p:sp>
       <p:pic>
         <p:nvPicPr>
-          <p:cNvPr id="8" name="Picture 7" descr="8959dbceac072f91.png"/>
+          <p:cNvPr id="8" name="Picture 7" descr="71606c5cb17b318a.png"/>
           <p:cNvPicPr>
             <a:picLocks noChangeAspect="1"/>
           </p:cNvPicPr>
@@ -11007,8 +11007,8 @@
         </p:blipFill>
         <p:spPr>
           <a:xfrm>
-            <a:off x="4820412" y="2103120"/>
-            <a:ext cx="2520696" cy="838200"/>
+            <a:off x="4815839" y="2103120"/>
+            <a:ext cx="2529840" cy="841248"/>
           </a:xfrm>
           <a:prstGeom prst="rect">
             <a:avLst/>
@@ -11017,7 +11017,7 @@
       </p:pic>
       <p:pic>
         <p:nvPicPr>
-          <p:cNvPr id="9" name="Picture 8" descr="ffce3c700a0e00c9.png"/>
+          <p:cNvPr id="9" name="Picture 8" descr="b66b632c66dd8fa2.png"/>
           <p:cNvPicPr>
             <a:picLocks noChangeAspect="1"/>
           </p:cNvPicPr>
@@ -11031,8 +11031,8 @@
         </p:blipFill>
         <p:spPr>
           <a:xfrm>
-            <a:off x="4367783" y="3243072"/>
-            <a:ext cx="1941576" cy="615696"/>
+            <a:off x="4351020" y="3246120"/>
+            <a:ext cx="1947672" cy="609600"/>
           </a:xfrm>
           <a:prstGeom prst="rect">
             <a:avLst/>
@@ -11041,7 +11041,7 @@
       </p:pic>
       <p:pic>
         <p:nvPicPr>
-          <p:cNvPr id="10" name="Picture 9" descr="d84f4ec980f8ffbd.png"/>
+          <p:cNvPr id="10" name="Picture 9" descr="7f6a024804d011df.png"/>
           <p:cNvPicPr>
             <a:picLocks noChangeAspect="1"/>
           </p:cNvPicPr>
@@ -11055,8 +11055,8 @@
         </p:blipFill>
         <p:spPr>
           <a:xfrm>
-            <a:off x="4367783" y="3986783"/>
-            <a:ext cx="3532632" cy="612648"/>
+            <a:off x="4351020" y="3983736"/>
+            <a:ext cx="3563112" cy="612648"/>
           </a:xfrm>
           <a:prstGeom prst="rect">
             <a:avLst/>
@@ -11071,7 +11071,7 @@
         </p:nvSpPr>
         <p:spPr>
           <a:xfrm>
-            <a:off x="4849367" y="4879848"/>
+            <a:off x="4834128" y="4878324"/>
             <a:ext cx="1920240" cy="548640"/>
           </a:xfrm>
           <a:prstGeom prst="rect">
@@ -11100,7 +11100,7 @@
       </p:sp>
       <p:pic>
         <p:nvPicPr>
-          <p:cNvPr id="12" name="Picture 11" descr="6ae3029025b12a09.png"/>
+          <p:cNvPr id="12" name="Picture 11" descr="7511c6a209ecd325.png"/>
           <p:cNvPicPr>
             <a:picLocks noChangeAspect="1"/>
           </p:cNvPicPr>
@@ -11114,8 +11114,8 @@
         </p:blipFill>
         <p:spPr>
           <a:xfrm>
-            <a:off x="6769607" y="4736592"/>
-            <a:ext cx="542544" cy="835152"/>
+            <a:off x="6754368" y="4733544"/>
+            <a:ext cx="573024" cy="838200"/>
           </a:xfrm>
           <a:prstGeom prst="rect">
             <a:avLst/>
@@ -12728,7 +12728,7 @@
         </p:nvSpPr>
         <p:spPr>
           <a:xfrm>
-            <a:off x="2301793" y="2299715"/>
+            <a:off x="2128057" y="2298192"/>
             <a:ext cx="2211325" cy="457200"/>
           </a:xfrm>
           <a:prstGeom prst="rect">
@@ -12757,7 +12757,7 @@
       </p:sp>
       <p:pic>
         <p:nvPicPr>
-          <p:cNvPr id="9" name="Picture 8" descr="dc9bb23a8d85d0e2.png"/>
+          <p:cNvPr id="9" name="Picture 8" descr="91c18cfbfd314afb.png"/>
           <p:cNvPicPr>
             <a:picLocks noChangeAspect="1"/>
           </p:cNvPicPr>
@@ -12771,8 +12771,8 @@
         </p:blipFill>
         <p:spPr>
           <a:xfrm>
-            <a:off x="4375959" y="2194560"/>
-            <a:ext cx="1161288" cy="667512"/>
+            <a:off x="4202223" y="2194560"/>
+            <a:ext cx="1335024" cy="664464"/>
           </a:xfrm>
           <a:prstGeom prst="rect">
             <a:avLst/>
@@ -12787,7 +12787,7 @@
         </p:nvSpPr>
         <p:spPr>
           <a:xfrm>
-            <a:off x="5537247" y="2299715"/>
+            <a:off x="5537247" y="2298192"/>
             <a:ext cx="3679351" cy="457200"/>
           </a:xfrm>
           <a:prstGeom prst="rect">
@@ -12816,7 +12816,7 @@
       </p:sp>
       <p:pic>
         <p:nvPicPr>
-          <p:cNvPr id="11" name="Picture 10" descr="75b3b503a37e46e7.png"/>
+          <p:cNvPr id="11" name="Picture 10" descr="4ea189ef1afd1076.png"/>
           <p:cNvPicPr>
             <a:picLocks noChangeAspect="1"/>
           </p:cNvPicPr>
@@ -12831,7 +12831,7 @@
         <p:spPr>
           <a:xfrm>
             <a:off x="9079438" y="2194560"/>
-            <a:ext cx="780288" cy="667512"/>
+            <a:ext cx="954023" cy="664464"/>
           </a:xfrm>
           <a:prstGeom prst="rect">
             <a:avLst/>
@@ -12846,7 +12846,7 @@
         </p:nvSpPr>
         <p:spPr>
           <a:xfrm>
-            <a:off x="777240" y="3136391"/>
+            <a:off x="777240" y="3133343"/>
             <a:ext cx="10607040" cy="465151"/>
           </a:xfrm>
           <a:prstGeom prst="rect">
@@ -13144,7 +13144,7 @@
         </p:nvSpPr>
         <p:spPr>
           <a:xfrm>
-            <a:off x="2295697" y="2211323"/>
+            <a:off x="2125009" y="2208276"/>
             <a:ext cx="2211325" cy="457200"/>
           </a:xfrm>
           <a:prstGeom prst="rect">
@@ -13173,7 +13173,7 @@
       </p:sp>
       <p:pic>
         <p:nvPicPr>
-          <p:cNvPr id="9" name="Picture 8" descr="337392e9b7df8f62.png"/>
+          <p:cNvPr id="9" name="Picture 8" descr="a601e11597070b59.png"/>
           <p:cNvPicPr>
             <a:picLocks noChangeAspect="1"/>
           </p:cNvPicPr>
@@ -13187,8 +13187,8 @@
         </p:blipFill>
         <p:spPr>
           <a:xfrm>
-            <a:off x="4369863" y="2103120"/>
-            <a:ext cx="1167384" cy="673608"/>
+            <a:off x="4199175" y="2103120"/>
+            <a:ext cx="1338072" cy="667512"/>
           </a:xfrm>
           <a:prstGeom prst="rect">
             <a:avLst/>
@@ -13203,7 +13203,7 @@
         </p:nvSpPr>
         <p:spPr>
           <a:xfrm>
-            <a:off x="5537247" y="2211323"/>
+            <a:off x="5537247" y="2208276"/>
             <a:ext cx="3679351" cy="457200"/>
           </a:xfrm>
           <a:prstGeom prst="rect">
@@ -13232,7 +13232,7 @@
       </p:sp>
       <p:pic>
         <p:nvPicPr>
-          <p:cNvPr id="11" name="Picture 10" descr="35a9c06a4a4a8536.png"/>
+          <p:cNvPr id="11" name="Picture 10" descr="84af40a7a998b68a.png"/>
           <p:cNvPicPr>
             <a:picLocks noChangeAspect="1"/>
           </p:cNvPicPr>
@@ -13247,7 +13247,7 @@
         <p:spPr>
           <a:xfrm>
             <a:off x="9079438" y="2103120"/>
-            <a:ext cx="786384" cy="673608"/>
+            <a:ext cx="957072" cy="667512"/>
           </a:xfrm>
           <a:prstGeom prst="rect">
             <a:avLst/>
@@ -13262,7 +13262,7 @@
         </p:nvSpPr>
         <p:spPr>
           <a:xfrm>
-            <a:off x="777240" y="3051048"/>
+            <a:off x="777240" y="3044951"/>
             <a:ext cx="10607040" cy="465151"/>
           </a:xfrm>
           <a:prstGeom prst="rect">
@@ -13297,7 +13297,7 @@
         </p:nvSpPr>
         <p:spPr>
           <a:xfrm>
-            <a:off x="1819625" y="3676219"/>
+            <a:off x="1819625" y="3670123"/>
             <a:ext cx="8659428" cy="457200"/>
           </a:xfrm>
           <a:prstGeom prst="rect">
@@ -13326,7 +13326,7 @@
       </p:sp>
       <p:pic>
         <p:nvPicPr>
-          <p:cNvPr id="14" name="Picture 13" descr="e6d15a07a9b81810.png"/>
+          <p:cNvPr id="14" name="Picture 13" descr="6134488e0463270c.png"/>
           <p:cNvPicPr>
             <a:picLocks noChangeAspect="1"/>
           </p:cNvPicPr>
@@ -13340,8 +13340,8 @@
         </p:blipFill>
         <p:spPr>
           <a:xfrm>
-            <a:off x="1874489" y="4201999"/>
-            <a:ext cx="2002536" cy="515112"/>
+            <a:off x="1874489" y="4195903"/>
+            <a:ext cx="2258568" cy="518160"/>
           </a:xfrm>
           <a:prstGeom prst="rect">
             <a:avLst/>
@@ -13356,7 +13356,7 @@
         </p:nvSpPr>
         <p:spPr>
           <a:xfrm>
-            <a:off x="777240" y="4854271"/>
+            <a:off x="777240" y="4851223"/>
             <a:ext cx="10607040" cy="548640"/>
           </a:xfrm>
           <a:prstGeom prst="rect">
@@ -13378,7 +13378,7 @@
                 </a:solidFill>
                 <a:latin typeface="Lexend"/>
               </a:rPr>
-              <a:t>Answer:   No — (−2/3)</a:t>
+              <a:t>Answer:   No — (−4/11)</a:t>
             </a:r>
             <a:r>
               <a:rPr sz="3040" b="1" i="0" baseline="30000">
@@ -13387,7 +13387,7 @@
                 </a:solidFill>
                 <a:latin typeface="Lexend"/>
               </a:rPr>
-              <a:t>-5</a:t>
+              <a:t>-7</a:t>
             </a:r>
             <a:r>
               <a:rPr sz="3040" b="1" i="0">
@@ -13396,7 +13396,7 @@
                 </a:solidFill>
                 <a:latin typeface="Lexend"/>
               </a:rPr>
-              <a:t> = (−3/2)</a:t>
+              <a:t> = (−11/4)</a:t>
             </a:r>
             <a:r>
               <a:rPr sz="3040" b="1" i="0" baseline="30000">
@@ -13405,7 +13405,7 @@
                 </a:solidFill>
                 <a:latin typeface="Lexend"/>
               </a:rPr>
-              <a:t>5</a:t>
+              <a:t>7</a:t>
             </a:r>
           </a:p>
         </p:txBody>
@@ -13804,7 +13804,7 @@
       </p:sp>
       <p:pic>
         <p:nvPicPr>
-          <p:cNvPr id="13" name="Picture 12" descr="8047be576e0f8206.png"/>
+          <p:cNvPr id="13" name="Picture 12" descr="6e6b6af109cf887a.png"/>
           <p:cNvPicPr>
             <a:picLocks noChangeAspect="1"/>
           </p:cNvPicPr>
@@ -13819,7 +13819,7 @@
         <p:spPr>
           <a:xfrm>
             <a:off x="3877878" y="2240280"/>
-            <a:ext cx="771144" cy="539496"/>
+            <a:ext cx="768096" cy="539496"/>
           </a:xfrm>
           <a:prstGeom prst="rect">
             <a:avLst/>
